--- a/slides/pptx/第01回_現状把握と地図づくり.pptx
+++ b/slides/pptx/第01回_現状把握と地図づくり.pptx
@@ -12,9 +12,14 @@
     <p:sldId id="260" r:id="rId6"/>
     <p:sldId id="261" r:id="rId7"/>
     <p:sldId id="262" r:id="rId8"/>
+    <p:sldId id="263" r:id="rId9"/>
+    <p:sldId id="264" r:id="rId10"/>
+    <p:sldId id="265" r:id="rId11"/>
+    <p:sldId id="266" r:id="rId12"/>
+    <p:sldId id="267" r:id="rId13"/>
   </p:sldIdLst>
   <p:notesMasterIdLst>
-    <p:notesMasterId r:id="rId9"/>
+    <p:notesMasterId r:id="rId14"/>
   </p:notesMasterIdLst>
   <p:sldSz cx="12192000" cy="6858000"/>
   <p:notesSz cx="6858000" cy="12192000"/>
@@ -508,8 +513,7 @@
           <a:p>
             <a:r>
               <a:rPr lang="en-US" dirty="0"/>
-              <a:t>今日は、教える回ではありません。まず拝見して、一緒に地図を描きます。
-【ゴール】自社のどこにAIを当てるかを、ご自身の言葉で説明できる状態にします。</a:t>
+              <a:t>表紙は5秒。名乗りと日程確認だけ済ませて、すぐ実演に入る。ここで講座の説明を始めない。初回は「測る回」であることを、この時点では言わなくてよい。構えられると素の使い方が見えなくなる。</a:t>
             </a:r>
             <a:endParaRPr lang="en-US" dirty="0"/>
           </a:p>
@@ -533,6 +537,270 @@
             <a:fld id="{F7021451-1387-4CA6-816F-3879F97B5CBC}" type="slidenum">
               <a:rPr lang="en-US"/>
               <a:t>1</a:t>
+            </a:fld>
+            <a:endParaRPr lang="en-US"/>
+          </a:p>
+        </p:txBody>
+      </p:sp>
+    </p:spTree>
+    <p:extLst>
+      <p:ext uri="{BB962C8B-B14F-4D97-AF65-F5344CB8AC3E}">
+        <p14:creationId xmlns:p14="http://schemas.microsoft.com/office/powerpoint/2010/main" val="1024086991"/>
+      </p:ext>
+    </p:extLst>
+  </p:cSld>
+  <p:clrMapOvr>
+    <a:masterClrMapping/>
+  </p:clrMapOvr>
+</p:notes>
+</file>
+
+<file path=ppt/notesSlides/notesSlide10.xml><?xml version="1.0" encoding="utf-8"?>
+<p:notes xmlns:a="http://schemas.openxmlformats.org/drawingml/2006/main" xmlns:r="http://schemas.openxmlformats.org/officeDocument/2006/relationships" xmlns:p="http://schemas.openxmlformats.org/presentationml/2006/main">
+  <p:cSld>
+    <p:spTree>
+      <p:nvGrpSpPr>
+        <p:cNvPr id="1" name=""/>
+        <p:cNvGrpSpPr/>
+        <p:nvPr/>
+      </p:nvGrpSpPr>
+      <p:grpSpPr>
+        <a:xfrm>
+          <a:off x="0" y="0"/>
+          <a:ext cx="0" cy="0"/>
+          <a:chOff x="0" y="0"/>
+          <a:chExt cx="0" cy="0"/>
+        </a:xfrm>
+      </p:grpSpPr>
+      <p:sp>
+        <p:nvSpPr>
+          <p:cNvPr id="2" name="Slide Image Placeholder 1"/>
+          <p:cNvSpPr>
+            <a:spLocks noGrp="1" noRot="1" noChangeAspect="1"/>
+          </p:cNvSpPr>
+          <p:nvPr>
+            <p:ph type="sldImg"/>
+          </p:nvPr>
+        </p:nvSpPr>
+        <p:spPr/>
+      </p:sp>
+      <p:sp>
+        <p:nvSpPr>
+          <p:cNvPr id="3" name="Notes Placeholder 2"/>
+          <p:cNvSpPr>
+            <a:spLocks noGrp="1"/>
+          </p:cNvSpPr>
+          <p:nvPr>
+            <p:ph type="body" idx="1"/>
+          </p:nvPr>
+        </p:nvSpPr>
+        <p:spPr/>
+        <p:txBody>
+          <a:bodyPr/>
+          <a:lstStyle/>
+          <a:p>
+            <a:r>
+              <a:rPr lang="en-US" dirty="0"/>
+              <a:t>「いつ使うか」は必ず日時まで落とす。『来週あたり』は使われない。その場でカレンダーに入れてもらう。</a:t>
+            </a:r>
+            <a:endParaRPr lang="en-US" dirty="0"/>
+          </a:p>
+        </p:txBody>
+      </p:sp>
+      <p:sp>
+        <p:nvSpPr>
+          <p:cNvPr id="4" name="Slide Number Placeholder 3"/>
+          <p:cNvSpPr>
+            <a:spLocks noGrp="1"/>
+          </p:cNvSpPr>
+          <p:nvPr>
+            <p:ph type="sldNum" sz="quarter" idx="10"/>
+          </p:nvPr>
+        </p:nvSpPr>
+        <p:spPr/>
+        <p:txBody>
+          <a:bodyPr/>
+          <a:lstStyle/>
+          <a:p>
+            <a:fld id="{F7021451-1387-4CA6-816F-3879F97B5CBC}" type="slidenum">
+              <a:rPr lang="en-US"/>
+              <a:t>10</a:t>
+            </a:fld>
+            <a:endParaRPr lang="en-US"/>
+          </a:p>
+        </p:txBody>
+      </p:sp>
+    </p:spTree>
+    <p:extLst>
+      <p:ext uri="{BB962C8B-B14F-4D97-AF65-F5344CB8AC3E}">
+        <p14:creationId xmlns:p14="http://schemas.microsoft.com/office/powerpoint/2010/main" val="1024086991"/>
+      </p:ext>
+    </p:extLst>
+  </p:cSld>
+  <p:clrMapOvr>
+    <a:masterClrMapping/>
+  </p:clrMapOvr>
+</p:notes>
+</file>
+
+<file path=ppt/notesSlides/notesSlide11.xml><?xml version="1.0" encoding="utf-8"?>
+<p:notes xmlns:a="http://schemas.openxmlformats.org/drawingml/2006/main" xmlns:r="http://schemas.openxmlformats.org/officeDocument/2006/relationships" xmlns:p="http://schemas.openxmlformats.org/presentationml/2006/main">
+  <p:cSld>
+    <p:spTree>
+      <p:nvGrpSpPr>
+        <p:cNvPr id="1" name=""/>
+        <p:cNvGrpSpPr/>
+        <p:nvPr/>
+      </p:nvGrpSpPr>
+      <p:grpSpPr>
+        <a:xfrm>
+          <a:off x="0" y="0"/>
+          <a:ext cx="0" cy="0"/>
+          <a:chOff x="0" y="0"/>
+          <a:chExt cx="0" cy="0"/>
+        </a:xfrm>
+      </p:grpSpPr>
+      <p:sp>
+        <p:nvSpPr>
+          <p:cNvPr id="2" name="Slide Image Placeholder 1"/>
+          <p:cNvSpPr>
+            <a:spLocks noGrp="1" noRot="1" noChangeAspect="1"/>
+          </p:cNvSpPr>
+          <p:nvPr>
+            <p:ph type="sldImg"/>
+          </p:nvPr>
+        </p:nvSpPr>
+        <p:spPr/>
+      </p:sp>
+      <p:sp>
+        <p:nvSpPr>
+          <p:cNvPr id="3" name="Notes Placeholder 2"/>
+          <p:cNvSpPr>
+            <a:spLocks noGrp="1"/>
+          </p:cNvSpPr>
+          <p:nvPr>
+            <p:ph type="body" idx="1"/>
+          </p:nvPr>
+        </p:nvSpPr>
+        <p:spPr/>
+        <p:txBody>
+          <a:bodyPr/>
+          <a:lstStyle/>
+          <a:p>
+            <a:r>
+              <a:rPr lang="en-US" dirty="0"/>
+              <a:t>ここは資料を読まない。事例だけ話す。初回の手応えが2回目の出席を決める、という構造を講師が理解していれば、自然に時間配分が変わる。</a:t>
+            </a:r>
+            <a:endParaRPr lang="en-US" dirty="0"/>
+          </a:p>
+        </p:txBody>
+      </p:sp>
+      <p:sp>
+        <p:nvSpPr>
+          <p:cNvPr id="4" name="Slide Number Placeholder 3"/>
+          <p:cNvSpPr>
+            <a:spLocks noGrp="1"/>
+          </p:cNvSpPr>
+          <p:nvPr>
+            <p:ph type="sldNum" sz="quarter" idx="10"/>
+          </p:nvPr>
+        </p:nvSpPr>
+        <p:spPr/>
+        <p:txBody>
+          <a:bodyPr/>
+          <a:lstStyle/>
+          <a:p>
+            <a:fld id="{F7021451-1387-4CA6-816F-3879F97B5CBC}" type="slidenum">
+              <a:rPr lang="en-US"/>
+              <a:t>11</a:t>
+            </a:fld>
+            <a:endParaRPr lang="en-US"/>
+          </a:p>
+        </p:txBody>
+      </p:sp>
+    </p:spTree>
+    <p:extLst>
+      <p:ext uri="{BB962C8B-B14F-4D97-AF65-F5344CB8AC3E}">
+        <p14:creationId xmlns:p14="http://schemas.microsoft.com/office/powerpoint/2010/main" val="1024086991"/>
+      </p:ext>
+    </p:extLst>
+  </p:cSld>
+  <p:clrMapOvr>
+    <a:masterClrMapping/>
+  </p:clrMapOvr>
+</p:notes>
+</file>
+
+<file path=ppt/notesSlides/notesSlide12.xml><?xml version="1.0" encoding="utf-8"?>
+<p:notes xmlns:a="http://schemas.openxmlformats.org/drawingml/2006/main" xmlns:r="http://schemas.openxmlformats.org/officeDocument/2006/relationships" xmlns:p="http://schemas.openxmlformats.org/presentationml/2006/main">
+  <p:cSld>
+    <p:spTree>
+      <p:nvGrpSpPr>
+        <p:cNvPr id="1" name=""/>
+        <p:cNvGrpSpPr/>
+        <p:nvPr/>
+      </p:nvGrpSpPr>
+      <p:grpSpPr>
+        <a:xfrm>
+          <a:off x="0" y="0"/>
+          <a:ext cx="0" cy="0"/>
+          <a:chOff x="0" y="0"/>
+          <a:chExt cx="0" cy="0"/>
+        </a:xfrm>
+      </p:grpSpPr>
+      <p:sp>
+        <p:nvSpPr>
+          <p:cNvPr id="2" name="Slide Image Placeholder 1"/>
+          <p:cNvSpPr>
+            <a:spLocks noGrp="1" noRot="1" noChangeAspect="1"/>
+          </p:cNvSpPr>
+          <p:nvPr>
+            <p:ph type="sldImg"/>
+          </p:nvPr>
+        </p:nvSpPr>
+        <p:spPr/>
+      </p:sp>
+      <p:sp>
+        <p:nvSpPr>
+          <p:cNvPr id="3" name="Notes Placeholder 2"/>
+          <p:cNvSpPr>
+            <a:spLocks noGrp="1"/>
+          </p:cNvSpPr>
+          <p:nvPr>
+            <p:ph type="body" idx="1"/>
+          </p:nvPr>
+        </p:nvSpPr>
+        <p:spPr/>
+        <p:txBody>
+          <a:bodyPr/>
+          <a:lstStyle/>
+          <a:p>
+            <a:r>
+              <a:rPr lang="en-US" dirty="0"/>
+              <a:t>宿題は口頭で確認して終わらせない。その場でスマホのカレンダーに入れてもらうところまでやる。次回の冒頭15分は、この宿題の実物から始まる。</a:t>
+            </a:r>
+            <a:endParaRPr lang="en-US" dirty="0"/>
+          </a:p>
+        </p:txBody>
+      </p:sp>
+      <p:sp>
+        <p:nvSpPr>
+          <p:cNvPr id="4" name="Slide Number Placeholder 3"/>
+          <p:cNvSpPr>
+            <a:spLocks noGrp="1"/>
+          </p:cNvSpPr>
+          <p:nvPr>
+            <p:ph type="sldNum" sz="quarter" idx="10"/>
+          </p:nvPr>
+        </p:nvSpPr>
+        <p:spPr/>
+        <p:txBody>
+          <a:bodyPr/>
+          <a:lstStyle/>
+          <a:p>
+            <a:fld id="{F7021451-1387-4CA6-816F-3879F97B5CBC}" type="slidenum">
+              <a:rPr lang="en-US"/>
+              <a:t>12</a:t>
             </a:fld>
             <a:endParaRPr lang="en-US"/>
           </a:p>
@@ -597,7 +865,7 @@
           <a:p>
             <a:r>
               <a:rPr lang="en-US" dirty="0"/>
-              <a:t>ここは30秒で。今日の到達点だけ言って、すぐ本題へ。</a:t>
+              <a:t>調査の数字は権威付けではなく、「あなただけが遅れているのではない」と伝えるために使う。ここで安心してもらえると、このあとの実演で素の使い方を見せてもらえる。3行を読み上げず、2行目だけ話して残りは目で追ってもらう。</a:t>
             </a:r>
             <a:endParaRPr lang="en-US" dirty="0"/>
           </a:p>
@@ -685,7 +953,7 @@
           <a:p>
             <a:r>
               <a:rPr lang="en-US" dirty="0"/>
-              <a:t>先に結論を言わず、受講者の実物を題材にしてこの型に当てはめて見せる。</a:t>
+              <a:t>30秒。今日の到達点だけ言う。「教える回ではなく、拝見する回です」と明言しておくと、このあと20分黙っていても不自然にならない。</a:t>
             </a:r>
             <a:endParaRPr lang="en-US" dirty="0"/>
           </a:p>
@@ -773,7 +1041,7 @@
           <a:p>
             <a:r>
               <a:rPr lang="en-US" dirty="0"/>
-              <a:t>必ず左（失敗例）から。自分の失敗として話す。うまくいく例だけ見せると、受講者は自分の失敗を言わなくなる。</a:t>
+              <a:t>3条件を先に説明しない。受講者が挙げた業務を1つ取り上げ、目の前で3条件に当てはめて見せる。自分の業務が題材になると腹に落ちる。ここで「年1回の作業を自動化するのは趣味です」と言うと、たいてい笑いが出て空気がほぐれる。</a:t>
             </a:r>
             <a:endParaRPr lang="en-US" dirty="0"/>
           </a:p>
@@ -861,7 +1129,7 @@
           <a:p>
             <a:r>
               <a:rPr lang="en-US" dirty="0"/>
-              <a:t>ここから講師は口頭指示のみ。画面を操作するのは必ず受講者。歯がゆくても手を出さない。</a:t>
+              <a:t>6列の表を画面に出し、1行目を講師が埋めて見せる。2行目からは受講者に埋めてもらう。「型が決まっているか」の列で必ず手が止まるので、そこで『毎回考えているか、それとも手順があるか』と言い換える。</a:t>
             </a:r>
             <a:endParaRPr lang="en-US" dirty="0"/>
           </a:p>
@@ -949,7 +1217,7 @@
           <a:p>
             <a:r>
               <a:rPr lang="en-US" dirty="0"/>
-              <a:t>ここは資料を読み上げない。自分の言葉と、匿名事例で話す。</a:t>
+              <a:t>実際に受講者が「これをAI化したい」と挙げた業務が、この失敗パターンに当てはまることが多い。否定せず、「そこは第9回で扱います。今日はもっと手前から」と回収先を示す。痛いところを選びたがるのは正しい感覚なので、感覚そのものは肯定する。</a:t>
             </a:r>
             <a:endParaRPr lang="en-US" dirty="0"/>
           </a:p>
@@ -1037,7 +1305,7 @@
           <a:p>
             <a:r>
               <a:rPr lang="en-US" dirty="0"/>
-              <a:t>その場でカレンダーに入れてもらう。口頭の約束で終わらせない。</a:t>
+              <a:t>ここで選ぶ1つが、この先12回の主役になる。急がず、受講者に選ばせる。講師が決めると、その後ずっと他人事の演習になる。決まったら「これを12回かけて仕組みにします」と宣言する。</a:t>
             </a:r>
             <a:endParaRPr lang="en-US" dirty="0"/>
           </a:p>
@@ -1061,6 +1329,182 @@
             <a:fld id="{F7021451-1387-4CA6-816F-3879F97B5CBC}" type="slidenum">
               <a:rPr lang="en-US"/>
               <a:t>7</a:t>
+            </a:fld>
+            <a:endParaRPr lang="en-US"/>
+          </a:p>
+        </p:txBody>
+      </p:sp>
+    </p:spTree>
+    <p:extLst>
+      <p:ext uri="{BB962C8B-B14F-4D97-AF65-F5344CB8AC3E}">
+        <p14:creationId xmlns:p14="http://schemas.microsoft.com/office/powerpoint/2010/main" val="1024086991"/>
+      </p:ext>
+    </p:extLst>
+  </p:cSld>
+  <p:clrMapOvr>
+    <a:masterClrMapping/>
+  </p:clrMapOvr>
+</p:notes>
+</file>
+
+<file path=ppt/notesSlides/notesSlide8.xml><?xml version="1.0" encoding="utf-8"?>
+<p:notes xmlns:a="http://schemas.openxmlformats.org/drawingml/2006/main" xmlns:r="http://schemas.openxmlformats.org/officeDocument/2006/relationships" xmlns:p="http://schemas.openxmlformats.org/presentationml/2006/main">
+  <p:cSld>
+    <p:spTree>
+      <p:nvGrpSpPr>
+        <p:cNvPr id="1" name=""/>
+        <p:cNvGrpSpPr/>
+        <p:nvPr/>
+      </p:nvGrpSpPr>
+      <p:grpSpPr>
+        <a:xfrm>
+          <a:off x="0" y="0"/>
+          <a:ext cx="0" cy="0"/>
+          <a:chOff x="0" y="0"/>
+          <a:chExt cx="0" cy="0"/>
+        </a:xfrm>
+      </p:grpSpPr>
+      <p:sp>
+        <p:nvSpPr>
+          <p:cNvPr id="2" name="Slide Image Placeholder 1"/>
+          <p:cNvSpPr>
+            <a:spLocks noGrp="1" noRot="1" noChangeAspect="1"/>
+          </p:cNvSpPr>
+          <p:nvPr>
+            <p:ph type="sldImg"/>
+          </p:nvPr>
+        </p:nvSpPr>
+        <p:spPr/>
+      </p:sp>
+      <p:sp>
+        <p:nvSpPr>
+          <p:cNvPr id="3" name="Notes Placeholder 2"/>
+          <p:cNvSpPr>
+            <a:spLocks noGrp="1"/>
+          </p:cNvSpPr>
+          <p:nvPr>
+            <p:ph type="body" idx="1"/>
+          </p:nvPr>
+        </p:nvSpPr>
+        <p:spPr/>
+        <p:txBody>
+          <a:bodyPr/>
+          <a:lstStyle/>
+          <a:p>
+            <a:r>
+              <a:rPr lang="en-US" dirty="0"/>
+              <a:t>3つとも初回で高確率で起きる。特に実演を渋られたときは、助け舟を出したくなるが待つ。沈黙が気まずくても20分待つ。手を出した瞬間に測定は終わる。</a:t>
+            </a:r>
+            <a:endParaRPr lang="en-US" dirty="0"/>
+          </a:p>
+        </p:txBody>
+      </p:sp>
+      <p:sp>
+        <p:nvSpPr>
+          <p:cNvPr id="4" name="Slide Number Placeholder 3"/>
+          <p:cNvSpPr>
+            <a:spLocks noGrp="1"/>
+          </p:cNvSpPr>
+          <p:nvPr>
+            <p:ph type="sldNum" sz="quarter" idx="10"/>
+          </p:nvPr>
+        </p:nvSpPr>
+        <p:spPr/>
+        <p:txBody>
+          <a:bodyPr/>
+          <a:lstStyle/>
+          <a:p>
+            <a:fld id="{F7021451-1387-4CA6-816F-3879F97B5CBC}" type="slidenum">
+              <a:rPr lang="en-US"/>
+              <a:t>8</a:t>
+            </a:fld>
+            <a:endParaRPr lang="en-US"/>
+          </a:p>
+        </p:txBody>
+      </p:sp>
+    </p:spTree>
+    <p:extLst>
+      <p:ext uri="{BB962C8B-B14F-4D97-AF65-F5344CB8AC3E}">
+        <p14:creationId xmlns:p14="http://schemas.microsoft.com/office/powerpoint/2010/main" val="1024086991"/>
+      </p:ext>
+    </p:extLst>
+  </p:cSld>
+  <p:clrMapOvr>
+    <a:masterClrMapping/>
+  </p:clrMapOvr>
+</p:notes>
+</file>
+
+<file path=ppt/notesSlides/notesSlide9.xml><?xml version="1.0" encoding="utf-8"?>
+<p:notes xmlns:a="http://schemas.openxmlformats.org/drawingml/2006/main" xmlns:r="http://schemas.openxmlformats.org/officeDocument/2006/relationships" xmlns:p="http://schemas.openxmlformats.org/presentationml/2006/main">
+  <p:cSld>
+    <p:spTree>
+      <p:nvGrpSpPr>
+        <p:cNvPr id="1" name=""/>
+        <p:cNvGrpSpPr/>
+        <p:nvPr/>
+      </p:nvGrpSpPr>
+      <p:grpSpPr>
+        <a:xfrm>
+          <a:off x="0" y="0"/>
+          <a:ext cx="0" cy="0"/>
+          <a:chOff x="0" y="0"/>
+          <a:chExt cx="0" cy="0"/>
+        </a:xfrm>
+      </p:grpSpPr>
+      <p:sp>
+        <p:nvSpPr>
+          <p:cNvPr id="2" name="Slide Image Placeholder 1"/>
+          <p:cNvSpPr>
+            <a:spLocks noGrp="1" noRot="1" noChangeAspect="1"/>
+          </p:cNvSpPr>
+          <p:nvPr>
+            <p:ph type="sldImg"/>
+          </p:nvPr>
+        </p:nvSpPr>
+        <p:spPr/>
+      </p:sp>
+      <p:sp>
+        <p:nvSpPr>
+          <p:cNvPr id="3" name="Notes Placeholder 2"/>
+          <p:cNvSpPr>
+            <a:spLocks noGrp="1"/>
+          </p:cNvSpPr>
+          <p:nvPr>
+            <p:ph type="body" idx="1"/>
+          </p:nvPr>
+        </p:nvSpPr>
+        <p:spPr/>
+        <p:txBody>
+          <a:bodyPr/>
+          <a:lstStyle/>
+          <a:p>
+            <a:r>
+              <a:rPr lang="en-US" dirty="0"/>
+              <a:t>ここから講師は口頭指示のみ。画面を操作するのは必ず受講者。棚卸しは6列すべて埋めようとせず、上位3つだけ完成させればよい。</a:t>
+            </a:r>
+            <a:endParaRPr lang="en-US" dirty="0"/>
+          </a:p>
+        </p:txBody>
+      </p:sp>
+      <p:sp>
+        <p:nvSpPr>
+          <p:cNvPr id="4" name="Slide Number Placeholder 3"/>
+          <p:cNvSpPr>
+            <a:spLocks noGrp="1"/>
+          </p:cNvSpPr>
+          <p:nvPr>
+            <p:ph type="sldNum" sz="quarter" idx="10"/>
+          </p:nvPr>
+        </p:nvSpPr>
+        <p:spPr/>
+        <p:txBody>
+          <a:bodyPr/>
+          <a:lstStyle/>
+          <a:p>
+            <a:fld id="{F7021451-1387-4CA6-816F-3879F97B5CBC}" type="slidenum">
+              <a:rPr lang="en-US"/>
+              <a:t>9</a:t>
             </a:fld>
             <a:endParaRPr lang="en-US"/>
           </a:p>
@@ -1680,6 +2124,1284 @@
 </p:sld>
 </file>
 
+<file path=ppt/slides/slide10.xml><?xml version="1.0" encoding="utf-8"?>
+<p:sld xmlns:a="http://schemas.openxmlformats.org/drawingml/2006/main" xmlns:r="http://schemas.openxmlformats.org/officeDocument/2006/relationships" xmlns:p="http://schemas.openxmlformats.org/presentationml/2006/main">
+  <p:cSld name="Slide 10">
+    <p:bg>
+      <p:bgPr>
+        <a:solidFill>
+          <a:srgbClr val="F6F2EA"/>
+        </a:solidFill>
+      </p:bgPr>
+    </p:bg>
+    <p:spTree>
+      <p:nvGrpSpPr>
+        <p:cNvPr id="1" name=""/>
+        <p:cNvGrpSpPr/>
+        <p:nvPr/>
+      </p:nvGrpSpPr>
+      <p:grpSpPr>
+        <a:xfrm>
+          <a:off x="0" y="0"/>
+          <a:ext cx="0" cy="0"/>
+          <a:chOff x="0" y="0"/>
+          <a:chExt cx="0" cy="0"/>
+        </a:xfrm>
+      </p:grpSpPr>
+      <p:sp>
+        <p:nvSpPr>
+          <p:cNvPr id="2" name="Text 0"/>
+          <p:cNvSpPr txBox="1"/>
+          <p:nvPr/>
+        </p:nvSpPr>
+        <p:spPr>
+          <a:xfrm>
+            <a:off x="777240" y="566928"/>
+            <a:ext cx="10607040" cy="274320"/>
+          </a:xfrm>
+          <a:prstGeom prst="rect">
+            <a:avLst/>
+          </a:prstGeom>
+          <a:noFill/>
+          <a:ln/>
+        </p:spPr>
+        <p:txBody>
+          <a:bodyPr wrap="square" lIns="0" tIns="0" rIns="0" bIns="0" rtlCol="0" anchor="ctr"/>
+          <a:lstStyle/>
+          <a:p>
+            <a:pPr indent="0" marL="0">
+              <a:buNone/>
+            </a:pPr>
+            <a:r>
+              <a:rPr lang="en-US" sz="1100" b="1" spc="250" kern="0" dirty="0">
+                <a:solidFill>
+                  <a:srgbClr val="3B6B4A"/>
+                </a:solidFill>
+                <a:latin typeface="Yu Gothic" pitchFamily="34" charset="0"/>
+                <a:ea typeface="Yu Gothic" pitchFamily="34" charset="-122"/>
+                <a:cs typeface="Yu Gothic" pitchFamily="34" charset="-120"/>
+              </a:rPr>
+              <a:t>業務への組み込み</a:t>
+            </a:r>
+            <a:endParaRPr lang="en-US" sz="1100" dirty="0"/>
+          </a:p>
+        </p:txBody>
+      </p:sp>
+      <p:sp>
+        <p:nvSpPr>
+          <p:cNvPr id="3" name="Text 1"/>
+          <p:cNvSpPr txBox="1"/>
+          <p:nvPr/>
+        </p:nvSpPr>
+        <p:spPr>
+          <a:xfrm>
+            <a:off x="777240" y="896112"/>
+            <a:ext cx="10607040" cy="640080"/>
+          </a:xfrm>
+          <a:prstGeom prst="rect">
+            <a:avLst/>
+          </a:prstGeom>
+          <a:noFill/>
+          <a:ln/>
+        </p:spPr>
+        <p:txBody>
+          <a:bodyPr wrap="square" lIns="0" tIns="0" rIns="0" bIns="0" rtlCol="0" anchor="ctr"/>
+          <a:lstStyle/>
+          <a:p>
+            <a:pPr indent="0" marL="0">
+              <a:buNone/>
+            </a:pPr>
+            <a:r>
+              <a:rPr lang="en-US" sz="2600" b="1" dirty="0">
+                <a:solidFill>
+                  <a:srgbClr val="23201D"/>
+                </a:solidFill>
+                <a:latin typeface="Yu Gothic" pitchFamily="34" charset="0"/>
+                <a:ea typeface="Yu Gothic" pitchFamily="34" charset="-122"/>
+                <a:cs typeface="Yu Gothic" pitchFamily="34" charset="-120"/>
+              </a:rPr>
+              <a:t>帰る前に決めること</a:t>
+            </a:r>
+            <a:endParaRPr lang="en-US" sz="2600" dirty="0"/>
+          </a:p>
+        </p:txBody>
+      </p:sp>
+      <p:sp>
+        <p:nvSpPr>
+          <p:cNvPr id="4" name="Text 2"/>
+          <p:cNvSpPr txBox="1"/>
+          <p:nvPr/>
+        </p:nvSpPr>
+        <p:spPr>
+          <a:xfrm>
+            <a:off x="777240" y="1572768"/>
+            <a:ext cx="10607040" cy="320040"/>
+          </a:xfrm>
+          <a:prstGeom prst="rect">
+            <a:avLst/>
+          </a:prstGeom>
+          <a:noFill/>
+          <a:ln/>
+        </p:spPr>
+        <p:txBody>
+          <a:bodyPr wrap="square" lIns="0" tIns="0" rIns="0" bIns="0" rtlCol="0" anchor="ctr"/>
+          <a:lstStyle/>
+          <a:p>
+            <a:pPr indent="0" marL="0">
+              <a:buNone/>
+            </a:pPr>
+            <a:r>
+              <a:rPr lang="en-US" sz="1250" b="1" dirty="0">
+                <a:solidFill>
+                  <a:srgbClr val="3B6B4A"/>
+                </a:solidFill>
+                <a:latin typeface="Yu Gothic" pitchFamily="34" charset="0"/>
+                <a:ea typeface="Yu Gothic" pitchFamily="34" charset="-122"/>
+                <a:cs typeface="Yu Gothic" pitchFamily="34" charset="-120"/>
+              </a:rPr>
+              <a:t>ここを決めないと、持ち帰っても使われません。紙に書きます。</a:t>
+            </a:r>
+            <a:endParaRPr lang="en-US" sz="1250" dirty="0"/>
+          </a:p>
+        </p:txBody>
+      </p:sp>
+      <p:sp>
+        <p:nvSpPr>
+          <p:cNvPr id="5" name="Shape 3"/>
+          <p:cNvSpPr/>
+          <p:nvPr/>
+        </p:nvSpPr>
+        <p:spPr>
+          <a:xfrm>
+            <a:off x="777240" y="2103120"/>
+            <a:ext cx="10607040" cy="914400"/>
+          </a:xfrm>
+          <a:prstGeom prst="rect">
+            <a:avLst/>
+          </a:prstGeom>
+          <a:solidFill>
+            <a:srgbClr val="FFFFFF"/>
+          </a:solidFill>
+          <a:ln w="12700">
+            <a:solidFill>
+              <a:srgbClr val="EDE7DB"/>
+            </a:solidFill>
+            <a:prstDash val="solid"/>
+          </a:ln>
+        </p:spPr>
+      </p:sp>
+      <p:sp>
+        <p:nvSpPr>
+          <p:cNvPr id="6" name="Shape 4"/>
+          <p:cNvSpPr/>
+          <p:nvPr/>
+        </p:nvSpPr>
+        <p:spPr>
+          <a:xfrm>
+            <a:off x="777240" y="2103120"/>
+            <a:ext cx="54864" cy="914400"/>
+          </a:xfrm>
+          <a:prstGeom prst="rect">
+            <a:avLst/>
+          </a:prstGeom>
+          <a:solidFill>
+            <a:srgbClr val="3B6B4A"/>
+          </a:solidFill>
+          <a:ln w="12700">
+            <a:solidFill>
+              <a:srgbClr val="333333"/>
+            </a:solidFill>
+            <a:prstDash val="solid"/>
+          </a:ln>
+        </p:spPr>
+      </p:sp>
+      <p:sp>
+        <p:nvSpPr>
+          <p:cNvPr id="7" name="Text 5"/>
+          <p:cNvSpPr txBox="1"/>
+          <p:nvPr/>
+        </p:nvSpPr>
+        <p:spPr>
+          <a:xfrm>
+            <a:off x="1143000" y="2176272"/>
+            <a:ext cx="2757830" cy="768096"/>
+          </a:xfrm>
+          <a:prstGeom prst="rect">
+            <a:avLst/>
+          </a:prstGeom>
+          <a:noFill/>
+          <a:ln/>
+        </p:spPr>
+        <p:txBody>
+          <a:bodyPr wrap="square" lIns="0" tIns="0" rIns="0" bIns="0" rtlCol="0" anchor="ctr"/>
+          <a:lstStyle/>
+          <a:p>
+            <a:pPr indent="0" marL="0">
+              <a:buNone/>
+            </a:pPr>
+            <a:r>
+              <a:rPr lang="en-US" sz="1400" b="1" dirty="0">
+                <a:solidFill>
+                  <a:srgbClr val="3B6B4A"/>
+                </a:solidFill>
+                <a:latin typeface="Yu Gothic" pitchFamily="34" charset="0"/>
+                <a:ea typeface="Yu Gothic" pitchFamily="34" charset="-122"/>
+                <a:cs typeface="Yu Gothic" pitchFamily="34" charset="-120"/>
+              </a:rPr>
+              <a:t>いつ使うか</a:t>
+            </a:r>
+            <a:endParaRPr lang="en-US" sz="1400" dirty="0"/>
+          </a:p>
+        </p:txBody>
+      </p:sp>
+      <p:sp>
+        <p:nvSpPr>
+          <p:cNvPr id="8" name="Text 6"/>
+          <p:cNvSpPr txBox="1"/>
+          <p:nvPr/>
+        </p:nvSpPr>
+        <p:spPr>
+          <a:xfrm>
+            <a:off x="4006901" y="2176272"/>
+            <a:ext cx="7011619" cy="768096"/>
+          </a:xfrm>
+          <a:prstGeom prst="rect">
+            <a:avLst/>
+          </a:prstGeom>
+          <a:noFill/>
+          <a:ln/>
+        </p:spPr>
+        <p:txBody>
+          <a:bodyPr wrap="square" lIns="0" tIns="0" rIns="0" bIns="0" rtlCol="0" anchor="ctr"/>
+          <a:lstStyle/>
+          <a:p>
+            <a:pPr indent="0" marL="0">
+              <a:lnSpc>
+                <a:spcPct val="130000"/>
+              </a:lnSpc>
+              <a:buNone/>
+            </a:pPr>
+            <a:r>
+              <a:rPr lang="en-US" sz="1250" dirty="0">
+                <a:solidFill>
+                  <a:srgbClr val="3F3933"/>
+                </a:solidFill>
+                <a:latin typeface="Yu Gothic" pitchFamily="34" charset="0"/>
+                <a:ea typeface="Yu Gothic" pitchFamily="34" charset="-122"/>
+                <a:cs typeface="Yu Gothic" pitchFamily="34" charset="-120"/>
+              </a:rPr>
+              <a:t>「明日の朝いち、見積を書く前に」まで具体的に決めます</a:t>
+            </a:r>
+            <a:endParaRPr lang="en-US" sz="1250" dirty="0"/>
+          </a:p>
+        </p:txBody>
+      </p:sp>
+      <p:sp>
+        <p:nvSpPr>
+          <p:cNvPr id="9" name="Shape 7"/>
+          <p:cNvSpPr/>
+          <p:nvPr/>
+        </p:nvSpPr>
+        <p:spPr>
+          <a:xfrm>
+            <a:off x="777240" y="3154680"/>
+            <a:ext cx="10607040" cy="914400"/>
+          </a:xfrm>
+          <a:prstGeom prst="rect">
+            <a:avLst/>
+          </a:prstGeom>
+          <a:solidFill>
+            <a:srgbClr val="FFFFFF"/>
+          </a:solidFill>
+          <a:ln w="12700">
+            <a:solidFill>
+              <a:srgbClr val="EDE7DB"/>
+            </a:solidFill>
+            <a:prstDash val="solid"/>
+          </a:ln>
+        </p:spPr>
+      </p:sp>
+      <p:sp>
+        <p:nvSpPr>
+          <p:cNvPr id="10" name="Shape 8"/>
+          <p:cNvSpPr/>
+          <p:nvPr/>
+        </p:nvSpPr>
+        <p:spPr>
+          <a:xfrm>
+            <a:off x="777240" y="3154680"/>
+            <a:ext cx="54864" cy="914400"/>
+          </a:xfrm>
+          <a:prstGeom prst="rect">
+            <a:avLst/>
+          </a:prstGeom>
+          <a:solidFill>
+            <a:srgbClr val="3B6B4A"/>
+          </a:solidFill>
+          <a:ln w="12700">
+            <a:solidFill>
+              <a:srgbClr val="333333"/>
+            </a:solidFill>
+            <a:prstDash val="solid"/>
+          </a:ln>
+        </p:spPr>
+      </p:sp>
+      <p:sp>
+        <p:nvSpPr>
+          <p:cNvPr id="11" name="Text 9"/>
+          <p:cNvSpPr txBox="1"/>
+          <p:nvPr/>
+        </p:nvSpPr>
+        <p:spPr>
+          <a:xfrm>
+            <a:off x="1143000" y="3227832"/>
+            <a:ext cx="2757830" cy="768096"/>
+          </a:xfrm>
+          <a:prstGeom prst="rect">
+            <a:avLst/>
+          </a:prstGeom>
+          <a:noFill/>
+          <a:ln/>
+        </p:spPr>
+        <p:txBody>
+          <a:bodyPr wrap="square" lIns="0" tIns="0" rIns="0" bIns="0" rtlCol="0" anchor="ctr"/>
+          <a:lstStyle/>
+          <a:p>
+            <a:pPr indent="0" marL="0">
+              <a:buNone/>
+            </a:pPr>
+            <a:r>
+              <a:rPr lang="en-US" sz="1400" b="1" dirty="0">
+                <a:solidFill>
+                  <a:srgbClr val="3B6B4A"/>
+                </a:solidFill>
+                <a:latin typeface="Yu Gothic" pitchFamily="34" charset="0"/>
+                <a:ea typeface="Yu Gothic" pitchFamily="34" charset="-122"/>
+                <a:cs typeface="Yu Gothic" pitchFamily="34" charset="-120"/>
+              </a:rPr>
+              <a:t>誰が使うか</a:t>
+            </a:r>
+            <a:endParaRPr lang="en-US" sz="1400" dirty="0"/>
+          </a:p>
+        </p:txBody>
+      </p:sp>
+      <p:sp>
+        <p:nvSpPr>
+          <p:cNvPr id="12" name="Text 10"/>
+          <p:cNvSpPr txBox="1"/>
+          <p:nvPr/>
+        </p:nvSpPr>
+        <p:spPr>
+          <a:xfrm>
+            <a:off x="4006901" y="3227832"/>
+            <a:ext cx="7011619" cy="768096"/>
+          </a:xfrm>
+          <a:prstGeom prst="rect">
+            <a:avLst/>
+          </a:prstGeom>
+          <a:noFill/>
+          <a:ln/>
+        </p:spPr>
+        <p:txBody>
+          <a:bodyPr wrap="square" lIns="0" tIns="0" rIns="0" bIns="0" rtlCol="0" anchor="ctr"/>
+          <a:lstStyle/>
+          <a:p>
+            <a:pPr indent="0" marL="0">
+              <a:lnSpc>
+                <a:spcPct val="130000"/>
+              </a:lnSpc>
+              <a:buNone/>
+            </a:pPr>
+            <a:r>
+              <a:rPr lang="en-US" sz="1250" dirty="0">
+                <a:solidFill>
+                  <a:srgbClr val="3F3933"/>
+                </a:solidFill>
+                <a:latin typeface="Yu Gothic" pitchFamily="34" charset="0"/>
+                <a:ea typeface="Yu Gothic" pitchFamily="34" charset="-122"/>
+                <a:cs typeface="Yu Gothic" pitchFamily="34" charset="-120"/>
+              </a:rPr>
+              <a:t>当面は社長ご自身です。社員に渡すのは第3回から</a:t>
+            </a:r>
+            <a:endParaRPr lang="en-US" sz="1250" dirty="0"/>
+          </a:p>
+        </p:txBody>
+      </p:sp>
+      <p:sp>
+        <p:nvSpPr>
+          <p:cNvPr id="13" name="Shape 11"/>
+          <p:cNvSpPr/>
+          <p:nvPr/>
+        </p:nvSpPr>
+        <p:spPr>
+          <a:xfrm>
+            <a:off x="777240" y="4206240"/>
+            <a:ext cx="10607040" cy="914400"/>
+          </a:xfrm>
+          <a:prstGeom prst="rect">
+            <a:avLst/>
+          </a:prstGeom>
+          <a:solidFill>
+            <a:srgbClr val="FFFFFF"/>
+          </a:solidFill>
+          <a:ln w="12700">
+            <a:solidFill>
+              <a:srgbClr val="EDE7DB"/>
+            </a:solidFill>
+            <a:prstDash val="solid"/>
+          </a:ln>
+        </p:spPr>
+      </p:sp>
+      <p:sp>
+        <p:nvSpPr>
+          <p:cNvPr id="14" name="Shape 12"/>
+          <p:cNvSpPr/>
+          <p:nvPr/>
+        </p:nvSpPr>
+        <p:spPr>
+          <a:xfrm>
+            <a:off x="777240" y="4206240"/>
+            <a:ext cx="54864" cy="914400"/>
+          </a:xfrm>
+          <a:prstGeom prst="rect">
+            <a:avLst/>
+          </a:prstGeom>
+          <a:solidFill>
+            <a:srgbClr val="3B6B4A"/>
+          </a:solidFill>
+          <a:ln w="12700">
+            <a:solidFill>
+              <a:srgbClr val="333333"/>
+            </a:solidFill>
+            <a:prstDash val="solid"/>
+          </a:ln>
+        </p:spPr>
+      </p:sp>
+      <p:sp>
+        <p:nvSpPr>
+          <p:cNvPr id="15" name="Text 13"/>
+          <p:cNvSpPr txBox="1"/>
+          <p:nvPr/>
+        </p:nvSpPr>
+        <p:spPr>
+          <a:xfrm>
+            <a:off x="1143000" y="4279392"/>
+            <a:ext cx="2757830" cy="768096"/>
+          </a:xfrm>
+          <a:prstGeom prst="rect">
+            <a:avLst/>
+          </a:prstGeom>
+          <a:noFill/>
+          <a:ln/>
+        </p:spPr>
+        <p:txBody>
+          <a:bodyPr wrap="square" lIns="0" tIns="0" rIns="0" bIns="0" rtlCol="0" anchor="ctr"/>
+          <a:lstStyle/>
+          <a:p>
+            <a:pPr indent="0" marL="0">
+              <a:buNone/>
+            </a:pPr>
+            <a:r>
+              <a:rPr lang="en-US" sz="1400" b="1" dirty="0">
+                <a:solidFill>
+                  <a:srgbClr val="3B6B4A"/>
+                </a:solidFill>
+                <a:latin typeface="Yu Gothic" pitchFamily="34" charset="0"/>
+                <a:ea typeface="Yu Gothic" pitchFamily="34" charset="-122"/>
+                <a:cs typeface="Yu Gothic" pitchFamily="34" charset="-120"/>
+              </a:rPr>
+              <a:t>何を確認するか</a:t>
+            </a:r>
+            <a:endParaRPr lang="en-US" sz="1400" dirty="0"/>
+          </a:p>
+        </p:txBody>
+      </p:sp>
+      <p:sp>
+        <p:nvSpPr>
+          <p:cNvPr id="16" name="Text 14"/>
+          <p:cNvSpPr txBox="1"/>
+          <p:nvPr/>
+        </p:nvSpPr>
+        <p:spPr>
+          <a:xfrm>
+            <a:off x="4006901" y="4279392"/>
+            <a:ext cx="7011619" cy="768096"/>
+          </a:xfrm>
+          <a:prstGeom prst="rect">
+            <a:avLst/>
+          </a:prstGeom>
+          <a:noFill/>
+          <a:ln/>
+        </p:spPr>
+        <p:txBody>
+          <a:bodyPr wrap="square" lIns="0" tIns="0" rIns="0" bIns="0" rtlCol="0" anchor="ctr"/>
+          <a:lstStyle/>
+          <a:p>
+            <a:pPr indent="0" marL="0">
+              <a:lnSpc>
+                <a:spcPct val="130000"/>
+              </a:lnSpc>
+              <a:buNone/>
+            </a:pPr>
+            <a:r>
+              <a:rPr lang="en-US" sz="1250" dirty="0">
+                <a:solidFill>
+                  <a:srgbClr val="3F3933"/>
+                </a:solidFill>
+                <a:latin typeface="Yu Gothic" pitchFamily="34" charset="0"/>
+                <a:ea typeface="Yu Gothic" pitchFamily="34" charset="-122"/>
+                <a:cs typeface="Yu Gothic" pitchFamily="34" charset="-120"/>
+              </a:rPr>
+              <a:t>出てきた金額と数字は、提出前に必ず目視で確認します</a:t>
+            </a:r>
+            <a:endParaRPr lang="en-US" sz="1250" dirty="0"/>
+          </a:p>
+        </p:txBody>
+      </p:sp>
+      <p:sp>
+        <p:nvSpPr>
+          <p:cNvPr id="17" name="Text 15"/>
+          <p:cNvSpPr txBox="1"/>
+          <p:nvPr/>
+        </p:nvSpPr>
+        <p:spPr>
+          <a:xfrm>
+            <a:off x="777240" y="6382512"/>
+            <a:ext cx="7424928" cy="256032"/>
+          </a:xfrm>
+          <a:prstGeom prst="rect">
+            <a:avLst/>
+          </a:prstGeom>
+          <a:noFill/>
+          <a:ln/>
+        </p:spPr>
+        <p:txBody>
+          <a:bodyPr wrap="square" lIns="0" tIns="0" rIns="0" bIns="0" rtlCol="0" anchor="ctr"/>
+          <a:lstStyle/>
+          <a:p>
+            <a:pPr indent="0" marL="0">
+              <a:buNone/>
+            </a:pPr>
+            <a:r>
+              <a:rPr lang="en-US" sz="900" dirty="0">
+                <a:solidFill>
+                  <a:srgbClr val="8A8177"/>
+                </a:solidFill>
+                <a:latin typeface="Yu Gothic" pitchFamily="34" charset="0"/>
+                <a:ea typeface="Yu Gothic" pitchFamily="34" charset="-122"/>
+                <a:cs typeface="Yu Gothic" pitchFamily="34" charset="-120"/>
+              </a:rPr>
+              <a:t>第1回　現状把握と地図づくり</a:t>
+            </a:r>
+            <a:endParaRPr lang="en-US" sz="900" dirty="0"/>
+          </a:p>
+        </p:txBody>
+      </p:sp>
+      <p:sp>
+        <p:nvSpPr>
+          <p:cNvPr id="18" name="Text 16"/>
+          <p:cNvSpPr txBox="1"/>
+          <p:nvPr/>
+        </p:nvSpPr>
+        <p:spPr>
+          <a:xfrm>
+            <a:off x="8202168" y="6382512"/>
+            <a:ext cx="3182112" cy="256032"/>
+          </a:xfrm>
+          <a:prstGeom prst="rect">
+            <a:avLst/>
+          </a:prstGeom>
+          <a:noFill/>
+          <a:ln/>
+        </p:spPr>
+        <p:txBody>
+          <a:bodyPr wrap="square" lIns="0" tIns="0" rIns="0" bIns="0" rtlCol="0" anchor="ctr"/>
+          <a:lstStyle/>
+          <a:p>
+            <a:pPr algn="r" indent="0" marL="0">
+              <a:buNone/>
+            </a:pPr>
+            <a:r>
+              <a:rPr lang="en-US" sz="900" dirty="0">
+                <a:solidFill>
+                  <a:srgbClr val="8A8177"/>
+                </a:solidFill>
+                <a:latin typeface="Yu Gothic" pitchFamily="34" charset="0"/>
+                <a:ea typeface="Yu Gothic" pitchFamily="34" charset="-122"/>
+                <a:cs typeface="Yu Gothic" pitchFamily="34" charset="-120"/>
+              </a:rPr>
+              <a:t>組み込み</a:t>
+            </a:r>
+            <a:endParaRPr lang="en-US" sz="900" dirty="0"/>
+          </a:p>
+        </p:txBody>
+      </p:sp>
+    </p:spTree>
+  </p:cSld>
+  <p:clrMapOvr>
+    <a:masterClrMapping/>
+  </p:clrMapOvr>
+</p:sld>
+</file>
+
+<file path=ppt/slides/slide11.xml><?xml version="1.0" encoding="utf-8"?>
+<p:sld xmlns:a="http://schemas.openxmlformats.org/drawingml/2006/main" xmlns:r="http://schemas.openxmlformats.org/officeDocument/2006/relationships" xmlns:p="http://schemas.openxmlformats.org/presentationml/2006/main">
+  <p:cSld name="Slide 11">
+    <p:bg>
+      <p:bgPr>
+        <a:solidFill>
+          <a:srgbClr val="F6F2EA"/>
+        </a:solidFill>
+      </p:bgPr>
+    </p:bg>
+    <p:spTree>
+      <p:nvGrpSpPr>
+        <p:cNvPr id="1" name=""/>
+        <p:cNvGrpSpPr/>
+        <p:nvPr/>
+      </p:nvGrpSpPr>
+      <p:grpSpPr>
+        <a:xfrm>
+          <a:off x="0" y="0"/>
+          <a:ext cx="0" cy="0"/>
+          <a:chOff x="0" y="0"/>
+          <a:chExt cx="0" cy="0"/>
+        </a:xfrm>
+      </p:grpSpPr>
+      <p:sp>
+        <p:nvSpPr>
+          <p:cNvPr id="2" name="Text 0"/>
+          <p:cNvSpPr txBox="1"/>
+          <p:nvPr/>
+        </p:nvSpPr>
+        <p:spPr>
+          <a:xfrm>
+            <a:off x="777240" y="566928"/>
+            <a:ext cx="10607040" cy="274320"/>
+          </a:xfrm>
+          <a:prstGeom prst="rect">
+            <a:avLst/>
+          </a:prstGeom>
+          <a:noFill/>
+          <a:ln/>
+        </p:spPr>
+        <p:txBody>
+          <a:bodyPr wrap="square" lIns="0" tIns="0" rIns="0" bIns="0" rtlCol="0" anchor="ctr"/>
+          <a:lstStyle/>
+          <a:p>
+            <a:pPr indent="0" marL="0">
+              <a:buNone/>
+            </a:pPr>
+            <a:r>
+              <a:rPr lang="en-US" sz="1100" b="1" spc="250" kern="0" dirty="0">
+                <a:solidFill>
+                  <a:srgbClr val="B04A2F"/>
+                </a:solidFill>
+                <a:latin typeface="Yu Gothic" pitchFamily="34" charset="0"/>
+                <a:ea typeface="Yu Gothic" pitchFamily="34" charset="-122"/>
+                <a:cs typeface="Yu Gothic" pitchFamily="34" charset="-120"/>
+              </a:rPr>
+              <a:t>ここだけは</a:t>
+            </a:r>
+            <a:endParaRPr lang="en-US" sz="1100" dirty="0"/>
+          </a:p>
+        </p:txBody>
+      </p:sp>
+      <p:sp>
+        <p:nvSpPr>
+          <p:cNvPr id="3" name="Text 1"/>
+          <p:cNvSpPr txBox="1"/>
+          <p:nvPr/>
+        </p:nvSpPr>
+        <p:spPr>
+          <a:xfrm>
+            <a:off x="777240" y="1097280"/>
+            <a:ext cx="10607040" cy="640080"/>
+          </a:xfrm>
+          <a:prstGeom prst="rect">
+            <a:avLst/>
+          </a:prstGeom>
+          <a:noFill/>
+          <a:ln/>
+        </p:spPr>
+        <p:txBody>
+          <a:bodyPr wrap="square" lIns="0" tIns="0" rIns="0" bIns="0" rtlCol="0" anchor="ctr"/>
+          <a:lstStyle/>
+          <a:p>
+            <a:pPr indent="0" marL="0">
+              <a:buNone/>
+            </a:pPr>
+            <a:r>
+              <a:rPr lang="en-US" sz="2600" b="1" dirty="0">
+                <a:solidFill>
+                  <a:srgbClr val="23201D"/>
+                </a:solidFill>
+                <a:latin typeface="Yu Gothic" pitchFamily="34" charset="0"/>
+                <a:ea typeface="Yu Gothic" pitchFamily="34" charset="-122"/>
+                <a:cs typeface="Yu Gothic" pitchFamily="34" charset="-120"/>
+              </a:rPr>
+              <a:t>今日は、成果より「手応え」を持ち帰る回です</a:t>
+            </a:r>
+            <a:endParaRPr lang="en-US" sz="2600" dirty="0"/>
+          </a:p>
+        </p:txBody>
+      </p:sp>
+      <p:sp>
+        <p:nvSpPr>
+          <p:cNvPr id="4" name="Shape 2"/>
+          <p:cNvSpPr/>
+          <p:nvPr/>
+        </p:nvSpPr>
+        <p:spPr>
+          <a:xfrm>
+            <a:off x="777240" y="2148840"/>
+            <a:ext cx="64008" cy="2194560"/>
+          </a:xfrm>
+          <a:prstGeom prst="rect">
+            <a:avLst/>
+          </a:prstGeom>
+          <a:solidFill>
+            <a:srgbClr val="B04A2F"/>
+          </a:solidFill>
+          <a:ln w="12700">
+            <a:solidFill>
+              <a:srgbClr val="333333"/>
+            </a:solidFill>
+            <a:prstDash val="solid"/>
+          </a:ln>
+        </p:spPr>
+      </p:sp>
+      <p:sp>
+        <p:nvSpPr>
+          <p:cNvPr id="5" name="Text 3"/>
+          <p:cNvSpPr txBox="1"/>
+          <p:nvPr/>
+        </p:nvSpPr>
+        <p:spPr>
+          <a:xfrm>
+            <a:off x="1188720" y="2148840"/>
+            <a:ext cx="9966960" cy="2194560"/>
+          </a:xfrm>
+          <a:prstGeom prst="rect">
+            <a:avLst/>
+          </a:prstGeom>
+          <a:noFill/>
+          <a:ln/>
+        </p:spPr>
+        <p:txBody>
+          <a:bodyPr wrap="square" lIns="0" tIns="0" rIns="0" bIns="0" rtlCol="0" anchor="ctr"/>
+          <a:lstStyle/>
+          <a:p>
+            <a:pPr indent="0" marL="0">
+              <a:lnSpc>
+                <a:spcPct val="160000"/>
+              </a:lnSpc>
+              <a:buNone/>
+            </a:pPr>
+            <a:r>
+              <a:rPr lang="en-US" sz="1650" dirty="0">
+                <a:solidFill>
+                  <a:srgbClr val="3F3933"/>
+                </a:solidFill>
+                <a:latin typeface="Yu Gothic" pitchFamily="34" charset="0"/>
+                <a:ea typeface="Yu Gothic" pitchFamily="34" charset="-122"/>
+                <a:cs typeface="Yu Gothic" pitchFamily="34" charset="-120"/>
+              </a:rPr>
+              <a:t>診断して終わった初回は、2回目の欠席理由をつくります。だから必ず、その日のうちに1つ動くものを持ち帰っていただきます。小さくて構いません。明日の朝に一度使えるものであることのほうが大事です。</a:t>
+            </a:r>
+            <a:endParaRPr lang="en-US" sz="1650" dirty="0"/>
+          </a:p>
+        </p:txBody>
+      </p:sp>
+      <p:sp>
+        <p:nvSpPr>
+          <p:cNvPr id="6" name="Shape 4"/>
+          <p:cNvSpPr/>
+          <p:nvPr/>
+        </p:nvSpPr>
+        <p:spPr>
+          <a:xfrm>
+            <a:off x="777240" y="4709160"/>
+            <a:ext cx="10607040" cy="960120"/>
+          </a:xfrm>
+          <a:prstGeom prst="rect">
+            <a:avLst/>
+          </a:prstGeom>
+          <a:solidFill>
+            <a:srgbClr val="EDE7DB"/>
+          </a:solidFill>
+          <a:ln w="12700">
+            <a:solidFill>
+              <a:srgbClr val="333333"/>
+            </a:solidFill>
+            <a:prstDash val="solid"/>
+          </a:ln>
+        </p:spPr>
+      </p:sp>
+      <p:sp>
+        <p:nvSpPr>
+          <p:cNvPr id="7" name="Text 5"/>
+          <p:cNvSpPr txBox="1"/>
+          <p:nvPr/>
+        </p:nvSpPr>
+        <p:spPr>
+          <a:xfrm>
+            <a:off x="1051560" y="4800600"/>
+            <a:ext cx="1463040" cy="256032"/>
+          </a:xfrm>
+          <a:prstGeom prst="rect">
+            <a:avLst/>
+          </a:prstGeom>
+          <a:noFill/>
+          <a:ln/>
+        </p:spPr>
+        <p:txBody>
+          <a:bodyPr wrap="square" lIns="0" tIns="0" rIns="0" bIns="0" rtlCol="0" anchor="ctr"/>
+          <a:lstStyle/>
+          <a:p>
+            <a:pPr indent="0" marL="0">
+              <a:buNone/>
+            </a:pPr>
+            <a:r>
+              <a:rPr lang="en-US" sz="900" b="1" spc="150" kern="0" dirty="0">
+                <a:solidFill>
+                  <a:srgbClr val="B04A2F"/>
+                </a:solidFill>
+                <a:latin typeface="Yu Gothic" pitchFamily="34" charset="0"/>
+                <a:ea typeface="Yu Gothic" pitchFamily="34" charset="-122"/>
+                <a:cs typeface="Yu Gothic" pitchFamily="34" charset="-120"/>
+              </a:rPr>
+              <a:t>他社では</a:t>
+            </a:r>
+            <a:endParaRPr lang="en-US" sz="900" dirty="0"/>
+          </a:p>
+        </p:txBody>
+      </p:sp>
+      <p:sp>
+        <p:nvSpPr>
+          <p:cNvPr id="8" name="Text 6"/>
+          <p:cNvSpPr txBox="1"/>
+          <p:nvPr/>
+        </p:nvSpPr>
+        <p:spPr>
+          <a:xfrm>
+            <a:off x="1051560" y="5029200"/>
+            <a:ext cx="10058400" cy="566928"/>
+          </a:xfrm>
+          <a:prstGeom prst="rect">
+            <a:avLst/>
+          </a:prstGeom>
+          <a:noFill/>
+          <a:ln/>
+        </p:spPr>
+        <p:txBody>
+          <a:bodyPr wrap="square" lIns="0" tIns="0" rIns="0" bIns="0" rtlCol="0" anchor="ctr"/>
+          <a:lstStyle/>
+          <a:p>
+            <a:pPr indent="0" marL="0">
+              <a:lnSpc>
+                <a:spcPct val="130000"/>
+              </a:lnSpc>
+              <a:buNone/>
+            </a:pPr>
+            <a:r>
+              <a:rPr lang="en-US" sz="1250" dirty="0">
+                <a:solidFill>
+                  <a:srgbClr val="3F3933"/>
+                </a:solidFill>
+                <a:latin typeface="Yu Gothic" pitchFamily="34" charset="0"/>
+                <a:ea typeface="Yu Gothic" pitchFamily="34" charset="-122"/>
+                <a:cs typeface="Yu Gothic" pitchFamily="34" charset="-120"/>
+              </a:rPr>
+              <a:t>ある会社では、初回に作ったのは「お断りメールの下書き」1本だけでした。ただ、それを翌朝に使ったことで、2回目以降の宿題が一度も止まりませんでした。</a:t>
+            </a:r>
+            <a:endParaRPr lang="en-US" sz="1250" dirty="0"/>
+          </a:p>
+        </p:txBody>
+      </p:sp>
+      <p:sp>
+        <p:nvSpPr>
+          <p:cNvPr id="9" name="Text 7"/>
+          <p:cNvSpPr txBox="1"/>
+          <p:nvPr/>
+        </p:nvSpPr>
+        <p:spPr>
+          <a:xfrm>
+            <a:off x="777240" y="6382512"/>
+            <a:ext cx="7424928" cy="256032"/>
+          </a:xfrm>
+          <a:prstGeom prst="rect">
+            <a:avLst/>
+          </a:prstGeom>
+          <a:noFill/>
+          <a:ln/>
+        </p:spPr>
+        <p:txBody>
+          <a:bodyPr wrap="square" lIns="0" tIns="0" rIns="0" bIns="0" rtlCol="0" anchor="ctr"/>
+          <a:lstStyle/>
+          <a:p>
+            <a:pPr indent="0" marL="0">
+              <a:buNone/>
+            </a:pPr>
+            <a:r>
+              <a:rPr lang="en-US" sz="900" dirty="0">
+                <a:solidFill>
+                  <a:srgbClr val="8A8177"/>
+                </a:solidFill>
+                <a:latin typeface="Yu Gothic" pitchFamily="34" charset="0"/>
+                <a:ea typeface="Yu Gothic" pitchFamily="34" charset="-122"/>
+                <a:cs typeface="Yu Gothic" pitchFamily="34" charset="-120"/>
+              </a:rPr>
+              <a:t>第1回　現状把握と地図づくり</a:t>
+            </a:r>
+            <a:endParaRPr lang="en-US" sz="900" dirty="0"/>
+          </a:p>
+        </p:txBody>
+      </p:sp>
+      <p:sp>
+        <p:nvSpPr>
+          <p:cNvPr id="10" name="Text 8"/>
+          <p:cNvSpPr txBox="1"/>
+          <p:nvPr/>
+        </p:nvSpPr>
+        <p:spPr>
+          <a:xfrm>
+            <a:off x="8202168" y="6382512"/>
+            <a:ext cx="3182112" cy="256032"/>
+          </a:xfrm>
+          <a:prstGeom prst="rect">
+            <a:avLst/>
+          </a:prstGeom>
+          <a:noFill/>
+          <a:ln/>
+        </p:spPr>
+        <p:txBody>
+          <a:bodyPr wrap="square" lIns="0" tIns="0" rIns="0" bIns="0" rtlCol="0" anchor="ctr"/>
+          <a:lstStyle/>
+          <a:p>
+            <a:pPr algn="r" indent="0" marL="0">
+              <a:buNone/>
+            </a:pPr>
+            <a:r>
+              <a:rPr lang="en-US" sz="900" dirty="0">
+                <a:solidFill>
+                  <a:srgbClr val="8A8177"/>
+                </a:solidFill>
+                <a:latin typeface="Yu Gothic" pitchFamily="34" charset="0"/>
+                <a:ea typeface="Yu Gothic" pitchFamily="34" charset="-122"/>
+                <a:cs typeface="Yu Gothic" pitchFamily="34" charset="-120"/>
+              </a:rPr>
+              <a:t>ここだけは</a:t>
+            </a:r>
+            <a:endParaRPr lang="en-US" sz="900" dirty="0"/>
+          </a:p>
+        </p:txBody>
+      </p:sp>
+    </p:spTree>
+  </p:cSld>
+  <p:clrMapOvr>
+    <a:masterClrMapping/>
+  </p:clrMapOvr>
+</p:sld>
+</file>
+
+<file path=ppt/slides/slide12.xml><?xml version="1.0" encoding="utf-8"?>
+<p:sld xmlns:a="http://schemas.openxmlformats.org/drawingml/2006/main" xmlns:r="http://schemas.openxmlformats.org/officeDocument/2006/relationships" xmlns:p="http://schemas.openxmlformats.org/presentationml/2006/main">
+  <p:cSld name="Slide 12">
+    <p:bg>
+      <p:bgPr>
+        <a:solidFill>
+          <a:srgbClr val="23201D"/>
+        </a:solidFill>
+      </p:bgPr>
+    </p:bg>
+    <p:spTree>
+      <p:nvGrpSpPr>
+        <p:cNvPr id="1" name=""/>
+        <p:cNvGrpSpPr/>
+        <p:nvPr/>
+      </p:nvGrpSpPr>
+      <p:grpSpPr>
+        <a:xfrm>
+          <a:off x="0" y="0"/>
+          <a:ext cx="0" cy="0"/>
+          <a:chOff x="0" y="0"/>
+          <a:chExt cx="0" cy="0"/>
+        </a:xfrm>
+      </p:grpSpPr>
+      <p:sp>
+        <p:nvSpPr>
+          <p:cNvPr id="2" name="Text 0"/>
+          <p:cNvSpPr txBox="1"/>
+          <p:nvPr/>
+        </p:nvSpPr>
+        <p:spPr>
+          <a:xfrm>
+            <a:off x="777240" y="1280160"/>
+            <a:ext cx="10607040" cy="365760"/>
+          </a:xfrm>
+          <a:prstGeom prst="rect">
+            <a:avLst/>
+          </a:prstGeom>
+          <a:noFill/>
+          <a:ln/>
+        </p:spPr>
+        <p:txBody>
+          <a:bodyPr wrap="square" lIns="0" tIns="0" rIns="0" bIns="0" rtlCol="0" anchor="ctr"/>
+          <a:lstStyle/>
+          <a:p>
+            <a:pPr indent="0" marL="0">
+              <a:buNone/>
+            </a:pPr>
+            <a:r>
+              <a:rPr lang="en-US" sz="1200" b="1" spc="300" kern="0" dirty="0">
+                <a:solidFill>
+                  <a:srgbClr val="B04A2F"/>
+                </a:solidFill>
+                <a:latin typeface="Yu Gothic" pitchFamily="34" charset="0"/>
+                <a:ea typeface="Yu Gothic" pitchFamily="34" charset="-122"/>
+                <a:cs typeface="Yu Gothic" pitchFamily="34" charset="-120"/>
+              </a:rPr>
+              <a:t>今日の宿題</a:t>
+            </a:r>
+            <a:endParaRPr lang="en-US" sz="1200" dirty="0"/>
+          </a:p>
+        </p:txBody>
+      </p:sp>
+      <p:sp>
+        <p:nvSpPr>
+          <p:cNvPr id="3" name="Text 1"/>
+          <p:cNvSpPr txBox="1"/>
+          <p:nvPr/>
+        </p:nvSpPr>
+        <p:spPr>
+          <a:xfrm>
+            <a:off x="777240" y="1691640"/>
+            <a:ext cx="10607040" cy="640080"/>
+          </a:xfrm>
+          <a:prstGeom prst="rect">
+            <a:avLst/>
+          </a:prstGeom>
+          <a:noFill/>
+          <a:ln/>
+        </p:spPr>
+        <p:txBody>
+          <a:bodyPr wrap="square" lIns="0" tIns="0" rIns="0" bIns="0" rtlCol="0" anchor="ctr"/>
+          <a:lstStyle/>
+          <a:p>
+            <a:pPr indent="0" marL="0">
+              <a:buNone/>
+            </a:pPr>
+            <a:r>
+              <a:rPr lang="en-US" sz="3200" b="1" dirty="0">
+                <a:solidFill>
+                  <a:srgbClr val="FFFFFF"/>
+                </a:solidFill>
+                <a:latin typeface="Yu Gothic" pitchFamily="34" charset="0"/>
+                <a:ea typeface="Yu Gothic" pitchFamily="34" charset="-122"/>
+                <a:cs typeface="Yu Gothic" pitchFamily="34" charset="-120"/>
+              </a:rPr>
+              <a:t>ひとつだけ</a:t>
+            </a:r>
+            <a:endParaRPr lang="en-US" sz="3200" dirty="0"/>
+          </a:p>
+        </p:txBody>
+      </p:sp>
+      <p:sp>
+        <p:nvSpPr>
+          <p:cNvPr id="4" name="Shape 2"/>
+          <p:cNvSpPr/>
+          <p:nvPr/>
+        </p:nvSpPr>
+        <p:spPr>
+          <a:xfrm>
+            <a:off x="777240" y="2651760"/>
+            <a:ext cx="10607040" cy="1371600"/>
+          </a:xfrm>
+          <a:prstGeom prst="rect">
+            <a:avLst/>
+          </a:prstGeom>
+          <a:solidFill>
+            <a:srgbClr val="2E2A26"/>
+          </a:solidFill>
+          <a:ln w="12700">
+            <a:solidFill>
+              <a:srgbClr val="B04A2F"/>
+            </a:solidFill>
+            <a:prstDash val="solid"/>
+          </a:ln>
+        </p:spPr>
+      </p:sp>
+      <p:sp>
+        <p:nvSpPr>
+          <p:cNvPr id="5" name="Text 3"/>
+          <p:cNvSpPr txBox="1"/>
+          <p:nvPr/>
+        </p:nvSpPr>
+        <p:spPr>
+          <a:xfrm>
+            <a:off x="1234440" y="2743200"/>
+            <a:ext cx="9692640" cy="1188720"/>
+          </a:xfrm>
+          <a:prstGeom prst="rect">
+            <a:avLst/>
+          </a:prstGeom>
+          <a:noFill/>
+          <a:ln/>
+        </p:spPr>
+        <p:txBody>
+          <a:bodyPr wrap="square" lIns="0" tIns="0" rIns="0" bIns="0" rtlCol="0" anchor="ctr"/>
+          <a:lstStyle/>
+          <a:p>
+            <a:pPr indent="0" marL="0">
+              <a:lnSpc>
+                <a:spcPct val="140000"/>
+              </a:lnSpc>
+              <a:buNone/>
+            </a:pPr>
+            <a:r>
+              <a:rPr lang="en-US" sz="1900" b="1" dirty="0">
+                <a:solidFill>
+                  <a:srgbClr val="FFFFFF"/>
+                </a:solidFill>
+                <a:latin typeface="Yu Gothic" pitchFamily="34" charset="0"/>
+                <a:ea typeface="Yu Gothic" pitchFamily="34" charset="-122"/>
+                <a:cs typeface="Yu Gothic" pitchFamily="34" charset="-120"/>
+              </a:rPr>
+              <a:t>明日の朝いちで、今日つくった指示をもう一度使う。</a:t>
+            </a:r>
+            <a:endParaRPr lang="en-US" sz="1900" dirty="0"/>
+          </a:p>
+        </p:txBody>
+      </p:sp>
+      <p:sp>
+        <p:nvSpPr>
+          <p:cNvPr id="6" name="Text 4"/>
+          <p:cNvSpPr txBox="1"/>
+          <p:nvPr/>
+        </p:nvSpPr>
+        <p:spPr>
+          <a:xfrm>
+            <a:off x="777240" y="4297680"/>
+            <a:ext cx="10607040" cy="274320"/>
+          </a:xfrm>
+          <a:prstGeom prst="rect">
+            <a:avLst/>
+          </a:prstGeom>
+          <a:noFill/>
+          <a:ln/>
+        </p:spPr>
+        <p:txBody>
+          <a:bodyPr wrap="square" lIns="0" tIns="0" rIns="0" bIns="0" rtlCol="0" anchor="ctr"/>
+          <a:lstStyle/>
+          <a:p>
+            <a:pPr indent="0" marL="0">
+              <a:buNone/>
+            </a:pPr>
+            <a:r>
+              <a:rPr lang="en-US" sz="1000" b="1" spc="200" kern="0" dirty="0">
+                <a:solidFill>
+                  <a:srgbClr val="B04A2F"/>
+                </a:solidFill>
+                <a:latin typeface="Yu Gothic" pitchFamily="34" charset="0"/>
+                <a:ea typeface="Yu Gothic" pitchFamily="34" charset="-122"/>
+                <a:cs typeface="Yu Gothic" pitchFamily="34" charset="-120"/>
+              </a:rPr>
+              <a:t>なぜこの宿題か</a:t>
+            </a:r>
+            <a:endParaRPr lang="en-US" sz="1000" dirty="0"/>
+          </a:p>
+        </p:txBody>
+      </p:sp>
+      <p:sp>
+        <p:nvSpPr>
+          <p:cNvPr id="7" name="Text 5"/>
+          <p:cNvSpPr txBox="1"/>
+          <p:nvPr/>
+        </p:nvSpPr>
+        <p:spPr>
+          <a:xfrm>
+            <a:off x="777240" y="4572000"/>
+            <a:ext cx="9546336" cy="914400"/>
+          </a:xfrm>
+          <a:prstGeom prst="rect">
+            <a:avLst/>
+          </a:prstGeom>
+          <a:noFill/>
+          <a:ln/>
+        </p:spPr>
+        <p:txBody>
+          <a:bodyPr wrap="square" lIns="0" tIns="0" rIns="0" bIns="0" rtlCol="0" anchor="ctr"/>
+          <a:lstStyle/>
+          <a:p>
+            <a:pPr indent="0" marL="0">
+              <a:lnSpc>
+                <a:spcPct val="145000"/>
+              </a:lnSpc>
+              <a:buNone/>
+            </a:pPr>
+            <a:r>
+              <a:rPr lang="en-US" sz="1350" dirty="0">
+                <a:solidFill>
+                  <a:srgbClr val="CFC6B8"/>
+                </a:solidFill>
+                <a:latin typeface="Yu Gothic" pitchFamily="34" charset="0"/>
+                <a:ea typeface="Yu Gothic" pitchFamily="34" charset="-122"/>
+                <a:cs typeface="Yu Gothic" pitchFamily="34" charset="-120"/>
+              </a:rPr>
+              <a:t>作ったものは、翌日に一度使わないと2週間で忘れます。逆に一度でも実務で使えば、それは仕組みとして残ります。難しいことはお願いしません。もう一度使うだけです。</a:t>
+            </a:r>
+            <a:endParaRPr lang="en-US" sz="1350" dirty="0"/>
+          </a:p>
+        </p:txBody>
+      </p:sp>
+      <p:sp>
+        <p:nvSpPr>
+          <p:cNvPr id="8" name="Text 6"/>
+          <p:cNvSpPr txBox="1"/>
+          <p:nvPr/>
+        </p:nvSpPr>
+        <p:spPr>
+          <a:xfrm>
+            <a:off x="777240" y="6382512"/>
+            <a:ext cx="10607040" cy="256032"/>
+          </a:xfrm>
+          <a:prstGeom prst="rect">
+            <a:avLst/>
+          </a:prstGeom>
+          <a:noFill/>
+          <a:ln/>
+        </p:spPr>
+        <p:txBody>
+          <a:bodyPr wrap="square" lIns="0" tIns="0" rIns="0" bIns="0" rtlCol="0" anchor="ctr"/>
+          <a:lstStyle/>
+          <a:p>
+            <a:pPr indent="0" marL="0">
+              <a:buNone/>
+            </a:pPr>
+            <a:r>
+              <a:rPr lang="en-US" sz="900" dirty="0">
+                <a:solidFill>
+                  <a:srgbClr val="6E6558"/>
+                </a:solidFill>
+                <a:latin typeface="Yu Gothic" pitchFamily="34" charset="0"/>
+                <a:ea typeface="Yu Gothic" pitchFamily="34" charset="-122"/>
+                <a:cs typeface="Yu Gothic" pitchFamily="34" charset="-120"/>
+              </a:rPr>
+              <a:t>第1回　現状把握と地図づくり</a:t>
+            </a:r>
+            <a:endParaRPr lang="en-US" sz="900" dirty="0"/>
+          </a:p>
+        </p:txBody>
+      </p:sp>
+    </p:spTree>
+  </p:cSld>
+  <p:clrMapOvr>
+    <a:masterClrMapping/>
+  </p:clrMapOvr>
+</p:sld>
+</file>
+
 <file path=ppt/slides/slide2.xml><?xml version="1.0" encoding="utf-8"?>
 <p:sld xmlns:a="http://schemas.openxmlformats.org/drawingml/2006/main" xmlns:r="http://schemas.openxmlformats.org/officeDocument/2006/relationships" xmlns:p="http://schemas.openxmlformats.org/presentationml/2006/main">
   <p:cSld name="Slide 2">
@@ -1712,7 +3434,7 @@
         </p:nvSpPr>
         <p:spPr>
           <a:xfrm>
-            <a:off x="777240" y="777240"/>
+            <a:off x="777240" y="566928"/>
             <a:ext cx="10607040" cy="274320"/>
           </a:xfrm>
           <a:prstGeom prst="rect">
@@ -1737,7 +3459,7 @@
                 <a:ea typeface="Yu Gothic" pitchFamily="34" charset="-122"/>
                 <a:cs typeface="Yu Gothic" pitchFamily="34" charset="-120"/>
               </a:rPr>
-              <a:t>今日のゴール</a:t>
+              <a:t>今日の出発点</a:t>
             </a:r>
             <a:endParaRPr lang="en-US" sz="1100" dirty="0"/>
           </a:p>
@@ -1751,27 +3473,24 @@
         </p:nvSpPr>
         <p:spPr>
           <a:xfrm>
-            <a:off x="777240" y="1280160"/>
-            <a:ext cx="9758477" cy="1828800"/>
-          </a:xfrm>
-          <a:prstGeom prst="rect">
-            <a:avLst/>
-          </a:prstGeom>
-          <a:noFill/>
-          <a:ln/>
-        </p:spPr>
-        <p:txBody>
-          <a:bodyPr wrap="square" lIns="0" tIns="0" rIns="0" bIns="0" rtlCol="0" anchor="ctr"/>
-          <a:lstStyle/>
-          <a:p>
-            <a:pPr indent="0" marL="0">
-              <a:lnSpc>
-                <a:spcPct val="145000"/>
-              </a:lnSpc>
-              <a:buNone/>
-            </a:pPr>
-            <a:r>
-              <a:rPr lang="en-US" sz="2800" b="1" dirty="0">
+            <a:off x="777240" y="896112"/>
+            <a:ext cx="10607040" cy="640080"/>
+          </a:xfrm>
+          <a:prstGeom prst="rect">
+            <a:avLst/>
+          </a:prstGeom>
+          <a:noFill/>
+          <a:ln/>
+        </p:spPr>
+        <p:txBody>
+          <a:bodyPr wrap="square" lIns="0" tIns="0" rIns="0" bIns="0" rtlCol="0" anchor="ctr"/>
+          <a:lstStyle/>
+          <a:p>
+            <a:pPr indent="0" marL="0">
+              <a:buNone/>
+            </a:pPr>
+            <a:r>
+              <a:rPr lang="en-US" sz="2600" b="1" dirty="0">
                 <a:solidFill>
                   <a:srgbClr val="23201D"/>
                 </a:solidFill>
@@ -1779,9 +3498,9 @@
                 <a:ea typeface="Yu Gothic" pitchFamily="34" charset="-122"/>
                 <a:cs typeface="Yu Gothic" pitchFamily="34" charset="-120"/>
               </a:rPr>
-              <a:t>自社のどこにAIを当てるかを、ご自身の言葉で説明できる状態にします。</a:t>
-            </a:r>
-            <a:endParaRPr lang="en-US" sz="2800" dirty="0"/>
+              <a:t>「AIで何かできませんか」では、何も決まりません。</a:t>
+            </a:r>
+            <a:endParaRPr lang="en-US" sz="2600" dirty="0"/>
           </a:p>
         </p:txBody>
       </p:sp>
@@ -1793,14 +3512,323 @@
         </p:nvSpPr>
         <p:spPr>
           <a:xfrm>
-            <a:off x="777240" y="3429000"/>
-            <a:ext cx="10607040" cy="18288"/>
+            <a:off x="777240" y="1783080"/>
+            <a:ext cx="10607040" cy="713232"/>
           </a:xfrm>
           <a:prstGeom prst="rect">
             <a:avLst/>
           </a:prstGeom>
           <a:solidFill>
-            <a:srgbClr val="EDE7DB"/>
+            <a:srgbClr val="FFFFFF"/>
+          </a:solidFill>
+          <a:ln w="12700">
+            <a:solidFill>
+              <a:srgbClr val="EDE7DB"/>
+            </a:solidFill>
+            <a:prstDash val="solid"/>
+          </a:ln>
+        </p:spPr>
+      </p:sp>
+      <p:sp>
+        <p:nvSpPr>
+          <p:cNvPr id="5" name="Text 3"/>
+          <p:cNvSpPr txBox="1"/>
+          <p:nvPr/>
+        </p:nvSpPr>
+        <p:spPr>
+          <a:xfrm>
+            <a:off x="1051560" y="1783080"/>
+            <a:ext cx="365760" cy="713232"/>
+          </a:xfrm>
+          <a:prstGeom prst="rect">
+            <a:avLst/>
+          </a:prstGeom>
+          <a:noFill/>
+          <a:ln/>
+        </p:spPr>
+        <p:txBody>
+          <a:bodyPr wrap="square" lIns="0" tIns="0" rIns="0" bIns="0" rtlCol="0" anchor="ctr"/>
+          <a:lstStyle/>
+          <a:p>
+            <a:pPr indent="0" marL="0">
+              <a:buNone/>
+            </a:pPr>
+            <a:r>
+              <a:rPr lang="en-US" sz="1400" dirty="0">
+                <a:solidFill>
+                  <a:srgbClr val="8A8177"/>
+                </a:solidFill>
+                <a:latin typeface="Yu Gothic" pitchFamily="34" charset="0"/>
+                <a:ea typeface="Yu Gothic" pitchFamily="34" charset="-122"/>
+                <a:cs typeface="Yu Gothic" pitchFamily="34" charset="-120"/>
+              </a:rPr>
+              <a:t>―</a:t>
+            </a:r>
+            <a:endParaRPr lang="en-US" sz="1400" dirty="0"/>
+          </a:p>
+        </p:txBody>
+      </p:sp>
+      <p:sp>
+        <p:nvSpPr>
+          <p:cNvPr id="6" name="Text 4"/>
+          <p:cNvSpPr txBox="1"/>
+          <p:nvPr/>
+        </p:nvSpPr>
+        <p:spPr>
+          <a:xfrm>
+            <a:off x="1508760" y="1783080"/>
+            <a:ext cx="9601200" cy="713232"/>
+          </a:xfrm>
+          <a:prstGeom prst="rect">
+            <a:avLst/>
+          </a:prstGeom>
+          <a:noFill/>
+          <a:ln/>
+        </p:spPr>
+        <p:txBody>
+          <a:bodyPr wrap="square" lIns="0" tIns="0" rIns="0" bIns="0" rtlCol="0" anchor="ctr"/>
+          <a:lstStyle/>
+          <a:p>
+            <a:pPr indent="0" marL="0">
+              <a:buNone/>
+            </a:pPr>
+            <a:r>
+              <a:rPr lang="en-US" sz="1500" dirty="0">
+                <a:solidFill>
+                  <a:srgbClr val="23201D"/>
+                </a:solidFill>
+                <a:latin typeface="Yu Gothic" pitchFamily="34" charset="0"/>
+                <a:ea typeface="Yu Gothic" pitchFamily="34" charset="-122"/>
+                <a:cs typeface="Yu Gothic" pitchFamily="34" charset="-120"/>
+              </a:rPr>
+              <a:t>中小企業がAI導入で止まる理由の第1位は、活用事例の情報不足（83.3%）</a:t>
+            </a:r>
+            <a:endParaRPr lang="en-US" sz="1500" dirty="0"/>
+          </a:p>
+        </p:txBody>
+      </p:sp>
+      <p:sp>
+        <p:nvSpPr>
+          <p:cNvPr id="7" name="Shape 5"/>
+          <p:cNvSpPr/>
+          <p:nvPr/>
+        </p:nvSpPr>
+        <p:spPr>
+          <a:xfrm>
+            <a:off x="777240" y="2624328"/>
+            <a:ext cx="10607040" cy="713232"/>
+          </a:xfrm>
+          <a:prstGeom prst="rect">
+            <a:avLst/>
+          </a:prstGeom>
+          <a:solidFill>
+            <a:srgbClr val="FFFFFF"/>
+          </a:solidFill>
+          <a:ln w="12700">
+            <a:solidFill>
+              <a:srgbClr val="EDE7DB"/>
+            </a:solidFill>
+            <a:prstDash val="solid"/>
+          </a:ln>
+        </p:spPr>
+      </p:sp>
+      <p:sp>
+        <p:nvSpPr>
+          <p:cNvPr id="8" name="Text 6"/>
+          <p:cNvSpPr txBox="1"/>
+          <p:nvPr/>
+        </p:nvSpPr>
+        <p:spPr>
+          <a:xfrm>
+            <a:off x="1051560" y="2624328"/>
+            <a:ext cx="365760" cy="713232"/>
+          </a:xfrm>
+          <a:prstGeom prst="rect">
+            <a:avLst/>
+          </a:prstGeom>
+          <a:noFill/>
+          <a:ln/>
+        </p:spPr>
+        <p:txBody>
+          <a:bodyPr wrap="square" lIns="0" tIns="0" rIns="0" bIns="0" rtlCol="0" anchor="ctr"/>
+          <a:lstStyle/>
+          <a:p>
+            <a:pPr indent="0" marL="0">
+              <a:buNone/>
+            </a:pPr>
+            <a:r>
+              <a:rPr lang="en-US" sz="1400" dirty="0">
+                <a:solidFill>
+                  <a:srgbClr val="8A8177"/>
+                </a:solidFill>
+                <a:latin typeface="Yu Gothic" pitchFamily="34" charset="0"/>
+                <a:ea typeface="Yu Gothic" pitchFamily="34" charset="-122"/>
+                <a:cs typeface="Yu Gothic" pitchFamily="34" charset="-120"/>
+              </a:rPr>
+              <a:t>―</a:t>
+            </a:r>
+            <a:endParaRPr lang="en-US" sz="1400" dirty="0"/>
+          </a:p>
+        </p:txBody>
+      </p:sp>
+      <p:sp>
+        <p:nvSpPr>
+          <p:cNvPr id="9" name="Text 7"/>
+          <p:cNvSpPr txBox="1"/>
+          <p:nvPr/>
+        </p:nvSpPr>
+        <p:spPr>
+          <a:xfrm>
+            <a:off x="1508760" y="2624328"/>
+            <a:ext cx="9601200" cy="713232"/>
+          </a:xfrm>
+          <a:prstGeom prst="rect">
+            <a:avLst/>
+          </a:prstGeom>
+          <a:noFill/>
+          <a:ln/>
+        </p:spPr>
+        <p:txBody>
+          <a:bodyPr wrap="square" lIns="0" tIns="0" rIns="0" bIns="0" rtlCol="0" anchor="ctr"/>
+          <a:lstStyle/>
+          <a:p>
+            <a:pPr indent="0" marL="0">
+              <a:buNone/>
+            </a:pPr>
+            <a:r>
+              <a:rPr lang="en-US" sz="1500" dirty="0">
+                <a:solidFill>
+                  <a:srgbClr val="23201D"/>
+                </a:solidFill>
+                <a:latin typeface="Yu Gothic" pitchFamily="34" charset="0"/>
+                <a:ea typeface="Yu Gothic" pitchFamily="34" charset="-122"/>
+                <a:cs typeface="Yu Gothic" pitchFamily="34" charset="-120"/>
+              </a:rPr>
+              <a:t>使ってはいる。ただ、どの業務に当てるかを決めていないので成果が見えない</a:t>
+            </a:r>
+            <a:endParaRPr lang="en-US" sz="1500" dirty="0"/>
+          </a:p>
+        </p:txBody>
+      </p:sp>
+      <p:sp>
+        <p:nvSpPr>
+          <p:cNvPr id="10" name="Shape 8"/>
+          <p:cNvSpPr/>
+          <p:nvPr/>
+        </p:nvSpPr>
+        <p:spPr>
+          <a:xfrm>
+            <a:off x="777240" y="3465576"/>
+            <a:ext cx="10607040" cy="713232"/>
+          </a:xfrm>
+          <a:prstGeom prst="rect">
+            <a:avLst/>
+          </a:prstGeom>
+          <a:solidFill>
+            <a:srgbClr val="FFFFFF"/>
+          </a:solidFill>
+          <a:ln w="12700">
+            <a:solidFill>
+              <a:srgbClr val="EDE7DB"/>
+            </a:solidFill>
+            <a:prstDash val="solid"/>
+          </a:ln>
+        </p:spPr>
+      </p:sp>
+      <p:sp>
+        <p:nvSpPr>
+          <p:cNvPr id="11" name="Text 9"/>
+          <p:cNvSpPr txBox="1"/>
+          <p:nvPr/>
+        </p:nvSpPr>
+        <p:spPr>
+          <a:xfrm>
+            <a:off x="1051560" y="3465576"/>
+            <a:ext cx="365760" cy="713232"/>
+          </a:xfrm>
+          <a:prstGeom prst="rect">
+            <a:avLst/>
+          </a:prstGeom>
+          <a:noFill/>
+          <a:ln/>
+        </p:spPr>
+        <p:txBody>
+          <a:bodyPr wrap="square" lIns="0" tIns="0" rIns="0" bIns="0" rtlCol="0" anchor="ctr"/>
+          <a:lstStyle/>
+          <a:p>
+            <a:pPr indent="0" marL="0">
+              <a:buNone/>
+            </a:pPr>
+            <a:r>
+              <a:rPr lang="en-US" sz="1400" dirty="0">
+                <a:solidFill>
+                  <a:srgbClr val="8A8177"/>
+                </a:solidFill>
+                <a:latin typeface="Yu Gothic" pitchFamily="34" charset="0"/>
+                <a:ea typeface="Yu Gothic" pitchFamily="34" charset="-122"/>
+                <a:cs typeface="Yu Gothic" pitchFamily="34" charset="-120"/>
+              </a:rPr>
+              <a:t>―</a:t>
+            </a:r>
+            <a:endParaRPr lang="en-US" sz="1400" dirty="0"/>
+          </a:p>
+        </p:txBody>
+      </p:sp>
+      <p:sp>
+        <p:nvSpPr>
+          <p:cNvPr id="12" name="Text 10"/>
+          <p:cNvSpPr txBox="1"/>
+          <p:nvPr/>
+        </p:nvSpPr>
+        <p:spPr>
+          <a:xfrm>
+            <a:off x="1508760" y="3465576"/>
+            <a:ext cx="9601200" cy="713232"/>
+          </a:xfrm>
+          <a:prstGeom prst="rect">
+            <a:avLst/>
+          </a:prstGeom>
+          <a:noFill/>
+          <a:ln/>
+        </p:spPr>
+        <p:txBody>
+          <a:bodyPr wrap="square" lIns="0" tIns="0" rIns="0" bIns="0" rtlCol="0" anchor="ctr"/>
+          <a:lstStyle/>
+          <a:p>
+            <a:pPr indent="0" marL="0">
+              <a:buNone/>
+            </a:pPr>
+            <a:r>
+              <a:rPr lang="en-US" sz="1500" dirty="0">
+                <a:solidFill>
+                  <a:srgbClr val="23201D"/>
+                </a:solidFill>
+                <a:latin typeface="Yu Gothic" pitchFamily="34" charset="0"/>
+                <a:ea typeface="Yu Gothic" pitchFamily="34" charset="-122"/>
+                <a:cs typeface="Yu Gothic" pitchFamily="34" charset="-120"/>
+              </a:rPr>
+              <a:t>だから今日は、教える前に、御社の業務を分解して当てる場所を決めます</a:t>
+            </a:r>
+            <a:endParaRPr lang="en-US" sz="1500" dirty="0"/>
+          </a:p>
+        </p:txBody>
+      </p:sp>
+      <p:sp>
+        <p:nvSpPr>
+          <p:cNvPr id="13" name="Shape 11"/>
+          <p:cNvSpPr/>
+          <p:nvPr/>
+        </p:nvSpPr>
+        <p:spPr>
+          <a:xfrm>
+            <a:off x="777240" y="4526280"/>
+            <a:ext cx="10607040" cy="914400"/>
+          </a:xfrm>
+          <a:prstGeom prst="rect">
+            <a:avLst/>
+          </a:prstGeom>
+          <a:solidFill>
+            <a:srgbClr val="B04A2F"/>
           </a:solidFill>
           <a:ln w="12700">
             <a:solidFill>
@@ -1812,14 +3840,14 @@
       </p:sp>
       <p:sp>
         <p:nvSpPr>
-          <p:cNvPr id="5" name="Text 3"/>
-          <p:cNvSpPr txBox="1"/>
-          <p:nvPr/>
-        </p:nvSpPr>
-        <p:spPr>
-          <a:xfrm>
-            <a:off x="777240" y="3657600"/>
-            <a:ext cx="9015984" cy="822960"/>
+          <p:cNvPr id="14" name="Text 12"/>
+          <p:cNvSpPr txBox="1"/>
+          <p:nvPr/>
+        </p:nvSpPr>
+        <p:spPr>
+          <a:xfrm>
+            <a:off x="1143000" y="4526280"/>
+            <a:ext cx="9875520" cy="914400"/>
           </a:xfrm>
           <a:prstGeom prst="rect">
             <a:avLst/>
@@ -1833,84 +3861,59 @@
           <a:p>
             <a:pPr indent="0" marL="0">
               <a:lnSpc>
-                <a:spcPct val="140000"/>
+                <a:spcPct val="130000"/>
               </a:lnSpc>
               <a:buNone/>
             </a:pPr>
             <a:r>
-              <a:rPr lang="en-US" sz="1500" dirty="0">
-                <a:solidFill>
-                  <a:srgbClr val="5A534A"/>
-                </a:solidFill>
-                <a:latin typeface="Yu Gothic" pitchFamily="34" charset="0"/>
-                <a:ea typeface="Yu Gothic" pitchFamily="34" charset="-122"/>
-                <a:cs typeface="Yu Gothic" pitchFamily="34" charset="-120"/>
-              </a:rPr>
-              <a:t>今日は、教える回ではありません。まず拝見して、一緒に地図を描きます。</a:t>
-            </a:r>
-            <a:endParaRPr lang="en-US" sz="1500" dirty="0"/>
-          </a:p>
-        </p:txBody>
-      </p:sp>
-      <p:sp>
-        <p:nvSpPr>
-          <p:cNvPr id="6" name="Shape 4"/>
-          <p:cNvSpPr/>
-          <p:nvPr/>
-        </p:nvSpPr>
-        <p:spPr>
-          <a:xfrm>
-            <a:off x="777240" y="4846320"/>
-            <a:ext cx="10607040" cy="777240"/>
-          </a:xfrm>
-          <a:prstGeom prst="rect">
-            <a:avLst/>
-          </a:prstGeom>
-          <a:solidFill>
-            <a:srgbClr val="EDE7DB"/>
-          </a:solidFill>
-          <a:ln w="12700">
-            <a:solidFill>
-              <a:srgbClr val="333333"/>
-            </a:solidFill>
-            <a:prstDash val="solid"/>
-          </a:ln>
-        </p:spPr>
-      </p:sp>
-      <p:sp>
-        <p:nvSpPr>
-          <p:cNvPr id="7" name="Text 5"/>
-          <p:cNvSpPr txBox="1"/>
-          <p:nvPr/>
-        </p:nvSpPr>
-        <p:spPr>
-          <a:xfrm>
-            <a:off x="960120" y="4956048"/>
-            <a:ext cx="1956816" cy="237744"/>
-          </a:xfrm>
-          <a:prstGeom prst="rect">
-            <a:avLst/>
-          </a:prstGeom>
-          <a:noFill/>
-          <a:ln/>
-        </p:spPr>
-        <p:txBody>
-          <a:bodyPr wrap="square" lIns="0" tIns="0" rIns="0" bIns="0" rtlCol="0" anchor="ctr"/>
-          <a:lstStyle/>
-          <a:p>
-            <a:pPr indent="0" marL="0">
-              <a:buNone/>
-            </a:pPr>
-            <a:r>
-              <a:rPr lang="en-US" sz="900" b="1" dirty="0">
-                <a:solidFill>
-                  <a:srgbClr val="B04A2F"/>
-                </a:solidFill>
-                <a:latin typeface="Yu Gothic" pitchFamily="34" charset="0"/>
-                <a:ea typeface="Yu Gothic" pitchFamily="34" charset="-122"/>
-                <a:cs typeface="Yu Gothic" pitchFamily="34" charset="-120"/>
-              </a:rPr>
-              <a:t>0-15分</a:t>
+              <a:rPr lang="en-US" sz="1800" b="1" dirty="0">
+                <a:solidFill>
+                  <a:srgbClr val="FFFFFF"/>
+                </a:solidFill>
+                <a:latin typeface="Yu Gothic" pitchFamily="34" charset="0"/>
+                <a:ea typeface="Yu Gothic" pitchFamily="34" charset="-122"/>
+                <a:cs typeface="Yu Gothic" pitchFamily="34" charset="-120"/>
+              </a:rPr>
+              <a:t>足りないのは知識ではありません。「うちの場合はここ」という具体です。</a:t>
+            </a:r>
+            <a:endParaRPr lang="en-US" sz="1800" dirty="0"/>
+          </a:p>
+        </p:txBody>
+      </p:sp>
+      <p:sp>
+        <p:nvSpPr>
+          <p:cNvPr id="15" name="Text 13"/>
+          <p:cNvSpPr txBox="1"/>
+          <p:nvPr/>
+        </p:nvSpPr>
+        <p:spPr>
+          <a:xfrm>
+            <a:off x="777240" y="6382512"/>
+            <a:ext cx="7424928" cy="256032"/>
+          </a:xfrm>
+          <a:prstGeom prst="rect">
+            <a:avLst/>
+          </a:prstGeom>
+          <a:noFill/>
+          <a:ln/>
+        </p:spPr>
+        <p:txBody>
+          <a:bodyPr wrap="square" lIns="0" tIns="0" rIns="0" bIns="0" rtlCol="0" anchor="ctr"/>
+          <a:lstStyle/>
+          <a:p>
+            <a:pPr indent="0" marL="0">
+              <a:buNone/>
+            </a:pPr>
+            <a:r>
+              <a:rPr lang="en-US" sz="900" dirty="0">
+                <a:solidFill>
+                  <a:srgbClr val="8A8177"/>
+                </a:solidFill>
+                <a:latin typeface="Yu Gothic" pitchFamily="34" charset="0"/>
+                <a:ea typeface="Yu Gothic" pitchFamily="34" charset="-122"/>
+                <a:cs typeface="Yu Gothic" pitchFamily="34" charset="-120"/>
+              </a:rPr>
+              <a:t>第1回　現状把握と地図づくり</a:t>
             </a:r>
             <a:endParaRPr lang="en-US" sz="900" dirty="0"/>
           </a:p>
@@ -1918,377 +3921,26 @@
       </p:sp>
       <p:sp>
         <p:nvSpPr>
-          <p:cNvPr id="8" name="Text 6"/>
-          <p:cNvSpPr txBox="1"/>
-          <p:nvPr/>
-        </p:nvSpPr>
-        <p:spPr>
-          <a:xfrm>
-            <a:off x="960120" y="5193792"/>
-            <a:ext cx="1956816" cy="365760"/>
-          </a:xfrm>
-          <a:prstGeom prst="rect">
-            <a:avLst/>
-          </a:prstGeom>
-          <a:noFill/>
-          <a:ln/>
-        </p:spPr>
-        <p:txBody>
-          <a:bodyPr wrap="square" lIns="0" tIns="0" rIns="0" bIns="0" rtlCol="0" anchor="ctr"/>
-          <a:lstStyle/>
-          <a:p>
-            <a:pPr indent="0" marL="0">
-              <a:buNone/>
-            </a:pPr>
-            <a:r>
-              <a:rPr lang="en-US" sz="1100" dirty="0">
-                <a:solidFill>
-                  <a:srgbClr val="23201D"/>
-                </a:solidFill>
-                <a:latin typeface="Yu Gothic" pitchFamily="34" charset="0"/>
-                <a:ea typeface="Yu Gothic" pitchFamily="34" charset="-122"/>
-                <a:cs typeface="Yu Gothic" pitchFamily="34" charset="-120"/>
-              </a:rPr>
-              <a:t>前回の宿題を実物で</a:t>
-            </a:r>
-            <a:endParaRPr lang="en-US" sz="1100" dirty="0"/>
-          </a:p>
-        </p:txBody>
-      </p:sp>
-      <p:sp>
-        <p:nvSpPr>
-          <p:cNvPr id="9" name="Text 7"/>
-          <p:cNvSpPr txBox="1"/>
-          <p:nvPr/>
-        </p:nvSpPr>
-        <p:spPr>
-          <a:xfrm>
-            <a:off x="3008376" y="4956048"/>
-            <a:ext cx="1956816" cy="237744"/>
-          </a:xfrm>
-          <a:prstGeom prst="rect">
-            <a:avLst/>
-          </a:prstGeom>
-          <a:noFill/>
-          <a:ln/>
-        </p:spPr>
-        <p:txBody>
-          <a:bodyPr wrap="square" lIns="0" tIns="0" rIns="0" bIns="0" rtlCol="0" anchor="ctr"/>
-          <a:lstStyle/>
-          <a:p>
-            <a:pPr indent="0" marL="0">
-              <a:buNone/>
-            </a:pPr>
-            <a:r>
-              <a:rPr lang="en-US" sz="900" b="1" dirty="0">
-                <a:solidFill>
-                  <a:srgbClr val="B04A2F"/>
-                </a:solidFill>
-                <a:latin typeface="Yu Gothic" pitchFamily="34" charset="0"/>
-                <a:ea typeface="Yu Gothic" pitchFamily="34" charset="-122"/>
-                <a:cs typeface="Yu Gothic" pitchFamily="34" charset="-120"/>
-              </a:rPr>
-              <a:t>15-35分</a:t>
-            </a:r>
-            <a:endParaRPr lang="en-US" sz="900" dirty="0"/>
-          </a:p>
-        </p:txBody>
-      </p:sp>
-      <p:sp>
-        <p:nvSpPr>
-          <p:cNvPr id="10" name="Text 8"/>
-          <p:cNvSpPr txBox="1"/>
-          <p:nvPr/>
-        </p:nvSpPr>
-        <p:spPr>
-          <a:xfrm>
-            <a:off x="3008376" y="5193792"/>
-            <a:ext cx="1956816" cy="365760"/>
-          </a:xfrm>
-          <a:prstGeom prst="rect">
-            <a:avLst/>
-          </a:prstGeom>
-          <a:noFill/>
-          <a:ln/>
-        </p:spPr>
-        <p:txBody>
-          <a:bodyPr wrap="square" lIns="0" tIns="0" rIns="0" bIns="0" rtlCol="0" anchor="ctr"/>
-          <a:lstStyle/>
-          <a:p>
-            <a:pPr indent="0" marL="0">
-              <a:buNone/>
-            </a:pPr>
-            <a:r>
-              <a:rPr lang="en-US" sz="1100" dirty="0">
-                <a:solidFill>
-                  <a:srgbClr val="23201D"/>
-                </a:solidFill>
-                <a:latin typeface="Yu Gothic" pitchFamily="34" charset="0"/>
-                <a:ea typeface="Yu Gothic" pitchFamily="34" charset="-122"/>
-                <a:cs typeface="Yu Gothic" pitchFamily="34" charset="-120"/>
-              </a:rPr>
-              <a:t>テーマとデモ</a:t>
-            </a:r>
-            <a:endParaRPr lang="en-US" sz="1100" dirty="0"/>
-          </a:p>
-        </p:txBody>
-      </p:sp>
-      <p:sp>
-        <p:nvSpPr>
-          <p:cNvPr id="11" name="Text 9"/>
-          <p:cNvSpPr txBox="1"/>
-          <p:nvPr/>
-        </p:nvSpPr>
-        <p:spPr>
-          <a:xfrm>
-            <a:off x="5056632" y="4956048"/>
-            <a:ext cx="1956816" cy="237744"/>
-          </a:xfrm>
-          <a:prstGeom prst="rect">
-            <a:avLst/>
-          </a:prstGeom>
-          <a:noFill/>
-          <a:ln/>
-        </p:spPr>
-        <p:txBody>
-          <a:bodyPr wrap="square" lIns="0" tIns="0" rIns="0" bIns="0" rtlCol="0" anchor="ctr"/>
-          <a:lstStyle/>
-          <a:p>
-            <a:pPr indent="0" marL="0">
-              <a:buNone/>
-            </a:pPr>
-            <a:r>
-              <a:rPr lang="en-US" sz="900" b="1" dirty="0">
-                <a:solidFill>
-                  <a:srgbClr val="B04A2F"/>
-                </a:solidFill>
-                <a:latin typeface="Yu Gothic" pitchFamily="34" charset="0"/>
-                <a:ea typeface="Yu Gothic" pitchFamily="34" charset="-122"/>
-                <a:cs typeface="Yu Gothic" pitchFamily="34" charset="-120"/>
-              </a:rPr>
-              <a:t>35-90分</a:t>
-            </a:r>
-            <a:endParaRPr lang="en-US" sz="900" dirty="0"/>
-          </a:p>
-        </p:txBody>
-      </p:sp>
-      <p:sp>
-        <p:nvSpPr>
-          <p:cNvPr id="12" name="Text 10"/>
-          <p:cNvSpPr txBox="1"/>
-          <p:nvPr/>
-        </p:nvSpPr>
-        <p:spPr>
-          <a:xfrm>
-            <a:off x="5056632" y="5193792"/>
-            <a:ext cx="1956816" cy="365760"/>
-          </a:xfrm>
-          <a:prstGeom prst="rect">
-            <a:avLst/>
-          </a:prstGeom>
-          <a:noFill/>
-          <a:ln/>
-        </p:spPr>
-        <p:txBody>
-          <a:bodyPr wrap="square" lIns="0" tIns="0" rIns="0" bIns="0" rtlCol="0" anchor="ctr"/>
-          <a:lstStyle/>
-          <a:p>
-            <a:pPr indent="0" marL="0">
-              <a:buNone/>
-            </a:pPr>
-            <a:r>
-              <a:rPr lang="en-US" sz="1100" dirty="0">
-                <a:solidFill>
-                  <a:srgbClr val="23201D"/>
-                </a:solidFill>
-                <a:latin typeface="Yu Gothic" pitchFamily="34" charset="0"/>
-                <a:ea typeface="Yu Gothic" pitchFamily="34" charset="-122"/>
-                <a:cs typeface="Yu Gothic" pitchFamily="34" charset="-120"/>
-              </a:rPr>
-              <a:t>一緒に手を動かす</a:t>
-            </a:r>
-            <a:endParaRPr lang="en-US" sz="1100" dirty="0"/>
-          </a:p>
-        </p:txBody>
-      </p:sp>
-      <p:sp>
-        <p:nvSpPr>
-          <p:cNvPr id="13" name="Text 11"/>
-          <p:cNvSpPr txBox="1"/>
-          <p:nvPr/>
-        </p:nvSpPr>
-        <p:spPr>
-          <a:xfrm>
-            <a:off x="7104888" y="4956048"/>
-            <a:ext cx="1956816" cy="237744"/>
-          </a:xfrm>
-          <a:prstGeom prst="rect">
-            <a:avLst/>
-          </a:prstGeom>
-          <a:noFill/>
-          <a:ln/>
-        </p:spPr>
-        <p:txBody>
-          <a:bodyPr wrap="square" lIns="0" tIns="0" rIns="0" bIns="0" rtlCol="0" anchor="ctr"/>
-          <a:lstStyle/>
-          <a:p>
-            <a:pPr indent="0" marL="0">
-              <a:buNone/>
-            </a:pPr>
-            <a:r>
-              <a:rPr lang="en-US" sz="900" b="1" dirty="0">
-                <a:solidFill>
-                  <a:srgbClr val="B04A2F"/>
-                </a:solidFill>
-                <a:latin typeface="Yu Gothic" pitchFamily="34" charset="0"/>
-                <a:ea typeface="Yu Gothic" pitchFamily="34" charset="-122"/>
-                <a:cs typeface="Yu Gothic" pitchFamily="34" charset="-120"/>
-              </a:rPr>
-              <a:t>90-105分</a:t>
-            </a:r>
-            <a:endParaRPr lang="en-US" sz="900" dirty="0"/>
-          </a:p>
-        </p:txBody>
-      </p:sp>
-      <p:sp>
-        <p:nvSpPr>
-          <p:cNvPr id="14" name="Text 12"/>
-          <p:cNvSpPr txBox="1"/>
-          <p:nvPr/>
-        </p:nvSpPr>
-        <p:spPr>
-          <a:xfrm>
-            <a:off x="7104888" y="5193792"/>
-            <a:ext cx="1956816" cy="365760"/>
-          </a:xfrm>
-          <a:prstGeom prst="rect">
-            <a:avLst/>
-          </a:prstGeom>
-          <a:noFill/>
-          <a:ln/>
-        </p:spPr>
-        <p:txBody>
-          <a:bodyPr wrap="square" lIns="0" tIns="0" rIns="0" bIns="0" rtlCol="0" anchor="ctr"/>
-          <a:lstStyle/>
-          <a:p>
-            <a:pPr indent="0" marL="0">
-              <a:buNone/>
-            </a:pPr>
-            <a:r>
-              <a:rPr lang="en-US" sz="1100" dirty="0">
-                <a:solidFill>
-                  <a:srgbClr val="23201D"/>
-                </a:solidFill>
-                <a:latin typeface="Yu Gothic" pitchFamily="34" charset="0"/>
-                <a:ea typeface="Yu Gothic" pitchFamily="34" charset="-122"/>
-                <a:cs typeface="Yu Gothic" pitchFamily="34" charset="-120"/>
-              </a:rPr>
-              <a:t>業務への組み込み</a:t>
-            </a:r>
-            <a:endParaRPr lang="en-US" sz="1100" dirty="0"/>
-          </a:p>
-        </p:txBody>
-      </p:sp>
-      <p:sp>
-        <p:nvSpPr>
-          <p:cNvPr id="15" name="Text 13"/>
-          <p:cNvSpPr txBox="1"/>
-          <p:nvPr/>
-        </p:nvSpPr>
-        <p:spPr>
-          <a:xfrm>
-            <a:off x="9153144" y="4956048"/>
-            <a:ext cx="1956816" cy="237744"/>
-          </a:xfrm>
-          <a:prstGeom prst="rect">
-            <a:avLst/>
-          </a:prstGeom>
-          <a:noFill/>
-          <a:ln/>
-        </p:spPr>
-        <p:txBody>
-          <a:bodyPr wrap="square" lIns="0" tIns="0" rIns="0" bIns="0" rtlCol="0" anchor="ctr"/>
-          <a:lstStyle/>
-          <a:p>
-            <a:pPr indent="0" marL="0">
-              <a:buNone/>
-            </a:pPr>
-            <a:r>
-              <a:rPr lang="en-US" sz="900" b="1" dirty="0">
-                <a:solidFill>
-                  <a:srgbClr val="B04A2F"/>
-                </a:solidFill>
-                <a:latin typeface="Yu Gothic" pitchFamily="34" charset="0"/>
-                <a:ea typeface="Yu Gothic" pitchFamily="34" charset="-122"/>
-                <a:cs typeface="Yu Gothic" pitchFamily="34" charset="-120"/>
-              </a:rPr>
-              <a:t>105-120分</a:t>
-            </a:r>
-            <a:endParaRPr lang="en-US" sz="900" dirty="0"/>
-          </a:p>
-        </p:txBody>
-      </p:sp>
-      <p:sp>
-        <p:nvSpPr>
           <p:cNvPr id="16" name="Text 14"/>
           <p:cNvSpPr txBox="1"/>
           <p:nvPr/>
         </p:nvSpPr>
         <p:spPr>
           <a:xfrm>
-            <a:off x="9153144" y="5193792"/>
-            <a:ext cx="1956816" cy="365760"/>
-          </a:xfrm>
-          <a:prstGeom prst="rect">
-            <a:avLst/>
-          </a:prstGeom>
-          <a:noFill/>
-          <a:ln/>
-        </p:spPr>
-        <p:txBody>
-          <a:bodyPr wrap="square" lIns="0" tIns="0" rIns="0" bIns="0" rtlCol="0" anchor="ctr"/>
-          <a:lstStyle/>
-          <a:p>
-            <a:pPr indent="0" marL="0">
-              <a:buNone/>
-            </a:pPr>
-            <a:r>
-              <a:rPr lang="en-US" sz="1100" dirty="0">
-                <a:solidFill>
-                  <a:srgbClr val="23201D"/>
-                </a:solidFill>
-                <a:latin typeface="Yu Gothic" pitchFamily="34" charset="0"/>
-                <a:ea typeface="Yu Gothic" pitchFamily="34" charset="-122"/>
-                <a:cs typeface="Yu Gothic" pitchFamily="34" charset="-120"/>
-              </a:rPr>
-              <a:t>宿題・記録</a:t>
-            </a:r>
-            <a:endParaRPr lang="en-US" sz="1100" dirty="0"/>
-          </a:p>
-        </p:txBody>
-      </p:sp>
-      <p:sp>
-        <p:nvSpPr>
-          <p:cNvPr id="17" name="Text 15"/>
-          <p:cNvSpPr txBox="1"/>
-          <p:nvPr/>
-        </p:nvSpPr>
-        <p:spPr>
-          <a:xfrm>
-            <a:off x="777240" y="6355080"/>
-            <a:ext cx="7424928" cy="274320"/>
-          </a:xfrm>
-          <a:prstGeom prst="rect">
-            <a:avLst/>
-          </a:prstGeom>
-          <a:noFill/>
-          <a:ln/>
-        </p:spPr>
-        <p:txBody>
-          <a:bodyPr wrap="square" lIns="0" tIns="0" rIns="0" bIns="0" rtlCol="0" anchor="ctr"/>
-          <a:lstStyle/>
-          <a:p>
-            <a:pPr indent="0" marL="0">
+            <a:off x="8202168" y="6382512"/>
+            <a:ext cx="3182112" cy="256032"/>
+          </a:xfrm>
+          <a:prstGeom prst="rect">
+            <a:avLst/>
+          </a:prstGeom>
+          <a:noFill/>
+          <a:ln/>
+        </p:spPr>
+        <p:txBody>
+          <a:bodyPr wrap="square" lIns="0" tIns="0" rIns="0" bIns="0" rtlCol="0" anchor="ctr"/>
+          <a:lstStyle/>
+          <a:p>
+            <a:pPr algn="r" indent="0" marL="0">
               <a:buNone/>
             </a:pPr>
             <a:r>
@@ -2300,46 +3952,7 @@
                 <a:ea typeface="Yu Gothic" pitchFamily="34" charset="-122"/>
                 <a:cs typeface="Yu Gothic" pitchFamily="34" charset="-120"/>
               </a:rPr>
-              <a:t>第1回　現状把握と地図づくり</a:t>
-            </a:r>
-            <a:endParaRPr lang="en-US" sz="900" dirty="0"/>
-          </a:p>
-        </p:txBody>
-      </p:sp>
-      <p:sp>
-        <p:nvSpPr>
-          <p:cNvPr id="18" name="Text 16"/>
-          <p:cNvSpPr txBox="1"/>
-          <p:nvPr/>
-        </p:nvSpPr>
-        <p:spPr>
-          <a:xfrm>
-            <a:off x="8202168" y="6355080"/>
-            <a:ext cx="3182112" cy="274320"/>
-          </a:xfrm>
-          <a:prstGeom prst="rect">
-            <a:avLst/>
-          </a:prstGeom>
-          <a:noFill/>
-          <a:ln/>
-        </p:spPr>
-        <p:txBody>
-          <a:bodyPr wrap="square" lIns="0" tIns="0" rIns="0" bIns="0" rtlCol="0" anchor="ctr"/>
-          <a:lstStyle/>
-          <a:p>
-            <a:pPr algn="r" indent="0" marL="0">
-              <a:buNone/>
-            </a:pPr>
-            <a:r>
-              <a:rPr lang="en-US" sz="900" dirty="0">
-                <a:solidFill>
-                  <a:srgbClr val="8A8177"/>
-                </a:solidFill>
-                <a:latin typeface="Yu Gothic" pitchFamily="34" charset="0"/>
-                <a:ea typeface="Yu Gothic" pitchFamily="34" charset="-122"/>
-                <a:cs typeface="Yu Gothic" pitchFamily="34" charset="-120"/>
-              </a:rPr>
-              <a:t>今日のゴール</a:t>
+              <a:t>出発点</a:t>
             </a:r>
             <a:endParaRPr lang="en-US" sz="900" dirty="0"/>
           </a:p>
@@ -2385,7 +3998,7 @@
         </p:nvSpPr>
         <p:spPr>
           <a:xfrm>
-            <a:off x="777240" y="640080"/>
+            <a:off x="777240" y="566928"/>
             <a:ext cx="10607040" cy="274320"/>
           </a:xfrm>
           <a:prstGeom prst="rect">
@@ -2410,7 +4023,7 @@
                 <a:ea typeface="Yu Gothic" pitchFamily="34" charset="-122"/>
                 <a:cs typeface="Yu Gothic" pitchFamily="34" charset="-120"/>
               </a:rPr>
-              <a:t>考え方</a:t>
+              <a:t>今日のゴール</a:t>
             </a:r>
             <a:endParaRPr lang="en-US" sz="1100" dirty="0"/>
           </a:p>
@@ -2424,24 +4037,27 @@
         </p:nvSpPr>
         <p:spPr>
           <a:xfrm>
-            <a:off x="777240" y="960120"/>
-            <a:ext cx="10607040" cy="640080"/>
-          </a:xfrm>
-          <a:prstGeom prst="rect">
-            <a:avLst/>
-          </a:prstGeom>
-          <a:noFill/>
-          <a:ln/>
-        </p:spPr>
-        <p:txBody>
-          <a:bodyPr wrap="square" lIns="0" tIns="0" rIns="0" bIns="0" rtlCol="0" anchor="ctr"/>
-          <a:lstStyle/>
-          <a:p>
-            <a:pPr indent="0" marL="0">
-              <a:buNone/>
-            </a:pPr>
-            <a:r>
-              <a:rPr lang="en-US" sz="2700" b="1" dirty="0">
+            <a:off x="777240" y="1143000"/>
+            <a:ext cx="9864547" cy="1645920"/>
+          </a:xfrm>
+          <a:prstGeom prst="rect">
+            <a:avLst/>
+          </a:prstGeom>
+          <a:noFill/>
+          <a:ln/>
+        </p:spPr>
+        <p:txBody>
+          <a:bodyPr wrap="square" lIns="0" tIns="0" rIns="0" bIns="0" rtlCol="0" anchor="ctr"/>
+          <a:lstStyle/>
+          <a:p>
+            <a:pPr indent="0" marL="0">
+              <a:lnSpc>
+                <a:spcPct val="145000"/>
+              </a:lnSpc>
+              <a:buNone/>
+            </a:pPr>
+            <a:r>
+              <a:rPr lang="en-US" sz="2600" b="1" dirty="0">
                 <a:solidFill>
                   <a:srgbClr val="23201D"/>
                 </a:solidFill>
@@ -2449,9 +4065,9 @@
                 <a:ea typeface="Yu Gothic" pitchFamily="34" charset="-122"/>
                 <a:cs typeface="Yu Gothic" pitchFamily="34" charset="-120"/>
               </a:rPr>
-              <a:t>AIが向く業務の3条件</a:t>
-            </a:r>
-            <a:endParaRPr lang="en-US" sz="2700" dirty="0"/>
+              <a:t>自社のどこにAIを当てるかを、ご自身の言葉で説明できる状態にします。</a:t>
+            </a:r>
+            <a:endParaRPr lang="en-US" sz="2600" dirty="0"/>
           </a:p>
         </p:txBody>
       </p:sp>
@@ -2463,18 +4079,18 @@
         </p:nvSpPr>
         <p:spPr>
           <a:xfrm>
-            <a:off x="777240" y="1783080"/>
-            <a:ext cx="10607040" cy="1167384"/>
+            <a:off x="777240" y="3063240"/>
+            <a:ext cx="10607040" cy="18288"/>
           </a:xfrm>
           <a:prstGeom prst="rect">
             <a:avLst/>
           </a:prstGeom>
           <a:solidFill>
-            <a:srgbClr val="FFFFFF"/>
+            <a:srgbClr val="EDE7DB"/>
           </a:solidFill>
           <a:ln w="12700">
             <a:solidFill>
-              <a:srgbClr val="EDE7DB"/>
+              <a:srgbClr val="333333"/>
             </a:solidFill>
             <a:prstDash val="solid"/>
           </a:ln>
@@ -2482,24 +4098,66 @@
       </p:sp>
       <p:sp>
         <p:nvSpPr>
-          <p:cNvPr id="5" name="Shape 3"/>
+          <p:cNvPr id="5" name="Text 3"/>
+          <p:cNvSpPr txBox="1"/>
+          <p:nvPr/>
+        </p:nvSpPr>
+        <p:spPr>
+          <a:xfrm>
+            <a:off x="777240" y="3291840"/>
+            <a:ext cx="9334195" cy="1005840"/>
+          </a:xfrm>
+          <a:prstGeom prst="rect">
+            <a:avLst/>
+          </a:prstGeom>
+          <a:noFill/>
+          <a:ln/>
+        </p:spPr>
+        <p:txBody>
+          <a:bodyPr wrap="square" lIns="0" tIns="0" rIns="0" bIns="0" rtlCol="0" anchor="ctr"/>
+          <a:lstStyle/>
+          <a:p>
+            <a:pPr indent="0" marL="0">
+              <a:lnSpc>
+                <a:spcPct val="140000"/>
+              </a:lnSpc>
+              <a:buNone/>
+            </a:pPr>
+            <a:r>
+              <a:rPr lang="en-US" sz="1450" dirty="0">
+                <a:solidFill>
+                  <a:srgbClr val="5A534A"/>
+                </a:solidFill>
+                <a:latin typeface="Yu Gothic" pitchFamily="34" charset="0"/>
+                <a:ea typeface="Yu Gothic" pitchFamily="34" charset="-122"/>
+                <a:cs typeface="Yu Gothic" pitchFamily="34" charset="-120"/>
+              </a:rPr>
+              <a:t>今日は教える回ではありません。まず20分、普段の使い方を拝見します。そのうえで業務を棚卸しし、最後に1つだけ、その場で動かして持ち帰っていただきます。</a:t>
+            </a:r>
+            <a:endParaRPr lang="en-US" sz="1450" dirty="0"/>
+          </a:p>
+        </p:txBody>
+      </p:sp>
+      <p:sp>
+        <p:nvSpPr>
+          <p:cNvPr id="6" name="Shape 4"/>
           <p:cNvSpPr/>
           <p:nvPr/>
         </p:nvSpPr>
         <p:spPr>
           <a:xfrm>
-            <a:off x="1033272" y="2174748"/>
-            <a:ext cx="384048" cy="384048"/>
-          </a:xfrm>
-          <a:prstGeom prst="ellipse">
+            <a:off x="777240" y="4754880"/>
+            <a:ext cx="10607040" cy="822960"/>
+          </a:xfrm>
+          <a:prstGeom prst="rect">
             <a:avLst/>
           </a:prstGeom>
           <a:solidFill>
-            <a:srgbClr val="B04A2F"/>
+            <a:srgbClr val="EDE7DB"/>
           </a:solidFill>
           <a:ln w="12700">
             <a:solidFill>
-              <a:srgbClr val="B04A2F"/>
+              <a:srgbClr val="333333"/>
             </a:solidFill>
             <a:prstDash val="solid"/>
           </a:ln>
@@ -2507,69 +4165,69 @@
       </p:sp>
       <p:sp>
         <p:nvSpPr>
-          <p:cNvPr id="6" name="Text 4"/>
-          <p:cNvSpPr txBox="1"/>
-          <p:nvPr/>
-        </p:nvSpPr>
-        <p:spPr>
-          <a:xfrm>
-            <a:off x="1033272" y="2174748"/>
-            <a:ext cx="384048" cy="384048"/>
-          </a:xfrm>
-          <a:prstGeom prst="rect">
-            <a:avLst/>
-          </a:prstGeom>
-          <a:noFill/>
-          <a:ln/>
-        </p:spPr>
-        <p:txBody>
-          <a:bodyPr wrap="square" lIns="0" tIns="0" rIns="0" bIns="0" rtlCol="0" anchor="ctr"/>
-          <a:lstStyle/>
-          <a:p>
-            <a:pPr algn="ctr" indent="0" marL="0">
-              <a:buNone/>
-            </a:pPr>
-            <a:r>
-              <a:rPr lang="en-US" sz="1400" b="1" dirty="0">
-                <a:solidFill>
-                  <a:srgbClr val="FFFFFF"/>
-                </a:solidFill>
-                <a:latin typeface="Yu Gothic" pitchFamily="34" charset="0"/>
-                <a:ea typeface="Yu Gothic" pitchFamily="34" charset="-122"/>
-                <a:cs typeface="Yu Gothic" pitchFamily="34" charset="-120"/>
-              </a:rPr>
-              <a:t>1</a:t>
-            </a:r>
-            <a:endParaRPr lang="en-US" sz="1400" dirty="0"/>
-          </a:p>
-        </p:txBody>
-      </p:sp>
-      <p:sp>
-        <p:nvSpPr>
           <p:cNvPr id="7" name="Text 5"/>
           <p:cNvSpPr txBox="1"/>
           <p:nvPr/>
         </p:nvSpPr>
         <p:spPr>
           <a:xfrm>
-            <a:off x="1645920" y="1874520"/>
-            <a:ext cx="3394253" cy="984504"/>
-          </a:xfrm>
-          <a:prstGeom prst="rect">
-            <a:avLst/>
-          </a:prstGeom>
-          <a:noFill/>
-          <a:ln/>
-        </p:spPr>
-        <p:txBody>
-          <a:bodyPr wrap="square" lIns="0" tIns="0" rIns="0" bIns="0" rtlCol="0" anchor="ctr"/>
-          <a:lstStyle/>
-          <a:p>
-            <a:pPr indent="0" marL="0">
-              <a:buNone/>
-            </a:pPr>
-            <a:r>
-              <a:rPr lang="en-US" sz="1500" b="1" dirty="0">
+            <a:off x="960120" y="4873752"/>
+            <a:ext cx="1956816" cy="237744"/>
+          </a:xfrm>
+          <a:prstGeom prst="rect">
+            <a:avLst/>
+          </a:prstGeom>
+          <a:noFill/>
+          <a:ln/>
+        </p:spPr>
+        <p:txBody>
+          <a:bodyPr wrap="square" lIns="0" tIns="0" rIns="0" bIns="0" rtlCol="0" anchor="ctr"/>
+          <a:lstStyle/>
+          <a:p>
+            <a:pPr indent="0" marL="0">
+              <a:buNone/>
+            </a:pPr>
+            <a:r>
+              <a:rPr lang="en-US" sz="900" b="1" dirty="0">
+                <a:solidFill>
+                  <a:srgbClr val="B04A2F"/>
+                </a:solidFill>
+                <a:latin typeface="Yu Gothic" pitchFamily="34" charset="0"/>
+                <a:ea typeface="Yu Gothic" pitchFamily="34" charset="-122"/>
+                <a:cs typeface="Yu Gothic" pitchFamily="34" charset="-120"/>
+              </a:rPr>
+              <a:t>0-15分</a:t>
+            </a:r>
+            <a:endParaRPr lang="en-US" sz="900" dirty="0"/>
+          </a:p>
+        </p:txBody>
+      </p:sp>
+      <p:sp>
+        <p:nvSpPr>
+          <p:cNvPr id="8" name="Text 6"/>
+          <p:cNvSpPr txBox="1"/>
+          <p:nvPr/>
+        </p:nvSpPr>
+        <p:spPr>
+          <a:xfrm>
+            <a:off x="960120" y="5111496"/>
+            <a:ext cx="1956816" cy="384048"/>
+          </a:xfrm>
+          <a:prstGeom prst="rect">
+            <a:avLst/>
+          </a:prstGeom>
+          <a:noFill/>
+          <a:ln/>
+        </p:spPr>
+        <p:txBody>
+          <a:bodyPr wrap="square" lIns="0" tIns="0" rIns="0" bIns="0" rtlCol="0" anchor="ctr"/>
+          <a:lstStyle/>
+          <a:p>
+            <a:pPr indent="0" marL="0">
+              <a:buNone/>
+            </a:pPr>
+            <a:r>
+              <a:rPr lang="en-US" sz="1100" dirty="0">
                 <a:solidFill>
                   <a:srgbClr val="23201D"/>
                 </a:solidFill>
@@ -2577,103 +4235,89 @@
                 <a:ea typeface="Yu Gothic" pitchFamily="34" charset="-122"/>
                 <a:cs typeface="Yu Gothic" pitchFamily="34" charset="-120"/>
               </a:rPr>
-              <a:t>くり返し発生する</a:t>
-            </a:r>
-            <a:endParaRPr lang="en-US" sz="1500" dirty="0"/>
-          </a:p>
-        </p:txBody>
-      </p:sp>
-      <p:sp>
-        <p:nvSpPr>
-          <p:cNvPr id="8" name="Text 6"/>
-          <p:cNvSpPr txBox="1"/>
-          <p:nvPr/>
-        </p:nvSpPr>
-        <p:spPr>
-          <a:xfrm>
-            <a:off x="5146243" y="1874520"/>
-            <a:ext cx="5963717" cy="984504"/>
-          </a:xfrm>
-          <a:prstGeom prst="rect">
-            <a:avLst/>
-          </a:prstGeom>
-          <a:noFill/>
-          <a:ln/>
-        </p:spPr>
-        <p:txBody>
-          <a:bodyPr wrap="square" lIns="0" tIns="0" rIns="0" bIns="0" rtlCol="0" anchor="ctr"/>
-          <a:lstStyle/>
-          <a:p>
-            <a:pPr indent="0" marL="0">
-              <a:lnSpc>
-                <a:spcPct val="130000"/>
-              </a:lnSpc>
-              <a:buNone/>
-            </a:pPr>
-            <a:r>
-              <a:rPr lang="en-US" sz="1250" dirty="0">
-                <a:solidFill>
-                  <a:srgbClr val="5A534A"/>
-                </a:solidFill>
-                <a:latin typeface="Yu Gothic" pitchFamily="34" charset="0"/>
-                <a:ea typeface="Yu Gothic" pitchFamily="34" charset="-122"/>
-                <a:cs typeface="Yu Gothic" pitchFamily="34" charset="-120"/>
-              </a:rPr>
-              <a:t>月に何度も起きること。年1回の作業をAI化するのは趣味です</a:t>
-            </a:r>
-            <a:endParaRPr lang="en-US" sz="1250" dirty="0"/>
-          </a:p>
-        </p:txBody>
-      </p:sp>
-      <p:sp>
-        <p:nvSpPr>
-          <p:cNvPr id="9" name="Shape 7"/>
-          <p:cNvSpPr/>
-          <p:nvPr/>
-        </p:nvSpPr>
-        <p:spPr>
-          <a:xfrm>
-            <a:off x="777240" y="3096768"/>
-            <a:ext cx="10607040" cy="1167384"/>
-          </a:xfrm>
-          <a:prstGeom prst="rect">
-            <a:avLst/>
-          </a:prstGeom>
-          <a:solidFill>
-            <a:srgbClr val="FFFFFF"/>
-          </a:solidFill>
-          <a:ln w="12700">
-            <a:solidFill>
-              <a:srgbClr val="EDE7DB"/>
-            </a:solidFill>
-            <a:prstDash val="solid"/>
-          </a:ln>
-        </p:spPr>
-      </p:sp>
-      <p:sp>
-        <p:nvSpPr>
-          <p:cNvPr id="10" name="Shape 8"/>
-          <p:cNvSpPr/>
-          <p:nvPr/>
-        </p:nvSpPr>
-        <p:spPr>
-          <a:xfrm>
-            <a:off x="1033272" y="3488436"/>
-            <a:ext cx="384048" cy="384048"/>
-          </a:xfrm>
-          <a:prstGeom prst="ellipse">
-            <a:avLst/>
-          </a:prstGeom>
-          <a:solidFill>
-            <a:srgbClr val="B04A2F"/>
-          </a:solidFill>
-          <a:ln w="12700">
-            <a:solidFill>
-              <a:srgbClr val="B04A2F"/>
-            </a:solidFill>
-            <a:prstDash val="solid"/>
-          </a:ln>
-        </p:spPr>
+              <a:t>前回の宿題を実物で</a:t>
+            </a:r>
+            <a:endParaRPr lang="en-US" sz="1100" dirty="0"/>
+          </a:p>
+        </p:txBody>
+      </p:sp>
+      <p:sp>
+        <p:nvSpPr>
+          <p:cNvPr id="9" name="Text 7"/>
+          <p:cNvSpPr txBox="1"/>
+          <p:nvPr/>
+        </p:nvSpPr>
+        <p:spPr>
+          <a:xfrm>
+            <a:off x="3008376" y="4873752"/>
+            <a:ext cx="1956816" cy="237744"/>
+          </a:xfrm>
+          <a:prstGeom prst="rect">
+            <a:avLst/>
+          </a:prstGeom>
+          <a:noFill/>
+          <a:ln/>
+        </p:spPr>
+        <p:txBody>
+          <a:bodyPr wrap="square" lIns="0" tIns="0" rIns="0" bIns="0" rtlCol="0" anchor="ctr"/>
+          <a:lstStyle/>
+          <a:p>
+            <a:pPr indent="0" marL="0">
+              <a:buNone/>
+            </a:pPr>
+            <a:r>
+              <a:rPr lang="en-US" sz="900" b="1" dirty="0">
+                <a:solidFill>
+                  <a:srgbClr val="B04A2F"/>
+                </a:solidFill>
+                <a:latin typeface="Yu Gothic" pitchFamily="34" charset="0"/>
+                <a:ea typeface="Yu Gothic" pitchFamily="34" charset="-122"/>
+                <a:cs typeface="Yu Gothic" pitchFamily="34" charset="-120"/>
+              </a:rPr>
+              <a:t>15-35分</a:t>
+            </a:r>
+            <a:endParaRPr lang="en-US" sz="900" dirty="0"/>
+          </a:p>
+        </p:txBody>
+      </p:sp>
+      <p:sp>
+        <p:nvSpPr>
+          <p:cNvPr id="10" name="Text 8"/>
+          <p:cNvSpPr txBox="1"/>
+          <p:nvPr/>
+        </p:nvSpPr>
+        <p:spPr>
+          <a:xfrm>
+            <a:off x="3008376" y="5111496"/>
+            <a:ext cx="1956816" cy="384048"/>
+          </a:xfrm>
+          <a:prstGeom prst="rect">
+            <a:avLst/>
+          </a:prstGeom>
+          <a:noFill/>
+          <a:ln/>
+        </p:spPr>
+        <p:txBody>
+          <a:bodyPr wrap="square" lIns="0" tIns="0" rIns="0" bIns="0" rtlCol="0" anchor="ctr"/>
+          <a:lstStyle/>
+          <a:p>
+            <a:pPr indent="0" marL="0">
+              <a:buNone/>
+            </a:pPr>
+            <a:r>
+              <a:rPr lang="en-US" sz="1100" dirty="0">
+                <a:solidFill>
+                  <a:srgbClr val="23201D"/>
+                </a:solidFill>
+                <a:latin typeface="Yu Gothic" pitchFamily="34" charset="0"/>
+                <a:ea typeface="Yu Gothic" pitchFamily="34" charset="-122"/>
+                <a:cs typeface="Yu Gothic" pitchFamily="34" charset="-120"/>
+              </a:rPr>
+              <a:t>テーマとデモ</a:t>
+            </a:r>
+            <a:endParaRPr lang="en-US" sz="1100" dirty="0"/>
+          </a:p>
+        </p:txBody>
       </p:sp>
       <p:sp>
         <p:nvSpPr>
@@ -2683,34 +4327,34 @@
         </p:nvSpPr>
         <p:spPr>
           <a:xfrm>
-            <a:off x="1033272" y="3488436"/>
-            <a:ext cx="384048" cy="384048"/>
-          </a:xfrm>
-          <a:prstGeom prst="rect">
-            <a:avLst/>
-          </a:prstGeom>
-          <a:noFill/>
-          <a:ln/>
-        </p:spPr>
-        <p:txBody>
-          <a:bodyPr wrap="square" lIns="0" tIns="0" rIns="0" bIns="0" rtlCol="0" anchor="ctr"/>
-          <a:lstStyle/>
-          <a:p>
-            <a:pPr algn="ctr" indent="0" marL="0">
-              <a:buNone/>
-            </a:pPr>
-            <a:r>
-              <a:rPr lang="en-US" sz="1400" b="1" dirty="0">
-                <a:solidFill>
-                  <a:srgbClr val="FFFFFF"/>
-                </a:solidFill>
-                <a:latin typeface="Yu Gothic" pitchFamily="34" charset="0"/>
-                <a:ea typeface="Yu Gothic" pitchFamily="34" charset="-122"/>
-                <a:cs typeface="Yu Gothic" pitchFamily="34" charset="-120"/>
-              </a:rPr>
-              <a:t>2</a:t>
-            </a:r>
-            <a:endParaRPr lang="en-US" sz="1400" dirty="0"/>
+            <a:off x="5056632" y="4873752"/>
+            <a:ext cx="1956816" cy="237744"/>
+          </a:xfrm>
+          <a:prstGeom prst="rect">
+            <a:avLst/>
+          </a:prstGeom>
+          <a:noFill/>
+          <a:ln/>
+        </p:spPr>
+        <p:txBody>
+          <a:bodyPr wrap="square" lIns="0" tIns="0" rIns="0" bIns="0" rtlCol="0" anchor="ctr"/>
+          <a:lstStyle/>
+          <a:p>
+            <a:pPr indent="0" marL="0">
+              <a:buNone/>
+            </a:pPr>
+            <a:r>
+              <a:rPr lang="en-US" sz="900" b="1" dirty="0">
+                <a:solidFill>
+                  <a:srgbClr val="B04A2F"/>
+                </a:solidFill>
+                <a:latin typeface="Yu Gothic" pitchFamily="34" charset="0"/>
+                <a:ea typeface="Yu Gothic" pitchFamily="34" charset="-122"/>
+                <a:cs typeface="Yu Gothic" pitchFamily="34" charset="-120"/>
+              </a:rPr>
+              <a:t>35-90分</a:t>
+            </a:r>
+            <a:endParaRPr lang="en-US" sz="900" dirty="0"/>
           </a:p>
         </p:txBody>
       </p:sp>
@@ -2722,24 +4366,24 @@
         </p:nvSpPr>
         <p:spPr>
           <a:xfrm>
-            <a:off x="1645920" y="3188208"/>
-            <a:ext cx="3394253" cy="984504"/>
-          </a:xfrm>
-          <a:prstGeom prst="rect">
-            <a:avLst/>
-          </a:prstGeom>
-          <a:noFill/>
-          <a:ln/>
-        </p:spPr>
-        <p:txBody>
-          <a:bodyPr wrap="square" lIns="0" tIns="0" rIns="0" bIns="0" rtlCol="0" anchor="ctr"/>
-          <a:lstStyle/>
-          <a:p>
-            <a:pPr indent="0" marL="0">
-              <a:buNone/>
-            </a:pPr>
-            <a:r>
-              <a:rPr lang="en-US" sz="1500" b="1" dirty="0">
+            <a:off x="5056632" y="5111496"/>
+            <a:ext cx="1956816" cy="384048"/>
+          </a:xfrm>
+          <a:prstGeom prst="rect">
+            <a:avLst/>
+          </a:prstGeom>
+          <a:noFill/>
+          <a:ln/>
+        </p:spPr>
+        <p:txBody>
+          <a:bodyPr wrap="square" lIns="0" tIns="0" rIns="0" bIns="0" rtlCol="0" anchor="ctr"/>
+          <a:lstStyle/>
+          <a:p>
+            <a:pPr indent="0" marL="0">
+              <a:buNone/>
+            </a:pPr>
+            <a:r>
+              <a:rPr lang="en-US" sz="1100" dirty="0">
                 <a:solidFill>
                   <a:srgbClr val="23201D"/>
                 </a:solidFill>
@@ -2747,9 +4391,9 @@
                 <a:ea typeface="Yu Gothic" pitchFamily="34" charset="-122"/>
                 <a:cs typeface="Yu Gothic" pitchFamily="34" charset="-120"/>
               </a:rPr>
-              <a:t>文章・画像・データが中心</a:t>
-            </a:r>
-            <a:endParaRPr lang="en-US" sz="1500" dirty="0"/>
+              <a:t>一緒に手を動かす</a:t>
+            </a:r>
+            <a:endParaRPr lang="en-US" sz="1100" dirty="0"/>
           </a:p>
         </p:txBody>
       </p:sp>
@@ -2761,89 +4405,114 @@
         </p:nvSpPr>
         <p:spPr>
           <a:xfrm>
-            <a:off x="5146243" y="3188208"/>
-            <a:ext cx="5963717" cy="984504"/>
-          </a:xfrm>
-          <a:prstGeom prst="rect">
-            <a:avLst/>
-          </a:prstGeom>
-          <a:noFill/>
-          <a:ln/>
-        </p:spPr>
-        <p:txBody>
-          <a:bodyPr wrap="square" lIns="0" tIns="0" rIns="0" bIns="0" rtlCol="0" anchor="ctr"/>
-          <a:lstStyle/>
-          <a:p>
-            <a:pPr indent="0" marL="0">
-              <a:lnSpc>
-                <a:spcPct val="130000"/>
-              </a:lnSpc>
-              <a:buNone/>
-            </a:pPr>
-            <a:r>
-              <a:rPr lang="en-US" sz="1250" dirty="0">
-                <a:solidFill>
-                  <a:srgbClr val="5A534A"/>
-                </a:solidFill>
-                <a:latin typeface="Yu Gothic" pitchFamily="34" charset="0"/>
-                <a:ea typeface="Yu Gothic" pitchFamily="34" charset="-122"/>
-                <a:cs typeface="Yu Gothic" pitchFamily="34" charset="-120"/>
-              </a:rPr>
-              <a:t>人が読み書きしているもの。判断そのものではない</a:t>
-            </a:r>
-            <a:endParaRPr lang="en-US" sz="1250" dirty="0"/>
-          </a:p>
-        </p:txBody>
-      </p:sp>
-      <p:sp>
-        <p:nvSpPr>
-          <p:cNvPr id="14" name="Shape 12"/>
-          <p:cNvSpPr/>
-          <p:nvPr/>
-        </p:nvSpPr>
-        <p:spPr>
-          <a:xfrm>
-            <a:off x="777240" y="4410456"/>
-            <a:ext cx="10607040" cy="1167384"/>
-          </a:xfrm>
-          <a:prstGeom prst="rect">
-            <a:avLst/>
-          </a:prstGeom>
-          <a:solidFill>
-            <a:srgbClr val="FFFFFF"/>
-          </a:solidFill>
-          <a:ln w="12700">
-            <a:solidFill>
-              <a:srgbClr val="EDE7DB"/>
-            </a:solidFill>
-            <a:prstDash val="solid"/>
-          </a:ln>
-        </p:spPr>
-      </p:sp>
-      <p:sp>
-        <p:nvSpPr>
-          <p:cNvPr id="15" name="Shape 13"/>
-          <p:cNvSpPr/>
-          <p:nvPr/>
-        </p:nvSpPr>
-        <p:spPr>
-          <a:xfrm>
-            <a:off x="1033272" y="4802124"/>
-            <a:ext cx="384048" cy="384048"/>
-          </a:xfrm>
-          <a:prstGeom prst="ellipse">
-            <a:avLst/>
-          </a:prstGeom>
-          <a:solidFill>
-            <a:srgbClr val="B04A2F"/>
-          </a:solidFill>
-          <a:ln w="12700">
-            <a:solidFill>
-              <a:srgbClr val="B04A2F"/>
-            </a:solidFill>
-            <a:prstDash val="solid"/>
-          </a:ln>
-        </p:spPr>
+            <a:off x="7104888" y="4873752"/>
+            <a:ext cx="1956816" cy="237744"/>
+          </a:xfrm>
+          <a:prstGeom prst="rect">
+            <a:avLst/>
+          </a:prstGeom>
+          <a:noFill/>
+          <a:ln/>
+        </p:spPr>
+        <p:txBody>
+          <a:bodyPr wrap="square" lIns="0" tIns="0" rIns="0" bIns="0" rtlCol="0" anchor="ctr"/>
+          <a:lstStyle/>
+          <a:p>
+            <a:pPr indent="0" marL="0">
+              <a:buNone/>
+            </a:pPr>
+            <a:r>
+              <a:rPr lang="en-US" sz="900" b="1" dirty="0">
+                <a:solidFill>
+                  <a:srgbClr val="B04A2F"/>
+                </a:solidFill>
+                <a:latin typeface="Yu Gothic" pitchFamily="34" charset="0"/>
+                <a:ea typeface="Yu Gothic" pitchFamily="34" charset="-122"/>
+                <a:cs typeface="Yu Gothic" pitchFamily="34" charset="-120"/>
+              </a:rPr>
+              <a:t>90-105分</a:t>
+            </a:r>
+            <a:endParaRPr lang="en-US" sz="900" dirty="0"/>
+          </a:p>
+        </p:txBody>
+      </p:sp>
+      <p:sp>
+        <p:nvSpPr>
+          <p:cNvPr id="14" name="Text 12"/>
+          <p:cNvSpPr txBox="1"/>
+          <p:nvPr/>
+        </p:nvSpPr>
+        <p:spPr>
+          <a:xfrm>
+            <a:off x="7104888" y="5111496"/>
+            <a:ext cx="1956816" cy="384048"/>
+          </a:xfrm>
+          <a:prstGeom prst="rect">
+            <a:avLst/>
+          </a:prstGeom>
+          <a:noFill/>
+          <a:ln/>
+        </p:spPr>
+        <p:txBody>
+          <a:bodyPr wrap="square" lIns="0" tIns="0" rIns="0" bIns="0" rtlCol="0" anchor="ctr"/>
+          <a:lstStyle/>
+          <a:p>
+            <a:pPr indent="0" marL="0">
+              <a:buNone/>
+            </a:pPr>
+            <a:r>
+              <a:rPr lang="en-US" sz="1100" dirty="0">
+                <a:solidFill>
+                  <a:srgbClr val="23201D"/>
+                </a:solidFill>
+                <a:latin typeface="Yu Gothic" pitchFamily="34" charset="0"/>
+                <a:ea typeface="Yu Gothic" pitchFamily="34" charset="-122"/>
+                <a:cs typeface="Yu Gothic" pitchFamily="34" charset="-120"/>
+              </a:rPr>
+              <a:t>業務への組み込み</a:t>
+            </a:r>
+            <a:endParaRPr lang="en-US" sz="1100" dirty="0"/>
+          </a:p>
+        </p:txBody>
+      </p:sp>
+      <p:sp>
+        <p:nvSpPr>
+          <p:cNvPr id="15" name="Text 13"/>
+          <p:cNvSpPr txBox="1"/>
+          <p:nvPr/>
+        </p:nvSpPr>
+        <p:spPr>
+          <a:xfrm>
+            <a:off x="9153144" y="4873752"/>
+            <a:ext cx="1956816" cy="237744"/>
+          </a:xfrm>
+          <a:prstGeom prst="rect">
+            <a:avLst/>
+          </a:prstGeom>
+          <a:noFill/>
+          <a:ln/>
+        </p:spPr>
+        <p:txBody>
+          <a:bodyPr wrap="square" lIns="0" tIns="0" rIns="0" bIns="0" rtlCol="0" anchor="ctr"/>
+          <a:lstStyle/>
+          <a:p>
+            <a:pPr indent="0" marL="0">
+              <a:buNone/>
+            </a:pPr>
+            <a:r>
+              <a:rPr lang="en-US" sz="900" b="1" dirty="0">
+                <a:solidFill>
+                  <a:srgbClr val="B04A2F"/>
+                </a:solidFill>
+                <a:latin typeface="Yu Gothic" pitchFamily="34" charset="0"/>
+                <a:ea typeface="Yu Gothic" pitchFamily="34" charset="-122"/>
+                <a:cs typeface="Yu Gothic" pitchFamily="34" charset="-120"/>
+              </a:rPr>
+              <a:t>105-120分</a:t>
+            </a:r>
+            <a:endParaRPr lang="en-US" sz="900" dirty="0"/>
+          </a:p>
+        </p:txBody>
       </p:sp>
       <p:sp>
         <p:nvSpPr>
@@ -2853,34 +4522,34 @@
         </p:nvSpPr>
         <p:spPr>
           <a:xfrm>
-            <a:off x="1033272" y="4802124"/>
-            <a:ext cx="384048" cy="384048"/>
-          </a:xfrm>
-          <a:prstGeom prst="rect">
-            <a:avLst/>
-          </a:prstGeom>
-          <a:noFill/>
-          <a:ln/>
-        </p:spPr>
-        <p:txBody>
-          <a:bodyPr wrap="square" lIns="0" tIns="0" rIns="0" bIns="0" rtlCol="0" anchor="ctr"/>
-          <a:lstStyle/>
-          <a:p>
-            <a:pPr algn="ctr" indent="0" marL="0">
-              <a:buNone/>
-            </a:pPr>
-            <a:r>
-              <a:rPr lang="en-US" sz="1400" b="1" dirty="0">
-                <a:solidFill>
-                  <a:srgbClr val="FFFFFF"/>
-                </a:solidFill>
-                <a:latin typeface="Yu Gothic" pitchFamily="34" charset="0"/>
-                <a:ea typeface="Yu Gothic" pitchFamily="34" charset="-122"/>
-                <a:cs typeface="Yu Gothic" pitchFamily="34" charset="-120"/>
-              </a:rPr>
-              <a:t>3</a:t>
-            </a:r>
-            <a:endParaRPr lang="en-US" sz="1400" dirty="0"/>
+            <a:off x="9153144" y="5111496"/>
+            <a:ext cx="1956816" cy="384048"/>
+          </a:xfrm>
+          <a:prstGeom prst="rect">
+            <a:avLst/>
+          </a:prstGeom>
+          <a:noFill/>
+          <a:ln/>
+        </p:spPr>
+        <p:txBody>
+          <a:bodyPr wrap="square" lIns="0" tIns="0" rIns="0" bIns="0" rtlCol="0" anchor="ctr"/>
+          <a:lstStyle/>
+          <a:p>
+            <a:pPr indent="0" marL="0">
+              <a:buNone/>
+            </a:pPr>
+            <a:r>
+              <a:rPr lang="en-US" sz="1100" dirty="0">
+                <a:solidFill>
+                  <a:srgbClr val="23201D"/>
+                </a:solidFill>
+                <a:latin typeface="Yu Gothic" pitchFamily="34" charset="0"/>
+                <a:ea typeface="Yu Gothic" pitchFamily="34" charset="-122"/>
+                <a:cs typeface="Yu Gothic" pitchFamily="34" charset="-120"/>
+              </a:rPr>
+              <a:t>宿題・記録</a:t>
+            </a:r>
+            <a:endParaRPr lang="en-US" sz="1100" dirty="0"/>
           </a:p>
         </p:txBody>
       </p:sp>
@@ -2892,34 +4561,34 @@
         </p:nvSpPr>
         <p:spPr>
           <a:xfrm>
-            <a:off x="1645920" y="4501896"/>
-            <a:ext cx="3394253" cy="984504"/>
-          </a:xfrm>
-          <a:prstGeom prst="rect">
-            <a:avLst/>
-          </a:prstGeom>
-          <a:noFill/>
-          <a:ln/>
-        </p:spPr>
-        <p:txBody>
-          <a:bodyPr wrap="square" lIns="0" tIns="0" rIns="0" bIns="0" rtlCol="0" anchor="ctr"/>
-          <a:lstStyle/>
-          <a:p>
-            <a:pPr indent="0" marL="0">
-              <a:buNone/>
-            </a:pPr>
-            <a:r>
-              <a:rPr lang="en-US" sz="1500" b="1" dirty="0">
-                <a:solidFill>
-                  <a:srgbClr val="23201D"/>
-                </a:solidFill>
-                <a:latin typeface="Yu Gothic" pitchFamily="34" charset="0"/>
-                <a:ea typeface="Yu Gothic" pitchFamily="34" charset="-122"/>
-                <a:cs typeface="Yu Gothic" pitchFamily="34" charset="-120"/>
-              </a:rPr>
-              <a:t>80点でも価値がある</a:t>
-            </a:r>
-            <a:endParaRPr lang="en-US" sz="1500" dirty="0"/>
+            <a:off x="777240" y="6382512"/>
+            <a:ext cx="7424928" cy="256032"/>
+          </a:xfrm>
+          <a:prstGeom prst="rect">
+            <a:avLst/>
+          </a:prstGeom>
+          <a:noFill/>
+          <a:ln/>
+        </p:spPr>
+        <p:txBody>
+          <a:bodyPr wrap="square" lIns="0" tIns="0" rIns="0" bIns="0" rtlCol="0" anchor="ctr"/>
+          <a:lstStyle/>
+          <a:p>
+            <a:pPr indent="0" marL="0">
+              <a:buNone/>
+            </a:pPr>
+            <a:r>
+              <a:rPr lang="en-US" sz="900" dirty="0">
+                <a:solidFill>
+                  <a:srgbClr val="8A8177"/>
+                </a:solidFill>
+                <a:latin typeface="Yu Gothic" pitchFamily="34" charset="0"/>
+                <a:ea typeface="Yu Gothic" pitchFamily="34" charset="-122"/>
+                <a:cs typeface="Yu Gothic" pitchFamily="34" charset="-120"/>
+              </a:rPr>
+              <a:t>第1回　現状把握と地図づくり</a:t>
+            </a:r>
+            <a:endParaRPr lang="en-US" sz="900" dirty="0"/>
           </a:p>
         </p:txBody>
       </p:sp>
@@ -2931,101 +4600,20 @@
         </p:nvSpPr>
         <p:spPr>
           <a:xfrm>
-            <a:off x="5146243" y="4501896"/>
-            <a:ext cx="5963717" cy="984504"/>
-          </a:xfrm>
-          <a:prstGeom prst="rect">
-            <a:avLst/>
-          </a:prstGeom>
-          <a:noFill/>
-          <a:ln/>
-        </p:spPr>
-        <p:txBody>
-          <a:bodyPr wrap="square" lIns="0" tIns="0" rIns="0" bIns="0" rtlCol="0" anchor="ctr"/>
-          <a:lstStyle/>
-          <a:p>
-            <a:pPr indent="0" marL="0">
-              <a:lnSpc>
-                <a:spcPct val="130000"/>
-              </a:lnSpc>
-              <a:buNone/>
-            </a:pPr>
-            <a:r>
-              <a:rPr lang="en-US" sz="1250" dirty="0">
-                <a:solidFill>
-                  <a:srgbClr val="5A534A"/>
-                </a:solidFill>
-                <a:latin typeface="Yu Gothic" pitchFamily="34" charset="0"/>
-                <a:ea typeface="Yu Gothic" pitchFamily="34" charset="-122"/>
-                <a:cs typeface="Yu Gothic" pitchFamily="34" charset="-120"/>
-              </a:rPr>
-              <a:t>完璧でなくてよい。100点が要るものは下書きまで</a:t>
-            </a:r>
-            <a:endParaRPr lang="en-US" sz="1250" dirty="0"/>
-          </a:p>
-        </p:txBody>
-      </p:sp>
-      <p:sp>
-        <p:nvSpPr>
-          <p:cNvPr id="19" name="Text 17"/>
-          <p:cNvSpPr txBox="1"/>
-          <p:nvPr/>
-        </p:nvSpPr>
-        <p:spPr>
-          <a:xfrm>
-            <a:off x="777240" y="5715000"/>
-            <a:ext cx="10607040" cy="457200"/>
-          </a:xfrm>
-          <a:prstGeom prst="rect">
-            <a:avLst/>
-          </a:prstGeom>
-          <a:noFill/>
-          <a:ln/>
-        </p:spPr>
-        <p:txBody>
-          <a:bodyPr wrap="square" lIns="0" tIns="0" rIns="0" bIns="0" rtlCol="0" anchor="ctr"/>
-          <a:lstStyle/>
-          <a:p>
-            <a:pPr indent="0" marL="0">
-              <a:buNone/>
-            </a:pPr>
-            <a:r>
-              <a:rPr lang="en-US" sz="1200" b="1" dirty="0">
-                <a:solidFill>
-                  <a:srgbClr val="B04A2F"/>
-                </a:solidFill>
-                <a:latin typeface="Yu Gothic" pitchFamily="34" charset="0"/>
-                <a:ea typeface="Yu Gothic" pitchFamily="34" charset="-122"/>
-                <a:cs typeface="Yu Gothic" pitchFamily="34" charset="-120"/>
-              </a:rPr>
-              <a:t>3つとも満たす業務が、最初の一手です。</a:t>
-            </a:r>
-            <a:endParaRPr lang="en-US" sz="1200" dirty="0"/>
-          </a:p>
-        </p:txBody>
-      </p:sp>
-      <p:sp>
-        <p:nvSpPr>
-          <p:cNvPr id="20" name="Text 18"/>
-          <p:cNvSpPr txBox="1"/>
-          <p:nvPr/>
-        </p:nvSpPr>
-        <p:spPr>
-          <a:xfrm>
-            <a:off x="777240" y="6355080"/>
-            <a:ext cx="7424928" cy="274320"/>
-          </a:xfrm>
-          <a:prstGeom prst="rect">
-            <a:avLst/>
-          </a:prstGeom>
-          <a:noFill/>
-          <a:ln/>
-        </p:spPr>
-        <p:txBody>
-          <a:bodyPr wrap="square" lIns="0" tIns="0" rIns="0" bIns="0" rtlCol="0" anchor="ctr"/>
-          <a:lstStyle/>
-          <a:p>
-            <a:pPr indent="0" marL="0">
+            <a:off x="8202168" y="6382512"/>
+            <a:ext cx="3182112" cy="256032"/>
+          </a:xfrm>
+          <a:prstGeom prst="rect">
+            <a:avLst/>
+          </a:prstGeom>
+          <a:noFill/>
+          <a:ln/>
+        </p:spPr>
+        <p:txBody>
+          <a:bodyPr wrap="square" lIns="0" tIns="0" rIns="0" bIns="0" rtlCol="0" anchor="ctr"/>
+          <a:lstStyle/>
+          <a:p>
+            <a:pPr algn="r" indent="0" marL="0">
               <a:buNone/>
             </a:pPr>
             <a:r>
@@ -3037,46 +4625,7 @@
                 <a:ea typeface="Yu Gothic" pitchFamily="34" charset="-122"/>
                 <a:cs typeface="Yu Gothic" pitchFamily="34" charset="-120"/>
               </a:rPr>
-              <a:t>第1回　現状把握と地図づくり</a:t>
-            </a:r>
-            <a:endParaRPr lang="en-US" sz="900" dirty="0"/>
-          </a:p>
-        </p:txBody>
-      </p:sp>
-      <p:sp>
-        <p:nvSpPr>
-          <p:cNvPr id="21" name="Text 19"/>
-          <p:cNvSpPr txBox="1"/>
-          <p:nvPr/>
-        </p:nvSpPr>
-        <p:spPr>
-          <a:xfrm>
-            <a:off x="8202168" y="6355080"/>
-            <a:ext cx="3182112" cy="274320"/>
-          </a:xfrm>
-          <a:prstGeom prst="rect">
-            <a:avLst/>
-          </a:prstGeom>
-          <a:noFill/>
-          <a:ln/>
-        </p:spPr>
-        <p:txBody>
-          <a:bodyPr wrap="square" lIns="0" tIns="0" rIns="0" bIns="0" rtlCol="0" anchor="ctr"/>
-          <a:lstStyle/>
-          <a:p>
-            <a:pPr algn="r" indent="0" marL="0">
-              <a:buNone/>
-            </a:pPr>
-            <a:r>
-              <a:rPr lang="en-US" sz="900" dirty="0">
-                <a:solidFill>
-                  <a:srgbClr val="8A8177"/>
-                </a:solidFill>
-                <a:latin typeface="Yu Gothic" pitchFamily="34" charset="0"/>
-                <a:ea typeface="Yu Gothic" pitchFamily="34" charset="-122"/>
-                <a:cs typeface="Yu Gothic" pitchFamily="34" charset="-120"/>
-              </a:rPr>
-              <a:t>考え方</a:t>
+              <a:t>ゴール</a:t>
             </a:r>
             <a:endParaRPr lang="en-US" sz="900" dirty="0"/>
           </a:p>
@@ -3122,7 +4671,7 @@
         </p:nvSpPr>
         <p:spPr>
           <a:xfrm>
-            <a:off x="777240" y="640080"/>
+            <a:off x="777240" y="566928"/>
             <a:ext cx="10607040" cy="274320"/>
           </a:xfrm>
           <a:prstGeom prst="rect">
@@ -3147,7 +4696,7 @@
                 <a:ea typeface="Yu Gothic" pitchFamily="34" charset="-122"/>
                 <a:cs typeface="Yu Gothic" pitchFamily="34" charset="-120"/>
               </a:rPr>
-              <a:t>実演</a:t>
+              <a:t>考え方</a:t>
             </a:r>
             <a:endParaRPr lang="en-US" sz="1100" dirty="0"/>
           </a:p>
@@ -3161,7 +4710,7 @@
         </p:nvSpPr>
         <p:spPr>
           <a:xfrm>
-            <a:off x="777240" y="960120"/>
+            <a:off x="777240" y="896112"/>
             <a:ext cx="10607040" cy="640080"/>
           </a:xfrm>
           <a:prstGeom prst="rect">
@@ -3178,7 +4727,7 @@
               <a:buNone/>
             </a:pPr>
             <a:r>
-              <a:rPr lang="en-US" sz="2700" b="1" dirty="0">
+              <a:rPr lang="en-US" sz="2600" b="1" dirty="0">
                 <a:solidFill>
                   <a:srgbClr val="23201D"/>
                 </a:solidFill>
@@ -3186,9 +4735,9 @@
                 <a:ea typeface="Yu Gothic" pitchFamily="34" charset="-122"/>
                 <a:cs typeface="Yu Gothic" pitchFamily="34" charset="-120"/>
               </a:rPr>
-              <a:t>優先順位の付け方</a:t>
-            </a:r>
-            <a:endParaRPr lang="en-US" sz="2700" dirty="0"/>
+              <a:t>AIが向く業務の3条件</a:t>
+            </a:r>
+            <a:endParaRPr lang="en-US" sz="2600" dirty="0"/>
           </a:p>
         </p:txBody>
       </p:sp>
@@ -3200,18 +4749,18 @@
         </p:nvSpPr>
         <p:spPr>
           <a:xfrm>
-            <a:off x="777240" y="1828800"/>
-            <a:ext cx="4983480" cy="3566160"/>
+            <a:off x="777240" y="1700784"/>
+            <a:ext cx="10607040" cy="1188720"/>
           </a:xfrm>
           <a:prstGeom prst="rect">
             <a:avLst/>
           </a:prstGeom>
           <a:solidFill>
-            <a:srgbClr val="EDE7DB"/>
+            <a:srgbClr val="FFFFFF"/>
           </a:solidFill>
-          <a:ln w="15875">
+          <a:ln w="12700">
             <a:solidFill>
-              <a:srgbClr val="8A8177"/>
+              <a:srgbClr val="EDE7DB"/>
             </a:solidFill>
             <a:prstDash val="solid"/>
           </a:ln>
@@ -3225,497 +4774,8 @@
         </p:nvSpPr>
         <p:spPr>
           <a:xfrm>
-            <a:off x="777240" y="1828800"/>
-            <a:ext cx="4983480" cy="566928"/>
-          </a:xfrm>
-          <a:prstGeom prst="rect">
-            <a:avLst/>
-          </a:prstGeom>
-          <a:solidFill>
-            <a:srgbClr val="8A8177"/>
-          </a:solidFill>
-          <a:ln w="12700">
-            <a:solidFill>
-              <a:srgbClr val="333333"/>
-            </a:solidFill>
-            <a:prstDash val="solid"/>
-          </a:ln>
-        </p:spPr>
-      </p:sp>
-      <p:sp>
-        <p:nvSpPr>
-          <p:cNvPr id="6" name="Text 4"/>
-          <p:cNvSpPr txBox="1"/>
-          <p:nvPr/>
-        </p:nvSpPr>
-        <p:spPr>
-          <a:xfrm>
-            <a:off x="1005840" y="1883664"/>
-            <a:ext cx="4526280" cy="457200"/>
-          </a:xfrm>
-          <a:prstGeom prst="rect">
-            <a:avLst/>
-          </a:prstGeom>
-          <a:noFill/>
-          <a:ln/>
-        </p:spPr>
-        <p:txBody>
-          <a:bodyPr wrap="square" lIns="0" tIns="0" rIns="0" bIns="0" rtlCol="0" anchor="ctr"/>
-          <a:lstStyle/>
-          <a:p>
-            <a:pPr indent="0" marL="0">
-              <a:buNone/>
-            </a:pPr>
-            <a:r>
-              <a:rPr lang="en-US" sz="1400" b="1" dirty="0">
-                <a:solidFill>
-                  <a:srgbClr val="FFFFFF"/>
-                </a:solidFill>
-                <a:latin typeface="Yu Gothic" pitchFamily="34" charset="0"/>
-                <a:ea typeface="Yu Gothic" pitchFamily="34" charset="-122"/>
-                <a:cs typeface="Yu Gothic" pitchFamily="34" charset="-120"/>
-              </a:rPr>
-              <a:t>最初に選びがちなもの</a:t>
-            </a:r>
-            <a:endParaRPr lang="en-US" sz="1400" dirty="0"/>
-          </a:p>
-        </p:txBody>
-      </p:sp>
-      <p:sp>
-        <p:nvSpPr>
-          <p:cNvPr id="7" name="Text 5"/>
-          <p:cNvSpPr txBox="1"/>
-          <p:nvPr/>
-        </p:nvSpPr>
-        <p:spPr>
-          <a:xfrm>
-            <a:off x="1097280" y="2606040"/>
-            <a:ext cx="4343400" cy="548640"/>
-          </a:xfrm>
-          <a:prstGeom prst="rect">
-            <a:avLst/>
-          </a:prstGeom>
-          <a:noFill/>
-          <a:ln/>
-        </p:spPr>
-        <p:txBody>
-          <a:bodyPr wrap="square" lIns="0" tIns="0" rIns="0" bIns="0" rtlCol="0" anchor="ctr"/>
-          <a:lstStyle/>
-          <a:p>
-            <a:pPr indent="0" marL="0">
-              <a:lnSpc>
-                <a:spcPct val="125000"/>
-              </a:lnSpc>
-              <a:buNone/>
-            </a:pPr>
-            <a:r>
-              <a:rPr lang="en-US" sz="1300" dirty="0">
-                <a:solidFill>
-                  <a:srgbClr val="23201D"/>
-                </a:solidFill>
-                <a:latin typeface="Yu Gothic" pitchFamily="34" charset="0"/>
-                <a:ea typeface="Yu Gothic" pitchFamily="34" charset="-122"/>
-                <a:cs typeface="Yu Gothic" pitchFamily="34" charset="-120"/>
-              </a:rPr>
-              <a:t>契約・与信・人事の判断</a:t>
-            </a:r>
-            <a:endParaRPr lang="en-US" sz="1300" dirty="0"/>
-          </a:p>
-        </p:txBody>
-      </p:sp>
-      <p:sp>
-        <p:nvSpPr>
-          <p:cNvPr id="8" name="Text 6"/>
-          <p:cNvSpPr txBox="1"/>
-          <p:nvPr/>
-        </p:nvSpPr>
-        <p:spPr>
-          <a:xfrm>
-            <a:off x="1097280" y="3172968"/>
-            <a:ext cx="4343400" cy="548640"/>
-          </a:xfrm>
-          <a:prstGeom prst="rect">
-            <a:avLst/>
-          </a:prstGeom>
-          <a:noFill/>
-          <a:ln/>
-        </p:spPr>
-        <p:txBody>
-          <a:bodyPr wrap="square" lIns="0" tIns="0" rIns="0" bIns="0" rtlCol="0" anchor="ctr"/>
-          <a:lstStyle/>
-          <a:p>
-            <a:pPr indent="0" marL="0">
-              <a:lnSpc>
-                <a:spcPct val="125000"/>
-              </a:lnSpc>
-              <a:buNone/>
-            </a:pPr>
-            <a:r>
-              <a:rPr lang="en-US" sz="1300" dirty="0">
-                <a:solidFill>
-                  <a:srgbClr val="23201D"/>
-                </a:solidFill>
-                <a:latin typeface="Yu Gothic" pitchFamily="34" charset="0"/>
-                <a:ea typeface="Yu Gothic" pitchFamily="34" charset="-122"/>
-                <a:cs typeface="Yu Gothic" pitchFamily="34" charset="-120"/>
-              </a:rPr>
-              <a:t>一番痛いので、つい手を出したくなる</a:t>
-            </a:r>
-            <a:endParaRPr lang="en-US" sz="1300" dirty="0"/>
-          </a:p>
-        </p:txBody>
-      </p:sp>
-      <p:sp>
-        <p:nvSpPr>
-          <p:cNvPr id="9" name="Text 7"/>
-          <p:cNvSpPr txBox="1"/>
-          <p:nvPr/>
-        </p:nvSpPr>
-        <p:spPr>
-          <a:xfrm>
-            <a:off x="1097280" y="3739896"/>
-            <a:ext cx="4343400" cy="548640"/>
-          </a:xfrm>
-          <a:prstGeom prst="rect">
-            <a:avLst/>
-          </a:prstGeom>
-          <a:noFill/>
-          <a:ln/>
-        </p:spPr>
-        <p:txBody>
-          <a:bodyPr wrap="square" lIns="0" tIns="0" rIns="0" bIns="0" rtlCol="0" anchor="ctr"/>
-          <a:lstStyle/>
-          <a:p>
-            <a:pPr indent="0" marL="0">
-              <a:lnSpc>
-                <a:spcPct val="125000"/>
-              </a:lnSpc>
-              <a:buNone/>
-            </a:pPr>
-            <a:r>
-              <a:rPr lang="en-US" sz="1300" dirty="0">
-                <a:solidFill>
-                  <a:srgbClr val="23201D"/>
-                </a:solidFill>
-                <a:latin typeface="Yu Gothic" pitchFamily="34" charset="0"/>
-                <a:ea typeface="Yu Gothic" pitchFamily="34" charset="-122"/>
-                <a:cs typeface="Yu Gothic" pitchFamily="34" charset="-120"/>
-              </a:rPr>
-              <a:t>間違えたときに取り返しがつかない</a:t>
-            </a:r>
-            <a:endParaRPr lang="en-US" sz="1300" dirty="0"/>
-          </a:p>
-        </p:txBody>
-      </p:sp>
-      <p:sp>
-        <p:nvSpPr>
-          <p:cNvPr id="10" name="Text 8"/>
-          <p:cNvSpPr txBox="1"/>
-          <p:nvPr/>
-        </p:nvSpPr>
-        <p:spPr>
-          <a:xfrm>
-            <a:off x="1097280" y="4306824"/>
-            <a:ext cx="4343400" cy="548640"/>
-          </a:xfrm>
-          <a:prstGeom prst="rect">
-            <a:avLst/>
-          </a:prstGeom>
-          <a:noFill/>
-          <a:ln/>
-        </p:spPr>
-        <p:txBody>
-          <a:bodyPr wrap="square" lIns="0" tIns="0" rIns="0" bIns="0" rtlCol="0" anchor="ctr"/>
-          <a:lstStyle/>
-          <a:p>
-            <a:pPr indent="0" marL="0">
-              <a:lnSpc>
-                <a:spcPct val="125000"/>
-              </a:lnSpc>
-              <a:buNone/>
-            </a:pPr>
-            <a:r>
-              <a:rPr lang="en-US" sz="1300" dirty="0">
-                <a:solidFill>
-                  <a:srgbClr val="23201D"/>
-                </a:solidFill>
-                <a:latin typeface="Yu Gothic" pitchFamily="34" charset="0"/>
-                <a:ea typeface="Yu Gothic" pitchFamily="34" charset="-122"/>
-                <a:cs typeface="Yu Gothic" pitchFamily="34" charset="-120"/>
-              </a:rPr>
-              <a:t>→ 本講座では自動化しません。下書き支援まで</a:t>
-            </a:r>
-            <a:endParaRPr lang="en-US" sz="1300" dirty="0"/>
-          </a:p>
-        </p:txBody>
-      </p:sp>
-      <p:sp>
-        <p:nvSpPr>
-          <p:cNvPr id="11" name="Shape 9"/>
-          <p:cNvSpPr/>
-          <p:nvPr/>
-        </p:nvSpPr>
-        <p:spPr>
-          <a:xfrm>
-            <a:off x="6400800" y="1828800"/>
-            <a:ext cx="4983480" cy="3566160"/>
-          </a:xfrm>
-          <a:prstGeom prst="rect">
-            <a:avLst/>
-          </a:prstGeom>
-          <a:solidFill>
-            <a:srgbClr val="FFFFFF"/>
-          </a:solidFill>
-          <a:ln w="15875">
-            <a:solidFill>
-              <a:srgbClr val="3B6B4A"/>
-            </a:solidFill>
-            <a:prstDash val="solid"/>
-          </a:ln>
-        </p:spPr>
-      </p:sp>
-      <p:sp>
-        <p:nvSpPr>
-          <p:cNvPr id="12" name="Shape 10"/>
-          <p:cNvSpPr/>
-          <p:nvPr/>
-        </p:nvSpPr>
-        <p:spPr>
-          <a:xfrm>
-            <a:off x="6400800" y="1828800"/>
-            <a:ext cx="4983480" cy="566928"/>
-          </a:xfrm>
-          <a:prstGeom prst="rect">
-            <a:avLst/>
-          </a:prstGeom>
-          <a:solidFill>
-            <a:srgbClr val="3B6B4A"/>
-          </a:solidFill>
-          <a:ln w="12700">
-            <a:solidFill>
-              <a:srgbClr val="333333"/>
-            </a:solidFill>
-            <a:prstDash val="solid"/>
-          </a:ln>
-        </p:spPr>
-      </p:sp>
-      <p:sp>
-        <p:nvSpPr>
-          <p:cNvPr id="13" name="Text 11"/>
-          <p:cNvSpPr txBox="1"/>
-          <p:nvPr/>
-        </p:nvSpPr>
-        <p:spPr>
-          <a:xfrm>
-            <a:off x="6629400" y="1883664"/>
-            <a:ext cx="4526280" cy="457200"/>
-          </a:xfrm>
-          <a:prstGeom prst="rect">
-            <a:avLst/>
-          </a:prstGeom>
-          <a:noFill/>
-          <a:ln/>
-        </p:spPr>
-        <p:txBody>
-          <a:bodyPr wrap="square" lIns="0" tIns="0" rIns="0" bIns="0" rtlCol="0" anchor="ctr"/>
-          <a:lstStyle/>
-          <a:p>
-            <a:pPr indent="0" marL="0">
-              <a:buNone/>
-            </a:pPr>
-            <a:r>
-              <a:rPr lang="en-US" sz="1400" b="1" dirty="0">
-                <a:solidFill>
-                  <a:srgbClr val="FFFFFF"/>
-                </a:solidFill>
-                <a:latin typeface="Yu Gothic" pitchFamily="34" charset="0"/>
-                <a:ea typeface="Yu Gothic" pitchFamily="34" charset="-122"/>
-                <a:cs typeface="Yu Gothic" pitchFamily="34" charset="-120"/>
-              </a:rPr>
-              <a:t>最初に選ぶべきもの</a:t>
-            </a:r>
-            <a:endParaRPr lang="en-US" sz="1400" dirty="0"/>
-          </a:p>
-        </p:txBody>
-      </p:sp>
-      <p:sp>
-        <p:nvSpPr>
-          <p:cNvPr id="14" name="Text 12"/>
-          <p:cNvSpPr txBox="1"/>
-          <p:nvPr/>
-        </p:nvSpPr>
-        <p:spPr>
-          <a:xfrm>
-            <a:off x="6720840" y="2606040"/>
-            <a:ext cx="4343400" cy="548640"/>
-          </a:xfrm>
-          <a:prstGeom prst="rect">
-            <a:avLst/>
-          </a:prstGeom>
-          <a:noFill/>
-          <a:ln/>
-        </p:spPr>
-        <p:txBody>
-          <a:bodyPr wrap="square" lIns="0" tIns="0" rIns="0" bIns="0" rtlCol="0" anchor="ctr"/>
-          <a:lstStyle/>
-          <a:p>
-            <a:pPr indent="0" marL="0">
-              <a:lnSpc>
-                <a:spcPct val="125000"/>
-              </a:lnSpc>
-              <a:buNone/>
-            </a:pPr>
-            <a:r>
-              <a:rPr lang="en-US" sz="1300" dirty="0">
-                <a:solidFill>
-                  <a:srgbClr val="23201D"/>
-                </a:solidFill>
-                <a:latin typeface="Yu Gothic" pitchFamily="34" charset="0"/>
-                <a:ea typeface="Yu Gothic" pitchFamily="34" charset="-122"/>
-                <a:cs typeface="Yu Gothic" pitchFamily="34" charset="-120"/>
-              </a:rPr>
-              <a:t>頻度が高い</a:t>
-            </a:r>
-            <a:endParaRPr lang="en-US" sz="1300" dirty="0"/>
-          </a:p>
-        </p:txBody>
-      </p:sp>
-      <p:sp>
-        <p:nvSpPr>
-          <p:cNvPr id="15" name="Text 13"/>
-          <p:cNvSpPr txBox="1"/>
-          <p:nvPr/>
-        </p:nvSpPr>
-        <p:spPr>
-          <a:xfrm>
-            <a:off x="6720840" y="3172968"/>
-            <a:ext cx="4343400" cy="548640"/>
-          </a:xfrm>
-          <a:prstGeom prst="rect">
-            <a:avLst/>
-          </a:prstGeom>
-          <a:noFill/>
-          <a:ln/>
-        </p:spPr>
-        <p:txBody>
-          <a:bodyPr wrap="square" lIns="0" tIns="0" rIns="0" bIns="0" rtlCol="0" anchor="ctr"/>
-          <a:lstStyle/>
-          <a:p>
-            <a:pPr indent="0" marL="0">
-              <a:lnSpc>
-                <a:spcPct val="125000"/>
-              </a:lnSpc>
-              <a:buNone/>
-            </a:pPr>
-            <a:r>
-              <a:rPr lang="en-US" sz="1300" dirty="0">
-                <a:solidFill>
-                  <a:srgbClr val="23201D"/>
-                </a:solidFill>
-                <a:latin typeface="Yu Gothic" pitchFamily="34" charset="0"/>
-                <a:ea typeface="Yu Gothic" pitchFamily="34" charset="-122"/>
-                <a:cs typeface="Yu Gothic" pitchFamily="34" charset="-120"/>
-              </a:rPr>
-              <a:t>型が決まっている</a:t>
-            </a:r>
-            <a:endParaRPr lang="en-US" sz="1300" dirty="0"/>
-          </a:p>
-        </p:txBody>
-      </p:sp>
-      <p:sp>
-        <p:nvSpPr>
-          <p:cNvPr id="16" name="Text 14"/>
-          <p:cNvSpPr txBox="1"/>
-          <p:nvPr/>
-        </p:nvSpPr>
-        <p:spPr>
-          <a:xfrm>
-            <a:off x="6720840" y="3739896"/>
-            <a:ext cx="4343400" cy="548640"/>
-          </a:xfrm>
-          <a:prstGeom prst="rect">
-            <a:avLst/>
-          </a:prstGeom>
-          <a:noFill/>
-          <a:ln/>
-        </p:spPr>
-        <p:txBody>
-          <a:bodyPr wrap="square" lIns="0" tIns="0" rIns="0" bIns="0" rtlCol="0" anchor="ctr"/>
-          <a:lstStyle/>
-          <a:p>
-            <a:pPr indent="0" marL="0">
-              <a:lnSpc>
-                <a:spcPct val="125000"/>
-              </a:lnSpc>
-              <a:buNone/>
-            </a:pPr>
-            <a:r>
-              <a:rPr lang="en-US" sz="1300" dirty="0">
-                <a:solidFill>
-                  <a:srgbClr val="23201D"/>
-                </a:solidFill>
-                <a:latin typeface="Yu Gothic" pitchFamily="34" charset="0"/>
-                <a:ea typeface="Yu Gothic" pitchFamily="34" charset="-122"/>
-                <a:cs typeface="Yu Gothic" pitchFamily="34" charset="-120"/>
-              </a:rPr>
-              <a:t>間違えても取り返しがつく</a:t>
-            </a:r>
-            <a:endParaRPr lang="en-US" sz="1300" dirty="0"/>
-          </a:p>
-        </p:txBody>
-      </p:sp>
-      <p:sp>
-        <p:nvSpPr>
-          <p:cNvPr id="17" name="Text 15"/>
-          <p:cNvSpPr txBox="1"/>
-          <p:nvPr/>
-        </p:nvSpPr>
-        <p:spPr>
-          <a:xfrm>
-            <a:off x="6720840" y="4306824"/>
-            <a:ext cx="4343400" cy="548640"/>
-          </a:xfrm>
-          <a:prstGeom prst="rect">
-            <a:avLst/>
-          </a:prstGeom>
-          <a:noFill/>
-          <a:ln/>
-        </p:spPr>
-        <p:txBody>
-          <a:bodyPr wrap="square" lIns="0" tIns="0" rIns="0" bIns="0" rtlCol="0" anchor="ctr"/>
-          <a:lstStyle/>
-          <a:p>
-            <a:pPr indent="0" marL="0">
-              <a:lnSpc>
-                <a:spcPct val="125000"/>
-              </a:lnSpc>
-              <a:buNone/>
-            </a:pPr>
-            <a:r>
-              <a:rPr lang="en-US" sz="1300" dirty="0">
-                <a:solidFill>
-                  <a:srgbClr val="23201D"/>
-                </a:solidFill>
-                <a:latin typeface="Yu Gothic" pitchFamily="34" charset="0"/>
-                <a:ea typeface="Yu Gothic" pitchFamily="34" charset="-122"/>
-                <a:cs typeface="Yu Gothic" pitchFamily="34" charset="-120"/>
-              </a:rPr>
-              <a:t>→ ここから1つだけ選びます</a:t>
-            </a:r>
-            <a:endParaRPr lang="en-US" sz="1300" dirty="0"/>
-          </a:p>
-        </p:txBody>
-      </p:sp>
-      <p:sp>
-        <p:nvSpPr>
-          <p:cNvPr id="18" name="Shape 16"/>
-          <p:cNvSpPr/>
-          <p:nvPr/>
-        </p:nvSpPr>
-        <p:spPr>
-          <a:xfrm>
-            <a:off x="5815584" y="3337560"/>
-            <a:ext cx="512064" cy="512064"/>
+            <a:off x="1014984" y="2112264"/>
+            <a:ext cx="365760" cy="365760"/>
           </a:xfrm>
           <a:prstGeom prst="ellipse">
             <a:avLst/>
@@ -3733,40 +4793,500 @@
       </p:sp>
       <p:sp>
         <p:nvSpPr>
+          <p:cNvPr id="6" name="Text 4"/>
+          <p:cNvSpPr txBox="1"/>
+          <p:nvPr/>
+        </p:nvSpPr>
+        <p:spPr>
+          <a:xfrm>
+            <a:off x="1014984" y="2112264"/>
+            <a:ext cx="365760" cy="365760"/>
+          </a:xfrm>
+          <a:prstGeom prst="rect">
+            <a:avLst/>
+          </a:prstGeom>
+          <a:noFill/>
+          <a:ln/>
+        </p:spPr>
+        <p:txBody>
+          <a:bodyPr wrap="square" lIns="0" tIns="0" rIns="0" bIns="0" rtlCol="0" anchor="ctr"/>
+          <a:lstStyle/>
+          <a:p>
+            <a:pPr algn="ctr" indent="0" marL="0">
+              <a:buNone/>
+            </a:pPr>
+            <a:r>
+              <a:rPr lang="en-US" sz="1300" b="1" dirty="0">
+                <a:solidFill>
+                  <a:srgbClr val="FFFFFF"/>
+                </a:solidFill>
+                <a:latin typeface="Yu Gothic" pitchFamily="34" charset="0"/>
+                <a:ea typeface="Yu Gothic" pitchFamily="34" charset="-122"/>
+                <a:cs typeface="Yu Gothic" pitchFamily="34" charset="-120"/>
+              </a:rPr>
+              <a:t>1</a:t>
+            </a:r>
+            <a:endParaRPr lang="en-US" sz="1300" dirty="0"/>
+          </a:p>
+        </p:txBody>
+      </p:sp>
+      <p:sp>
+        <p:nvSpPr>
+          <p:cNvPr id="7" name="Text 5"/>
+          <p:cNvSpPr txBox="1"/>
+          <p:nvPr/>
+        </p:nvSpPr>
+        <p:spPr>
+          <a:xfrm>
+            <a:off x="1600200" y="1773936"/>
+            <a:ext cx="3182112" cy="1042416"/>
+          </a:xfrm>
+          <a:prstGeom prst="rect">
+            <a:avLst/>
+          </a:prstGeom>
+          <a:noFill/>
+          <a:ln/>
+        </p:spPr>
+        <p:txBody>
+          <a:bodyPr wrap="square" lIns="0" tIns="0" rIns="0" bIns="0" rtlCol="0" anchor="ctr"/>
+          <a:lstStyle/>
+          <a:p>
+            <a:pPr indent="0" marL="0">
+              <a:buNone/>
+            </a:pPr>
+            <a:r>
+              <a:rPr lang="en-US" sz="1450" b="1" dirty="0">
+                <a:solidFill>
+                  <a:srgbClr val="23201D"/>
+                </a:solidFill>
+                <a:latin typeface="Yu Gothic" pitchFamily="34" charset="0"/>
+                <a:ea typeface="Yu Gothic" pitchFamily="34" charset="-122"/>
+                <a:cs typeface="Yu Gothic" pitchFamily="34" charset="-120"/>
+              </a:rPr>
+              <a:t>くり返し発生する</a:t>
+            </a:r>
+            <a:endParaRPr lang="en-US" sz="1450" dirty="0"/>
+          </a:p>
+        </p:txBody>
+      </p:sp>
+      <p:sp>
+        <p:nvSpPr>
+          <p:cNvPr id="8" name="Text 6"/>
+          <p:cNvSpPr txBox="1"/>
+          <p:nvPr/>
+        </p:nvSpPr>
+        <p:spPr>
+          <a:xfrm>
+            <a:off x="4888382" y="1773936"/>
+            <a:ext cx="6267298" cy="1042416"/>
+          </a:xfrm>
+          <a:prstGeom prst="rect">
+            <a:avLst/>
+          </a:prstGeom>
+          <a:noFill/>
+          <a:ln/>
+        </p:spPr>
+        <p:txBody>
+          <a:bodyPr wrap="square" lIns="0" tIns="0" rIns="0" bIns="0" rtlCol="0" anchor="ctr"/>
+          <a:lstStyle/>
+          <a:p>
+            <a:pPr indent="0" marL="0">
+              <a:lnSpc>
+                <a:spcPct val="130000"/>
+              </a:lnSpc>
+              <a:buNone/>
+            </a:pPr>
+            <a:r>
+              <a:rPr lang="en-US" sz="1200" dirty="0">
+                <a:solidFill>
+                  <a:srgbClr val="5A534A"/>
+                </a:solidFill>
+                <a:latin typeface="Yu Gothic" pitchFamily="34" charset="0"/>
+                <a:ea typeface="Yu Gothic" pitchFamily="34" charset="-122"/>
+                <a:cs typeface="Yu Gothic" pitchFamily="34" charset="-120"/>
+              </a:rPr>
+              <a:t>月に何度も起きること。年1回の作業を自動化するのは趣味です</a:t>
+            </a:r>
+            <a:endParaRPr lang="en-US" sz="1200" dirty="0"/>
+          </a:p>
+        </p:txBody>
+      </p:sp>
+      <p:sp>
+        <p:nvSpPr>
+          <p:cNvPr id="9" name="Shape 7"/>
+          <p:cNvSpPr/>
+          <p:nvPr/>
+        </p:nvSpPr>
+        <p:spPr>
+          <a:xfrm>
+            <a:off x="777240" y="3017520"/>
+            <a:ext cx="10607040" cy="1188720"/>
+          </a:xfrm>
+          <a:prstGeom prst="rect">
+            <a:avLst/>
+          </a:prstGeom>
+          <a:solidFill>
+            <a:srgbClr val="FFFFFF"/>
+          </a:solidFill>
+          <a:ln w="12700">
+            <a:solidFill>
+              <a:srgbClr val="EDE7DB"/>
+            </a:solidFill>
+            <a:prstDash val="solid"/>
+          </a:ln>
+        </p:spPr>
+      </p:sp>
+      <p:sp>
+        <p:nvSpPr>
+          <p:cNvPr id="10" name="Shape 8"/>
+          <p:cNvSpPr/>
+          <p:nvPr/>
+        </p:nvSpPr>
+        <p:spPr>
+          <a:xfrm>
+            <a:off x="1014984" y="3429000"/>
+            <a:ext cx="365760" cy="365760"/>
+          </a:xfrm>
+          <a:prstGeom prst="ellipse">
+            <a:avLst/>
+          </a:prstGeom>
+          <a:solidFill>
+            <a:srgbClr val="B04A2F"/>
+          </a:solidFill>
+          <a:ln w="12700">
+            <a:solidFill>
+              <a:srgbClr val="333333"/>
+            </a:solidFill>
+            <a:prstDash val="solid"/>
+          </a:ln>
+        </p:spPr>
+      </p:sp>
+      <p:sp>
+        <p:nvSpPr>
+          <p:cNvPr id="11" name="Text 9"/>
+          <p:cNvSpPr txBox="1"/>
+          <p:nvPr/>
+        </p:nvSpPr>
+        <p:spPr>
+          <a:xfrm>
+            <a:off x="1014984" y="3429000"/>
+            <a:ext cx="365760" cy="365760"/>
+          </a:xfrm>
+          <a:prstGeom prst="rect">
+            <a:avLst/>
+          </a:prstGeom>
+          <a:noFill/>
+          <a:ln/>
+        </p:spPr>
+        <p:txBody>
+          <a:bodyPr wrap="square" lIns="0" tIns="0" rIns="0" bIns="0" rtlCol="0" anchor="ctr"/>
+          <a:lstStyle/>
+          <a:p>
+            <a:pPr algn="ctr" indent="0" marL="0">
+              <a:buNone/>
+            </a:pPr>
+            <a:r>
+              <a:rPr lang="en-US" sz="1300" b="1" dirty="0">
+                <a:solidFill>
+                  <a:srgbClr val="FFFFFF"/>
+                </a:solidFill>
+                <a:latin typeface="Yu Gothic" pitchFamily="34" charset="0"/>
+                <a:ea typeface="Yu Gothic" pitchFamily="34" charset="-122"/>
+                <a:cs typeface="Yu Gothic" pitchFamily="34" charset="-120"/>
+              </a:rPr>
+              <a:t>2</a:t>
+            </a:r>
+            <a:endParaRPr lang="en-US" sz="1300" dirty="0"/>
+          </a:p>
+        </p:txBody>
+      </p:sp>
+      <p:sp>
+        <p:nvSpPr>
+          <p:cNvPr id="12" name="Text 10"/>
+          <p:cNvSpPr txBox="1"/>
+          <p:nvPr/>
+        </p:nvSpPr>
+        <p:spPr>
+          <a:xfrm>
+            <a:off x="1600200" y="3090672"/>
+            <a:ext cx="3182112" cy="1042416"/>
+          </a:xfrm>
+          <a:prstGeom prst="rect">
+            <a:avLst/>
+          </a:prstGeom>
+          <a:noFill/>
+          <a:ln/>
+        </p:spPr>
+        <p:txBody>
+          <a:bodyPr wrap="square" lIns="0" tIns="0" rIns="0" bIns="0" rtlCol="0" anchor="ctr"/>
+          <a:lstStyle/>
+          <a:p>
+            <a:pPr indent="0" marL="0">
+              <a:buNone/>
+            </a:pPr>
+            <a:r>
+              <a:rPr lang="en-US" sz="1450" b="1" dirty="0">
+                <a:solidFill>
+                  <a:srgbClr val="23201D"/>
+                </a:solidFill>
+                <a:latin typeface="Yu Gothic" pitchFamily="34" charset="0"/>
+                <a:ea typeface="Yu Gothic" pitchFamily="34" charset="-122"/>
+                <a:cs typeface="Yu Gothic" pitchFamily="34" charset="-120"/>
+              </a:rPr>
+              <a:t>文章・画像・データが中心</a:t>
+            </a:r>
+            <a:endParaRPr lang="en-US" sz="1450" dirty="0"/>
+          </a:p>
+        </p:txBody>
+      </p:sp>
+      <p:sp>
+        <p:nvSpPr>
+          <p:cNvPr id="13" name="Text 11"/>
+          <p:cNvSpPr txBox="1"/>
+          <p:nvPr/>
+        </p:nvSpPr>
+        <p:spPr>
+          <a:xfrm>
+            <a:off x="4888382" y="3090672"/>
+            <a:ext cx="6267298" cy="1042416"/>
+          </a:xfrm>
+          <a:prstGeom prst="rect">
+            <a:avLst/>
+          </a:prstGeom>
+          <a:noFill/>
+          <a:ln/>
+        </p:spPr>
+        <p:txBody>
+          <a:bodyPr wrap="square" lIns="0" tIns="0" rIns="0" bIns="0" rtlCol="0" anchor="ctr"/>
+          <a:lstStyle/>
+          <a:p>
+            <a:pPr indent="0" marL="0">
+              <a:lnSpc>
+                <a:spcPct val="130000"/>
+              </a:lnSpc>
+              <a:buNone/>
+            </a:pPr>
+            <a:r>
+              <a:rPr lang="en-US" sz="1200" dirty="0">
+                <a:solidFill>
+                  <a:srgbClr val="5A534A"/>
+                </a:solidFill>
+                <a:latin typeface="Yu Gothic" pitchFamily="34" charset="0"/>
+                <a:ea typeface="Yu Gothic" pitchFamily="34" charset="-122"/>
+                <a:cs typeface="Yu Gothic" pitchFamily="34" charset="-120"/>
+              </a:rPr>
+              <a:t>人が読み書きしているもの。判断そのものではありません</a:t>
+            </a:r>
+            <a:endParaRPr lang="en-US" sz="1200" dirty="0"/>
+          </a:p>
+        </p:txBody>
+      </p:sp>
+      <p:sp>
+        <p:nvSpPr>
+          <p:cNvPr id="14" name="Shape 12"/>
+          <p:cNvSpPr/>
+          <p:nvPr/>
+        </p:nvSpPr>
+        <p:spPr>
+          <a:xfrm>
+            <a:off x="777240" y="4334256"/>
+            <a:ext cx="10607040" cy="1188720"/>
+          </a:xfrm>
+          <a:prstGeom prst="rect">
+            <a:avLst/>
+          </a:prstGeom>
+          <a:solidFill>
+            <a:srgbClr val="FFFFFF"/>
+          </a:solidFill>
+          <a:ln w="12700">
+            <a:solidFill>
+              <a:srgbClr val="EDE7DB"/>
+            </a:solidFill>
+            <a:prstDash val="solid"/>
+          </a:ln>
+        </p:spPr>
+      </p:sp>
+      <p:sp>
+        <p:nvSpPr>
+          <p:cNvPr id="15" name="Shape 13"/>
+          <p:cNvSpPr/>
+          <p:nvPr/>
+        </p:nvSpPr>
+        <p:spPr>
+          <a:xfrm>
+            <a:off x="1014984" y="4745736"/>
+            <a:ext cx="365760" cy="365760"/>
+          </a:xfrm>
+          <a:prstGeom prst="ellipse">
+            <a:avLst/>
+          </a:prstGeom>
+          <a:solidFill>
+            <a:srgbClr val="B04A2F"/>
+          </a:solidFill>
+          <a:ln w="12700">
+            <a:solidFill>
+              <a:srgbClr val="333333"/>
+            </a:solidFill>
+            <a:prstDash val="solid"/>
+          </a:ln>
+        </p:spPr>
+      </p:sp>
+      <p:sp>
+        <p:nvSpPr>
+          <p:cNvPr id="16" name="Text 14"/>
+          <p:cNvSpPr txBox="1"/>
+          <p:nvPr/>
+        </p:nvSpPr>
+        <p:spPr>
+          <a:xfrm>
+            <a:off x="1014984" y="4745736"/>
+            <a:ext cx="365760" cy="365760"/>
+          </a:xfrm>
+          <a:prstGeom prst="rect">
+            <a:avLst/>
+          </a:prstGeom>
+          <a:noFill/>
+          <a:ln/>
+        </p:spPr>
+        <p:txBody>
+          <a:bodyPr wrap="square" lIns="0" tIns="0" rIns="0" bIns="0" rtlCol="0" anchor="ctr"/>
+          <a:lstStyle/>
+          <a:p>
+            <a:pPr algn="ctr" indent="0" marL="0">
+              <a:buNone/>
+            </a:pPr>
+            <a:r>
+              <a:rPr lang="en-US" sz="1300" b="1" dirty="0">
+                <a:solidFill>
+                  <a:srgbClr val="FFFFFF"/>
+                </a:solidFill>
+                <a:latin typeface="Yu Gothic" pitchFamily="34" charset="0"/>
+                <a:ea typeface="Yu Gothic" pitchFamily="34" charset="-122"/>
+                <a:cs typeface="Yu Gothic" pitchFamily="34" charset="-120"/>
+              </a:rPr>
+              <a:t>3</a:t>
+            </a:r>
+            <a:endParaRPr lang="en-US" sz="1300" dirty="0"/>
+          </a:p>
+        </p:txBody>
+      </p:sp>
+      <p:sp>
+        <p:nvSpPr>
+          <p:cNvPr id="17" name="Text 15"/>
+          <p:cNvSpPr txBox="1"/>
+          <p:nvPr/>
+        </p:nvSpPr>
+        <p:spPr>
+          <a:xfrm>
+            <a:off x="1600200" y="4407408"/>
+            <a:ext cx="3182112" cy="1042416"/>
+          </a:xfrm>
+          <a:prstGeom prst="rect">
+            <a:avLst/>
+          </a:prstGeom>
+          <a:noFill/>
+          <a:ln/>
+        </p:spPr>
+        <p:txBody>
+          <a:bodyPr wrap="square" lIns="0" tIns="0" rIns="0" bIns="0" rtlCol="0" anchor="ctr"/>
+          <a:lstStyle/>
+          <a:p>
+            <a:pPr indent="0" marL="0">
+              <a:buNone/>
+            </a:pPr>
+            <a:r>
+              <a:rPr lang="en-US" sz="1450" b="1" dirty="0">
+                <a:solidFill>
+                  <a:srgbClr val="23201D"/>
+                </a:solidFill>
+                <a:latin typeface="Yu Gothic" pitchFamily="34" charset="0"/>
+                <a:ea typeface="Yu Gothic" pitchFamily="34" charset="-122"/>
+                <a:cs typeface="Yu Gothic" pitchFamily="34" charset="-120"/>
+              </a:rPr>
+              <a:t>80点でも価値がある</a:t>
+            </a:r>
+            <a:endParaRPr lang="en-US" sz="1450" dirty="0"/>
+          </a:p>
+        </p:txBody>
+      </p:sp>
+      <p:sp>
+        <p:nvSpPr>
+          <p:cNvPr id="18" name="Text 16"/>
+          <p:cNvSpPr txBox="1"/>
+          <p:nvPr/>
+        </p:nvSpPr>
+        <p:spPr>
+          <a:xfrm>
+            <a:off x="4888382" y="4407408"/>
+            <a:ext cx="6267298" cy="1042416"/>
+          </a:xfrm>
+          <a:prstGeom prst="rect">
+            <a:avLst/>
+          </a:prstGeom>
+          <a:noFill/>
+          <a:ln/>
+        </p:spPr>
+        <p:txBody>
+          <a:bodyPr wrap="square" lIns="0" tIns="0" rIns="0" bIns="0" rtlCol="0" anchor="ctr"/>
+          <a:lstStyle/>
+          <a:p>
+            <a:pPr indent="0" marL="0">
+              <a:lnSpc>
+                <a:spcPct val="130000"/>
+              </a:lnSpc>
+              <a:buNone/>
+            </a:pPr>
+            <a:r>
+              <a:rPr lang="en-US" sz="1200" dirty="0">
+                <a:solidFill>
+                  <a:srgbClr val="5A534A"/>
+                </a:solidFill>
+                <a:latin typeface="Yu Gothic" pitchFamily="34" charset="0"/>
+                <a:ea typeface="Yu Gothic" pitchFamily="34" charset="-122"/>
+                <a:cs typeface="Yu Gothic" pitchFamily="34" charset="-120"/>
+              </a:rPr>
+              <a:t>完璧でなくてよい。100点が要るものは下書きまでに留めます</a:t>
+            </a:r>
+            <a:endParaRPr lang="en-US" sz="1200" dirty="0"/>
+          </a:p>
+        </p:txBody>
+      </p:sp>
+      <p:sp>
+        <p:nvSpPr>
           <p:cNvPr id="19" name="Text 17"/>
           <p:cNvSpPr txBox="1"/>
           <p:nvPr/>
         </p:nvSpPr>
         <p:spPr>
           <a:xfrm>
-            <a:off x="5815584" y="3337560"/>
-            <a:ext cx="512064" cy="512064"/>
-          </a:xfrm>
-          <a:prstGeom prst="rect">
-            <a:avLst/>
-          </a:prstGeom>
-          <a:noFill/>
-          <a:ln/>
-        </p:spPr>
-        <p:txBody>
-          <a:bodyPr wrap="square" lIns="0" tIns="0" rIns="0" bIns="0" rtlCol="0" anchor="ctr"/>
-          <a:lstStyle/>
-          <a:p>
-            <a:pPr algn="ctr" indent="0" marL="0">
-              <a:buNone/>
-            </a:pPr>
-            <a:r>
-              <a:rPr lang="en-US" sz="1800" b="1" dirty="0">
-                <a:solidFill>
-                  <a:srgbClr val="FFFFFF"/>
-                </a:solidFill>
-                <a:latin typeface="Yu Gothic" pitchFamily="34" charset="0"/>
-                <a:ea typeface="Yu Gothic" pitchFamily="34" charset="-122"/>
-                <a:cs typeface="Yu Gothic" pitchFamily="34" charset="-120"/>
-              </a:rPr>
-              <a:t>→</a:t>
-            </a:r>
-            <a:endParaRPr lang="en-US" sz="1800" dirty="0"/>
+            <a:off x="777240" y="5669280"/>
+            <a:ext cx="10607040" cy="411480"/>
+          </a:xfrm>
+          <a:prstGeom prst="rect">
+            <a:avLst/>
+          </a:prstGeom>
+          <a:noFill/>
+          <a:ln/>
+        </p:spPr>
+        <p:txBody>
+          <a:bodyPr wrap="square" lIns="0" tIns="0" rIns="0" bIns="0" rtlCol="0" anchor="ctr"/>
+          <a:lstStyle/>
+          <a:p>
+            <a:pPr indent="0" marL="0">
+              <a:buNone/>
+            </a:pPr>
+            <a:r>
+              <a:rPr lang="en-US" sz="1200" b="1" dirty="0">
+                <a:solidFill>
+                  <a:srgbClr val="B04A2F"/>
+                </a:solidFill>
+                <a:latin typeface="Yu Gothic" pitchFamily="34" charset="0"/>
+                <a:ea typeface="Yu Gothic" pitchFamily="34" charset="-122"/>
+                <a:cs typeface="Yu Gothic" pitchFamily="34" charset="-120"/>
+              </a:rPr>
+              <a:t>3つとも満たす業務が、最初の一手です。1つでも欠けると、たいてい途中で止まります。</a:t>
+            </a:r>
+            <a:endParaRPr lang="en-US" sz="1200" dirty="0"/>
           </a:p>
         </p:txBody>
       </p:sp>
@@ -3778,8 +5298,8 @@
         </p:nvSpPr>
         <p:spPr>
           <a:xfrm>
-            <a:off x="777240" y="6355080"/>
-            <a:ext cx="7424928" cy="274320"/>
+            <a:off x="777240" y="6382512"/>
+            <a:ext cx="7424928" cy="256032"/>
           </a:xfrm>
           <a:prstGeom prst="rect">
             <a:avLst/>
@@ -3817,8 +5337,8 @@
         </p:nvSpPr>
         <p:spPr>
           <a:xfrm>
-            <a:off x="8202168" y="6355080"/>
-            <a:ext cx="3182112" cy="274320"/>
+            <a:off x="8202168" y="6382512"/>
+            <a:ext cx="3182112" cy="256032"/>
           </a:xfrm>
           <a:prstGeom prst="rect">
             <a:avLst/>
@@ -3842,7 +5362,7 @@
                 <a:ea typeface="Yu Gothic" pitchFamily="34" charset="-122"/>
                 <a:cs typeface="Yu Gothic" pitchFamily="34" charset="-120"/>
               </a:rPr>
-              <a:t>実演</a:t>
+              <a:t>考え方</a:t>
             </a:r>
             <a:endParaRPr lang="en-US" sz="900" dirty="0"/>
           </a:p>
@@ -3888,7 +5408,7 @@
         </p:nvSpPr>
         <p:spPr>
           <a:xfrm>
-            <a:off x="777240" y="640080"/>
+            <a:off x="777240" y="566928"/>
             <a:ext cx="10607040" cy="274320"/>
           </a:xfrm>
           <a:prstGeom prst="rect">
@@ -3913,7 +5433,7 @@
                 <a:ea typeface="Yu Gothic" pitchFamily="34" charset="-122"/>
                 <a:cs typeface="Yu Gothic" pitchFamily="34" charset="-120"/>
               </a:rPr>
-              <a:t>演習</a:t>
+              <a:t>あてはめ</a:t>
             </a:r>
             <a:endParaRPr lang="en-US" sz="1100" dirty="0"/>
           </a:p>
@@ -3927,7 +5447,7 @@
         </p:nvSpPr>
         <p:spPr>
           <a:xfrm>
-            <a:off x="777240" y="960120"/>
+            <a:off x="777240" y="896112"/>
             <a:ext cx="10607040" cy="640080"/>
           </a:xfrm>
           <a:prstGeom prst="rect">
@@ -3944,7 +5464,7 @@
               <a:buNone/>
             </a:pPr>
             <a:r>
-              <a:rPr lang="en-US" sz="2700" b="1" dirty="0">
+              <a:rPr lang="en-US" sz="2600" b="1" dirty="0">
                 <a:solidFill>
                   <a:srgbClr val="23201D"/>
                 </a:solidFill>
@@ -3952,61 +5472,22 @@
                 <a:ea typeface="Yu Gothic" pitchFamily="34" charset="-122"/>
                 <a:cs typeface="Yu Gothic" pitchFamily="34" charset="-120"/>
               </a:rPr>
-              <a:t>今日、一緒にやること</a:t>
-            </a:r>
-            <a:endParaRPr lang="en-US" sz="2700" dirty="0"/>
-          </a:p>
-        </p:txBody>
-      </p:sp>
-      <p:sp>
-        <p:nvSpPr>
-          <p:cNvPr id="4" name="Text 2"/>
-          <p:cNvSpPr txBox="1"/>
-          <p:nvPr/>
-        </p:nvSpPr>
-        <p:spPr>
-          <a:xfrm>
-            <a:off x="777240" y="1627632"/>
-            <a:ext cx="10607040" cy="320040"/>
-          </a:xfrm>
-          <a:prstGeom prst="rect">
-            <a:avLst/>
-          </a:prstGeom>
-          <a:noFill/>
-          <a:ln/>
-        </p:spPr>
-        <p:txBody>
-          <a:bodyPr wrap="square" lIns="0" tIns="0" rIns="0" bIns="0" rtlCol="0" anchor="ctr"/>
-          <a:lstStyle/>
-          <a:p>
-            <a:pPr indent="0" marL="0">
-              <a:buNone/>
-            </a:pPr>
-            <a:r>
-              <a:rPr lang="en-US" sz="1250" b="1" dirty="0">
-                <a:solidFill>
-                  <a:srgbClr val="2F4F6B"/>
-                </a:solidFill>
-                <a:latin typeface="Yu Gothic" pitchFamily="34" charset="0"/>
-                <a:ea typeface="Yu Gothic" pitchFamily="34" charset="-122"/>
-                <a:cs typeface="Yu Gothic" pitchFamily="34" charset="-120"/>
-              </a:rPr>
-              <a:t>55分。操作するのはご自身です。</a:t>
-            </a:r>
-            <a:endParaRPr lang="en-US" sz="1250" dirty="0"/>
-          </a:p>
-        </p:txBody>
-      </p:sp>
-      <p:sp>
-        <p:nvSpPr>
-          <p:cNvPr id="5" name="Shape 3"/>
+              <a:t>棚卸し表は、この6列で埋めます</a:t>
+            </a:r>
+            <a:endParaRPr lang="en-US" sz="2600" dirty="0"/>
+          </a:p>
+        </p:txBody>
+      </p:sp>
+      <p:sp>
+        <p:nvSpPr>
+          <p:cNvPr id="4" name="Shape 2"/>
           <p:cNvSpPr/>
           <p:nvPr/>
         </p:nvSpPr>
         <p:spPr>
           <a:xfrm>
-            <a:off x="777240" y="2240280"/>
-            <a:ext cx="3383280" cy="2697480"/>
+            <a:off x="777240" y="1691640"/>
+            <a:ext cx="10607040" cy="3931920"/>
           </a:xfrm>
           <a:prstGeom prst="rect">
             <a:avLst/>
@@ -4014,9 +5495,9 @@
           <a:solidFill>
             <a:srgbClr val="FFFFFF"/>
           </a:solidFill>
-          <a:ln w="12700">
+          <a:ln w="15875">
             <a:solidFill>
-              <a:srgbClr val="EDE7DB"/>
+              <a:srgbClr val="2F4F6B"/>
             </a:solidFill>
             <a:prstDash val="solid"/>
           </a:ln>
@@ -4024,16 +5505,16 @@
       </p:sp>
       <p:sp>
         <p:nvSpPr>
-          <p:cNvPr id="6" name="Shape 4"/>
+          <p:cNvPr id="5" name="Shape 3"/>
           <p:cNvSpPr/>
           <p:nvPr/>
         </p:nvSpPr>
         <p:spPr>
           <a:xfrm>
-            <a:off x="1051560" y="2487168"/>
-            <a:ext cx="438912" cy="438912"/>
-          </a:xfrm>
-          <a:prstGeom prst="ellipse">
+            <a:off x="777240" y="1691640"/>
+            <a:ext cx="10607040" cy="457200"/>
+          </a:xfrm>
+          <a:prstGeom prst="rect">
             <a:avLst/>
           </a:prstGeom>
           <a:solidFill>
@@ -4041,7 +5522,7 @@
           </a:solidFill>
           <a:ln w="12700">
             <a:solidFill>
-              <a:srgbClr val="2F4F6B"/>
+              <a:srgbClr val="333333"/>
             </a:solidFill>
             <a:prstDash val="solid"/>
           </a:ln>
@@ -4049,40 +5530,82 @@
       </p:sp>
       <p:sp>
         <p:nvSpPr>
+          <p:cNvPr id="6" name="Text 4"/>
+          <p:cNvSpPr txBox="1"/>
+          <p:nvPr/>
+        </p:nvSpPr>
+        <p:spPr>
+          <a:xfrm>
+            <a:off x="1051560" y="1709928"/>
+            <a:ext cx="10058400" cy="420624"/>
+          </a:xfrm>
+          <a:prstGeom prst="rect">
+            <a:avLst/>
+          </a:prstGeom>
+          <a:noFill/>
+          <a:ln/>
+        </p:spPr>
+        <p:txBody>
+          <a:bodyPr wrap="square" lIns="0" tIns="0" rIns="0" bIns="0" rtlCol="0" anchor="ctr"/>
+          <a:lstStyle/>
+          <a:p>
+            <a:pPr indent="0" marL="0">
+              <a:buNone/>
+            </a:pPr>
+            <a:r>
+              <a:rPr lang="en-US" sz="1200" b="1" dirty="0">
+                <a:solidFill>
+                  <a:srgbClr val="FFFFFF"/>
+                </a:solidFill>
+                <a:latin typeface="Yu Gothic" pitchFamily="34" charset="0"/>
+                <a:ea typeface="Yu Gothic" pitchFamily="34" charset="-122"/>
+                <a:cs typeface="Yu Gothic" pitchFamily="34" charset="-120"/>
+              </a:rPr>
+              <a:t>業務棚卸しシート（記入例：金属加工業・従業員18名）</a:t>
+            </a:r>
+            <a:endParaRPr lang="en-US" sz="1200" dirty="0"/>
+          </a:p>
+        </p:txBody>
+      </p:sp>
+      <p:sp>
+        <p:nvSpPr>
           <p:cNvPr id="7" name="Text 5"/>
           <p:cNvSpPr txBox="1"/>
           <p:nvPr/>
         </p:nvSpPr>
         <p:spPr>
           <a:xfrm>
-            <a:off x="1051560" y="2487168"/>
-            <a:ext cx="438912" cy="438912"/>
-          </a:xfrm>
-          <a:prstGeom prst="rect">
-            <a:avLst/>
-          </a:prstGeom>
-          <a:noFill/>
-          <a:ln/>
-        </p:spPr>
-        <p:txBody>
-          <a:bodyPr wrap="square" lIns="0" tIns="0" rIns="0" bIns="0" rtlCol="0" anchor="ctr"/>
-          <a:lstStyle/>
-          <a:p>
-            <a:pPr algn="ctr" indent="0" marL="0">
-              <a:buNone/>
-            </a:pPr>
-            <a:r>
-              <a:rPr lang="en-US" sz="1400" b="1" dirty="0">
-                <a:solidFill>
-                  <a:srgbClr val="FFFFFF"/>
-                </a:solidFill>
-                <a:latin typeface="Yu Gothic" pitchFamily="34" charset="0"/>
-                <a:ea typeface="Yu Gothic" pitchFamily="34" charset="-122"/>
-                <a:cs typeface="Yu Gothic" pitchFamily="34" charset="-120"/>
-              </a:rPr>
-              <a:t>1</a:t>
-            </a:r>
-            <a:endParaRPr lang="en-US" sz="1400" dirty="0"/>
+            <a:off x="1097280" y="2331720"/>
+            <a:ext cx="2057400" cy="530352"/>
+          </a:xfrm>
+          <a:prstGeom prst="rect">
+            <a:avLst/>
+          </a:prstGeom>
+          <a:noFill/>
+          <a:ln/>
+        </p:spPr>
+        <p:txBody>
+          <a:bodyPr wrap="square" lIns="0" tIns="0" rIns="0" bIns="0" rtlCol="0" anchor="ctr"/>
+          <a:lstStyle/>
+          <a:p>
+            <a:pPr indent="0" marL="0">
+              <a:lnSpc>
+                <a:spcPct val="110000"/>
+              </a:lnSpc>
+              <a:buNone/>
+            </a:pPr>
+            <a:r>
+              <a:rPr lang="en-US" sz="1100" b="1" dirty="0">
+                <a:solidFill>
+                  <a:srgbClr val="2F4F6B"/>
+                </a:solidFill>
+                <a:latin typeface="Yu Gothic" pitchFamily="34" charset="0"/>
+                <a:ea typeface="Yu Gothic" pitchFamily="34" charset="-122"/>
+                <a:cs typeface="Yu Gothic" pitchFamily="34" charset="-120"/>
+              </a:rPr>
+              <a:t>業務名</a:t>
+            </a:r>
+            <a:endParaRPr lang="en-US" sz="1100" dirty="0"/>
           </a:p>
         </p:txBody>
       </p:sp>
@@ -4094,8 +5617,8 @@
         </p:nvSpPr>
         <p:spPr>
           <a:xfrm>
-            <a:off x="1051560" y="3035808"/>
-            <a:ext cx="2834640" cy="777240"/>
+            <a:off x="3291840" y="2331720"/>
+            <a:ext cx="7772400" cy="530352"/>
           </a:xfrm>
           <a:prstGeom prst="rect">
             <a:avLst/>
@@ -4109,22 +5632,22 @@
           <a:p>
             <a:pPr indent="0" marL="0">
               <a:lnSpc>
-                <a:spcPct val="125000"/>
+                <a:spcPct val="115000"/>
               </a:lnSpc>
               <a:buNone/>
             </a:pPr>
             <a:r>
-              <a:rPr lang="en-US" sz="1500" b="1" dirty="0">
+              <a:rPr lang="en-US" sz="1150" dirty="0">
                 <a:solidFill>
                   <a:srgbClr val="23201D"/>
                 </a:solidFill>
-                <a:latin typeface="Yu Gothic" pitchFamily="34" charset="0"/>
-                <a:ea typeface="Yu Gothic" pitchFamily="34" charset="-122"/>
-                <a:cs typeface="Yu Gothic" pitchFamily="34" charset="-120"/>
-              </a:rPr>
-              <a:t>いまの使い方を拝見する</a:t>
-            </a:r>
-            <a:endParaRPr lang="en-US" sz="1500" dirty="0"/>
+                <a:latin typeface="Consolas" pitchFamily="34" charset="0"/>
+                <a:ea typeface="Consolas" pitchFamily="34" charset="-122"/>
+                <a:cs typeface="Consolas" pitchFamily="34" charset="-120"/>
+              </a:rPr>
+              <a:t>見積書の作成</a:t>
+            </a:r>
+            <a:endParaRPr lang="en-US" sz="1150" dirty="0"/>
           </a:p>
         </p:txBody>
       </p:sp>
@@ -4136,8 +5659,8 @@
         </p:nvSpPr>
         <p:spPr>
           <a:xfrm>
-            <a:off x="1051560" y="3822192"/>
-            <a:ext cx="2834640" cy="960120"/>
+            <a:off x="1097280" y="2862072"/>
+            <a:ext cx="2057400" cy="530352"/>
           </a:xfrm>
           <a:prstGeom prst="rect">
             <a:avLst/>
@@ -4151,12 +5674,432 @@
           <a:p>
             <a:pPr indent="0" marL="0">
               <a:lnSpc>
-                <a:spcPct val="130000"/>
+                <a:spcPct val="110000"/>
               </a:lnSpc>
               <a:buNone/>
             </a:pPr>
             <a:r>
-              <a:rPr lang="en-US" sz="1200" dirty="0">
+              <a:rPr lang="en-US" sz="1100" b="1" dirty="0">
+                <a:solidFill>
+                  <a:srgbClr val="2F4F6B"/>
+                </a:solidFill>
+                <a:latin typeface="Yu Gothic" pitchFamily="34" charset="0"/>
+                <a:ea typeface="Yu Gothic" pitchFamily="34" charset="-122"/>
+                <a:cs typeface="Yu Gothic" pitchFamily="34" charset="-120"/>
+              </a:rPr>
+              <a:t>誰が</a:t>
+            </a:r>
+            <a:endParaRPr lang="en-US" sz="1100" dirty="0"/>
+          </a:p>
+        </p:txBody>
+      </p:sp>
+      <p:sp>
+        <p:nvSpPr>
+          <p:cNvPr id="10" name="Text 8"/>
+          <p:cNvSpPr txBox="1"/>
+          <p:nvPr/>
+        </p:nvSpPr>
+        <p:spPr>
+          <a:xfrm>
+            <a:off x="3291840" y="2862072"/>
+            <a:ext cx="7772400" cy="530352"/>
+          </a:xfrm>
+          <a:prstGeom prst="rect">
+            <a:avLst/>
+          </a:prstGeom>
+          <a:noFill/>
+          <a:ln/>
+        </p:spPr>
+        <p:txBody>
+          <a:bodyPr wrap="square" lIns="0" tIns="0" rIns="0" bIns="0" rtlCol="0" anchor="ctr"/>
+          <a:lstStyle/>
+          <a:p>
+            <a:pPr indent="0" marL="0">
+              <a:lnSpc>
+                <a:spcPct val="115000"/>
+              </a:lnSpc>
+              <a:buNone/>
+            </a:pPr>
+            <a:r>
+              <a:rPr lang="en-US" sz="1150" dirty="0">
+                <a:solidFill>
+                  <a:srgbClr val="23201D"/>
+                </a:solidFill>
+                <a:latin typeface="Consolas" pitchFamily="34" charset="0"/>
+                <a:ea typeface="Consolas" pitchFamily="34" charset="-122"/>
+                <a:cs typeface="Consolas" pitchFamily="34" charset="-120"/>
+              </a:rPr>
+              <a:t>社長＋事務1名</a:t>
+            </a:r>
+            <a:endParaRPr lang="en-US" sz="1150" dirty="0"/>
+          </a:p>
+        </p:txBody>
+      </p:sp>
+      <p:sp>
+        <p:nvSpPr>
+          <p:cNvPr id="11" name="Text 9"/>
+          <p:cNvSpPr txBox="1"/>
+          <p:nvPr/>
+        </p:nvSpPr>
+        <p:spPr>
+          <a:xfrm>
+            <a:off x="1097280" y="3392424"/>
+            <a:ext cx="2057400" cy="530352"/>
+          </a:xfrm>
+          <a:prstGeom prst="rect">
+            <a:avLst/>
+          </a:prstGeom>
+          <a:noFill/>
+          <a:ln/>
+        </p:spPr>
+        <p:txBody>
+          <a:bodyPr wrap="square" lIns="0" tIns="0" rIns="0" bIns="0" rtlCol="0" anchor="ctr"/>
+          <a:lstStyle/>
+          <a:p>
+            <a:pPr indent="0" marL="0">
+              <a:lnSpc>
+                <a:spcPct val="110000"/>
+              </a:lnSpc>
+              <a:buNone/>
+            </a:pPr>
+            <a:r>
+              <a:rPr lang="en-US" sz="1100" b="1" dirty="0">
+                <a:solidFill>
+                  <a:srgbClr val="2F4F6B"/>
+                </a:solidFill>
+                <a:latin typeface="Yu Gothic" pitchFamily="34" charset="0"/>
+                <a:ea typeface="Yu Gothic" pitchFamily="34" charset="-122"/>
+                <a:cs typeface="Yu Gothic" pitchFamily="34" charset="-120"/>
+              </a:rPr>
+              <a:t>頻度・時間</a:t>
+            </a:r>
+            <a:endParaRPr lang="en-US" sz="1100" dirty="0"/>
+          </a:p>
+        </p:txBody>
+      </p:sp>
+      <p:sp>
+        <p:nvSpPr>
+          <p:cNvPr id="12" name="Text 10"/>
+          <p:cNvSpPr txBox="1"/>
+          <p:nvPr/>
+        </p:nvSpPr>
+        <p:spPr>
+          <a:xfrm>
+            <a:off x="3291840" y="3392424"/>
+            <a:ext cx="7772400" cy="530352"/>
+          </a:xfrm>
+          <a:prstGeom prst="rect">
+            <a:avLst/>
+          </a:prstGeom>
+          <a:noFill/>
+          <a:ln/>
+        </p:spPr>
+        <p:txBody>
+          <a:bodyPr wrap="square" lIns="0" tIns="0" rIns="0" bIns="0" rtlCol="0" anchor="ctr"/>
+          <a:lstStyle/>
+          <a:p>
+            <a:pPr indent="0" marL="0">
+              <a:lnSpc>
+                <a:spcPct val="115000"/>
+              </a:lnSpc>
+              <a:buNone/>
+            </a:pPr>
+            <a:r>
+              <a:rPr lang="en-US" sz="1150" dirty="0">
+                <a:solidFill>
+                  <a:srgbClr val="23201D"/>
+                </a:solidFill>
+                <a:latin typeface="Consolas" pitchFamily="34" charset="0"/>
+                <a:ea typeface="Consolas" pitchFamily="34" charset="-122"/>
+                <a:cs typeface="Consolas" pitchFamily="34" charset="-120"/>
+              </a:rPr>
+              <a:t>週5件 × 1件60分 ＝ 月20時間</a:t>
+            </a:r>
+            <a:endParaRPr lang="en-US" sz="1150" dirty="0"/>
+          </a:p>
+        </p:txBody>
+      </p:sp>
+      <p:sp>
+        <p:nvSpPr>
+          <p:cNvPr id="13" name="Text 11"/>
+          <p:cNvSpPr txBox="1"/>
+          <p:nvPr/>
+        </p:nvSpPr>
+        <p:spPr>
+          <a:xfrm>
+            <a:off x="1097280" y="3922776"/>
+            <a:ext cx="2057400" cy="530352"/>
+          </a:xfrm>
+          <a:prstGeom prst="rect">
+            <a:avLst/>
+          </a:prstGeom>
+          <a:noFill/>
+          <a:ln/>
+        </p:spPr>
+        <p:txBody>
+          <a:bodyPr wrap="square" lIns="0" tIns="0" rIns="0" bIns="0" rtlCol="0" anchor="ctr"/>
+          <a:lstStyle/>
+          <a:p>
+            <a:pPr indent="0" marL="0">
+              <a:lnSpc>
+                <a:spcPct val="110000"/>
+              </a:lnSpc>
+              <a:buNone/>
+            </a:pPr>
+            <a:r>
+              <a:rPr lang="en-US" sz="1100" b="1" dirty="0">
+                <a:solidFill>
+                  <a:srgbClr val="2F4F6B"/>
+                </a:solidFill>
+                <a:latin typeface="Yu Gothic" pitchFamily="34" charset="0"/>
+                <a:ea typeface="Yu Gothic" pitchFamily="34" charset="-122"/>
+                <a:cs typeface="Yu Gothic" pitchFamily="34" charset="-120"/>
+              </a:rPr>
+              <a:t>型が決まっているか</a:t>
+            </a:r>
+            <a:endParaRPr lang="en-US" sz="1100" dirty="0"/>
+          </a:p>
+        </p:txBody>
+      </p:sp>
+      <p:sp>
+        <p:nvSpPr>
+          <p:cNvPr id="14" name="Text 12"/>
+          <p:cNvSpPr txBox="1"/>
+          <p:nvPr/>
+        </p:nvSpPr>
+        <p:spPr>
+          <a:xfrm>
+            <a:off x="3291840" y="3922776"/>
+            <a:ext cx="7772400" cy="530352"/>
+          </a:xfrm>
+          <a:prstGeom prst="rect">
+            <a:avLst/>
+          </a:prstGeom>
+          <a:noFill/>
+          <a:ln/>
+        </p:spPr>
+        <p:txBody>
+          <a:bodyPr wrap="square" lIns="0" tIns="0" rIns="0" bIns="0" rtlCol="0" anchor="ctr"/>
+          <a:lstStyle/>
+          <a:p>
+            <a:pPr indent="0" marL="0">
+              <a:lnSpc>
+                <a:spcPct val="115000"/>
+              </a:lnSpc>
+              <a:buNone/>
+            </a:pPr>
+            <a:r>
+              <a:rPr lang="en-US" sz="1150" dirty="0">
+                <a:solidFill>
+                  <a:srgbClr val="23201D"/>
+                </a:solidFill>
+                <a:latin typeface="Consolas" pitchFamily="34" charset="0"/>
+                <a:ea typeface="Consolas" pitchFamily="34" charset="-122"/>
+                <a:cs typeface="Consolas" pitchFamily="34" charset="-120"/>
+              </a:rPr>
+              <a:t>半分。過去案件を探す部分は毎回同じ</a:t>
+            </a:r>
+            <a:endParaRPr lang="en-US" sz="1150" dirty="0"/>
+          </a:p>
+        </p:txBody>
+      </p:sp>
+      <p:sp>
+        <p:nvSpPr>
+          <p:cNvPr id="15" name="Text 13"/>
+          <p:cNvSpPr txBox="1"/>
+          <p:nvPr/>
+        </p:nvSpPr>
+        <p:spPr>
+          <a:xfrm>
+            <a:off x="1097280" y="4453128"/>
+            <a:ext cx="2057400" cy="530352"/>
+          </a:xfrm>
+          <a:prstGeom prst="rect">
+            <a:avLst/>
+          </a:prstGeom>
+          <a:noFill/>
+          <a:ln/>
+        </p:spPr>
+        <p:txBody>
+          <a:bodyPr wrap="square" lIns="0" tIns="0" rIns="0" bIns="0" rtlCol="0" anchor="ctr"/>
+          <a:lstStyle/>
+          <a:p>
+            <a:pPr indent="0" marL="0">
+              <a:lnSpc>
+                <a:spcPct val="110000"/>
+              </a:lnSpc>
+              <a:buNone/>
+            </a:pPr>
+            <a:r>
+              <a:rPr lang="en-US" sz="1100" b="1" dirty="0">
+                <a:solidFill>
+                  <a:srgbClr val="2F4F6B"/>
+                </a:solidFill>
+                <a:latin typeface="Yu Gothic" pitchFamily="34" charset="0"/>
+                <a:ea typeface="Yu Gothic" pitchFamily="34" charset="-122"/>
+                <a:cs typeface="Yu Gothic" pitchFamily="34" charset="-120"/>
+              </a:rPr>
+              <a:t>間違えたときの痛み</a:t>
+            </a:r>
+            <a:endParaRPr lang="en-US" sz="1100" dirty="0"/>
+          </a:p>
+        </p:txBody>
+      </p:sp>
+      <p:sp>
+        <p:nvSpPr>
+          <p:cNvPr id="16" name="Text 14"/>
+          <p:cNvSpPr txBox="1"/>
+          <p:nvPr/>
+        </p:nvSpPr>
+        <p:spPr>
+          <a:xfrm>
+            <a:off x="3291840" y="4453128"/>
+            <a:ext cx="7772400" cy="530352"/>
+          </a:xfrm>
+          <a:prstGeom prst="rect">
+            <a:avLst/>
+          </a:prstGeom>
+          <a:noFill/>
+          <a:ln/>
+        </p:spPr>
+        <p:txBody>
+          <a:bodyPr wrap="square" lIns="0" tIns="0" rIns="0" bIns="0" rtlCol="0" anchor="ctr"/>
+          <a:lstStyle/>
+          <a:p>
+            <a:pPr indent="0" marL="0">
+              <a:lnSpc>
+                <a:spcPct val="115000"/>
+              </a:lnSpc>
+              <a:buNone/>
+            </a:pPr>
+            <a:r>
+              <a:rPr lang="en-US" sz="1150" dirty="0">
+                <a:solidFill>
+                  <a:srgbClr val="23201D"/>
+                </a:solidFill>
+                <a:latin typeface="Consolas" pitchFamily="34" charset="0"/>
+                <a:ea typeface="Consolas" pitchFamily="34" charset="-122"/>
+                <a:cs typeface="Consolas" pitchFamily="34" charset="-120"/>
+              </a:rPr>
+              <a:t>中（提出前に社長が確認している）</a:t>
+            </a:r>
+            <a:endParaRPr lang="en-US" sz="1150" dirty="0"/>
+          </a:p>
+        </p:txBody>
+      </p:sp>
+      <p:sp>
+        <p:nvSpPr>
+          <p:cNvPr id="17" name="Text 15"/>
+          <p:cNvSpPr txBox="1"/>
+          <p:nvPr/>
+        </p:nvSpPr>
+        <p:spPr>
+          <a:xfrm>
+            <a:off x="1097280" y="4983480"/>
+            <a:ext cx="2057400" cy="530352"/>
+          </a:xfrm>
+          <a:prstGeom prst="rect">
+            <a:avLst/>
+          </a:prstGeom>
+          <a:noFill/>
+          <a:ln/>
+        </p:spPr>
+        <p:txBody>
+          <a:bodyPr wrap="square" lIns="0" tIns="0" rIns="0" bIns="0" rtlCol="0" anchor="ctr"/>
+          <a:lstStyle/>
+          <a:p>
+            <a:pPr indent="0" marL="0">
+              <a:lnSpc>
+                <a:spcPct val="110000"/>
+              </a:lnSpc>
+              <a:buNone/>
+            </a:pPr>
+            <a:r>
+              <a:rPr lang="en-US" sz="1100" b="1" dirty="0">
+                <a:solidFill>
+                  <a:srgbClr val="2F4F6B"/>
+                </a:solidFill>
+                <a:latin typeface="Yu Gothic" pitchFamily="34" charset="0"/>
+                <a:ea typeface="Yu Gothic" pitchFamily="34" charset="-122"/>
+                <a:cs typeface="Yu Gothic" pitchFamily="34" charset="-120"/>
+              </a:rPr>
+              <a:t>3条件の判定</a:t>
+            </a:r>
+            <a:endParaRPr lang="en-US" sz="1100" dirty="0"/>
+          </a:p>
+        </p:txBody>
+      </p:sp>
+      <p:sp>
+        <p:nvSpPr>
+          <p:cNvPr id="18" name="Text 16"/>
+          <p:cNvSpPr txBox="1"/>
+          <p:nvPr/>
+        </p:nvSpPr>
+        <p:spPr>
+          <a:xfrm>
+            <a:off x="3291840" y="4983480"/>
+            <a:ext cx="7772400" cy="530352"/>
+          </a:xfrm>
+          <a:prstGeom prst="rect">
+            <a:avLst/>
+          </a:prstGeom>
+          <a:noFill/>
+          <a:ln/>
+        </p:spPr>
+        <p:txBody>
+          <a:bodyPr wrap="square" lIns="0" tIns="0" rIns="0" bIns="0" rtlCol="0" anchor="ctr"/>
+          <a:lstStyle/>
+          <a:p>
+            <a:pPr indent="0" marL="0">
+              <a:lnSpc>
+                <a:spcPct val="115000"/>
+              </a:lnSpc>
+              <a:buNone/>
+            </a:pPr>
+            <a:r>
+              <a:rPr lang="en-US" sz="1150" dirty="0">
+                <a:solidFill>
+                  <a:srgbClr val="23201D"/>
+                </a:solidFill>
+                <a:latin typeface="Consolas" pitchFamily="34" charset="0"/>
+                <a:ea typeface="Consolas" pitchFamily="34" charset="-122"/>
+                <a:cs typeface="Consolas" pitchFamily="34" charset="-120"/>
+              </a:rPr>
+              <a:t>○○○ → 最初の一手</a:t>
+            </a:r>
+            <a:endParaRPr lang="en-US" sz="1150" dirty="0"/>
+          </a:p>
+        </p:txBody>
+      </p:sp>
+      <p:sp>
+        <p:nvSpPr>
+          <p:cNvPr id="19" name="Text 17"/>
+          <p:cNvSpPr txBox="1"/>
+          <p:nvPr/>
+        </p:nvSpPr>
+        <p:spPr>
+          <a:xfrm>
+            <a:off x="777240" y="5769864"/>
+            <a:ext cx="10607040" cy="548640"/>
+          </a:xfrm>
+          <a:prstGeom prst="rect">
+            <a:avLst/>
+          </a:prstGeom>
+          <a:noFill/>
+          <a:ln/>
+        </p:spPr>
+        <p:txBody>
+          <a:bodyPr wrap="square" lIns="0" tIns="0" rIns="0" bIns="0" rtlCol="0" anchor="ctr"/>
+          <a:lstStyle/>
+          <a:p>
+            <a:pPr indent="0" marL="0">
+              <a:lnSpc>
+                <a:spcPct val="135000"/>
+              </a:lnSpc>
+              <a:buNone/>
+            </a:pPr>
+            <a:r>
+              <a:rPr lang="en-US" sz="1250" dirty="0">
                 <a:solidFill>
                   <a:srgbClr val="5A534A"/>
                 </a:solidFill>
@@ -4164,355 +6107,9 @@
                 <a:ea typeface="Yu Gothic" pitchFamily="34" charset="-122"/>
                 <a:cs typeface="Yu Gothic" pitchFamily="34" charset="-120"/>
               </a:rPr>
-              <a:t>普段どおりに操作していただきます。うまくやろうとしなくて大丈夫です</a:t>
-            </a:r>
-            <a:endParaRPr lang="en-US" sz="1200" dirty="0"/>
-          </a:p>
-        </p:txBody>
-      </p:sp>
-      <p:sp>
-        <p:nvSpPr>
-          <p:cNvPr id="10" name="Shape 8"/>
-          <p:cNvSpPr/>
-          <p:nvPr/>
-        </p:nvSpPr>
-        <p:spPr>
-          <a:xfrm>
-            <a:off x="4389120" y="2240280"/>
-            <a:ext cx="3383280" cy="2697480"/>
-          </a:xfrm>
-          <a:prstGeom prst="rect">
-            <a:avLst/>
-          </a:prstGeom>
-          <a:solidFill>
-            <a:srgbClr val="FFFFFF"/>
-          </a:solidFill>
-          <a:ln w="12700">
-            <a:solidFill>
-              <a:srgbClr val="EDE7DB"/>
-            </a:solidFill>
-            <a:prstDash val="solid"/>
-          </a:ln>
-        </p:spPr>
-      </p:sp>
-      <p:sp>
-        <p:nvSpPr>
-          <p:cNvPr id="11" name="Shape 9"/>
-          <p:cNvSpPr/>
-          <p:nvPr/>
-        </p:nvSpPr>
-        <p:spPr>
-          <a:xfrm>
-            <a:off x="4663440" y="2487168"/>
-            <a:ext cx="438912" cy="438912"/>
-          </a:xfrm>
-          <a:prstGeom prst="ellipse">
-            <a:avLst/>
-          </a:prstGeom>
-          <a:solidFill>
-            <a:srgbClr val="2F4F6B"/>
-          </a:solidFill>
-          <a:ln w="12700">
-            <a:solidFill>
-              <a:srgbClr val="2F4F6B"/>
-            </a:solidFill>
-            <a:prstDash val="solid"/>
-          </a:ln>
-        </p:spPr>
-      </p:sp>
-      <p:sp>
-        <p:nvSpPr>
-          <p:cNvPr id="12" name="Text 10"/>
-          <p:cNvSpPr txBox="1"/>
-          <p:nvPr/>
-        </p:nvSpPr>
-        <p:spPr>
-          <a:xfrm>
-            <a:off x="4663440" y="2487168"/>
-            <a:ext cx="438912" cy="438912"/>
-          </a:xfrm>
-          <a:prstGeom prst="rect">
-            <a:avLst/>
-          </a:prstGeom>
-          <a:noFill/>
-          <a:ln/>
-        </p:spPr>
-        <p:txBody>
-          <a:bodyPr wrap="square" lIns="0" tIns="0" rIns="0" bIns="0" rtlCol="0" anchor="ctr"/>
-          <a:lstStyle/>
-          <a:p>
-            <a:pPr algn="ctr" indent="0" marL="0">
-              <a:buNone/>
-            </a:pPr>
-            <a:r>
-              <a:rPr lang="en-US" sz="1400" b="1" dirty="0">
-                <a:solidFill>
-                  <a:srgbClr val="FFFFFF"/>
-                </a:solidFill>
-                <a:latin typeface="Yu Gothic" pitchFamily="34" charset="0"/>
-                <a:ea typeface="Yu Gothic" pitchFamily="34" charset="-122"/>
-                <a:cs typeface="Yu Gothic" pitchFamily="34" charset="-120"/>
-              </a:rPr>
-              <a:t>2</a:t>
-            </a:r>
-            <a:endParaRPr lang="en-US" sz="1400" dirty="0"/>
-          </a:p>
-        </p:txBody>
-      </p:sp>
-      <p:sp>
-        <p:nvSpPr>
-          <p:cNvPr id="13" name="Text 11"/>
-          <p:cNvSpPr txBox="1"/>
-          <p:nvPr/>
-        </p:nvSpPr>
-        <p:spPr>
-          <a:xfrm>
-            <a:off x="4663440" y="3035808"/>
-            <a:ext cx="2834640" cy="777240"/>
-          </a:xfrm>
-          <a:prstGeom prst="rect">
-            <a:avLst/>
-          </a:prstGeom>
-          <a:noFill/>
-          <a:ln/>
-        </p:spPr>
-        <p:txBody>
-          <a:bodyPr wrap="square" lIns="0" tIns="0" rIns="0" bIns="0" rtlCol="0" anchor="ctr"/>
-          <a:lstStyle/>
-          <a:p>
-            <a:pPr indent="0" marL="0">
-              <a:lnSpc>
-                <a:spcPct val="125000"/>
-              </a:lnSpc>
-              <a:buNone/>
-            </a:pPr>
-            <a:r>
-              <a:rPr lang="en-US" sz="1500" b="1" dirty="0">
-                <a:solidFill>
-                  <a:srgbClr val="23201D"/>
-                </a:solidFill>
-                <a:latin typeface="Yu Gothic" pitchFamily="34" charset="0"/>
-                <a:ea typeface="Yu Gothic" pitchFamily="34" charset="-122"/>
-                <a:cs typeface="Yu Gothic" pitchFamily="34" charset="-120"/>
-              </a:rPr>
-              <a:t>業務を棚卸しする</a:t>
-            </a:r>
-            <a:endParaRPr lang="en-US" sz="1500" dirty="0"/>
-          </a:p>
-        </p:txBody>
-      </p:sp>
-      <p:sp>
-        <p:nvSpPr>
-          <p:cNvPr id="14" name="Text 12"/>
-          <p:cNvSpPr txBox="1"/>
-          <p:nvPr/>
-        </p:nvSpPr>
-        <p:spPr>
-          <a:xfrm>
-            <a:off x="4663440" y="3822192"/>
-            <a:ext cx="2834640" cy="960120"/>
-          </a:xfrm>
-          <a:prstGeom prst="rect">
-            <a:avLst/>
-          </a:prstGeom>
-          <a:noFill/>
-          <a:ln/>
-        </p:spPr>
-        <p:txBody>
-          <a:bodyPr wrap="square" lIns="0" tIns="0" rIns="0" bIns="0" rtlCol="0" anchor="ctr"/>
-          <a:lstStyle/>
-          <a:p>
-            <a:pPr indent="0" marL="0">
-              <a:lnSpc>
-                <a:spcPct val="130000"/>
-              </a:lnSpc>
-              <a:buNone/>
-            </a:pPr>
-            <a:r>
-              <a:rPr lang="en-US" sz="1200" dirty="0">
-                <a:solidFill>
-                  <a:srgbClr val="5A534A"/>
-                </a:solidFill>
-                <a:latin typeface="Yu Gothic" pitchFamily="34" charset="0"/>
-                <a:ea typeface="Yu Gothic" pitchFamily="34" charset="-122"/>
-                <a:cs typeface="Yu Gothic" pitchFamily="34" charset="-120"/>
-              </a:rPr>
-              <a:t>誰が・どのくらいの頻度で・1回何分。実際の一週間から書き出します</a:t>
-            </a:r>
-            <a:endParaRPr lang="en-US" sz="1200" dirty="0"/>
-          </a:p>
-        </p:txBody>
-      </p:sp>
-      <p:sp>
-        <p:nvSpPr>
-          <p:cNvPr id="15" name="Shape 13"/>
-          <p:cNvSpPr/>
-          <p:nvPr/>
-        </p:nvSpPr>
-        <p:spPr>
-          <a:xfrm>
-            <a:off x="8001000" y="2240280"/>
-            <a:ext cx="3383280" cy="2697480"/>
-          </a:xfrm>
-          <a:prstGeom prst="rect">
-            <a:avLst/>
-          </a:prstGeom>
-          <a:solidFill>
-            <a:srgbClr val="FFFFFF"/>
-          </a:solidFill>
-          <a:ln w="12700">
-            <a:solidFill>
-              <a:srgbClr val="EDE7DB"/>
-            </a:solidFill>
-            <a:prstDash val="solid"/>
-          </a:ln>
-        </p:spPr>
-      </p:sp>
-      <p:sp>
-        <p:nvSpPr>
-          <p:cNvPr id="16" name="Shape 14"/>
-          <p:cNvSpPr/>
-          <p:nvPr/>
-        </p:nvSpPr>
-        <p:spPr>
-          <a:xfrm>
-            <a:off x="8275320" y="2487168"/>
-            <a:ext cx="438912" cy="438912"/>
-          </a:xfrm>
-          <a:prstGeom prst="ellipse">
-            <a:avLst/>
-          </a:prstGeom>
-          <a:solidFill>
-            <a:srgbClr val="2F4F6B"/>
-          </a:solidFill>
-          <a:ln w="12700">
-            <a:solidFill>
-              <a:srgbClr val="2F4F6B"/>
-            </a:solidFill>
-            <a:prstDash val="solid"/>
-          </a:ln>
-        </p:spPr>
-      </p:sp>
-      <p:sp>
-        <p:nvSpPr>
-          <p:cNvPr id="17" name="Text 15"/>
-          <p:cNvSpPr txBox="1"/>
-          <p:nvPr/>
-        </p:nvSpPr>
-        <p:spPr>
-          <a:xfrm>
-            <a:off x="8275320" y="2487168"/>
-            <a:ext cx="438912" cy="438912"/>
-          </a:xfrm>
-          <a:prstGeom prst="rect">
-            <a:avLst/>
-          </a:prstGeom>
-          <a:noFill/>
-          <a:ln/>
-        </p:spPr>
-        <p:txBody>
-          <a:bodyPr wrap="square" lIns="0" tIns="0" rIns="0" bIns="0" rtlCol="0" anchor="ctr"/>
-          <a:lstStyle/>
-          <a:p>
-            <a:pPr algn="ctr" indent="0" marL="0">
-              <a:buNone/>
-            </a:pPr>
-            <a:r>
-              <a:rPr lang="en-US" sz="1400" b="1" dirty="0">
-                <a:solidFill>
-                  <a:srgbClr val="FFFFFF"/>
-                </a:solidFill>
-                <a:latin typeface="Yu Gothic" pitchFamily="34" charset="0"/>
-                <a:ea typeface="Yu Gothic" pitchFamily="34" charset="-122"/>
-                <a:cs typeface="Yu Gothic" pitchFamily="34" charset="-120"/>
-              </a:rPr>
-              <a:t>3</a:t>
-            </a:r>
-            <a:endParaRPr lang="en-US" sz="1400" dirty="0"/>
-          </a:p>
-        </p:txBody>
-      </p:sp>
-      <p:sp>
-        <p:nvSpPr>
-          <p:cNvPr id="18" name="Text 16"/>
-          <p:cNvSpPr txBox="1"/>
-          <p:nvPr/>
-        </p:nvSpPr>
-        <p:spPr>
-          <a:xfrm>
-            <a:off x="8275320" y="3035808"/>
-            <a:ext cx="2834640" cy="777240"/>
-          </a:xfrm>
-          <a:prstGeom prst="rect">
-            <a:avLst/>
-          </a:prstGeom>
-          <a:noFill/>
-          <a:ln/>
-        </p:spPr>
-        <p:txBody>
-          <a:bodyPr wrap="square" lIns="0" tIns="0" rIns="0" bIns="0" rtlCol="0" anchor="ctr"/>
-          <a:lstStyle/>
-          <a:p>
-            <a:pPr indent="0" marL="0">
-              <a:lnSpc>
-                <a:spcPct val="125000"/>
-              </a:lnSpc>
-              <a:buNone/>
-            </a:pPr>
-            <a:r>
-              <a:rPr lang="en-US" sz="1500" b="1" dirty="0">
-                <a:solidFill>
-                  <a:srgbClr val="23201D"/>
-                </a:solidFill>
-                <a:latin typeface="Yu Gothic" pitchFamily="34" charset="0"/>
-                <a:ea typeface="Yu Gothic" pitchFamily="34" charset="-122"/>
-                <a:cs typeface="Yu Gothic" pitchFamily="34" charset="-120"/>
-              </a:rPr>
-              <a:t>1つ、その場で解かせる</a:t>
-            </a:r>
-            <a:endParaRPr lang="en-US" sz="1500" dirty="0"/>
-          </a:p>
-        </p:txBody>
-      </p:sp>
-      <p:sp>
-        <p:nvSpPr>
-          <p:cNvPr id="19" name="Text 17"/>
-          <p:cNvSpPr txBox="1"/>
-          <p:nvPr/>
-        </p:nvSpPr>
-        <p:spPr>
-          <a:xfrm>
-            <a:off x="8275320" y="3822192"/>
-            <a:ext cx="2834640" cy="960120"/>
-          </a:xfrm>
-          <a:prstGeom prst="rect">
-            <a:avLst/>
-          </a:prstGeom>
-          <a:noFill/>
-          <a:ln/>
-        </p:spPr>
-        <p:txBody>
-          <a:bodyPr wrap="square" lIns="0" tIns="0" rIns="0" bIns="0" rtlCol="0" anchor="ctr"/>
-          <a:lstStyle/>
-          <a:p>
-            <a:pPr indent="0" marL="0">
-              <a:lnSpc>
-                <a:spcPct val="130000"/>
-              </a:lnSpc>
-              <a:buNone/>
-            </a:pPr>
-            <a:r>
-              <a:rPr lang="en-US" sz="1200" dirty="0">
-                <a:solidFill>
-                  <a:srgbClr val="5A534A"/>
-                </a:solidFill>
-                <a:latin typeface="Yu Gothic" pitchFamily="34" charset="0"/>
-                <a:ea typeface="Yu Gothic" pitchFamily="34" charset="-122"/>
-                <a:cs typeface="Yu Gothic" pitchFamily="34" charset="-120"/>
-              </a:rPr>
-              <a:t>上位3つのうち1つを、今日のうちに動かして持ち帰ります</a:t>
-            </a:r>
-            <a:endParaRPr lang="en-US" sz="1200" dirty="0"/>
+              <a:t>「型が決まっているか」と「間違えたときの痛み」の2列が、優先順位を決めます。時間の長さだけで選ぶと、たいてい難しすぎる業務を選んでしまいます。</a:t>
+            </a:r>
+            <a:endParaRPr lang="en-US" sz="1250" dirty="0"/>
           </a:p>
         </p:txBody>
       </p:sp>
@@ -4524,8 +6121,8 @@
         </p:nvSpPr>
         <p:spPr>
           <a:xfrm>
-            <a:off x="777240" y="6355080"/>
-            <a:ext cx="7424928" cy="274320"/>
+            <a:off x="777240" y="6382512"/>
+            <a:ext cx="7424928" cy="256032"/>
           </a:xfrm>
           <a:prstGeom prst="rect">
             <a:avLst/>
@@ -4563,8 +6160,8 @@
         </p:nvSpPr>
         <p:spPr>
           <a:xfrm>
-            <a:off x="8202168" y="6355080"/>
-            <a:ext cx="3182112" cy="274320"/>
+            <a:off x="8202168" y="6382512"/>
+            <a:ext cx="3182112" cy="256032"/>
           </a:xfrm>
           <a:prstGeom prst="rect">
             <a:avLst/>
@@ -4588,7 +6185,7 @@
                 <a:ea typeface="Yu Gothic" pitchFamily="34" charset="-122"/>
                 <a:cs typeface="Yu Gothic" pitchFamily="34" charset="-120"/>
               </a:rPr>
-              <a:t>演習</a:t>
+              <a:t>あてはめ</a:t>
             </a:r>
             <a:endParaRPr lang="en-US" sz="900" dirty="0"/>
           </a:p>
@@ -4634,7 +6231,7 @@
         </p:nvSpPr>
         <p:spPr>
           <a:xfrm>
-            <a:off x="777240" y="822960"/>
+            <a:off x="777240" y="566928"/>
             <a:ext cx="10607040" cy="274320"/>
           </a:xfrm>
           <a:prstGeom prst="rect">
@@ -4653,13 +6250,13 @@
             <a:r>
               <a:rPr lang="en-US" sz="1100" b="1" spc="250" kern="0" dirty="0">
                 <a:solidFill>
-                  <a:srgbClr val="B04A2F"/>
-                </a:solidFill>
-                <a:latin typeface="Yu Gothic" pitchFamily="34" charset="0"/>
-                <a:ea typeface="Yu Gothic" pitchFamily="34" charset="-122"/>
-                <a:cs typeface="Yu Gothic" pitchFamily="34" charset="-120"/>
-              </a:rPr>
-              <a:t>ここだけは</a:t>
+                  <a:srgbClr val="8A8177"/>
+                </a:solidFill>
+                <a:latin typeface="Yu Gothic" pitchFamily="34" charset="0"/>
+                <a:ea typeface="Yu Gothic" pitchFamily="34" charset="-122"/>
+                <a:cs typeface="Yu Gothic" pitchFamily="34" charset="-120"/>
+              </a:rPr>
+              <a:t>実演 ①</a:t>
             </a:r>
             <a:endParaRPr lang="en-US" sz="1100" dirty="0"/>
           </a:p>
@@ -4673,24 +6270,24 @@
         </p:nvSpPr>
         <p:spPr>
           <a:xfrm>
-            <a:off x="777240" y="1188720"/>
-            <a:ext cx="9546336" cy="822960"/>
-          </a:xfrm>
-          <a:prstGeom prst="rect">
-            <a:avLst/>
-          </a:prstGeom>
-          <a:noFill/>
-          <a:ln/>
-        </p:spPr>
-        <p:txBody>
-          <a:bodyPr wrap="square" lIns="0" tIns="0" rIns="0" bIns="0" rtlCol="0" anchor="ctr"/>
-          <a:lstStyle/>
-          <a:p>
-            <a:pPr indent="0" marL="0">
-              <a:buNone/>
-            </a:pPr>
-            <a:r>
-              <a:rPr lang="en-US" sz="3000" b="1" dirty="0">
+            <a:off x="777240" y="896112"/>
+            <a:ext cx="10607040" cy="640080"/>
+          </a:xfrm>
+          <a:prstGeom prst="rect">
+            <a:avLst/>
+          </a:prstGeom>
+          <a:noFill/>
+          <a:ln/>
+        </p:spPr>
+        <p:txBody>
+          <a:bodyPr wrap="square" lIns="0" tIns="0" rIns="0" bIns="0" rtlCol="0" anchor="ctr"/>
+          <a:lstStyle/>
+          <a:p>
+            <a:pPr indent="0" marL="0">
+              <a:buNone/>
+            </a:pPr>
+            <a:r>
+              <a:rPr lang="en-US" sz="2600" b="1" dirty="0">
                 <a:solidFill>
                   <a:srgbClr val="23201D"/>
                 </a:solidFill>
@@ -4698,9 +6295,9 @@
                 <a:ea typeface="Yu Gothic" pitchFamily="34" charset="-122"/>
                 <a:cs typeface="Yu Gothic" pitchFamily="34" charset="-120"/>
               </a:rPr>
-              <a:t>今日の持ち物</a:t>
-            </a:r>
-            <a:endParaRPr lang="en-US" sz="3000" dirty="0"/>
+              <a:t>やりがちな選び方</a:t>
+            </a:r>
+            <a:endParaRPr lang="en-US" sz="2600" dirty="0"/>
           </a:p>
         </p:txBody>
       </p:sp>
@@ -4712,14 +6309,352 @@
         </p:nvSpPr>
         <p:spPr>
           <a:xfrm>
-            <a:off x="777240" y="2331720"/>
-            <a:ext cx="64008" cy="2011680"/>
+            <a:off x="777240" y="1691640"/>
+            <a:ext cx="4879238" cy="1371600"/>
           </a:xfrm>
           <a:prstGeom prst="rect">
             <a:avLst/>
           </a:prstGeom>
           <a:solidFill>
-            <a:srgbClr val="B04A2F"/>
+            <a:srgbClr val="EDE7DB"/>
+          </a:solidFill>
+          <a:ln w="15875">
+            <a:solidFill>
+              <a:srgbClr val="8A8177"/>
+            </a:solidFill>
+            <a:prstDash val="solid"/>
+          </a:ln>
+        </p:spPr>
+      </p:sp>
+      <p:sp>
+        <p:nvSpPr>
+          <p:cNvPr id="5" name="Text 3"/>
+          <p:cNvSpPr txBox="1"/>
+          <p:nvPr/>
+        </p:nvSpPr>
+        <p:spPr>
+          <a:xfrm>
+            <a:off x="1005840" y="1783080"/>
+            <a:ext cx="1828800" cy="274320"/>
+          </a:xfrm>
+          <a:prstGeom prst="rect">
+            <a:avLst/>
+          </a:prstGeom>
+          <a:noFill/>
+          <a:ln/>
+        </p:spPr>
+        <p:txBody>
+          <a:bodyPr wrap="square" lIns="0" tIns="0" rIns="0" bIns="0" rtlCol="0" anchor="ctr"/>
+          <a:lstStyle/>
+          <a:p>
+            <a:pPr indent="0" marL="0">
+              <a:buNone/>
+            </a:pPr>
+            <a:r>
+              <a:rPr lang="en-US" sz="1000" b="1" spc="200" kern="0" dirty="0">
+                <a:solidFill>
+                  <a:srgbClr val="8A8177"/>
+                </a:solidFill>
+                <a:latin typeface="Yu Gothic" pitchFamily="34" charset="0"/>
+                <a:ea typeface="Yu Gothic" pitchFamily="34" charset="-122"/>
+                <a:cs typeface="Yu Gothic" pitchFamily="34" charset="-120"/>
+              </a:rPr>
+              <a:t>入力</a:t>
+            </a:r>
+            <a:endParaRPr lang="en-US" sz="1000" dirty="0"/>
+          </a:p>
+        </p:txBody>
+      </p:sp>
+      <p:sp>
+        <p:nvSpPr>
+          <p:cNvPr id="6" name="Text 4"/>
+          <p:cNvSpPr txBox="1"/>
+          <p:nvPr/>
+        </p:nvSpPr>
+        <p:spPr>
+          <a:xfrm>
+            <a:off x="1005840" y="2084832"/>
+            <a:ext cx="4422038" cy="868680"/>
+          </a:xfrm>
+          <a:prstGeom prst="rect">
+            <a:avLst/>
+          </a:prstGeom>
+          <a:noFill/>
+          <a:ln/>
+        </p:spPr>
+        <p:txBody>
+          <a:bodyPr wrap="square" lIns="0" tIns="0" rIns="0" bIns="0" rtlCol="0" anchor="ctr"/>
+          <a:lstStyle/>
+          <a:p>
+            <a:pPr indent="0" marL="0">
+              <a:lnSpc>
+                <a:spcPct val="125000"/>
+              </a:lnSpc>
+              <a:buNone/>
+            </a:pPr>
+            <a:r>
+              <a:rPr lang="en-US" sz="1200" dirty="0">
+                <a:solidFill>
+                  <a:srgbClr val="23201D"/>
+                </a:solidFill>
+                <a:latin typeface="Consolas" pitchFamily="34" charset="0"/>
+                <a:ea typeface="Consolas" pitchFamily="34" charset="-122"/>
+                <a:cs typeface="Consolas" pitchFamily="34" charset="-120"/>
+              </a:rPr>
+              <a:t>「一番時間がかかっている業務からAI化する」</a:t>
+            </a:r>
+            <a:endParaRPr lang="en-US" sz="1200" dirty="0"/>
+          </a:p>
+        </p:txBody>
+      </p:sp>
+      <p:sp>
+        <p:nvSpPr>
+          <p:cNvPr id="7" name="Shape 5"/>
+          <p:cNvSpPr/>
+          <p:nvPr/>
+        </p:nvSpPr>
+        <p:spPr>
+          <a:xfrm>
+            <a:off x="6080760" y="1691640"/>
+            <a:ext cx="5303520" cy="3017520"/>
+          </a:xfrm>
+          <a:prstGeom prst="rect">
+            <a:avLst/>
+          </a:prstGeom>
+          <a:solidFill>
+            <a:srgbClr val="FFFFFF"/>
+          </a:solidFill>
+          <a:ln w="12700">
+            <a:solidFill>
+              <a:srgbClr val="EDE7DB"/>
+            </a:solidFill>
+            <a:prstDash val="solid"/>
+          </a:ln>
+        </p:spPr>
+      </p:sp>
+      <p:sp>
+        <p:nvSpPr>
+          <p:cNvPr id="8" name="Text 6"/>
+          <p:cNvSpPr txBox="1"/>
+          <p:nvPr/>
+        </p:nvSpPr>
+        <p:spPr>
+          <a:xfrm>
+            <a:off x="6309360" y="1783080"/>
+            <a:ext cx="2743200" cy="274320"/>
+          </a:xfrm>
+          <a:prstGeom prst="rect">
+            <a:avLst/>
+          </a:prstGeom>
+          <a:noFill/>
+          <a:ln/>
+        </p:spPr>
+        <p:txBody>
+          <a:bodyPr wrap="square" lIns="0" tIns="0" rIns="0" bIns="0" rtlCol="0" anchor="ctr"/>
+          <a:lstStyle/>
+          <a:p>
+            <a:pPr indent="0" marL="0">
+              <a:buNone/>
+            </a:pPr>
+            <a:r>
+              <a:rPr lang="en-US" sz="1000" b="1" spc="200" kern="0" dirty="0">
+                <a:solidFill>
+                  <a:srgbClr val="8A8177"/>
+                </a:solidFill>
+                <a:latin typeface="Yu Gothic" pitchFamily="34" charset="0"/>
+                <a:ea typeface="Yu Gothic" pitchFamily="34" charset="-122"/>
+                <a:cs typeface="Yu Gothic" pitchFamily="34" charset="-120"/>
+              </a:rPr>
+              <a:t>出てくるもの</a:t>
+            </a:r>
+            <a:endParaRPr lang="en-US" sz="1000" dirty="0"/>
+          </a:p>
+        </p:txBody>
+      </p:sp>
+      <p:sp>
+        <p:nvSpPr>
+          <p:cNvPr id="9" name="Text 7"/>
+          <p:cNvSpPr txBox="1"/>
+          <p:nvPr/>
+        </p:nvSpPr>
+        <p:spPr>
+          <a:xfrm>
+            <a:off x="6309360" y="2148840"/>
+            <a:ext cx="4846320" cy="566928"/>
+          </a:xfrm>
+          <a:prstGeom prst="rect">
+            <a:avLst/>
+          </a:prstGeom>
+          <a:noFill/>
+          <a:ln/>
+        </p:spPr>
+        <p:txBody>
+          <a:bodyPr wrap="square" lIns="0" tIns="0" rIns="0" bIns="0" rtlCol="0" anchor="ctr"/>
+          <a:lstStyle/>
+          <a:p>
+            <a:pPr indent="0" marL="0">
+              <a:lnSpc>
+                <a:spcPct val="125000"/>
+              </a:lnSpc>
+              <a:buNone/>
+            </a:pPr>
+            <a:r>
+              <a:rPr lang="en-US" sz="1250" dirty="0">
+                <a:solidFill>
+                  <a:srgbClr val="23201D"/>
+                </a:solidFill>
+                <a:latin typeface="Yu Gothic" pitchFamily="34" charset="0"/>
+                <a:ea typeface="Yu Gothic" pitchFamily="34" charset="-122"/>
+                <a:cs typeface="Yu Gothic" pitchFamily="34" charset="-120"/>
+              </a:rPr>
+              <a:t>・選ばれたのは、与信判断や採用面接の評価</a:t>
+            </a:r>
+            <a:endParaRPr lang="en-US" sz="1250" dirty="0"/>
+          </a:p>
+        </p:txBody>
+      </p:sp>
+      <p:sp>
+        <p:nvSpPr>
+          <p:cNvPr id="10" name="Text 8"/>
+          <p:cNvSpPr txBox="1"/>
+          <p:nvPr/>
+        </p:nvSpPr>
+        <p:spPr>
+          <a:xfrm>
+            <a:off x="6309360" y="2752344"/>
+            <a:ext cx="4846320" cy="566928"/>
+          </a:xfrm>
+          <a:prstGeom prst="rect">
+            <a:avLst/>
+          </a:prstGeom>
+          <a:noFill/>
+          <a:ln/>
+        </p:spPr>
+        <p:txBody>
+          <a:bodyPr wrap="square" lIns="0" tIns="0" rIns="0" bIns="0" rtlCol="0" anchor="ctr"/>
+          <a:lstStyle/>
+          <a:p>
+            <a:pPr indent="0" marL="0">
+              <a:lnSpc>
+                <a:spcPct val="125000"/>
+              </a:lnSpc>
+              <a:buNone/>
+            </a:pPr>
+            <a:r>
+              <a:rPr lang="en-US" sz="1250" dirty="0">
+                <a:solidFill>
+                  <a:srgbClr val="23201D"/>
+                </a:solidFill>
+                <a:latin typeface="Yu Gothic" pitchFamily="34" charset="0"/>
+                <a:ea typeface="Yu Gothic" pitchFamily="34" charset="-122"/>
+                <a:cs typeface="Yu Gothic" pitchFamily="34" charset="-120"/>
+              </a:rPr>
+              <a:t>・型が決まっておらず、毎回考えている</a:t>
+            </a:r>
+            <a:endParaRPr lang="en-US" sz="1250" dirty="0"/>
+          </a:p>
+        </p:txBody>
+      </p:sp>
+      <p:sp>
+        <p:nvSpPr>
+          <p:cNvPr id="11" name="Text 9"/>
+          <p:cNvSpPr txBox="1"/>
+          <p:nvPr/>
+        </p:nvSpPr>
+        <p:spPr>
+          <a:xfrm>
+            <a:off x="6309360" y="3355848"/>
+            <a:ext cx="4846320" cy="566928"/>
+          </a:xfrm>
+          <a:prstGeom prst="rect">
+            <a:avLst/>
+          </a:prstGeom>
+          <a:noFill/>
+          <a:ln/>
+        </p:spPr>
+        <p:txBody>
+          <a:bodyPr wrap="square" lIns="0" tIns="0" rIns="0" bIns="0" rtlCol="0" anchor="ctr"/>
+          <a:lstStyle/>
+          <a:p>
+            <a:pPr indent="0" marL="0">
+              <a:lnSpc>
+                <a:spcPct val="125000"/>
+              </a:lnSpc>
+              <a:buNone/>
+            </a:pPr>
+            <a:r>
+              <a:rPr lang="en-US" sz="1250" dirty="0">
+                <a:solidFill>
+                  <a:srgbClr val="23201D"/>
+                </a:solidFill>
+                <a:latin typeface="Yu Gothic" pitchFamily="34" charset="0"/>
+                <a:ea typeface="Yu Gothic" pitchFamily="34" charset="-122"/>
+                <a:cs typeface="Yu Gothic" pitchFamily="34" charset="-120"/>
+              </a:rPr>
+              <a:t>・間違えると取り返しがつかない</a:t>
+            </a:r>
+            <a:endParaRPr lang="en-US" sz="1250" dirty="0"/>
+          </a:p>
+        </p:txBody>
+      </p:sp>
+      <p:sp>
+        <p:nvSpPr>
+          <p:cNvPr id="12" name="Text 10"/>
+          <p:cNvSpPr txBox="1"/>
+          <p:nvPr/>
+        </p:nvSpPr>
+        <p:spPr>
+          <a:xfrm>
+            <a:off x="6309360" y="3959352"/>
+            <a:ext cx="4846320" cy="566928"/>
+          </a:xfrm>
+          <a:prstGeom prst="rect">
+            <a:avLst/>
+          </a:prstGeom>
+          <a:noFill/>
+          <a:ln/>
+        </p:spPr>
+        <p:txBody>
+          <a:bodyPr wrap="square" lIns="0" tIns="0" rIns="0" bIns="0" rtlCol="0" anchor="ctr"/>
+          <a:lstStyle/>
+          <a:p>
+            <a:pPr indent="0" marL="0">
+              <a:lnSpc>
+                <a:spcPct val="125000"/>
+              </a:lnSpc>
+              <a:buNone/>
+            </a:pPr>
+            <a:r>
+              <a:rPr lang="en-US" sz="1250" dirty="0">
+                <a:solidFill>
+                  <a:srgbClr val="23201D"/>
+                </a:solidFill>
+                <a:latin typeface="Yu Gothic" pitchFamily="34" charset="0"/>
+                <a:ea typeface="Yu Gothic" pitchFamily="34" charset="-122"/>
+                <a:cs typeface="Yu Gothic" pitchFamily="34" charset="-120"/>
+              </a:rPr>
+              <a:t>・結果、AIの答えを誰も信用しない</a:t>
+            </a:r>
+            <a:endParaRPr lang="en-US" sz="1250" dirty="0"/>
+          </a:p>
+        </p:txBody>
+      </p:sp>
+      <p:sp>
+        <p:nvSpPr>
+          <p:cNvPr id="13" name="Shape 11"/>
+          <p:cNvSpPr/>
+          <p:nvPr/>
+        </p:nvSpPr>
+        <p:spPr>
+          <a:xfrm>
+            <a:off x="777240" y="3291840"/>
+            <a:ext cx="4879238" cy="1417320"/>
+          </a:xfrm>
+          <a:prstGeom prst="rect">
+            <a:avLst/>
+          </a:prstGeom>
+          <a:solidFill>
+            <a:srgbClr val="E4DFD5"/>
           </a:solidFill>
           <a:ln w="12700">
             <a:solidFill>
@@ -4731,14 +6666,14 @@
       </p:sp>
       <p:sp>
         <p:nvSpPr>
-          <p:cNvPr id="5" name="Text 3"/>
-          <p:cNvSpPr txBox="1"/>
-          <p:nvPr/>
-        </p:nvSpPr>
-        <p:spPr>
-          <a:xfrm>
-            <a:off x="1188720" y="2331720"/>
-            <a:ext cx="9966960" cy="2011680"/>
+          <p:cNvPr id="14" name="Text 12"/>
+          <p:cNvSpPr txBox="1"/>
+          <p:nvPr/>
+        </p:nvSpPr>
+        <p:spPr>
+          <a:xfrm>
+            <a:off x="1005840" y="3383280"/>
+            <a:ext cx="4422038" cy="1234440"/>
           </a:xfrm>
           <a:prstGeom prst="rect">
             <a:avLst/>
@@ -4752,12 +6687,12 @@
           <a:p>
             <a:pPr indent="0" marL="0">
               <a:lnSpc>
-                <a:spcPct val="160000"/>
+                <a:spcPct val="135000"/>
               </a:lnSpc>
               <a:buNone/>
             </a:pPr>
             <a:r>
-              <a:rPr lang="en-US" sz="1700" dirty="0">
+              <a:rPr lang="en-US" sz="1250" dirty="0">
                 <a:solidFill>
                   <a:srgbClr val="3F3933"/>
                 </a:solidFill>
@@ -4765,22 +6700,86 @@
                 <a:ea typeface="Yu Gothic" pitchFamily="34" charset="-122"/>
                 <a:cs typeface="Yu Gothic" pitchFamily="34" charset="-120"/>
               </a:rPr>
-              <a:t>パソコン（ChatGPTにログインした状態）／社外向けの文書1つ／月次の数字が入った表1つ／時間を取られている業務3つ。きれいに整えていただく必要はありません。</a:t>
-            </a:r>
-            <a:endParaRPr lang="en-US" sz="1700" dirty="0"/>
-          </a:p>
-        </p:txBody>
-      </p:sp>
-      <p:sp>
-        <p:nvSpPr>
-          <p:cNvPr id="6" name="Text 4"/>
-          <p:cNvSpPr txBox="1"/>
-          <p:nvPr/>
-        </p:nvSpPr>
-        <p:spPr>
-          <a:xfrm>
-            <a:off x="777240" y="6355080"/>
-            <a:ext cx="7424928" cy="274320"/>
+              <a:t>時間の長さは、AI化のしやすさとは関係ありません。長い業務ほど判断が多く含まれています。</a:t>
+            </a:r>
+            <a:endParaRPr lang="en-US" sz="1250" dirty="0"/>
+          </a:p>
+        </p:txBody>
+      </p:sp>
+      <p:sp>
+        <p:nvSpPr>
+          <p:cNvPr id="15" name="Shape 13"/>
+          <p:cNvSpPr/>
+          <p:nvPr/>
+        </p:nvSpPr>
+        <p:spPr>
+          <a:xfrm>
+            <a:off x="777240" y="4983480"/>
+            <a:ext cx="10607040" cy="685800"/>
+          </a:xfrm>
+          <a:prstGeom prst="rect">
+            <a:avLst/>
+          </a:prstGeom>
+          <a:solidFill>
+            <a:srgbClr val="8A8177"/>
+          </a:solidFill>
+          <a:ln w="12700">
+            <a:solidFill>
+              <a:srgbClr val="333333"/>
+            </a:solidFill>
+            <a:prstDash val="solid"/>
+          </a:ln>
+        </p:spPr>
+      </p:sp>
+      <p:sp>
+        <p:nvSpPr>
+          <p:cNvPr id="16" name="Text 14"/>
+          <p:cNvSpPr txBox="1"/>
+          <p:nvPr/>
+        </p:nvSpPr>
+        <p:spPr>
+          <a:xfrm>
+            <a:off x="1097280" y="4983480"/>
+            <a:ext cx="9966960" cy="685800"/>
+          </a:xfrm>
+          <a:prstGeom prst="rect">
+            <a:avLst/>
+          </a:prstGeom>
+          <a:noFill/>
+          <a:ln/>
+        </p:spPr>
+        <p:txBody>
+          <a:bodyPr wrap="square" lIns="0" tIns="0" rIns="0" bIns="0" rtlCol="0" anchor="ctr"/>
+          <a:lstStyle/>
+          <a:p>
+            <a:pPr indent="0" marL="0">
+              <a:buNone/>
+            </a:pPr>
+            <a:r>
+              <a:rPr lang="en-US" sz="1450" b="1" dirty="0">
+                <a:solidFill>
+                  <a:srgbClr val="FFFFFF"/>
+                </a:solidFill>
+                <a:latin typeface="Yu Gothic" pitchFamily="34" charset="0"/>
+                <a:ea typeface="Yu Gothic" pitchFamily="34" charset="-122"/>
+                <a:cs typeface="Yu Gothic" pitchFamily="34" charset="-120"/>
+              </a:rPr>
+              <a:t>痛いところから手をつけると、最初の一手で失敗します</a:t>
+            </a:r>
+            <a:endParaRPr lang="en-US" sz="1450" dirty="0"/>
+          </a:p>
+        </p:txBody>
+      </p:sp>
+      <p:sp>
+        <p:nvSpPr>
+          <p:cNvPr id="17" name="Text 15"/>
+          <p:cNvSpPr txBox="1"/>
+          <p:nvPr/>
+        </p:nvSpPr>
+        <p:spPr>
+          <a:xfrm>
+            <a:off x="777240" y="6382512"/>
+            <a:ext cx="7424928" cy="256032"/>
           </a:xfrm>
           <a:prstGeom prst="rect">
             <a:avLst/>
@@ -4812,14 +6811,14 @@
       </p:sp>
       <p:sp>
         <p:nvSpPr>
-          <p:cNvPr id="7" name="Text 5"/>
-          <p:cNvSpPr txBox="1"/>
-          <p:nvPr/>
-        </p:nvSpPr>
-        <p:spPr>
-          <a:xfrm>
-            <a:off x="8202168" y="6355080"/>
-            <a:ext cx="3182112" cy="274320"/>
+          <p:cNvPr id="18" name="Text 16"/>
+          <p:cNvSpPr txBox="1"/>
+          <p:nvPr/>
+        </p:nvSpPr>
+        <p:spPr>
+          <a:xfrm>
+            <a:off x="8202168" y="6382512"/>
+            <a:ext cx="3182112" cy="256032"/>
           </a:xfrm>
           <a:prstGeom prst="rect">
             <a:avLst/>
@@ -4843,7 +6842,7 @@
                 <a:ea typeface="Yu Gothic" pitchFamily="34" charset="-122"/>
                 <a:cs typeface="Yu Gothic" pitchFamily="34" charset="-120"/>
               </a:rPr>
-              <a:t>ここだけは</a:t>
+              <a:t>実演 ①</a:t>
             </a:r>
             <a:endParaRPr lang="en-US" sz="900" dirty="0"/>
           </a:p>
@@ -4863,7 +6862,7 @@
     <p:bg>
       <p:bgPr>
         <a:solidFill>
-          <a:srgbClr val="23201D"/>
+          <a:srgbClr val="F6F2EA"/>
         </a:solidFill>
       </p:bgPr>
     </p:bg>
@@ -4889,34 +6888,34 @@
         </p:nvSpPr>
         <p:spPr>
           <a:xfrm>
-            <a:off x="777240" y="1371600"/>
-            <a:ext cx="10607040" cy="365760"/>
-          </a:xfrm>
-          <a:prstGeom prst="rect">
-            <a:avLst/>
-          </a:prstGeom>
-          <a:noFill/>
-          <a:ln/>
-        </p:spPr>
-        <p:txBody>
-          <a:bodyPr wrap="square" lIns="0" tIns="0" rIns="0" bIns="0" rtlCol="0" anchor="ctr"/>
-          <a:lstStyle/>
-          <a:p>
-            <a:pPr indent="0" marL="0">
-              <a:buNone/>
-            </a:pPr>
-            <a:r>
-              <a:rPr lang="en-US" sz="1200" b="1" spc="300" kern="0" dirty="0">
-                <a:solidFill>
-                  <a:srgbClr val="B04A2F"/>
-                </a:solidFill>
-                <a:latin typeface="Yu Gothic" pitchFamily="34" charset="0"/>
-                <a:ea typeface="Yu Gothic" pitchFamily="34" charset="-122"/>
-                <a:cs typeface="Yu Gothic" pitchFamily="34" charset="-120"/>
-              </a:rPr>
-              <a:t>今日の宿題</a:t>
-            </a:r>
-            <a:endParaRPr lang="en-US" sz="1200" dirty="0"/>
+            <a:off x="777240" y="566928"/>
+            <a:ext cx="10607040" cy="274320"/>
+          </a:xfrm>
+          <a:prstGeom prst="rect">
+            <a:avLst/>
+          </a:prstGeom>
+          <a:noFill/>
+          <a:ln/>
+        </p:spPr>
+        <p:txBody>
+          <a:bodyPr wrap="square" lIns="0" tIns="0" rIns="0" bIns="0" rtlCol="0" anchor="ctr"/>
+          <a:lstStyle/>
+          <a:p>
+            <a:pPr indent="0" marL="0">
+              <a:buNone/>
+            </a:pPr>
+            <a:r>
+              <a:rPr lang="en-US" sz="1100" b="1" spc="250" kern="0" dirty="0">
+                <a:solidFill>
+                  <a:srgbClr val="3B6B4A"/>
+                </a:solidFill>
+                <a:latin typeface="Yu Gothic" pitchFamily="34" charset="0"/>
+                <a:ea typeface="Yu Gothic" pitchFamily="34" charset="-122"/>
+                <a:cs typeface="Yu Gothic" pitchFamily="34" charset="-120"/>
+              </a:rPr>
+              <a:t>実演 ②</a:t>
+            </a:r>
+            <a:endParaRPr lang="en-US" sz="1100" dirty="0"/>
           </a:p>
         </p:txBody>
       </p:sp>
@@ -4928,7 +6927,7 @@
         </p:nvSpPr>
         <p:spPr>
           <a:xfrm>
-            <a:off x="777240" y="1783080"/>
+            <a:off x="777240" y="896112"/>
             <a:ext cx="10607040" cy="640080"/>
           </a:xfrm>
           <a:prstGeom prst="rect">
@@ -4945,17 +6944,17 @@
               <a:buNone/>
             </a:pPr>
             <a:r>
-              <a:rPr lang="en-US" sz="3200" b="1" dirty="0">
-                <a:solidFill>
-                  <a:srgbClr val="FFFFFF"/>
-                </a:solidFill>
-                <a:latin typeface="Yu Gothic" pitchFamily="34" charset="0"/>
-                <a:ea typeface="Yu Gothic" pitchFamily="34" charset="-122"/>
-                <a:cs typeface="Yu Gothic" pitchFamily="34" charset="-120"/>
-              </a:rPr>
-              <a:t>ひとつだけ</a:t>
-            </a:r>
-            <a:endParaRPr lang="en-US" sz="3200" dirty="0"/>
+              <a:rPr lang="en-US" sz="2600" b="1" dirty="0">
+                <a:solidFill>
+                  <a:srgbClr val="23201D"/>
+                </a:solidFill>
+                <a:latin typeface="Yu Gothic" pitchFamily="34" charset="0"/>
+                <a:ea typeface="Yu Gothic" pitchFamily="34" charset="-122"/>
+                <a:cs typeface="Yu Gothic" pitchFamily="34" charset="-120"/>
+              </a:rPr>
+              <a:t>実際の選び方</a:t>
+            </a:r>
+            <a:endParaRPr lang="en-US" sz="2600" dirty="0"/>
           </a:p>
         </p:txBody>
       </p:sp>
@@ -4967,18 +6966,124 @@
         </p:nvSpPr>
         <p:spPr>
           <a:xfrm>
-            <a:off x="777240" y="2743200"/>
-            <a:ext cx="10607040" cy="1463040"/>
+            <a:off x="777240" y="1691640"/>
+            <a:ext cx="4879238" cy="1371600"/>
           </a:xfrm>
           <a:prstGeom prst="rect">
             <a:avLst/>
           </a:prstGeom>
           <a:solidFill>
-            <a:srgbClr val="2E2A26"/>
+            <a:srgbClr val="FFFFFF"/>
+          </a:solidFill>
+          <a:ln w="15875">
+            <a:solidFill>
+              <a:srgbClr val="3B6B4A"/>
+            </a:solidFill>
+            <a:prstDash val="solid"/>
+          </a:ln>
+        </p:spPr>
+      </p:sp>
+      <p:sp>
+        <p:nvSpPr>
+          <p:cNvPr id="5" name="Text 3"/>
+          <p:cNvSpPr txBox="1"/>
+          <p:nvPr/>
+        </p:nvSpPr>
+        <p:spPr>
+          <a:xfrm>
+            <a:off x="1005840" y="1783080"/>
+            <a:ext cx="1828800" cy="274320"/>
+          </a:xfrm>
+          <a:prstGeom prst="rect">
+            <a:avLst/>
+          </a:prstGeom>
+          <a:noFill/>
+          <a:ln/>
+        </p:spPr>
+        <p:txBody>
+          <a:bodyPr wrap="square" lIns="0" tIns="0" rIns="0" bIns="0" rtlCol="0" anchor="ctr"/>
+          <a:lstStyle/>
+          <a:p>
+            <a:pPr indent="0" marL="0">
+              <a:buNone/>
+            </a:pPr>
+            <a:r>
+              <a:rPr lang="en-US" sz="1000" b="1" spc="200" kern="0" dirty="0">
+                <a:solidFill>
+                  <a:srgbClr val="3B6B4A"/>
+                </a:solidFill>
+                <a:latin typeface="Yu Gothic" pitchFamily="34" charset="0"/>
+                <a:ea typeface="Yu Gothic" pitchFamily="34" charset="-122"/>
+                <a:cs typeface="Yu Gothic" pitchFamily="34" charset="-120"/>
+              </a:rPr>
+              <a:t>入力</a:t>
+            </a:r>
+            <a:endParaRPr lang="en-US" sz="1000" dirty="0"/>
+          </a:p>
+        </p:txBody>
+      </p:sp>
+      <p:sp>
+        <p:nvSpPr>
+          <p:cNvPr id="6" name="Text 4"/>
+          <p:cNvSpPr txBox="1"/>
+          <p:nvPr/>
+        </p:nvSpPr>
+        <p:spPr>
+          <a:xfrm>
+            <a:off x="1005840" y="2084832"/>
+            <a:ext cx="4422038" cy="868680"/>
+          </a:xfrm>
+          <a:prstGeom prst="rect">
+            <a:avLst/>
+          </a:prstGeom>
+          <a:noFill/>
+          <a:ln/>
+        </p:spPr>
+        <p:txBody>
+          <a:bodyPr wrap="square" lIns="0" tIns="0" rIns="0" bIns="0" rtlCol="0" anchor="ctr"/>
+          <a:lstStyle/>
+          <a:p>
+            <a:pPr indent="0" marL="0">
+              <a:lnSpc>
+                <a:spcPct val="125000"/>
+              </a:lnSpc>
+              <a:buNone/>
+            </a:pPr>
+            <a:r>
+              <a:rPr lang="en-US" sz="1200" dirty="0">
+                <a:solidFill>
+                  <a:srgbClr val="23201D"/>
+                </a:solidFill>
+                <a:latin typeface="Consolas" pitchFamily="34" charset="0"/>
+                <a:ea typeface="Consolas" pitchFamily="34" charset="-122"/>
+                <a:cs typeface="Consolas" pitchFamily="34" charset="-120"/>
+              </a:rPr>
+              <a:t>「頻度が高く、型があり、間違えても取り返しがつくものから」</a:t>
+            </a:r>
+            <a:endParaRPr lang="en-US" sz="1200" dirty="0"/>
+          </a:p>
+        </p:txBody>
+      </p:sp>
+      <p:sp>
+        <p:nvSpPr>
+          <p:cNvPr id="7" name="Shape 5"/>
+          <p:cNvSpPr/>
+          <p:nvPr/>
+        </p:nvSpPr>
+        <p:spPr>
+          <a:xfrm>
+            <a:off x="6080760" y="1691640"/>
+            <a:ext cx="5303520" cy="3017520"/>
+          </a:xfrm>
+          <a:prstGeom prst="rect">
+            <a:avLst/>
+          </a:prstGeom>
+          <a:solidFill>
+            <a:srgbClr val="FFFFFF"/>
           </a:solidFill>
           <a:ln w="12700">
             <a:solidFill>
-              <a:srgbClr val="B04A2F"/>
+              <a:srgbClr val="EDE7DB"/>
             </a:solidFill>
             <a:prstDash val="solid"/>
           </a:ln>
@@ -4986,14 +7091,604 @@
       </p:sp>
       <p:sp>
         <p:nvSpPr>
+          <p:cNvPr id="8" name="Text 6"/>
+          <p:cNvSpPr txBox="1"/>
+          <p:nvPr/>
+        </p:nvSpPr>
+        <p:spPr>
+          <a:xfrm>
+            <a:off x="6309360" y="1783080"/>
+            <a:ext cx="2743200" cy="274320"/>
+          </a:xfrm>
+          <a:prstGeom prst="rect">
+            <a:avLst/>
+          </a:prstGeom>
+          <a:noFill/>
+          <a:ln/>
+        </p:spPr>
+        <p:txBody>
+          <a:bodyPr wrap="square" lIns="0" tIns="0" rIns="0" bIns="0" rtlCol="0" anchor="ctr"/>
+          <a:lstStyle/>
+          <a:p>
+            <a:pPr indent="0" marL="0">
+              <a:buNone/>
+            </a:pPr>
+            <a:r>
+              <a:rPr lang="en-US" sz="1000" b="1" spc="200" kern="0" dirty="0">
+                <a:solidFill>
+                  <a:srgbClr val="8A8177"/>
+                </a:solidFill>
+                <a:latin typeface="Yu Gothic" pitchFamily="34" charset="0"/>
+                <a:ea typeface="Yu Gothic" pitchFamily="34" charset="-122"/>
+                <a:cs typeface="Yu Gothic" pitchFamily="34" charset="-120"/>
+              </a:rPr>
+              <a:t>出てくるもの</a:t>
+            </a:r>
+            <a:endParaRPr lang="en-US" sz="1000" dirty="0"/>
+          </a:p>
+        </p:txBody>
+      </p:sp>
+      <p:sp>
+        <p:nvSpPr>
+          <p:cNvPr id="9" name="Text 7"/>
+          <p:cNvSpPr txBox="1"/>
+          <p:nvPr/>
+        </p:nvSpPr>
+        <p:spPr>
+          <a:xfrm>
+            <a:off x="6309360" y="2148840"/>
+            <a:ext cx="4846320" cy="566928"/>
+          </a:xfrm>
+          <a:prstGeom prst="rect">
+            <a:avLst/>
+          </a:prstGeom>
+          <a:noFill/>
+          <a:ln/>
+        </p:spPr>
+        <p:txBody>
+          <a:bodyPr wrap="square" lIns="0" tIns="0" rIns="0" bIns="0" rtlCol="0" anchor="ctr"/>
+          <a:lstStyle/>
+          <a:p>
+            <a:pPr indent="0" marL="0">
+              <a:lnSpc>
+                <a:spcPct val="125000"/>
+              </a:lnSpc>
+              <a:buNone/>
+            </a:pPr>
+            <a:r>
+              <a:rPr lang="en-US" sz="1250" dirty="0">
+                <a:solidFill>
+                  <a:srgbClr val="23201D"/>
+                </a:solidFill>
+                <a:latin typeface="Yu Gothic" pitchFamily="34" charset="0"/>
+                <a:ea typeface="Yu Gothic" pitchFamily="34" charset="-122"/>
+                <a:cs typeface="Yu Gothic" pitchFamily="34" charset="-120"/>
+              </a:rPr>
+              <a:t>・選ばれたのは、見積書の下書きと議事録</a:t>
+            </a:r>
+            <a:endParaRPr lang="en-US" sz="1250" dirty="0"/>
+          </a:p>
+        </p:txBody>
+      </p:sp>
+      <p:sp>
+        <p:nvSpPr>
+          <p:cNvPr id="10" name="Text 8"/>
+          <p:cNvSpPr txBox="1"/>
+          <p:nvPr/>
+        </p:nvSpPr>
+        <p:spPr>
+          <a:xfrm>
+            <a:off x="6309360" y="2752344"/>
+            <a:ext cx="4846320" cy="566928"/>
+          </a:xfrm>
+          <a:prstGeom prst="rect">
+            <a:avLst/>
+          </a:prstGeom>
+          <a:noFill/>
+          <a:ln/>
+        </p:spPr>
+        <p:txBody>
+          <a:bodyPr wrap="square" lIns="0" tIns="0" rIns="0" bIns="0" rtlCol="0" anchor="ctr"/>
+          <a:lstStyle/>
+          <a:p>
+            <a:pPr indent="0" marL="0">
+              <a:lnSpc>
+                <a:spcPct val="125000"/>
+              </a:lnSpc>
+              <a:buNone/>
+            </a:pPr>
+            <a:r>
+              <a:rPr lang="en-US" sz="1250" dirty="0">
+                <a:solidFill>
+                  <a:srgbClr val="23201D"/>
+                </a:solidFill>
+                <a:latin typeface="Yu Gothic" pitchFamily="34" charset="0"/>
+                <a:ea typeface="Yu Gothic" pitchFamily="34" charset="-122"/>
+                <a:cs typeface="Yu Gothic" pitchFamily="34" charset="-120"/>
+              </a:rPr>
+              <a:t>・毎週発生し、手順がほぼ同じ</a:t>
+            </a:r>
+            <a:endParaRPr lang="en-US" sz="1250" dirty="0"/>
+          </a:p>
+        </p:txBody>
+      </p:sp>
+      <p:sp>
+        <p:nvSpPr>
+          <p:cNvPr id="11" name="Text 9"/>
+          <p:cNvSpPr txBox="1"/>
+          <p:nvPr/>
+        </p:nvSpPr>
+        <p:spPr>
+          <a:xfrm>
+            <a:off x="6309360" y="3355848"/>
+            <a:ext cx="4846320" cy="566928"/>
+          </a:xfrm>
+          <a:prstGeom prst="rect">
+            <a:avLst/>
+          </a:prstGeom>
+          <a:noFill/>
+          <a:ln/>
+        </p:spPr>
+        <p:txBody>
+          <a:bodyPr wrap="square" lIns="0" tIns="0" rIns="0" bIns="0" rtlCol="0" anchor="ctr"/>
+          <a:lstStyle/>
+          <a:p>
+            <a:pPr indent="0" marL="0">
+              <a:lnSpc>
+                <a:spcPct val="125000"/>
+              </a:lnSpc>
+              <a:buNone/>
+            </a:pPr>
+            <a:r>
+              <a:rPr lang="en-US" sz="1250" dirty="0">
+                <a:solidFill>
+                  <a:srgbClr val="23201D"/>
+                </a:solidFill>
+                <a:latin typeface="Yu Gothic" pitchFamily="34" charset="0"/>
+                <a:ea typeface="Yu Gothic" pitchFamily="34" charset="-122"/>
+                <a:cs typeface="Yu Gothic" pitchFamily="34" charset="-120"/>
+              </a:rPr>
+              <a:t>・提出前に必ず人が見るので事故らない</a:t>
+            </a:r>
+            <a:endParaRPr lang="en-US" sz="1250" dirty="0"/>
+          </a:p>
+        </p:txBody>
+      </p:sp>
+      <p:sp>
+        <p:nvSpPr>
+          <p:cNvPr id="12" name="Text 10"/>
+          <p:cNvSpPr txBox="1"/>
+          <p:nvPr/>
+        </p:nvSpPr>
+        <p:spPr>
+          <a:xfrm>
+            <a:off x="6309360" y="3959352"/>
+            <a:ext cx="4846320" cy="566928"/>
+          </a:xfrm>
+          <a:prstGeom prst="rect">
+            <a:avLst/>
+          </a:prstGeom>
+          <a:noFill/>
+          <a:ln/>
+        </p:spPr>
+        <p:txBody>
+          <a:bodyPr wrap="square" lIns="0" tIns="0" rIns="0" bIns="0" rtlCol="0" anchor="ctr"/>
+          <a:lstStyle/>
+          <a:p>
+            <a:pPr indent="0" marL="0">
+              <a:lnSpc>
+                <a:spcPct val="125000"/>
+              </a:lnSpc>
+              <a:buNone/>
+            </a:pPr>
+            <a:r>
+              <a:rPr lang="en-US" sz="1250" dirty="0">
+                <a:solidFill>
+                  <a:srgbClr val="23201D"/>
+                </a:solidFill>
+                <a:latin typeface="Yu Gothic" pitchFamily="34" charset="0"/>
+                <a:ea typeface="Yu Gothic" pitchFamily="34" charset="-122"/>
+                <a:cs typeface="Yu Gothic" pitchFamily="34" charset="-120"/>
+              </a:rPr>
+              <a:t>・2週間で「楽になった」が実感できる</a:t>
+            </a:r>
+            <a:endParaRPr lang="en-US" sz="1250" dirty="0"/>
+          </a:p>
+        </p:txBody>
+      </p:sp>
+      <p:sp>
+        <p:nvSpPr>
+          <p:cNvPr id="13" name="Shape 11"/>
+          <p:cNvSpPr/>
+          <p:nvPr/>
+        </p:nvSpPr>
+        <p:spPr>
+          <a:xfrm>
+            <a:off x="777240" y="3291840"/>
+            <a:ext cx="4879238" cy="1417320"/>
+          </a:xfrm>
+          <a:prstGeom prst="rect">
+            <a:avLst/>
+          </a:prstGeom>
+          <a:solidFill>
+            <a:srgbClr val="E7F0E9"/>
+          </a:solidFill>
+          <a:ln w="12700">
+            <a:solidFill>
+              <a:srgbClr val="333333"/>
+            </a:solidFill>
+            <a:prstDash val="solid"/>
+          </a:ln>
+        </p:spPr>
+      </p:sp>
+      <p:sp>
+        <p:nvSpPr>
+          <p:cNvPr id="14" name="Text 12"/>
+          <p:cNvSpPr txBox="1"/>
+          <p:nvPr/>
+        </p:nvSpPr>
+        <p:spPr>
+          <a:xfrm>
+            <a:off x="1005840" y="3383280"/>
+            <a:ext cx="4422038" cy="1234440"/>
+          </a:xfrm>
+          <a:prstGeom prst="rect">
+            <a:avLst/>
+          </a:prstGeom>
+          <a:noFill/>
+          <a:ln/>
+        </p:spPr>
+        <p:txBody>
+          <a:bodyPr wrap="square" lIns="0" tIns="0" rIns="0" bIns="0" rtlCol="0" anchor="ctr"/>
+          <a:lstStyle/>
+          <a:p>
+            <a:pPr indent="0" marL="0">
+              <a:lnSpc>
+                <a:spcPct val="135000"/>
+              </a:lnSpc>
+              <a:buNone/>
+            </a:pPr>
+            <a:r>
+              <a:rPr lang="en-US" sz="1250" dirty="0">
+                <a:solidFill>
+                  <a:srgbClr val="3F3933"/>
+                </a:solidFill>
+                <a:latin typeface="Yu Gothic" pitchFamily="34" charset="0"/>
+                <a:ea typeface="Yu Gothic" pitchFamily="34" charset="-122"/>
+                <a:cs typeface="Yu Gothic" pitchFamily="34" charset="-120"/>
+              </a:rPr>
+              <a:t>最初の一手は、成果の大きさではなく「確実に成功すること」で選びます。1つ成功すると、社内の空気が変わります。</a:t>
+            </a:r>
+            <a:endParaRPr lang="en-US" sz="1250" dirty="0"/>
+          </a:p>
+        </p:txBody>
+      </p:sp>
+      <p:sp>
+        <p:nvSpPr>
+          <p:cNvPr id="15" name="Shape 13"/>
+          <p:cNvSpPr/>
+          <p:nvPr/>
+        </p:nvSpPr>
+        <p:spPr>
+          <a:xfrm>
+            <a:off x="777240" y="4983480"/>
+            <a:ext cx="10607040" cy="685800"/>
+          </a:xfrm>
+          <a:prstGeom prst="rect">
+            <a:avLst/>
+          </a:prstGeom>
+          <a:solidFill>
+            <a:srgbClr val="3B6B4A"/>
+          </a:solidFill>
+          <a:ln w="12700">
+            <a:solidFill>
+              <a:srgbClr val="333333"/>
+            </a:solidFill>
+            <a:prstDash val="solid"/>
+          </a:ln>
+        </p:spPr>
+      </p:sp>
+      <p:sp>
+        <p:nvSpPr>
+          <p:cNvPr id="16" name="Text 14"/>
+          <p:cNvSpPr txBox="1"/>
+          <p:nvPr/>
+        </p:nvSpPr>
+        <p:spPr>
+          <a:xfrm>
+            <a:off x="1097280" y="4983480"/>
+            <a:ext cx="9966960" cy="685800"/>
+          </a:xfrm>
+          <a:prstGeom prst="rect">
+            <a:avLst/>
+          </a:prstGeom>
+          <a:noFill/>
+          <a:ln/>
+        </p:spPr>
+        <p:txBody>
+          <a:bodyPr wrap="square" lIns="0" tIns="0" rIns="0" bIns="0" rtlCol="0" anchor="ctr"/>
+          <a:lstStyle/>
+          <a:p>
+            <a:pPr indent="0" marL="0">
+              <a:buNone/>
+            </a:pPr>
+            <a:r>
+              <a:rPr lang="en-US" sz="1450" b="1" dirty="0">
+                <a:solidFill>
+                  <a:srgbClr val="FFFFFF"/>
+                </a:solidFill>
+                <a:latin typeface="Yu Gothic" pitchFamily="34" charset="0"/>
+                <a:ea typeface="Yu Gothic" pitchFamily="34" charset="-122"/>
+                <a:cs typeface="Yu Gothic" pitchFamily="34" charset="-120"/>
+              </a:rPr>
+              <a:t>最初の1つは、成功が見えているものを選ぶ</a:t>
+            </a:r>
+            <a:endParaRPr lang="en-US" sz="1450" dirty="0"/>
+          </a:p>
+        </p:txBody>
+      </p:sp>
+      <p:sp>
+        <p:nvSpPr>
+          <p:cNvPr id="17" name="Text 15"/>
+          <p:cNvSpPr txBox="1"/>
+          <p:nvPr/>
+        </p:nvSpPr>
+        <p:spPr>
+          <a:xfrm>
+            <a:off x="777240" y="6382512"/>
+            <a:ext cx="7424928" cy="256032"/>
+          </a:xfrm>
+          <a:prstGeom prst="rect">
+            <a:avLst/>
+          </a:prstGeom>
+          <a:noFill/>
+          <a:ln/>
+        </p:spPr>
+        <p:txBody>
+          <a:bodyPr wrap="square" lIns="0" tIns="0" rIns="0" bIns="0" rtlCol="0" anchor="ctr"/>
+          <a:lstStyle/>
+          <a:p>
+            <a:pPr indent="0" marL="0">
+              <a:buNone/>
+            </a:pPr>
+            <a:r>
+              <a:rPr lang="en-US" sz="900" dirty="0">
+                <a:solidFill>
+                  <a:srgbClr val="8A8177"/>
+                </a:solidFill>
+                <a:latin typeface="Yu Gothic" pitchFamily="34" charset="0"/>
+                <a:ea typeface="Yu Gothic" pitchFamily="34" charset="-122"/>
+                <a:cs typeface="Yu Gothic" pitchFamily="34" charset="-120"/>
+              </a:rPr>
+              <a:t>第1回　現状把握と地図づくり</a:t>
+            </a:r>
+            <a:endParaRPr lang="en-US" sz="900" dirty="0"/>
+          </a:p>
+        </p:txBody>
+      </p:sp>
+      <p:sp>
+        <p:nvSpPr>
+          <p:cNvPr id="18" name="Text 16"/>
+          <p:cNvSpPr txBox="1"/>
+          <p:nvPr/>
+        </p:nvSpPr>
+        <p:spPr>
+          <a:xfrm>
+            <a:off x="8202168" y="6382512"/>
+            <a:ext cx="3182112" cy="256032"/>
+          </a:xfrm>
+          <a:prstGeom prst="rect">
+            <a:avLst/>
+          </a:prstGeom>
+          <a:noFill/>
+          <a:ln/>
+        </p:spPr>
+        <p:txBody>
+          <a:bodyPr wrap="square" lIns="0" tIns="0" rIns="0" bIns="0" rtlCol="0" anchor="ctr"/>
+          <a:lstStyle/>
+          <a:p>
+            <a:pPr algn="r" indent="0" marL="0">
+              <a:buNone/>
+            </a:pPr>
+            <a:r>
+              <a:rPr lang="en-US" sz="900" dirty="0">
+                <a:solidFill>
+                  <a:srgbClr val="8A8177"/>
+                </a:solidFill>
+                <a:latin typeface="Yu Gothic" pitchFamily="34" charset="0"/>
+                <a:ea typeface="Yu Gothic" pitchFamily="34" charset="-122"/>
+                <a:cs typeface="Yu Gothic" pitchFamily="34" charset="-120"/>
+              </a:rPr>
+              <a:t>実演 ②</a:t>
+            </a:r>
+            <a:endParaRPr lang="en-US" sz="900" dirty="0"/>
+          </a:p>
+        </p:txBody>
+      </p:sp>
+    </p:spTree>
+  </p:cSld>
+  <p:clrMapOvr>
+    <a:masterClrMapping/>
+  </p:clrMapOvr>
+</p:sld>
+</file>
+
+<file path=ppt/slides/slide8.xml><?xml version="1.0" encoding="utf-8"?>
+<p:sld xmlns:a="http://schemas.openxmlformats.org/drawingml/2006/main" xmlns:r="http://schemas.openxmlformats.org/officeDocument/2006/relationships" xmlns:p="http://schemas.openxmlformats.org/presentationml/2006/main">
+  <p:cSld name="Slide 8">
+    <p:bg>
+      <p:bgPr>
+        <a:solidFill>
+          <a:srgbClr val="F6F2EA"/>
+        </a:solidFill>
+      </p:bgPr>
+    </p:bg>
+    <p:spTree>
+      <p:nvGrpSpPr>
+        <p:cNvPr id="1" name=""/>
+        <p:cNvGrpSpPr/>
+        <p:nvPr/>
+      </p:nvGrpSpPr>
+      <p:grpSpPr>
+        <a:xfrm>
+          <a:off x="0" y="0"/>
+          <a:ext cx="0" cy="0"/>
+          <a:chOff x="0" y="0"/>
+          <a:chExt cx="0" cy="0"/>
+        </a:xfrm>
+      </p:grpSpPr>
+      <p:sp>
+        <p:nvSpPr>
+          <p:cNvPr id="2" name="Text 0"/>
+          <p:cNvSpPr txBox="1"/>
+          <p:nvPr/>
+        </p:nvSpPr>
+        <p:spPr>
+          <a:xfrm>
+            <a:off x="777240" y="566928"/>
+            <a:ext cx="10607040" cy="274320"/>
+          </a:xfrm>
+          <a:prstGeom prst="rect">
+            <a:avLst/>
+          </a:prstGeom>
+          <a:noFill/>
+          <a:ln/>
+        </p:spPr>
+        <p:txBody>
+          <a:bodyPr wrap="square" lIns="0" tIns="0" rIns="0" bIns="0" rtlCol="0" anchor="ctr"/>
+          <a:lstStyle/>
+          <a:p>
+            <a:pPr indent="0" marL="0">
+              <a:buNone/>
+            </a:pPr>
+            <a:r>
+              <a:rPr lang="en-US" sz="1100" b="1" spc="250" kern="0" dirty="0">
+                <a:solidFill>
+                  <a:srgbClr val="B04A2F"/>
+                </a:solidFill>
+                <a:latin typeface="Yu Gothic" pitchFamily="34" charset="0"/>
+                <a:ea typeface="Yu Gothic" pitchFamily="34" charset="-122"/>
+                <a:cs typeface="Yu Gothic" pitchFamily="34" charset="-120"/>
+              </a:rPr>
+              <a:t>つまずきやすいところ</a:t>
+            </a:r>
+            <a:endParaRPr lang="en-US" sz="1100" dirty="0"/>
+          </a:p>
+        </p:txBody>
+      </p:sp>
+      <p:sp>
+        <p:nvSpPr>
+          <p:cNvPr id="3" name="Text 1"/>
+          <p:cNvSpPr txBox="1"/>
+          <p:nvPr/>
+        </p:nvSpPr>
+        <p:spPr>
+          <a:xfrm>
+            <a:off x="777240" y="896112"/>
+            <a:ext cx="10607040" cy="640080"/>
+          </a:xfrm>
+          <a:prstGeom prst="rect">
+            <a:avLst/>
+          </a:prstGeom>
+          <a:noFill/>
+          <a:ln/>
+        </p:spPr>
+        <p:txBody>
+          <a:bodyPr wrap="square" lIns="0" tIns="0" rIns="0" bIns="0" rtlCol="0" anchor="ctr"/>
+          <a:lstStyle/>
+          <a:p>
+            <a:pPr indent="0" marL="0">
+              <a:buNone/>
+            </a:pPr>
+            <a:r>
+              <a:rPr lang="en-US" sz="2600" b="1" dirty="0">
+                <a:solidFill>
+                  <a:srgbClr val="23201D"/>
+                </a:solidFill>
+                <a:latin typeface="Yu Gothic" pitchFamily="34" charset="0"/>
+                <a:ea typeface="Yu Gothic" pitchFamily="34" charset="-122"/>
+                <a:cs typeface="Yu Gothic" pitchFamily="34" charset="-120"/>
+              </a:rPr>
+              <a:t>この回で、よく起きること</a:t>
+            </a:r>
+            <a:endParaRPr lang="en-US" sz="2600" dirty="0"/>
+          </a:p>
+        </p:txBody>
+      </p:sp>
+      <p:sp>
+        <p:nvSpPr>
+          <p:cNvPr id="4" name="Shape 2"/>
+          <p:cNvSpPr/>
+          <p:nvPr/>
+        </p:nvSpPr>
+        <p:spPr>
+          <a:xfrm>
+            <a:off x="777240" y="1737360"/>
+            <a:ext cx="10607040" cy="1078992"/>
+          </a:xfrm>
+          <a:prstGeom prst="rect">
+            <a:avLst/>
+          </a:prstGeom>
+          <a:solidFill>
+            <a:srgbClr val="FFFFFF"/>
+          </a:solidFill>
+          <a:ln w="12700">
+            <a:solidFill>
+              <a:srgbClr val="EDE7DB"/>
+            </a:solidFill>
+            <a:prstDash val="solid"/>
+          </a:ln>
+        </p:spPr>
+      </p:sp>
+      <p:sp>
+        <p:nvSpPr>
           <p:cNvPr id="5" name="Text 3"/>
           <p:cNvSpPr txBox="1"/>
           <p:nvPr/>
         </p:nvSpPr>
         <p:spPr>
           <a:xfrm>
-            <a:off x="1234440" y="2880360"/>
-            <a:ext cx="9692640" cy="1188720"/>
+            <a:off x="1051560" y="1856232"/>
+            <a:ext cx="1463040" cy="256032"/>
+          </a:xfrm>
+          <a:prstGeom prst="rect">
+            <a:avLst/>
+          </a:prstGeom>
+          <a:noFill/>
+          <a:ln/>
+        </p:spPr>
+        <p:txBody>
+          <a:bodyPr wrap="square" lIns="0" tIns="0" rIns="0" bIns="0" rtlCol="0" anchor="ctr"/>
+          <a:lstStyle/>
+          <a:p>
+            <a:pPr indent="0" marL="0">
+              <a:buNone/>
+            </a:pPr>
+            <a:r>
+              <a:rPr lang="en-US" sz="900" b="1" spc="150" kern="0" dirty="0">
+                <a:solidFill>
+                  <a:srgbClr val="8A8177"/>
+                </a:solidFill>
+                <a:latin typeface="Yu Gothic" pitchFamily="34" charset="0"/>
+                <a:ea typeface="Yu Gothic" pitchFamily="34" charset="-122"/>
+                <a:cs typeface="Yu Gothic" pitchFamily="34" charset="-120"/>
+              </a:rPr>
+              <a:t>こうなったら</a:t>
+            </a:r>
+            <a:endParaRPr lang="en-US" sz="900" dirty="0"/>
+          </a:p>
+        </p:txBody>
+      </p:sp>
+      <p:sp>
+        <p:nvSpPr>
+          <p:cNvPr id="6" name="Text 4"/>
+          <p:cNvSpPr txBox="1"/>
+          <p:nvPr/>
+        </p:nvSpPr>
+        <p:spPr>
+          <a:xfrm>
+            <a:off x="1051560" y="2121408"/>
+            <a:ext cx="4454957" cy="566928"/>
           </a:xfrm>
           <a:prstGeom prst="rect">
             <a:avLst/>
@@ -5007,12 +7702,858 @@
           <a:p>
             <a:pPr indent="0" marL="0">
               <a:lnSpc>
-                <a:spcPct val="140000"/>
+                <a:spcPct val="120000"/>
               </a:lnSpc>
               <a:buNone/>
             </a:pPr>
             <a:r>
-              <a:rPr lang="en-US" sz="1900" b="1" dirty="0">
+              <a:rPr lang="en-US" sz="1350" b="1" dirty="0">
+                <a:solidFill>
+                  <a:srgbClr val="23201D"/>
+                </a:solidFill>
+                <a:latin typeface="Yu Gothic" pitchFamily="34" charset="0"/>
+                <a:ea typeface="Yu Gothic" pitchFamily="34" charset="-122"/>
+                <a:cs typeface="Yu Gothic" pitchFamily="34" charset="-120"/>
+              </a:rPr>
+              <a:t>「大した使い方をしていないので」と実演を渋られる</a:t>
+            </a:r>
+            <a:endParaRPr lang="en-US" sz="1350" dirty="0"/>
+          </a:p>
+        </p:txBody>
+      </p:sp>
+      <p:sp>
+        <p:nvSpPr>
+          <p:cNvPr id="7" name="Shape 5"/>
+          <p:cNvSpPr/>
+          <p:nvPr/>
+        </p:nvSpPr>
+        <p:spPr>
+          <a:xfrm>
+            <a:off x="5762549" y="1847088"/>
+            <a:ext cx="18288" cy="859536"/>
+          </a:xfrm>
+          <a:prstGeom prst="rect">
+            <a:avLst/>
+          </a:prstGeom>
+          <a:solidFill>
+            <a:srgbClr val="EDE7DB"/>
+          </a:solidFill>
+          <a:ln w="12700">
+            <a:solidFill>
+              <a:srgbClr val="333333"/>
+            </a:solidFill>
+            <a:prstDash val="solid"/>
+          </a:ln>
+        </p:spPr>
+      </p:sp>
+      <p:sp>
+        <p:nvSpPr>
+          <p:cNvPr id="8" name="Text 6"/>
+          <p:cNvSpPr txBox="1"/>
+          <p:nvPr/>
+        </p:nvSpPr>
+        <p:spPr>
+          <a:xfrm>
+            <a:off x="6080760" y="1856232"/>
+            <a:ext cx="1463040" cy="256032"/>
+          </a:xfrm>
+          <a:prstGeom prst="rect">
+            <a:avLst/>
+          </a:prstGeom>
+          <a:noFill/>
+          <a:ln/>
+        </p:spPr>
+        <p:txBody>
+          <a:bodyPr wrap="square" lIns="0" tIns="0" rIns="0" bIns="0" rtlCol="0" anchor="ctr"/>
+          <a:lstStyle/>
+          <a:p>
+            <a:pPr indent="0" marL="0">
+              <a:buNone/>
+            </a:pPr>
+            <a:r>
+              <a:rPr lang="en-US" sz="900" b="1" spc="150" kern="0" dirty="0">
+                <a:solidFill>
+                  <a:srgbClr val="B04A2F"/>
+                </a:solidFill>
+                <a:latin typeface="Yu Gothic" pitchFamily="34" charset="0"/>
+                <a:ea typeface="Yu Gothic" pitchFamily="34" charset="-122"/>
+                <a:cs typeface="Yu Gothic" pitchFamily="34" charset="-120"/>
+              </a:rPr>
+              <a:t>こうする</a:t>
+            </a:r>
+            <a:endParaRPr lang="en-US" sz="900" dirty="0"/>
+          </a:p>
+        </p:txBody>
+      </p:sp>
+      <p:sp>
+        <p:nvSpPr>
+          <p:cNvPr id="9" name="Text 7"/>
+          <p:cNvSpPr txBox="1"/>
+          <p:nvPr/>
+        </p:nvSpPr>
+        <p:spPr>
+          <a:xfrm>
+            <a:off x="6080760" y="2121408"/>
+            <a:ext cx="5091379" cy="566928"/>
+          </a:xfrm>
+          <a:prstGeom prst="rect">
+            <a:avLst/>
+          </a:prstGeom>
+          <a:noFill/>
+          <a:ln/>
+        </p:spPr>
+        <p:txBody>
+          <a:bodyPr wrap="square" lIns="0" tIns="0" rIns="0" bIns="0" rtlCol="0" anchor="ctr"/>
+          <a:lstStyle/>
+          <a:p>
+            <a:pPr indent="0" marL="0">
+              <a:lnSpc>
+                <a:spcPct val="125000"/>
+              </a:lnSpc>
+              <a:buNone/>
+            </a:pPr>
+            <a:r>
+              <a:rPr lang="en-US" sz="1250" dirty="0">
+                <a:solidFill>
+                  <a:srgbClr val="3F3933"/>
+                </a:solidFill>
+                <a:latin typeface="Yu Gothic" pitchFamily="34" charset="0"/>
+                <a:ea typeface="Yu Gothic" pitchFamily="34" charset="-122"/>
+                <a:cs typeface="Yu Gothic" pitchFamily="34" charset="-120"/>
+              </a:rPr>
+              <a:t>下手な使い方を見たいのではなく、どこを飛ばせるかを見たい、と目的を言い換えます</a:t>
+            </a:r>
+            <a:endParaRPr lang="en-US" sz="1250" dirty="0"/>
+          </a:p>
+        </p:txBody>
+      </p:sp>
+      <p:sp>
+        <p:nvSpPr>
+          <p:cNvPr id="10" name="Shape 8"/>
+          <p:cNvSpPr/>
+          <p:nvPr/>
+        </p:nvSpPr>
+        <p:spPr>
+          <a:xfrm>
+            <a:off x="777240" y="2944368"/>
+            <a:ext cx="10607040" cy="1078992"/>
+          </a:xfrm>
+          <a:prstGeom prst="rect">
+            <a:avLst/>
+          </a:prstGeom>
+          <a:solidFill>
+            <a:srgbClr val="FFFFFF"/>
+          </a:solidFill>
+          <a:ln w="12700">
+            <a:solidFill>
+              <a:srgbClr val="EDE7DB"/>
+            </a:solidFill>
+            <a:prstDash val="solid"/>
+          </a:ln>
+        </p:spPr>
+      </p:sp>
+      <p:sp>
+        <p:nvSpPr>
+          <p:cNvPr id="11" name="Text 9"/>
+          <p:cNvSpPr txBox="1"/>
+          <p:nvPr/>
+        </p:nvSpPr>
+        <p:spPr>
+          <a:xfrm>
+            <a:off x="1051560" y="3063240"/>
+            <a:ext cx="1463040" cy="256032"/>
+          </a:xfrm>
+          <a:prstGeom prst="rect">
+            <a:avLst/>
+          </a:prstGeom>
+          <a:noFill/>
+          <a:ln/>
+        </p:spPr>
+        <p:txBody>
+          <a:bodyPr wrap="square" lIns="0" tIns="0" rIns="0" bIns="0" rtlCol="0" anchor="ctr"/>
+          <a:lstStyle/>
+          <a:p>
+            <a:pPr indent="0" marL="0">
+              <a:buNone/>
+            </a:pPr>
+            <a:r>
+              <a:rPr lang="en-US" sz="900" b="1" spc="150" kern="0" dirty="0">
+                <a:solidFill>
+                  <a:srgbClr val="8A8177"/>
+                </a:solidFill>
+                <a:latin typeface="Yu Gothic" pitchFamily="34" charset="0"/>
+                <a:ea typeface="Yu Gothic" pitchFamily="34" charset="-122"/>
+                <a:cs typeface="Yu Gothic" pitchFamily="34" charset="-120"/>
+              </a:rPr>
+              <a:t>こうなったら</a:t>
+            </a:r>
+            <a:endParaRPr lang="en-US" sz="900" dirty="0"/>
+          </a:p>
+        </p:txBody>
+      </p:sp>
+      <p:sp>
+        <p:nvSpPr>
+          <p:cNvPr id="12" name="Text 10"/>
+          <p:cNvSpPr txBox="1"/>
+          <p:nvPr/>
+        </p:nvSpPr>
+        <p:spPr>
+          <a:xfrm>
+            <a:off x="1051560" y="3328416"/>
+            <a:ext cx="4454957" cy="566928"/>
+          </a:xfrm>
+          <a:prstGeom prst="rect">
+            <a:avLst/>
+          </a:prstGeom>
+          <a:noFill/>
+          <a:ln/>
+        </p:spPr>
+        <p:txBody>
+          <a:bodyPr wrap="square" lIns="0" tIns="0" rIns="0" bIns="0" rtlCol="0" anchor="ctr"/>
+          <a:lstStyle/>
+          <a:p>
+            <a:pPr indent="0" marL="0">
+              <a:lnSpc>
+                <a:spcPct val="120000"/>
+              </a:lnSpc>
+              <a:buNone/>
+            </a:pPr>
+            <a:r>
+              <a:rPr lang="en-US" sz="1350" b="1" dirty="0">
+                <a:solidFill>
+                  <a:srgbClr val="23201D"/>
+                </a:solidFill>
+                <a:latin typeface="Yu Gothic" pitchFamily="34" charset="0"/>
+                <a:ea typeface="Yu Gothic" pitchFamily="34" charset="-122"/>
+                <a:cs typeface="Yu Gothic" pitchFamily="34" charset="-120"/>
+              </a:rPr>
+              <a:t>実データが機密で出せない</a:t>
+            </a:r>
+            <a:endParaRPr lang="en-US" sz="1350" dirty="0"/>
+          </a:p>
+        </p:txBody>
+      </p:sp>
+      <p:sp>
+        <p:nvSpPr>
+          <p:cNvPr id="13" name="Shape 11"/>
+          <p:cNvSpPr/>
+          <p:nvPr/>
+        </p:nvSpPr>
+        <p:spPr>
+          <a:xfrm>
+            <a:off x="5762549" y="3054096"/>
+            <a:ext cx="18288" cy="859536"/>
+          </a:xfrm>
+          <a:prstGeom prst="rect">
+            <a:avLst/>
+          </a:prstGeom>
+          <a:solidFill>
+            <a:srgbClr val="EDE7DB"/>
+          </a:solidFill>
+          <a:ln w="12700">
+            <a:solidFill>
+              <a:srgbClr val="333333"/>
+            </a:solidFill>
+            <a:prstDash val="solid"/>
+          </a:ln>
+        </p:spPr>
+      </p:sp>
+      <p:sp>
+        <p:nvSpPr>
+          <p:cNvPr id="14" name="Text 12"/>
+          <p:cNvSpPr txBox="1"/>
+          <p:nvPr/>
+        </p:nvSpPr>
+        <p:spPr>
+          <a:xfrm>
+            <a:off x="6080760" y="3063240"/>
+            <a:ext cx="1463040" cy="256032"/>
+          </a:xfrm>
+          <a:prstGeom prst="rect">
+            <a:avLst/>
+          </a:prstGeom>
+          <a:noFill/>
+          <a:ln/>
+        </p:spPr>
+        <p:txBody>
+          <a:bodyPr wrap="square" lIns="0" tIns="0" rIns="0" bIns="0" rtlCol="0" anchor="ctr"/>
+          <a:lstStyle/>
+          <a:p>
+            <a:pPr indent="0" marL="0">
+              <a:buNone/>
+            </a:pPr>
+            <a:r>
+              <a:rPr lang="en-US" sz="900" b="1" spc="150" kern="0" dirty="0">
+                <a:solidFill>
+                  <a:srgbClr val="B04A2F"/>
+                </a:solidFill>
+                <a:latin typeface="Yu Gothic" pitchFamily="34" charset="0"/>
+                <a:ea typeface="Yu Gothic" pitchFamily="34" charset="-122"/>
+                <a:cs typeface="Yu Gothic" pitchFamily="34" charset="-120"/>
+              </a:rPr>
+              <a:t>こうする</a:t>
+            </a:r>
+            <a:endParaRPr lang="en-US" sz="900" dirty="0"/>
+          </a:p>
+        </p:txBody>
+      </p:sp>
+      <p:sp>
+        <p:nvSpPr>
+          <p:cNvPr id="15" name="Text 13"/>
+          <p:cNvSpPr txBox="1"/>
+          <p:nvPr/>
+        </p:nvSpPr>
+        <p:spPr>
+          <a:xfrm>
+            <a:off x="6080760" y="3328416"/>
+            <a:ext cx="5091379" cy="566928"/>
+          </a:xfrm>
+          <a:prstGeom prst="rect">
+            <a:avLst/>
+          </a:prstGeom>
+          <a:noFill/>
+          <a:ln/>
+        </p:spPr>
+        <p:txBody>
+          <a:bodyPr wrap="square" lIns="0" tIns="0" rIns="0" bIns="0" rtlCol="0" anchor="ctr"/>
+          <a:lstStyle/>
+          <a:p>
+            <a:pPr indent="0" marL="0">
+              <a:lnSpc>
+                <a:spcPct val="125000"/>
+              </a:lnSpc>
+              <a:buNone/>
+            </a:pPr>
+            <a:r>
+              <a:rPr lang="en-US" sz="1250" dirty="0">
+                <a:solidFill>
+                  <a:srgbClr val="3F3933"/>
+                </a:solidFill>
+                <a:latin typeface="Yu Gothic" pitchFamily="34" charset="0"/>
+                <a:ea typeface="Yu Gothic" pitchFamily="34" charset="-122"/>
+                <a:cs typeface="Yu Gothic" pitchFamily="34" charset="-120"/>
+              </a:rPr>
+              <a:t>その場で伏せ方をお伝えします。社名はA社、金額は桁だけ。この作業自体が今日の学びになります</a:t>
+            </a:r>
+            <a:endParaRPr lang="en-US" sz="1250" dirty="0"/>
+          </a:p>
+        </p:txBody>
+      </p:sp>
+      <p:sp>
+        <p:nvSpPr>
+          <p:cNvPr id="16" name="Shape 14"/>
+          <p:cNvSpPr/>
+          <p:nvPr/>
+        </p:nvSpPr>
+        <p:spPr>
+          <a:xfrm>
+            <a:off x="777240" y="4151376"/>
+            <a:ext cx="10607040" cy="1078992"/>
+          </a:xfrm>
+          <a:prstGeom prst="rect">
+            <a:avLst/>
+          </a:prstGeom>
+          <a:solidFill>
+            <a:srgbClr val="FFFFFF"/>
+          </a:solidFill>
+          <a:ln w="12700">
+            <a:solidFill>
+              <a:srgbClr val="EDE7DB"/>
+            </a:solidFill>
+            <a:prstDash val="solid"/>
+          </a:ln>
+        </p:spPr>
+      </p:sp>
+      <p:sp>
+        <p:nvSpPr>
+          <p:cNvPr id="17" name="Text 15"/>
+          <p:cNvSpPr txBox="1"/>
+          <p:nvPr/>
+        </p:nvSpPr>
+        <p:spPr>
+          <a:xfrm>
+            <a:off x="1051560" y="4270248"/>
+            <a:ext cx="1463040" cy="256032"/>
+          </a:xfrm>
+          <a:prstGeom prst="rect">
+            <a:avLst/>
+          </a:prstGeom>
+          <a:noFill/>
+          <a:ln/>
+        </p:spPr>
+        <p:txBody>
+          <a:bodyPr wrap="square" lIns="0" tIns="0" rIns="0" bIns="0" rtlCol="0" anchor="ctr"/>
+          <a:lstStyle/>
+          <a:p>
+            <a:pPr indent="0" marL="0">
+              <a:buNone/>
+            </a:pPr>
+            <a:r>
+              <a:rPr lang="en-US" sz="900" b="1" spc="150" kern="0" dirty="0">
+                <a:solidFill>
+                  <a:srgbClr val="8A8177"/>
+                </a:solidFill>
+                <a:latin typeface="Yu Gothic" pitchFamily="34" charset="0"/>
+                <a:ea typeface="Yu Gothic" pitchFamily="34" charset="-122"/>
+                <a:cs typeface="Yu Gothic" pitchFamily="34" charset="-120"/>
+              </a:rPr>
+              <a:t>こうなったら</a:t>
+            </a:r>
+            <a:endParaRPr lang="en-US" sz="900" dirty="0"/>
+          </a:p>
+        </p:txBody>
+      </p:sp>
+      <p:sp>
+        <p:nvSpPr>
+          <p:cNvPr id="18" name="Text 16"/>
+          <p:cNvSpPr txBox="1"/>
+          <p:nvPr/>
+        </p:nvSpPr>
+        <p:spPr>
+          <a:xfrm>
+            <a:off x="1051560" y="4535424"/>
+            <a:ext cx="4454957" cy="566928"/>
+          </a:xfrm>
+          <a:prstGeom prst="rect">
+            <a:avLst/>
+          </a:prstGeom>
+          <a:noFill/>
+          <a:ln/>
+        </p:spPr>
+        <p:txBody>
+          <a:bodyPr wrap="square" lIns="0" tIns="0" rIns="0" bIns="0" rtlCol="0" anchor="ctr"/>
+          <a:lstStyle/>
+          <a:p>
+            <a:pPr indent="0" marL="0">
+              <a:lnSpc>
+                <a:spcPct val="120000"/>
+              </a:lnSpc>
+              <a:buNone/>
+            </a:pPr>
+            <a:r>
+              <a:rPr lang="en-US" sz="1350" b="1" dirty="0">
+                <a:solidFill>
+                  <a:srgbClr val="23201D"/>
+                </a:solidFill>
+                <a:latin typeface="Yu Gothic" pitchFamily="34" charset="0"/>
+                <a:ea typeface="Yu Gothic" pitchFamily="34" charset="-122"/>
+                <a:cs typeface="Yu Gothic" pitchFamily="34" charset="-120"/>
+              </a:rPr>
+              <a:t>候補が3つに絞れず、10個出てくる</a:t>
+            </a:r>
+            <a:endParaRPr lang="en-US" sz="1350" dirty="0"/>
+          </a:p>
+        </p:txBody>
+      </p:sp>
+      <p:sp>
+        <p:nvSpPr>
+          <p:cNvPr id="19" name="Shape 17"/>
+          <p:cNvSpPr/>
+          <p:nvPr/>
+        </p:nvSpPr>
+        <p:spPr>
+          <a:xfrm>
+            <a:off x="5762549" y="4261104"/>
+            <a:ext cx="18288" cy="859536"/>
+          </a:xfrm>
+          <a:prstGeom prst="rect">
+            <a:avLst/>
+          </a:prstGeom>
+          <a:solidFill>
+            <a:srgbClr val="EDE7DB"/>
+          </a:solidFill>
+          <a:ln w="12700">
+            <a:solidFill>
+              <a:srgbClr val="333333"/>
+            </a:solidFill>
+            <a:prstDash val="solid"/>
+          </a:ln>
+        </p:spPr>
+      </p:sp>
+      <p:sp>
+        <p:nvSpPr>
+          <p:cNvPr id="20" name="Text 18"/>
+          <p:cNvSpPr txBox="1"/>
+          <p:nvPr/>
+        </p:nvSpPr>
+        <p:spPr>
+          <a:xfrm>
+            <a:off x="6080760" y="4270248"/>
+            <a:ext cx="1463040" cy="256032"/>
+          </a:xfrm>
+          <a:prstGeom prst="rect">
+            <a:avLst/>
+          </a:prstGeom>
+          <a:noFill/>
+          <a:ln/>
+        </p:spPr>
+        <p:txBody>
+          <a:bodyPr wrap="square" lIns="0" tIns="0" rIns="0" bIns="0" rtlCol="0" anchor="ctr"/>
+          <a:lstStyle/>
+          <a:p>
+            <a:pPr indent="0" marL="0">
+              <a:buNone/>
+            </a:pPr>
+            <a:r>
+              <a:rPr lang="en-US" sz="900" b="1" spc="150" kern="0" dirty="0">
+                <a:solidFill>
+                  <a:srgbClr val="B04A2F"/>
+                </a:solidFill>
+                <a:latin typeface="Yu Gothic" pitchFamily="34" charset="0"/>
+                <a:ea typeface="Yu Gothic" pitchFamily="34" charset="-122"/>
+                <a:cs typeface="Yu Gothic" pitchFamily="34" charset="-120"/>
+              </a:rPr>
+              <a:t>こうする</a:t>
+            </a:r>
+            <a:endParaRPr lang="en-US" sz="900" dirty="0"/>
+          </a:p>
+        </p:txBody>
+      </p:sp>
+      <p:sp>
+        <p:nvSpPr>
+          <p:cNvPr id="21" name="Text 19"/>
+          <p:cNvSpPr txBox="1"/>
+          <p:nvPr/>
+        </p:nvSpPr>
+        <p:spPr>
+          <a:xfrm>
+            <a:off x="6080760" y="4535424"/>
+            <a:ext cx="5091379" cy="566928"/>
+          </a:xfrm>
+          <a:prstGeom prst="rect">
+            <a:avLst/>
+          </a:prstGeom>
+          <a:noFill/>
+          <a:ln/>
+        </p:spPr>
+        <p:txBody>
+          <a:bodyPr wrap="square" lIns="0" tIns="0" rIns="0" bIns="0" rtlCol="0" anchor="ctr"/>
+          <a:lstStyle/>
+          <a:p>
+            <a:pPr indent="0" marL="0">
+              <a:lnSpc>
+                <a:spcPct val="125000"/>
+              </a:lnSpc>
+              <a:buNone/>
+            </a:pPr>
+            <a:r>
+              <a:rPr lang="en-US" sz="1250" dirty="0">
+                <a:solidFill>
+                  <a:srgbClr val="3F3933"/>
+                </a:solidFill>
+                <a:latin typeface="Yu Gothic" pitchFamily="34" charset="0"/>
+                <a:ea typeface="Yu Gothic" pitchFamily="34" charset="-122"/>
+                <a:cs typeface="Yu Gothic" pitchFamily="34" charset="-120"/>
+              </a:rPr>
+              <a:t>絞るのは今日の仕事です。3条件で機械的に落とし、残ったものから頻度順に3つ取ります</a:t>
+            </a:r>
+            <a:endParaRPr lang="en-US" sz="1250" dirty="0"/>
+          </a:p>
+        </p:txBody>
+      </p:sp>
+      <p:sp>
+        <p:nvSpPr>
+          <p:cNvPr id="22" name="Text 20"/>
+          <p:cNvSpPr txBox="1"/>
+          <p:nvPr/>
+        </p:nvSpPr>
+        <p:spPr>
+          <a:xfrm>
+            <a:off x="777240" y="6382512"/>
+            <a:ext cx="7424928" cy="256032"/>
+          </a:xfrm>
+          <a:prstGeom prst="rect">
+            <a:avLst/>
+          </a:prstGeom>
+          <a:noFill/>
+          <a:ln/>
+        </p:spPr>
+        <p:txBody>
+          <a:bodyPr wrap="square" lIns="0" tIns="0" rIns="0" bIns="0" rtlCol="0" anchor="ctr"/>
+          <a:lstStyle/>
+          <a:p>
+            <a:pPr indent="0" marL="0">
+              <a:buNone/>
+            </a:pPr>
+            <a:r>
+              <a:rPr lang="en-US" sz="900" dirty="0">
+                <a:solidFill>
+                  <a:srgbClr val="8A8177"/>
+                </a:solidFill>
+                <a:latin typeface="Yu Gothic" pitchFamily="34" charset="0"/>
+                <a:ea typeface="Yu Gothic" pitchFamily="34" charset="-122"/>
+                <a:cs typeface="Yu Gothic" pitchFamily="34" charset="-120"/>
+              </a:rPr>
+              <a:t>第1回　現状把握と地図づくり</a:t>
+            </a:r>
+            <a:endParaRPr lang="en-US" sz="900" dirty="0"/>
+          </a:p>
+        </p:txBody>
+      </p:sp>
+      <p:sp>
+        <p:nvSpPr>
+          <p:cNvPr id="23" name="Text 21"/>
+          <p:cNvSpPr txBox="1"/>
+          <p:nvPr/>
+        </p:nvSpPr>
+        <p:spPr>
+          <a:xfrm>
+            <a:off x="8202168" y="6382512"/>
+            <a:ext cx="3182112" cy="256032"/>
+          </a:xfrm>
+          <a:prstGeom prst="rect">
+            <a:avLst/>
+          </a:prstGeom>
+          <a:noFill/>
+          <a:ln/>
+        </p:spPr>
+        <p:txBody>
+          <a:bodyPr wrap="square" lIns="0" tIns="0" rIns="0" bIns="0" rtlCol="0" anchor="ctr"/>
+          <a:lstStyle/>
+          <a:p>
+            <a:pPr algn="r" indent="0" marL="0">
+              <a:buNone/>
+            </a:pPr>
+            <a:r>
+              <a:rPr lang="en-US" sz="900" dirty="0">
+                <a:solidFill>
+                  <a:srgbClr val="8A8177"/>
+                </a:solidFill>
+                <a:latin typeface="Yu Gothic" pitchFamily="34" charset="0"/>
+                <a:ea typeface="Yu Gothic" pitchFamily="34" charset="-122"/>
+                <a:cs typeface="Yu Gothic" pitchFamily="34" charset="-120"/>
+              </a:rPr>
+              <a:t>つまずき</a:t>
+            </a:r>
+            <a:endParaRPr lang="en-US" sz="900" dirty="0"/>
+          </a:p>
+        </p:txBody>
+      </p:sp>
+    </p:spTree>
+  </p:cSld>
+  <p:clrMapOvr>
+    <a:masterClrMapping/>
+  </p:clrMapOvr>
+</p:sld>
+</file>
+
+<file path=ppt/slides/slide9.xml><?xml version="1.0" encoding="utf-8"?>
+<p:sld xmlns:a="http://schemas.openxmlformats.org/drawingml/2006/main" xmlns:r="http://schemas.openxmlformats.org/officeDocument/2006/relationships" xmlns:p="http://schemas.openxmlformats.org/presentationml/2006/main">
+  <p:cSld name="Slide 9">
+    <p:bg>
+      <p:bgPr>
+        <a:solidFill>
+          <a:srgbClr val="F6F2EA"/>
+        </a:solidFill>
+      </p:bgPr>
+    </p:bg>
+    <p:spTree>
+      <p:nvGrpSpPr>
+        <p:cNvPr id="1" name=""/>
+        <p:cNvGrpSpPr/>
+        <p:nvPr/>
+      </p:nvGrpSpPr>
+      <p:grpSpPr>
+        <a:xfrm>
+          <a:off x="0" y="0"/>
+          <a:ext cx="0" cy="0"/>
+          <a:chOff x="0" y="0"/>
+          <a:chExt cx="0" cy="0"/>
+        </a:xfrm>
+      </p:grpSpPr>
+      <p:sp>
+        <p:nvSpPr>
+          <p:cNvPr id="2" name="Text 0"/>
+          <p:cNvSpPr txBox="1"/>
+          <p:nvPr/>
+        </p:nvSpPr>
+        <p:spPr>
+          <a:xfrm>
+            <a:off x="777240" y="566928"/>
+            <a:ext cx="10607040" cy="274320"/>
+          </a:xfrm>
+          <a:prstGeom prst="rect">
+            <a:avLst/>
+          </a:prstGeom>
+          <a:noFill/>
+          <a:ln/>
+        </p:spPr>
+        <p:txBody>
+          <a:bodyPr wrap="square" lIns="0" tIns="0" rIns="0" bIns="0" rtlCol="0" anchor="ctr"/>
+          <a:lstStyle/>
+          <a:p>
+            <a:pPr indent="0" marL="0">
+              <a:buNone/>
+            </a:pPr>
+            <a:r>
+              <a:rPr lang="en-US" sz="1100" b="1" spc="250" kern="0" dirty="0">
+                <a:solidFill>
+                  <a:srgbClr val="2F4F6B"/>
+                </a:solidFill>
+                <a:latin typeface="Yu Gothic" pitchFamily="34" charset="0"/>
+                <a:ea typeface="Yu Gothic" pitchFamily="34" charset="-122"/>
+                <a:cs typeface="Yu Gothic" pitchFamily="34" charset="-120"/>
+              </a:rPr>
+              <a:t>演習</a:t>
+            </a:r>
+            <a:endParaRPr lang="en-US" sz="1100" dirty="0"/>
+          </a:p>
+        </p:txBody>
+      </p:sp>
+      <p:sp>
+        <p:nvSpPr>
+          <p:cNvPr id="3" name="Text 1"/>
+          <p:cNvSpPr txBox="1"/>
+          <p:nvPr/>
+        </p:nvSpPr>
+        <p:spPr>
+          <a:xfrm>
+            <a:off x="777240" y="896112"/>
+            <a:ext cx="10607040" cy="640080"/>
+          </a:xfrm>
+          <a:prstGeom prst="rect">
+            <a:avLst/>
+          </a:prstGeom>
+          <a:noFill/>
+          <a:ln/>
+        </p:spPr>
+        <p:txBody>
+          <a:bodyPr wrap="square" lIns="0" tIns="0" rIns="0" bIns="0" rtlCol="0" anchor="ctr"/>
+          <a:lstStyle/>
+          <a:p>
+            <a:pPr indent="0" marL="0">
+              <a:buNone/>
+            </a:pPr>
+            <a:r>
+              <a:rPr lang="en-US" sz="2600" b="1" dirty="0">
+                <a:solidFill>
+                  <a:srgbClr val="23201D"/>
+                </a:solidFill>
+                <a:latin typeface="Yu Gothic" pitchFamily="34" charset="0"/>
+                <a:ea typeface="Yu Gothic" pitchFamily="34" charset="-122"/>
+                <a:cs typeface="Yu Gothic" pitchFamily="34" charset="-120"/>
+              </a:rPr>
+              <a:t>今日、一緒にやること</a:t>
+            </a:r>
+            <a:endParaRPr lang="en-US" sz="2600" dirty="0"/>
+          </a:p>
+        </p:txBody>
+      </p:sp>
+      <p:sp>
+        <p:nvSpPr>
+          <p:cNvPr id="4" name="Text 2"/>
+          <p:cNvSpPr txBox="1"/>
+          <p:nvPr/>
+        </p:nvSpPr>
+        <p:spPr>
+          <a:xfrm>
+            <a:off x="777240" y="1572768"/>
+            <a:ext cx="10607040" cy="320040"/>
+          </a:xfrm>
+          <a:prstGeom prst="rect">
+            <a:avLst/>
+          </a:prstGeom>
+          <a:noFill/>
+          <a:ln/>
+        </p:spPr>
+        <p:txBody>
+          <a:bodyPr wrap="square" lIns="0" tIns="0" rIns="0" bIns="0" rtlCol="0" anchor="ctr"/>
+          <a:lstStyle/>
+          <a:p>
+            <a:pPr indent="0" marL="0">
+              <a:buNone/>
+            </a:pPr>
+            <a:r>
+              <a:rPr lang="en-US" sz="1250" b="1" dirty="0">
+                <a:solidFill>
+                  <a:srgbClr val="2F4F6B"/>
+                </a:solidFill>
+                <a:latin typeface="Yu Gothic" pitchFamily="34" charset="0"/>
+                <a:ea typeface="Yu Gothic" pitchFamily="34" charset="-122"/>
+                <a:cs typeface="Yu Gothic" pitchFamily="34" charset="-120"/>
+              </a:rPr>
+              <a:t>55分。操作するのはご自身です。</a:t>
+            </a:r>
+            <a:endParaRPr lang="en-US" sz="1250" dirty="0"/>
+          </a:p>
+        </p:txBody>
+      </p:sp>
+      <p:sp>
+        <p:nvSpPr>
+          <p:cNvPr id="5" name="Shape 3"/>
+          <p:cNvSpPr/>
+          <p:nvPr/>
+        </p:nvSpPr>
+        <p:spPr>
+          <a:xfrm>
+            <a:off x="777240" y="2148840"/>
+            <a:ext cx="3383280" cy="2880360"/>
+          </a:xfrm>
+          <a:prstGeom prst="rect">
+            <a:avLst/>
+          </a:prstGeom>
+          <a:solidFill>
+            <a:srgbClr val="FFFFFF"/>
+          </a:solidFill>
+          <a:ln w="12700">
+            <a:solidFill>
+              <a:srgbClr val="EDE7DB"/>
+            </a:solidFill>
+            <a:prstDash val="solid"/>
+          </a:ln>
+        </p:spPr>
+      </p:sp>
+      <p:sp>
+        <p:nvSpPr>
+          <p:cNvPr id="6" name="Shape 4"/>
+          <p:cNvSpPr/>
+          <p:nvPr/>
+        </p:nvSpPr>
+        <p:spPr>
+          <a:xfrm>
+            <a:off x="1051560" y="2395728"/>
+            <a:ext cx="438912" cy="438912"/>
+          </a:xfrm>
+          <a:prstGeom prst="ellipse">
+            <a:avLst/>
+          </a:prstGeom>
+          <a:solidFill>
+            <a:srgbClr val="2F4F6B"/>
+          </a:solidFill>
+          <a:ln w="12700">
+            <a:solidFill>
+              <a:srgbClr val="333333"/>
+            </a:solidFill>
+            <a:prstDash val="solid"/>
+          </a:ln>
+        </p:spPr>
+      </p:sp>
+      <p:sp>
+        <p:nvSpPr>
+          <p:cNvPr id="7" name="Text 5"/>
+          <p:cNvSpPr txBox="1"/>
+          <p:nvPr/>
+        </p:nvSpPr>
+        <p:spPr>
+          <a:xfrm>
+            <a:off x="1051560" y="2395728"/>
+            <a:ext cx="438912" cy="438912"/>
+          </a:xfrm>
+          <a:prstGeom prst="rect">
+            <a:avLst/>
+          </a:prstGeom>
+          <a:noFill/>
+          <a:ln/>
+        </p:spPr>
+        <p:txBody>
+          <a:bodyPr wrap="square" lIns="0" tIns="0" rIns="0" bIns="0" rtlCol="0" anchor="ctr"/>
+          <a:lstStyle/>
+          <a:p>
+            <a:pPr algn="ctr" indent="0" marL="0">
+              <a:buNone/>
+            </a:pPr>
+            <a:r>
+              <a:rPr lang="en-US" sz="1300" b="1" dirty="0">
                 <a:solidFill>
                   <a:srgbClr val="FFFFFF"/>
                 </a:solidFill>
@@ -5020,22 +8561,22 @@
                 <a:ea typeface="Yu Gothic" pitchFamily="34" charset="-122"/>
                 <a:cs typeface="Yu Gothic" pitchFamily="34" charset="-120"/>
               </a:rPr>
-              <a:t>明日の朝いちで、今日つくった指示をもう一度使う。</a:t>
-            </a:r>
-            <a:endParaRPr lang="en-US" sz="1900" dirty="0"/>
-          </a:p>
-        </p:txBody>
-      </p:sp>
-      <p:sp>
-        <p:nvSpPr>
-          <p:cNvPr id="6" name="Text 4"/>
-          <p:cNvSpPr txBox="1"/>
-          <p:nvPr/>
-        </p:nvSpPr>
-        <p:spPr>
-          <a:xfrm>
-            <a:off x="777240" y="4572000"/>
-            <a:ext cx="10607040" cy="822960"/>
+              <a:t>1</a:t>
+            </a:r>
+            <a:endParaRPr lang="en-US" sz="1300" dirty="0"/>
+          </a:p>
+        </p:txBody>
+      </p:sp>
+      <p:sp>
+        <p:nvSpPr>
+          <p:cNvPr id="8" name="Text 6"/>
+          <p:cNvSpPr txBox="1"/>
+          <p:nvPr/>
+        </p:nvSpPr>
+        <p:spPr>
+          <a:xfrm>
+            <a:off x="1051560" y="2944368"/>
+            <a:ext cx="2834640" cy="731520"/>
           </a:xfrm>
           <a:prstGeom prst="rect">
             <a:avLst/>
@@ -5049,40 +8590,324 @@
           <a:p>
             <a:pPr indent="0" marL="0">
               <a:lnSpc>
-                <a:spcPct val="145000"/>
+                <a:spcPct val="125000"/>
               </a:lnSpc>
               <a:buNone/>
             </a:pPr>
             <a:r>
-              <a:rPr lang="en-US" sz="1300" dirty="0">
-                <a:solidFill>
-                  <a:srgbClr val="B9B0A4"/>
-                </a:solidFill>
-                <a:latin typeface="Yu Gothic" pitchFamily="34" charset="0"/>
-                <a:ea typeface="Yu Gothic" pitchFamily="34" charset="-122"/>
-                <a:cs typeface="Yu Gothic" pitchFamily="34" charset="-120"/>
-              </a:rPr>
-              <a:t>15分で終わる大きさにしてあります。できなかった回があっても構いません。</a:t>
+              <a:rPr lang="en-US" sz="1450" b="1" dirty="0">
+                <a:solidFill>
+                  <a:srgbClr val="23201D"/>
+                </a:solidFill>
+                <a:latin typeface="Yu Gothic" pitchFamily="34" charset="0"/>
+                <a:ea typeface="Yu Gothic" pitchFamily="34" charset="-122"/>
+                <a:cs typeface="Yu Gothic" pitchFamily="34" charset="-120"/>
+              </a:rPr>
+              <a:t>いまの使い方を拝見する</a:t>
+            </a:r>
+            <a:endParaRPr lang="en-US" sz="1450" dirty="0"/>
+          </a:p>
+        </p:txBody>
+      </p:sp>
+      <p:sp>
+        <p:nvSpPr>
+          <p:cNvPr id="9" name="Text 7"/>
+          <p:cNvSpPr txBox="1"/>
+          <p:nvPr/>
+        </p:nvSpPr>
+        <p:spPr>
+          <a:xfrm>
+            <a:off x="1051560" y="3703320"/>
+            <a:ext cx="2834640" cy="1188720"/>
+          </a:xfrm>
+          <a:prstGeom prst="rect">
+            <a:avLst/>
+          </a:prstGeom>
+          <a:noFill/>
+          <a:ln/>
+        </p:spPr>
+        <p:txBody>
+          <a:bodyPr wrap="square" lIns="0" tIns="0" rIns="0" bIns="0" rtlCol="0" anchor="ctr"/>
+          <a:lstStyle/>
+          <a:p>
+            <a:pPr indent="0" marL="0">
+              <a:lnSpc>
+                <a:spcPct val="130000"/>
+              </a:lnSpc>
+              <a:buNone/>
+            </a:pPr>
+            <a:r>
+              <a:rPr lang="en-US" sz="1150" dirty="0">
+                <a:solidFill>
+                  <a:srgbClr val="5A534A"/>
+                </a:solidFill>
+                <a:latin typeface="Yu Gothic" pitchFamily="34" charset="0"/>
+                <a:ea typeface="Yu Gothic" pitchFamily="34" charset="-122"/>
+                <a:cs typeface="Yu Gothic" pitchFamily="34" charset="-120"/>
+              </a:rPr>
+              <a:t>20分。普段どおりに操作していただきます。うまくやろうとしなくて大丈夫です</a:t>
+            </a:r>
+            <a:endParaRPr lang="en-US" sz="1150" dirty="0"/>
+          </a:p>
+        </p:txBody>
+      </p:sp>
+      <p:sp>
+        <p:nvSpPr>
+          <p:cNvPr id="10" name="Shape 8"/>
+          <p:cNvSpPr/>
+          <p:nvPr/>
+        </p:nvSpPr>
+        <p:spPr>
+          <a:xfrm>
+            <a:off x="4389120" y="2148840"/>
+            <a:ext cx="3383280" cy="2880360"/>
+          </a:xfrm>
+          <a:prstGeom prst="rect">
+            <a:avLst/>
+          </a:prstGeom>
+          <a:solidFill>
+            <a:srgbClr val="FFFFFF"/>
+          </a:solidFill>
+          <a:ln w="12700">
+            <a:solidFill>
+              <a:srgbClr val="EDE7DB"/>
+            </a:solidFill>
+            <a:prstDash val="solid"/>
+          </a:ln>
+        </p:spPr>
+      </p:sp>
+      <p:sp>
+        <p:nvSpPr>
+          <p:cNvPr id="11" name="Shape 9"/>
+          <p:cNvSpPr/>
+          <p:nvPr/>
+        </p:nvSpPr>
+        <p:spPr>
+          <a:xfrm>
+            <a:off x="4663440" y="2395728"/>
+            <a:ext cx="438912" cy="438912"/>
+          </a:xfrm>
+          <a:prstGeom prst="ellipse">
+            <a:avLst/>
+          </a:prstGeom>
+          <a:solidFill>
+            <a:srgbClr val="2F4F6B"/>
+          </a:solidFill>
+          <a:ln w="12700">
+            <a:solidFill>
+              <a:srgbClr val="333333"/>
+            </a:solidFill>
+            <a:prstDash val="solid"/>
+          </a:ln>
+        </p:spPr>
+      </p:sp>
+      <p:sp>
+        <p:nvSpPr>
+          <p:cNvPr id="12" name="Text 10"/>
+          <p:cNvSpPr txBox="1"/>
+          <p:nvPr/>
+        </p:nvSpPr>
+        <p:spPr>
+          <a:xfrm>
+            <a:off x="4663440" y="2395728"/>
+            <a:ext cx="438912" cy="438912"/>
+          </a:xfrm>
+          <a:prstGeom prst="rect">
+            <a:avLst/>
+          </a:prstGeom>
+          <a:noFill/>
+          <a:ln/>
+        </p:spPr>
+        <p:txBody>
+          <a:bodyPr wrap="square" lIns="0" tIns="0" rIns="0" bIns="0" rtlCol="0" anchor="ctr"/>
+          <a:lstStyle/>
+          <a:p>
+            <a:pPr algn="ctr" indent="0" marL="0">
+              <a:buNone/>
+            </a:pPr>
+            <a:r>
+              <a:rPr lang="en-US" sz="1300" b="1" dirty="0">
+                <a:solidFill>
+                  <a:srgbClr val="FFFFFF"/>
+                </a:solidFill>
+                <a:latin typeface="Yu Gothic" pitchFamily="34" charset="0"/>
+                <a:ea typeface="Yu Gothic" pitchFamily="34" charset="-122"/>
+                <a:cs typeface="Yu Gothic" pitchFamily="34" charset="-120"/>
+              </a:rPr>
+              <a:t>2</a:t>
             </a:r>
             <a:endParaRPr lang="en-US" sz="1300" dirty="0"/>
           </a:p>
+        </p:txBody>
+      </p:sp>
+      <p:sp>
+        <p:nvSpPr>
+          <p:cNvPr id="13" name="Text 11"/>
+          <p:cNvSpPr txBox="1"/>
+          <p:nvPr/>
+        </p:nvSpPr>
+        <p:spPr>
+          <a:xfrm>
+            <a:off x="4663440" y="2944368"/>
+            <a:ext cx="2834640" cy="731520"/>
+          </a:xfrm>
+          <a:prstGeom prst="rect">
+            <a:avLst/>
+          </a:prstGeom>
+          <a:noFill/>
+          <a:ln/>
+        </p:spPr>
+        <p:txBody>
+          <a:bodyPr wrap="square" lIns="0" tIns="0" rIns="0" bIns="0" rtlCol="0" anchor="ctr"/>
+          <a:lstStyle/>
           <a:p>
             <a:pPr indent="0" marL="0">
               <a:lnSpc>
-                <a:spcPct val="145000"/>
+                <a:spcPct val="125000"/>
               </a:lnSpc>
               <a:buNone/>
             </a:pPr>
             <a:r>
-              <a:rPr lang="en-US" sz="1300" dirty="0">
-                <a:solidFill>
-                  <a:srgbClr val="B9B0A4"/>
-                </a:solidFill>
-                <a:latin typeface="Yu Gothic" pitchFamily="34" charset="0"/>
-                <a:ea typeface="Yu Gothic" pitchFamily="34" charset="-122"/>
-                <a:cs typeface="Yu Gothic" pitchFamily="34" charset="-120"/>
-              </a:rPr>
-              <a:t>2回続いたら、宿題の出し方を見直します。</a:t>
+              <a:rPr lang="en-US" sz="1450" b="1" dirty="0">
+                <a:solidFill>
+                  <a:srgbClr val="23201D"/>
+                </a:solidFill>
+                <a:latin typeface="Yu Gothic" pitchFamily="34" charset="0"/>
+                <a:ea typeface="Yu Gothic" pitchFamily="34" charset="-122"/>
+                <a:cs typeface="Yu Gothic" pitchFamily="34" charset="-120"/>
+              </a:rPr>
+              <a:t>業務を棚卸しする</a:t>
+            </a:r>
+            <a:endParaRPr lang="en-US" sz="1450" dirty="0"/>
+          </a:p>
+        </p:txBody>
+      </p:sp>
+      <p:sp>
+        <p:nvSpPr>
+          <p:cNvPr id="14" name="Text 12"/>
+          <p:cNvSpPr txBox="1"/>
+          <p:nvPr/>
+        </p:nvSpPr>
+        <p:spPr>
+          <a:xfrm>
+            <a:off x="4663440" y="3703320"/>
+            <a:ext cx="2834640" cy="1188720"/>
+          </a:xfrm>
+          <a:prstGeom prst="rect">
+            <a:avLst/>
+          </a:prstGeom>
+          <a:noFill/>
+          <a:ln/>
+        </p:spPr>
+        <p:txBody>
+          <a:bodyPr wrap="square" lIns="0" tIns="0" rIns="0" bIns="0" rtlCol="0" anchor="ctr"/>
+          <a:lstStyle/>
+          <a:p>
+            <a:pPr indent="0" marL="0">
+              <a:lnSpc>
+                <a:spcPct val="130000"/>
+              </a:lnSpc>
+              <a:buNone/>
+            </a:pPr>
+            <a:r>
+              <a:rPr lang="en-US" sz="1150" dirty="0">
+                <a:solidFill>
+                  <a:srgbClr val="5A534A"/>
+                </a:solidFill>
+                <a:latin typeface="Yu Gothic" pitchFamily="34" charset="0"/>
+                <a:ea typeface="Yu Gothic" pitchFamily="34" charset="-122"/>
+                <a:cs typeface="Yu Gothic" pitchFamily="34" charset="-120"/>
+              </a:rPr>
+              <a:t>実際の一週間を聞きながら、6列の表をその場で埋めます</a:t>
+            </a:r>
+            <a:endParaRPr lang="en-US" sz="1150" dirty="0"/>
+          </a:p>
+        </p:txBody>
+      </p:sp>
+      <p:sp>
+        <p:nvSpPr>
+          <p:cNvPr id="15" name="Shape 13"/>
+          <p:cNvSpPr/>
+          <p:nvPr/>
+        </p:nvSpPr>
+        <p:spPr>
+          <a:xfrm>
+            <a:off x="8001000" y="2148840"/>
+            <a:ext cx="3383280" cy="2880360"/>
+          </a:xfrm>
+          <a:prstGeom prst="rect">
+            <a:avLst/>
+          </a:prstGeom>
+          <a:solidFill>
+            <a:srgbClr val="FFFFFF"/>
+          </a:solidFill>
+          <a:ln w="12700">
+            <a:solidFill>
+              <a:srgbClr val="EDE7DB"/>
+            </a:solidFill>
+            <a:prstDash val="solid"/>
+          </a:ln>
+        </p:spPr>
+      </p:sp>
+      <p:sp>
+        <p:nvSpPr>
+          <p:cNvPr id="16" name="Shape 14"/>
+          <p:cNvSpPr/>
+          <p:nvPr/>
+        </p:nvSpPr>
+        <p:spPr>
+          <a:xfrm>
+            <a:off x="8275320" y="2395728"/>
+            <a:ext cx="438912" cy="438912"/>
+          </a:xfrm>
+          <a:prstGeom prst="ellipse">
+            <a:avLst/>
+          </a:prstGeom>
+          <a:solidFill>
+            <a:srgbClr val="2F4F6B"/>
+          </a:solidFill>
+          <a:ln w="12700">
+            <a:solidFill>
+              <a:srgbClr val="333333"/>
+            </a:solidFill>
+            <a:prstDash val="solid"/>
+          </a:ln>
+        </p:spPr>
+      </p:sp>
+      <p:sp>
+        <p:nvSpPr>
+          <p:cNvPr id="17" name="Text 15"/>
+          <p:cNvSpPr txBox="1"/>
+          <p:nvPr/>
+        </p:nvSpPr>
+        <p:spPr>
+          <a:xfrm>
+            <a:off x="8275320" y="2395728"/>
+            <a:ext cx="438912" cy="438912"/>
+          </a:xfrm>
+          <a:prstGeom prst="rect">
+            <a:avLst/>
+          </a:prstGeom>
+          <a:noFill/>
+          <a:ln/>
+        </p:spPr>
+        <p:txBody>
+          <a:bodyPr wrap="square" lIns="0" tIns="0" rIns="0" bIns="0" rtlCol="0" anchor="ctr"/>
+          <a:lstStyle/>
+          <a:p>
+            <a:pPr algn="ctr" indent="0" marL="0">
+              <a:buNone/>
+            </a:pPr>
+            <a:r>
+              <a:rPr lang="en-US" sz="1300" b="1" dirty="0">
+                <a:solidFill>
+                  <a:srgbClr val="FFFFFF"/>
+                </a:solidFill>
+                <a:latin typeface="Yu Gothic" pitchFamily="34" charset="0"/>
+                <a:ea typeface="Yu Gothic" pitchFamily="34" charset="-122"/>
+                <a:cs typeface="Yu Gothic" pitchFamily="34" charset="-120"/>
+              </a:rPr>
+              <a:t>3</a:t>
             </a:r>
             <a:endParaRPr lang="en-US" sz="1300" dirty="0"/>
           </a:p>
@@ -5090,14 +8915,98 @@
       </p:sp>
       <p:sp>
         <p:nvSpPr>
-          <p:cNvPr id="7" name="Text 5"/>
-          <p:cNvSpPr txBox="1"/>
-          <p:nvPr/>
-        </p:nvSpPr>
-        <p:spPr>
-          <a:xfrm>
-            <a:off x="777240" y="6355080"/>
-            <a:ext cx="10607040" cy="274320"/>
+          <p:cNvPr id="18" name="Text 16"/>
+          <p:cNvSpPr txBox="1"/>
+          <p:nvPr/>
+        </p:nvSpPr>
+        <p:spPr>
+          <a:xfrm>
+            <a:off x="8275320" y="2944368"/>
+            <a:ext cx="2834640" cy="731520"/>
+          </a:xfrm>
+          <a:prstGeom prst="rect">
+            <a:avLst/>
+          </a:prstGeom>
+          <a:noFill/>
+          <a:ln/>
+        </p:spPr>
+        <p:txBody>
+          <a:bodyPr wrap="square" lIns="0" tIns="0" rIns="0" bIns="0" rtlCol="0" anchor="ctr"/>
+          <a:lstStyle/>
+          <a:p>
+            <a:pPr indent="0" marL="0">
+              <a:lnSpc>
+                <a:spcPct val="125000"/>
+              </a:lnSpc>
+              <a:buNone/>
+            </a:pPr>
+            <a:r>
+              <a:rPr lang="en-US" sz="1450" b="1" dirty="0">
+                <a:solidFill>
+                  <a:srgbClr val="23201D"/>
+                </a:solidFill>
+                <a:latin typeface="Yu Gothic" pitchFamily="34" charset="0"/>
+                <a:ea typeface="Yu Gothic" pitchFamily="34" charset="-122"/>
+                <a:cs typeface="Yu Gothic" pitchFamily="34" charset="-120"/>
+              </a:rPr>
+              <a:t>1つ、その場で解かせる</a:t>
+            </a:r>
+            <a:endParaRPr lang="en-US" sz="1450" dirty="0"/>
+          </a:p>
+        </p:txBody>
+      </p:sp>
+      <p:sp>
+        <p:nvSpPr>
+          <p:cNvPr id="19" name="Text 17"/>
+          <p:cNvSpPr txBox="1"/>
+          <p:nvPr/>
+        </p:nvSpPr>
+        <p:spPr>
+          <a:xfrm>
+            <a:off x="8275320" y="3703320"/>
+            <a:ext cx="2834640" cy="1188720"/>
+          </a:xfrm>
+          <a:prstGeom prst="rect">
+            <a:avLst/>
+          </a:prstGeom>
+          <a:noFill/>
+          <a:ln/>
+        </p:spPr>
+        <p:txBody>
+          <a:bodyPr wrap="square" lIns="0" tIns="0" rIns="0" bIns="0" rtlCol="0" anchor="ctr"/>
+          <a:lstStyle/>
+          <a:p>
+            <a:pPr indent="0" marL="0">
+              <a:lnSpc>
+                <a:spcPct val="130000"/>
+              </a:lnSpc>
+              <a:buNone/>
+            </a:pPr>
+            <a:r>
+              <a:rPr lang="en-US" sz="1150" dirty="0">
+                <a:solidFill>
+                  <a:srgbClr val="5A534A"/>
+                </a:solidFill>
+                <a:latin typeface="Yu Gothic" pitchFamily="34" charset="0"/>
+                <a:ea typeface="Yu Gothic" pitchFamily="34" charset="-122"/>
+                <a:cs typeface="Yu Gothic" pitchFamily="34" charset="-120"/>
+              </a:rPr>
+              <a:t>上位3つのうち1つを今日のうちに動かし、指示文を保存して持ち帰ります</a:t>
+            </a:r>
+            <a:endParaRPr lang="en-US" sz="1150" dirty="0"/>
+          </a:p>
+        </p:txBody>
+      </p:sp>
+      <p:sp>
+        <p:nvSpPr>
+          <p:cNvPr id="20" name="Text 18"/>
+          <p:cNvSpPr txBox="1"/>
+          <p:nvPr/>
+        </p:nvSpPr>
+        <p:spPr>
+          <a:xfrm>
+            <a:off x="777240" y="6382512"/>
+            <a:ext cx="7424928" cy="256032"/>
           </a:xfrm>
           <a:prstGeom prst="rect">
             <a:avLst/>
@@ -5115,13 +9024,52 @@
             <a:r>
               <a:rPr lang="en-US" sz="900" dirty="0">
                 <a:solidFill>
-                  <a:srgbClr val="6E6558"/>
+                  <a:srgbClr val="8A8177"/>
                 </a:solidFill>
                 <a:latin typeface="Yu Gothic" pitchFamily="34" charset="0"/>
                 <a:ea typeface="Yu Gothic" pitchFamily="34" charset="-122"/>
                 <a:cs typeface="Yu Gothic" pitchFamily="34" charset="-120"/>
               </a:rPr>
               <a:t>第1回　現状把握と地図づくり</a:t>
+            </a:r>
+            <a:endParaRPr lang="en-US" sz="900" dirty="0"/>
+          </a:p>
+        </p:txBody>
+      </p:sp>
+      <p:sp>
+        <p:nvSpPr>
+          <p:cNvPr id="21" name="Text 19"/>
+          <p:cNvSpPr txBox="1"/>
+          <p:nvPr/>
+        </p:nvSpPr>
+        <p:spPr>
+          <a:xfrm>
+            <a:off x="8202168" y="6382512"/>
+            <a:ext cx="3182112" cy="256032"/>
+          </a:xfrm>
+          <a:prstGeom prst="rect">
+            <a:avLst/>
+          </a:prstGeom>
+          <a:noFill/>
+          <a:ln/>
+        </p:spPr>
+        <p:txBody>
+          <a:bodyPr wrap="square" lIns="0" tIns="0" rIns="0" bIns="0" rtlCol="0" anchor="ctr"/>
+          <a:lstStyle/>
+          <a:p>
+            <a:pPr algn="r" indent="0" marL="0">
+              <a:buNone/>
+            </a:pPr>
+            <a:r>
+              <a:rPr lang="en-US" sz="900" dirty="0">
+                <a:solidFill>
+                  <a:srgbClr val="8A8177"/>
+                </a:solidFill>
+                <a:latin typeface="Yu Gothic" pitchFamily="34" charset="0"/>
+                <a:ea typeface="Yu Gothic" pitchFamily="34" charset="-122"/>
+                <a:cs typeface="Yu Gothic" pitchFamily="34" charset="-120"/>
+              </a:rPr>
+              <a:t>演習</a:t>
             </a:r>
             <a:endParaRPr lang="en-US" sz="900" dirty="0"/>
           </a:p>

--- a/slides/pptx/第01回_現状把握と地図づくり.pptx
+++ b/slides/pptx/第01回_現状把握と地図づくり.pptx
@@ -17,9 +17,12 @@
     <p:sldId id="265" r:id="rId11"/>
     <p:sldId id="266" r:id="rId12"/>
     <p:sldId id="267" r:id="rId13"/>
+    <p:sldId id="268" r:id="rId14"/>
+    <p:sldId id="269" r:id="rId15"/>
+    <p:sldId id="270" r:id="rId16"/>
   </p:sldIdLst>
   <p:notesMasterIdLst>
-    <p:notesMasterId r:id="rId14"/>
+    <p:notesMasterId r:id="rId17"/>
   </p:notesMasterIdLst>
   <p:sldSz cx="12192000" cy="6858000"/>
   <p:notesSz cx="6858000" cy="12192000"/>
@@ -601,7 +604,7 @@
           <a:p>
             <a:r>
               <a:rPr lang="en-US" dirty="0"/>
-              <a:t>「いつ使うか」は必ず日時まで落とす。『来週あたり』は使われない。その場でカレンダーに入れてもらう。</a:t>
+              <a:t>用語を覚えてもらう必要はない。配布する用語辞典に同じものが載っていることを伝えるだけでよい。ハルシネーションだけは、この回で必ず言葉にしておく。</a:t>
             </a:r>
             <a:endParaRPr lang="en-US" dirty="0"/>
           </a:p>
@@ -689,7 +692,7 @@
           <a:p>
             <a:r>
               <a:rPr lang="en-US" dirty="0"/>
-              <a:t>ここは資料を読まない。事例だけ話す。初回の手応えが2回目の出席を決める、という構造を講師が理解していれば、自然に時間配分が変わる。</a:t>
+              <a:t>ここから講師は口頭指示のみ。画面を操作するのは必ず受講者。棚卸しは6列すべて埋めようとせず、上位3つだけ完成させればよい。</a:t>
             </a:r>
             <a:endParaRPr lang="en-US" dirty="0"/>
           </a:p>
@@ -777,7 +780,7 @@
           <a:p>
             <a:r>
               <a:rPr lang="en-US" dirty="0"/>
-              <a:t>宿題は口頭で確認して終わらせない。その場でスマホのカレンダーに入れてもらうところまでやる。次回の冒頭15分は、この宿題の実物から始まる。</a:t>
+              <a:t>「いつ使うか」は必ず日時まで落とす。『来週あたり』は使われない。その場でカレンダーに入れてもらう。</a:t>
             </a:r>
             <a:endParaRPr lang="en-US" dirty="0"/>
           </a:p>
@@ -801,6 +804,270 @@
             <a:fld id="{F7021451-1387-4CA6-816F-3879F97B5CBC}" type="slidenum">
               <a:rPr lang="en-US"/>
               <a:t>12</a:t>
+            </a:fld>
+            <a:endParaRPr lang="en-US"/>
+          </a:p>
+        </p:txBody>
+      </p:sp>
+    </p:spTree>
+    <p:extLst>
+      <p:ext uri="{BB962C8B-B14F-4D97-AF65-F5344CB8AC3E}">
+        <p14:creationId xmlns:p14="http://schemas.microsoft.com/office/powerpoint/2010/main" val="1024086991"/>
+      </p:ext>
+    </p:extLst>
+  </p:cSld>
+  <p:clrMapOvr>
+    <a:masterClrMapping/>
+  </p:clrMapOvr>
+</p:notes>
+</file>
+
+<file path=ppt/notesSlides/notesSlide13.xml><?xml version="1.0" encoding="utf-8"?>
+<p:notes xmlns:a="http://schemas.openxmlformats.org/drawingml/2006/main" xmlns:r="http://schemas.openxmlformats.org/officeDocument/2006/relationships" xmlns:p="http://schemas.openxmlformats.org/presentationml/2006/main">
+  <p:cSld>
+    <p:spTree>
+      <p:nvGrpSpPr>
+        <p:cNvPr id="1" name=""/>
+        <p:cNvGrpSpPr/>
+        <p:nvPr/>
+      </p:nvGrpSpPr>
+      <p:grpSpPr>
+        <a:xfrm>
+          <a:off x="0" y="0"/>
+          <a:ext cx="0" cy="0"/>
+          <a:chOff x="0" y="0"/>
+          <a:chExt cx="0" cy="0"/>
+        </a:xfrm>
+      </p:grpSpPr>
+      <p:sp>
+        <p:nvSpPr>
+          <p:cNvPr id="2" name="Slide Image Placeholder 1"/>
+          <p:cNvSpPr>
+            <a:spLocks noGrp="1" noRot="1" noChangeAspect="1"/>
+          </p:cNvSpPr>
+          <p:nvPr>
+            <p:ph type="sldImg"/>
+          </p:nvPr>
+        </p:nvSpPr>
+        <p:spPr/>
+      </p:sp>
+      <p:sp>
+        <p:nvSpPr>
+          <p:cNvPr id="3" name="Notes Placeholder 2"/>
+          <p:cNvSpPr>
+            <a:spLocks noGrp="1"/>
+          </p:cNvSpPr>
+          <p:nvPr>
+            <p:ph type="body" idx="1"/>
+          </p:nvPr>
+        </p:nvSpPr>
+        <p:spPr/>
+        <p:txBody>
+          <a:bodyPr/>
+          <a:lstStyle/>
+          <a:p>
+            <a:r>
+              <a:rPr lang="en-US" dirty="0"/>
+              <a:t>ここは資料を読まない。事例だけ話す。初回の手応えが2回目の出席を決める、という構造を講師が理解していれば、自然に時間配分が変わる。</a:t>
+            </a:r>
+            <a:endParaRPr lang="en-US" dirty="0"/>
+          </a:p>
+        </p:txBody>
+      </p:sp>
+      <p:sp>
+        <p:nvSpPr>
+          <p:cNvPr id="4" name="Slide Number Placeholder 3"/>
+          <p:cNvSpPr>
+            <a:spLocks noGrp="1"/>
+          </p:cNvSpPr>
+          <p:nvPr>
+            <p:ph type="sldNum" sz="quarter" idx="10"/>
+          </p:nvPr>
+        </p:nvSpPr>
+        <p:spPr/>
+        <p:txBody>
+          <a:bodyPr/>
+          <a:lstStyle/>
+          <a:p>
+            <a:fld id="{F7021451-1387-4CA6-816F-3879F97B5CBC}" type="slidenum">
+              <a:rPr lang="en-US"/>
+              <a:t>13</a:t>
+            </a:fld>
+            <a:endParaRPr lang="en-US"/>
+          </a:p>
+        </p:txBody>
+      </p:sp>
+    </p:spTree>
+    <p:extLst>
+      <p:ext uri="{BB962C8B-B14F-4D97-AF65-F5344CB8AC3E}">
+        <p14:creationId xmlns:p14="http://schemas.microsoft.com/office/powerpoint/2010/main" val="1024086991"/>
+      </p:ext>
+    </p:extLst>
+  </p:cSld>
+  <p:clrMapOvr>
+    <a:masterClrMapping/>
+  </p:clrMapOvr>
+</p:notes>
+</file>
+
+<file path=ppt/notesSlides/notesSlide14.xml><?xml version="1.0" encoding="utf-8"?>
+<p:notes xmlns:a="http://schemas.openxmlformats.org/drawingml/2006/main" xmlns:r="http://schemas.openxmlformats.org/officeDocument/2006/relationships" xmlns:p="http://schemas.openxmlformats.org/presentationml/2006/main">
+  <p:cSld>
+    <p:spTree>
+      <p:nvGrpSpPr>
+        <p:cNvPr id="1" name=""/>
+        <p:cNvGrpSpPr/>
+        <p:nvPr/>
+      </p:nvGrpSpPr>
+      <p:grpSpPr>
+        <a:xfrm>
+          <a:off x="0" y="0"/>
+          <a:ext cx="0" cy="0"/>
+          <a:chOff x="0" y="0"/>
+          <a:chExt cx="0" cy="0"/>
+        </a:xfrm>
+      </p:grpSpPr>
+      <p:sp>
+        <p:nvSpPr>
+          <p:cNvPr id="2" name="Slide Image Placeholder 1"/>
+          <p:cNvSpPr>
+            <a:spLocks noGrp="1" noRot="1" noChangeAspect="1"/>
+          </p:cNvSpPr>
+          <p:nvPr>
+            <p:ph type="sldImg"/>
+          </p:nvPr>
+        </p:nvSpPr>
+        <p:spPr/>
+      </p:sp>
+      <p:sp>
+        <p:nvSpPr>
+          <p:cNvPr id="3" name="Notes Placeholder 2"/>
+          <p:cNvSpPr>
+            <a:spLocks noGrp="1"/>
+          </p:cNvSpPr>
+          <p:nvPr>
+            <p:ph type="body" idx="1"/>
+          </p:nvPr>
+        </p:nvSpPr>
+        <p:spPr/>
+        <p:txBody>
+          <a:bodyPr/>
+          <a:lstStyle/>
+          <a:p>
+            <a:r>
+              <a:rPr lang="en-US" dirty="0"/>
+              <a:t>次回の持ち物を、口頭とチャットの両方で伝える。3日前にもう一度送る運用を、ここで予告しておく。</a:t>
+            </a:r>
+            <a:endParaRPr lang="en-US" dirty="0"/>
+          </a:p>
+        </p:txBody>
+      </p:sp>
+      <p:sp>
+        <p:nvSpPr>
+          <p:cNvPr id="4" name="Slide Number Placeholder 3"/>
+          <p:cNvSpPr>
+            <a:spLocks noGrp="1"/>
+          </p:cNvSpPr>
+          <p:nvPr>
+            <p:ph type="sldNum" sz="quarter" idx="10"/>
+          </p:nvPr>
+        </p:nvSpPr>
+        <p:spPr/>
+        <p:txBody>
+          <a:bodyPr/>
+          <a:lstStyle/>
+          <a:p>
+            <a:fld id="{F7021451-1387-4CA6-816F-3879F97B5CBC}" type="slidenum">
+              <a:rPr lang="en-US"/>
+              <a:t>14</a:t>
+            </a:fld>
+            <a:endParaRPr lang="en-US"/>
+          </a:p>
+        </p:txBody>
+      </p:sp>
+    </p:spTree>
+    <p:extLst>
+      <p:ext uri="{BB962C8B-B14F-4D97-AF65-F5344CB8AC3E}">
+        <p14:creationId xmlns:p14="http://schemas.microsoft.com/office/powerpoint/2010/main" val="1024086991"/>
+      </p:ext>
+    </p:extLst>
+  </p:cSld>
+  <p:clrMapOvr>
+    <a:masterClrMapping/>
+  </p:clrMapOvr>
+</p:notes>
+</file>
+
+<file path=ppt/notesSlides/notesSlide15.xml><?xml version="1.0" encoding="utf-8"?>
+<p:notes xmlns:a="http://schemas.openxmlformats.org/drawingml/2006/main" xmlns:r="http://schemas.openxmlformats.org/officeDocument/2006/relationships" xmlns:p="http://schemas.openxmlformats.org/presentationml/2006/main">
+  <p:cSld>
+    <p:spTree>
+      <p:nvGrpSpPr>
+        <p:cNvPr id="1" name=""/>
+        <p:cNvGrpSpPr/>
+        <p:nvPr/>
+      </p:nvGrpSpPr>
+      <p:grpSpPr>
+        <a:xfrm>
+          <a:off x="0" y="0"/>
+          <a:ext cx="0" cy="0"/>
+          <a:chOff x="0" y="0"/>
+          <a:chExt cx="0" cy="0"/>
+        </a:xfrm>
+      </p:grpSpPr>
+      <p:sp>
+        <p:nvSpPr>
+          <p:cNvPr id="2" name="Slide Image Placeholder 1"/>
+          <p:cNvSpPr>
+            <a:spLocks noGrp="1" noRot="1" noChangeAspect="1"/>
+          </p:cNvSpPr>
+          <p:nvPr>
+            <p:ph type="sldImg"/>
+          </p:nvPr>
+        </p:nvSpPr>
+        <p:spPr/>
+      </p:sp>
+      <p:sp>
+        <p:nvSpPr>
+          <p:cNvPr id="3" name="Notes Placeholder 2"/>
+          <p:cNvSpPr>
+            <a:spLocks noGrp="1"/>
+          </p:cNvSpPr>
+          <p:nvPr>
+            <p:ph type="body" idx="1"/>
+          </p:nvPr>
+        </p:nvSpPr>
+        <p:spPr/>
+        <p:txBody>
+          <a:bodyPr/>
+          <a:lstStyle/>
+          <a:p>
+            <a:r>
+              <a:rPr lang="en-US" dirty="0"/>
+              <a:t>宿題は口頭で確認して終わらせない。その場でスマホのカレンダーに入れてもらうところまでやる。次回の冒頭15分は、この宿題の実物から始まる。</a:t>
+            </a:r>
+            <a:endParaRPr lang="en-US" dirty="0"/>
+          </a:p>
+        </p:txBody>
+      </p:sp>
+      <p:sp>
+        <p:nvSpPr>
+          <p:cNvPr id="4" name="Slide Number Placeholder 3"/>
+          <p:cNvSpPr>
+            <a:spLocks noGrp="1"/>
+          </p:cNvSpPr>
+          <p:nvPr>
+            <p:ph type="sldNum" sz="quarter" idx="10"/>
+          </p:nvPr>
+        </p:nvSpPr>
+        <p:spPr/>
+        <p:txBody>
+          <a:bodyPr/>
+          <a:lstStyle/>
+          <a:p>
+            <a:fld id="{F7021451-1387-4CA6-816F-3879F97B5CBC}" type="slidenum">
+              <a:rPr lang="en-US"/>
+              <a:t>15</a:t>
             </a:fld>
             <a:endParaRPr lang="en-US"/>
           </a:p>
@@ -1481,7 +1748,7 @@
           <a:p>
             <a:r>
               <a:rPr lang="en-US" dirty="0"/>
-              <a:t>ここから講師は口頭指示のみ。画面を操作するのは必ず受講者。棚卸しは6列すべて埋めようとせず、上位3つだけ完成させればよい。</a:t>
+              <a:t>3つとも初回で高確率で出る。特に2つ目は、ここで押し切らないと講座全体が空回りする。『判断の勘所は使った人にしか分からない』を、経営者本人の経験に引き寄せて話す。</a:t>
             </a:r>
             <a:endParaRPr lang="en-US" dirty="0"/>
           </a:p>
@@ -2175,13 +2442,13 @@
             <a:r>
               <a:rPr lang="en-US" sz="1100" b="1" spc="250" kern="0" dirty="0">
                 <a:solidFill>
-                  <a:srgbClr val="3B6B4A"/>
-                </a:solidFill>
-                <a:latin typeface="Yu Gothic" pitchFamily="34" charset="0"/>
-                <a:ea typeface="Yu Gothic" pitchFamily="34" charset="-122"/>
-                <a:cs typeface="Yu Gothic" pitchFamily="34" charset="-120"/>
-              </a:rPr>
-              <a:t>業務への組み込み</a:t>
+                  <a:srgbClr val="8A8177"/>
+                </a:solidFill>
+                <a:latin typeface="Yu Gothic" pitchFamily="34" charset="0"/>
+                <a:ea typeface="Yu Gothic" pitchFamily="34" charset="-122"/>
+                <a:cs typeface="Yu Gothic" pitchFamily="34" charset="-120"/>
+              </a:rPr>
+              <a:t>用語</a:t>
             </a:r>
             <a:endParaRPr lang="en-US" sz="1100" dirty="0"/>
           </a:p>
@@ -2220,7 +2487,7 @@
                 <a:ea typeface="Yu Gothic" pitchFamily="34" charset="-122"/>
                 <a:cs typeface="Yu Gothic" pitchFamily="34" charset="-120"/>
               </a:rPr>
-              <a:t>帰る前に決めること</a:t>
+              <a:t>今日出てきた言葉</a:t>
             </a:r>
             <a:endParaRPr lang="en-US" sz="2600" dirty="0"/>
           </a:p>
@@ -2228,53 +2495,14 @@
       </p:sp>
       <p:sp>
         <p:nvSpPr>
-          <p:cNvPr id="4" name="Text 2"/>
-          <p:cNvSpPr txBox="1"/>
-          <p:nvPr/>
-        </p:nvSpPr>
-        <p:spPr>
-          <a:xfrm>
-            <a:off x="777240" y="1572768"/>
-            <a:ext cx="10607040" cy="320040"/>
-          </a:xfrm>
-          <a:prstGeom prst="rect">
-            <a:avLst/>
-          </a:prstGeom>
-          <a:noFill/>
-          <a:ln/>
-        </p:spPr>
-        <p:txBody>
-          <a:bodyPr wrap="square" lIns="0" tIns="0" rIns="0" bIns="0" rtlCol="0" anchor="ctr"/>
-          <a:lstStyle/>
-          <a:p>
-            <a:pPr indent="0" marL="0">
-              <a:buNone/>
-            </a:pPr>
-            <a:r>
-              <a:rPr lang="en-US" sz="1250" b="1" dirty="0">
-                <a:solidFill>
-                  <a:srgbClr val="3B6B4A"/>
-                </a:solidFill>
-                <a:latin typeface="Yu Gothic" pitchFamily="34" charset="0"/>
-                <a:ea typeface="Yu Gothic" pitchFamily="34" charset="-122"/>
-                <a:cs typeface="Yu Gothic" pitchFamily="34" charset="-120"/>
-              </a:rPr>
-              <a:t>ここを決めないと、持ち帰っても使われません。紙に書きます。</a:t>
-            </a:r>
-            <a:endParaRPr lang="en-US" sz="1250" dirty="0"/>
-          </a:p>
-        </p:txBody>
-      </p:sp>
-      <p:sp>
-        <p:nvSpPr>
-          <p:cNvPr id="5" name="Shape 3"/>
+          <p:cNvPr id="4" name="Shape 2"/>
           <p:cNvSpPr/>
           <p:nvPr/>
         </p:nvSpPr>
         <p:spPr>
           <a:xfrm>
-            <a:off x="777240" y="2103120"/>
-            <a:ext cx="10607040" cy="914400"/>
+            <a:off x="777240" y="1828800"/>
+            <a:ext cx="10607040" cy="1078992"/>
           </a:xfrm>
           <a:prstGeom prst="rect">
             <a:avLst/>
@@ -2292,20 +2520,59 @@
       </p:sp>
       <p:sp>
         <p:nvSpPr>
+          <p:cNvPr id="5" name="Text 3"/>
+          <p:cNvSpPr txBox="1"/>
+          <p:nvPr/>
+        </p:nvSpPr>
+        <p:spPr>
+          <a:xfrm>
+            <a:off x="1097280" y="1920240"/>
+            <a:ext cx="2969971" cy="896112"/>
+          </a:xfrm>
+          <a:prstGeom prst="rect">
+            <a:avLst/>
+          </a:prstGeom>
+          <a:noFill/>
+          <a:ln/>
+        </p:spPr>
+        <p:txBody>
+          <a:bodyPr wrap="square" lIns="0" tIns="0" rIns="0" bIns="0" rtlCol="0" anchor="ctr"/>
+          <a:lstStyle/>
+          <a:p>
+            <a:pPr indent="0" marL="0">
+              <a:buNone/>
+            </a:pPr>
+            <a:r>
+              <a:rPr lang="en-US" sz="1500" b="1" dirty="0">
+                <a:solidFill>
+                  <a:srgbClr val="23201D"/>
+                </a:solidFill>
+                <a:latin typeface="Yu Gothic" pitchFamily="34" charset="0"/>
+                <a:ea typeface="Yu Gothic" pitchFamily="34" charset="-122"/>
+                <a:cs typeface="Yu Gothic" pitchFamily="34" charset="-120"/>
+              </a:rPr>
+              <a:t>プロンプト</a:t>
+            </a:r>
+            <a:endParaRPr lang="en-US" sz="1500" dirty="0"/>
+          </a:p>
+        </p:txBody>
+      </p:sp>
+      <p:sp>
+        <p:nvSpPr>
           <p:cNvPr id="6" name="Shape 4"/>
           <p:cNvSpPr/>
           <p:nvPr/>
         </p:nvSpPr>
         <p:spPr>
           <a:xfrm>
-            <a:off x="777240" y="2103120"/>
-            <a:ext cx="54864" cy="914400"/>
+            <a:off x="4065422" y="1956816"/>
+            <a:ext cx="18288" cy="822960"/>
           </a:xfrm>
           <a:prstGeom prst="rect">
             <a:avLst/>
           </a:prstGeom>
           <a:solidFill>
-            <a:srgbClr val="3B6B4A"/>
+            <a:srgbClr val="EDE7DB"/>
           </a:solidFill>
           <a:ln w="12700">
             <a:solidFill>
@@ -2323,47 +2590,8 @@
         </p:nvSpPr>
         <p:spPr>
           <a:xfrm>
-            <a:off x="1143000" y="2176272"/>
-            <a:ext cx="2757830" cy="768096"/>
-          </a:xfrm>
-          <a:prstGeom prst="rect">
-            <a:avLst/>
-          </a:prstGeom>
-          <a:noFill/>
-          <a:ln/>
-        </p:spPr>
-        <p:txBody>
-          <a:bodyPr wrap="square" lIns="0" tIns="0" rIns="0" bIns="0" rtlCol="0" anchor="ctr"/>
-          <a:lstStyle/>
-          <a:p>
-            <a:pPr indent="0" marL="0">
-              <a:buNone/>
-            </a:pPr>
-            <a:r>
-              <a:rPr lang="en-US" sz="1400" b="1" dirty="0">
-                <a:solidFill>
-                  <a:srgbClr val="3B6B4A"/>
-                </a:solidFill>
-                <a:latin typeface="Yu Gothic" pitchFamily="34" charset="0"/>
-                <a:ea typeface="Yu Gothic" pitchFamily="34" charset="-122"/>
-                <a:cs typeface="Yu Gothic" pitchFamily="34" charset="-120"/>
-              </a:rPr>
-              <a:t>いつ使うか</a:t>
-            </a:r>
-            <a:endParaRPr lang="en-US" sz="1400" dirty="0"/>
-          </a:p>
-        </p:txBody>
-      </p:sp>
-      <p:sp>
-        <p:nvSpPr>
-          <p:cNvPr id="8" name="Text 6"/>
-          <p:cNvSpPr txBox="1"/>
-          <p:nvPr/>
-        </p:nvSpPr>
-        <p:spPr>
-          <a:xfrm>
-            <a:off x="4006901" y="2176272"/>
-            <a:ext cx="7011619" cy="768096"/>
+            <a:off x="4383634" y="1920240"/>
+            <a:ext cx="6682435" cy="896112"/>
           </a:xfrm>
           <a:prstGeom prst="rect">
             <a:avLst/>
@@ -2384,13 +2612,13 @@
             <a:r>
               <a:rPr lang="en-US" sz="1250" dirty="0">
                 <a:solidFill>
-                  <a:srgbClr val="3F3933"/>
-                </a:solidFill>
-                <a:latin typeface="Yu Gothic" pitchFamily="34" charset="0"/>
-                <a:ea typeface="Yu Gothic" pitchFamily="34" charset="-122"/>
-                <a:cs typeface="Yu Gothic" pitchFamily="34" charset="-120"/>
-              </a:rPr>
-              <a:t>「明日の朝いち、見積を書く前に」まで具体的に決めます</a:t>
+                  <a:srgbClr val="5A534A"/>
+                </a:solidFill>
+                <a:latin typeface="Yu Gothic" pitchFamily="34" charset="0"/>
+                <a:ea typeface="Yu Gothic" pitchFamily="34" charset="-122"/>
+                <a:cs typeface="Yu Gothic" pitchFamily="34" charset="-120"/>
+              </a:rPr>
+              <a:t>AIへの指示文。長さより、前提と条件が入っているかが効きます</a:t>
             </a:r>
             <a:endParaRPr lang="en-US" sz="1250" dirty="0"/>
           </a:p>
@@ -2398,14 +2626,14 @@
       </p:sp>
       <p:sp>
         <p:nvSpPr>
-          <p:cNvPr id="9" name="Shape 7"/>
+          <p:cNvPr id="8" name="Shape 6"/>
           <p:cNvSpPr/>
           <p:nvPr/>
         </p:nvSpPr>
         <p:spPr>
           <a:xfrm>
-            <a:off x="777240" y="3154680"/>
-            <a:ext cx="10607040" cy="914400"/>
+            <a:off x="777240" y="3063240"/>
+            <a:ext cx="10607040" cy="1078992"/>
           </a:xfrm>
           <a:prstGeom prst="rect">
             <a:avLst/>
@@ -2423,20 +2651,59 @@
       </p:sp>
       <p:sp>
         <p:nvSpPr>
+          <p:cNvPr id="9" name="Text 7"/>
+          <p:cNvSpPr txBox="1"/>
+          <p:nvPr/>
+        </p:nvSpPr>
+        <p:spPr>
+          <a:xfrm>
+            <a:off x="1097280" y="3154680"/>
+            <a:ext cx="2969971" cy="896112"/>
+          </a:xfrm>
+          <a:prstGeom prst="rect">
+            <a:avLst/>
+          </a:prstGeom>
+          <a:noFill/>
+          <a:ln/>
+        </p:spPr>
+        <p:txBody>
+          <a:bodyPr wrap="square" lIns="0" tIns="0" rIns="0" bIns="0" rtlCol="0" anchor="ctr"/>
+          <a:lstStyle/>
+          <a:p>
+            <a:pPr indent="0" marL="0">
+              <a:buNone/>
+            </a:pPr>
+            <a:r>
+              <a:rPr lang="en-US" sz="1500" b="1" dirty="0">
+                <a:solidFill>
+                  <a:srgbClr val="23201D"/>
+                </a:solidFill>
+                <a:latin typeface="Yu Gothic" pitchFamily="34" charset="0"/>
+                <a:ea typeface="Yu Gothic" pitchFamily="34" charset="-122"/>
+                <a:cs typeface="Yu Gothic" pitchFamily="34" charset="-120"/>
+              </a:rPr>
+              <a:t>ハルシネーション</a:t>
+            </a:r>
+            <a:endParaRPr lang="en-US" sz="1500" dirty="0"/>
+          </a:p>
+        </p:txBody>
+      </p:sp>
+      <p:sp>
+        <p:nvSpPr>
           <p:cNvPr id="10" name="Shape 8"/>
           <p:cNvSpPr/>
           <p:nvPr/>
         </p:nvSpPr>
         <p:spPr>
           <a:xfrm>
-            <a:off x="777240" y="3154680"/>
-            <a:ext cx="54864" cy="914400"/>
+            <a:off x="4065422" y="3191256"/>
+            <a:ext cx="18288" cy="822960"/>
           </a:xfrm>
           <a:prstGeom prst="rect">
             <a:avLst/>
           </a:prstGeom>
           <a:solidFill>
-            <a:srgbClr val="3B6B4A"/>
+            <a:srgbClr val="EDE7DB"/>
           </a:solidFill>
           <a:ln w="12700">
             <a:solidFill>
@@ -2454,47 +2721,8 @@
         </p:nvSpPr>
         <p:spPr>
           <a:xfrm>
-            <a:off x="1143000" y="3227832"/>
-            <a:ext cx="2757830" cy="768096"/>
-          </a:xfrm>
-          <a:prstGeom prst="rect">
-            <a:avLst/>
-          </a:prstGeom>
-          <a:noFill/>
-          <a:ln/>
-        </p:spPr>
-        <p:txBody>
-          <a:bodyPr wrap="square" lIns="0" tIns="0" rIns="0" bIns="0" rtlCol="0" anchor="ctr"/>
-          <a:lstStyle/>
-          <a:p>
-            <a:pPr indent="0" marL="0">
-              <a:buNone/>
-            </a:pPr>
-            <a:r>
-              <a:rPr lang="en-US" sz="1400" b="1" dirty="0">
-                <a:solidFill>
-                  <a:srgbClr val="3B6B4A"/>
-                </a:solidFill>
-                <a:latin typeface="Yu Gothic" pitchFamily="34" charset="0"/>
-                <a:ea typeface="Yu Gothic" pitchFamily="34" charset="-122"/>
-                <a:cs typeface="Yu Gothic" pitchFamily="34" charset="-120"/>
-              </a:rPr>
-              <a:t>誰が使うか</a:t>
-            </a:r>
-            <a:endParaRPr lang="en-US" sz="1400" dirty="0"/>
-          </a:p>
-        </p:txBody>
-      </p:sp>
-      <p:sp>
-        <p:nvSpPr>
-          <p:cNvPr id="12" name="Text 10"/>
-          <p:cNvSpPr txBox="1"/>
-          <p:nvPr/>
-        </p:nvSpPr>
-        <p:spPr>
-          <a:xfrm>
-            <a:off x="4006901" y="3227832"/>
-            <a:ext cx="7011619" cy="768096"/>
+            <a:off x="4383634" y="3154680"/>
+            <a:ext cx="6682435" cy="896112"/>
           </a:xfrm>
           <a:prstGeom prst="rect">
             <a:avLst/>
@@ -2515,13 +2743,13 @@
             <a:r>
               <a:rPr lang="en-US" sz="1250" dirty="0">
                 <a:solidFill>
-                  <a:srgbClr val="3F3933"/>
-                </a:solidFill>
-                <a:latin typeface="Yu Gothic" pitchFamily="34" charset="0"/>
-                <a:ea typeface="Yu Gothic" pitchFamily="34" charset="-122"/>
-                <a:cs typeface="Yu Gothic" pitchFamily="34" charset="-120"/>
-              </a:rPr>
-              <a:t>当面は社長ご自身です。社員に渡すのは第3回から</a:t>
+                  <a:srgbClr val="5A534A"/>
+                </a:solidFill>
+                <a:latin typeface="Yu Gothic" pitchFamily="34" charset="0"/>
+                <a:ea typeface="Yu Gothic" pitchFamily="34" charset="-122"/>
+                <a:cs typeface="Yu Gothic" pitchFamily="34" charset="-120"/>
+              </a:rPr>
+              <a:t>AIがもっともらしい嘘を言うこと。無くなりません。前提として仕組みを作ります</a:t>
             </a:r>
             <a:endParaRPr lang="en-US" sz="1250" dirty="0"/>
           </a:p>
@@ -2529,14 +2757,14 @@
       </p:sp>
       <p:sp>
         <p:nvSpPr>
-          <p:cNvPr id="13" name="Shape 11"/>
+          <p:cNvPr id="12" name="Shape 10"/>
           <p:cNvSpPr/>
           <p:nvPr/>
         </p:nvSpPr>
         <p:spPr>
           <a:xfrm>
-            <a:off x="777240" y="4206240"/>
-            <a:ext cx="10607040" cy="914400"/>
+            <a:off x="777240" y="4297680"/>
+            <a:ext cx="10607040" cy="1078992"/>
           </a:xfrm>
           <a:prstGeom prst="rect">
             <a:avLst/>
@@ -2554,20 +2782,59 @@
       </p:sp>
       <p:sp>
         <p:nvSpPr>
+          <p:cNvPr id="13" name="Text 11"/>
+          <p:cNvSpPr txBox="1"/>
+          <p:nvPr/>
+        </p:nvSpPr>
+        <p:spPr>
+          <a:xfrm>
+            <a:off x="1097280" y="4389120"/>
+            <a:ext cx="2969971" cy="896112"/>
+          </a:xfrm>
+          <a:prstGeom prst="rect">
+            <a:avLst/>
+          </a:prstGeom>
+          <a:noFill/>
+          <a:ln/>
+        </p:spPr>
+        <p:txBody>
+          <a:bodyPr wrap="square" lIns="0" tIns="0" rIns="0" bIns="0" rtlCol="0" anchor="ctr"/>
+          <a:lstStyle/>
+          <a:p>
+            <a:pPr indent="0" marL="0">
+              <a:buNone/>
+            </a:pPr>
+            <a:r>
+              <a:rPr lang="en-US" sz="1500" b="1" dirty="0">
+                <a:solidFill>
+                  <a:srgbClr val="23201D"/>
+                </a:solidFill>
+                <a:latin typeface="Yu Gothic" pitchFamily="34" charset="0"/>
+                <a:ea typeface="Yu Gothic" pitchFamily="34" charset="-122"/>
+                <a:cs typeface="Yu Gothic" pitchFamily="34" charset="-120"/>
+              </a:rPr>
+              <a:t>棚卸し</a:t>
+            </a:r>
+            <a:endParaRPr lang="en-US" sz="1500" dirty="0"/>
+          </a:p>
+        </p:txBody>
+      </p:sp>
+      <p:sp>
+        <p:nvSpPr>
           <p:cNvPr id="14" name="Shape 12"/>
           <p:cNvSpPr/>
           <p:nvPr/>
         </p:nvSpPr>
         <p:spPr>
           <a:xfrm>
-            <a:off x="777240" y="4206240"/>
-            <a:ext cx="54864" cy="914400"/>
+            <a:off x="4065422" y="4425696"/>
+            <a:ext cx="18288" cy="822960"/>
           </a:xfrm>
           <a:prstGeom prst="rect">
             <a:avLst/>
           </a:prstGeom>
           <a:solidFill>
-            <a:srgbClr val="3B6B4A"/>
+            <a:srgbClr val="EDE7DB"/>
           </a:solidFill>
           <a:ln w="12700">
             <a:solidFill>
@@ -2585,47 +2852,8 @@
         </p:nvSpPr>
         <p:spPr>
           <a:xfrm>
-            <a:off x="1143000" y="4279392"/>
-            <a:ext cx="2757830" cy="768096"/>
-          </a:xfrm>
-          <a:prstGeom prst="rect">
-            <a:avLst/>
-          </a:prstGeom>
-          <a:noFill/>
-          <a:ln/>
-        </p:spPr>
-        <p:txBody>
-          <a:bodyPr wrap="square" lIns="0" tIns="0" rIns="0" bIns="0" rtlCol="0" anchor="ctr"/>
-          <a:lstStyle/>
-          <a:p>
-            <a:pPr indent="0" marL="0">
-              <a:buNone/>
-            </a:pPr>
-            <a:r>
-              <a:rPr lang="en-US" sz="1400" b="1" dirty="0">
-                <a:solidFill>
-                  <a:srgbClr val="3B6B4A"/>
-                </a:solidFill>
-                <a:latin typeface="Yu Gothic" pitchFamily="34" charset="0"/>
-                <a:ea typeface="Yu Gothic" pitchFamily="34" charset="-122"/>
-                <a:cs typeface="Yu Gothic" pitchFamily="34" charset="-120"/>
-              </a:rPr>
-              <a:t>何を確認するか</a:t>
-            </a:r>
-            <a:endParaRPr lang="en-US" sz="1400" dirty="0"/>
-          </a:p>
-        </p:txBody>
-      </p:sp>
-      <p:sp>
-        <p:nvSpPr>
-          <p:cNvPr id="16" name="Text 14"/>
-          <p:cNvSpPr txBox="1"/>
-          <p:nvPr/>
-        </p:nvSpPr>
-        <p:spPr>
-          <a:xfrm>
-            <a:off x="4006901" y="4279392"/>
-            <a:ext cx="7011619" cy="768096"/>
+            <a:off x="4383634" y="4389120"/>
+            <a:ext cx="6682435" cy="896112"/>
           </a:xfrm>
           <a:prstGeom prst="rect">
             <a:avLst/>
@@ -2646,15 +2874,54 @@
             <a:r>
               <a:rPr lang="en-US" sz="1250" dirty="0">
                 <a:solidFill>
-                  <a:srgbClr val="3F3933"/>
-                </a:solidFill>
-                <a:latin typeface="Yu Gothic" pitchFamily="34" charset="0"/>
-                <a:ea typeface="Yu Gothic" pitchFamily="34" charset="-122"/>
-                <a:cs typeface="Yu Gothic" pitchFamily="34" charset="-120"/>
-              </a:rPr>
-              <a:t>出てきた金額と数字は、提出前に必ず目視で確認します</a:t>
+                  <a:srgbClr val="5A534A"/>
+                </a:solidFill>
+                <a:latin typeface="Yu Gothic" pitchFamily="34" charset="0"/>
+                <a:ea typeface="Yu Gothic" pitchFamily="34" charset="-122"/>
+                <a:cs typeface="Yu Gothic" pitchFamily="34" charset="-120"/>
+              </a:rPr>
+              <a:t>業務を、誰が・どのくらいの頻度で・1回何分、に分解して並べること</a:t>
             </a:r>
             <a:endParaRPr lang="en-US" sz="1250" dirty="0"/>
+          </a:p>
+        </p:txBody>
+      </p:sp>
+      <p:sp>
+        <p:nvSpPr>
+          <p:cNvPr id="16" name="Text 14"/>
+          <p:cNvSpPr txBox="1"/>
+          <p:nvPr/>
+        </p:nvSpPr>
+        <p:spPr>
+          <a:xfrm>
+            <a:off x="777240" y="5623560"/>
+            <a:ext cx="10607040" cy="411480"/>
+          </a:xfrm>
+          <a:prstGeom prst="rect">
+            <a:avLst/>
+          </a:prstGeom>
+          <a:noFill/>
+          <a:ln/>
+        </p:spPr>
+        <p:txBody>
+          <a:bodyPr wrap="square" lIns="0" tIns="0" rIns="0" bIns="0" rtlCol="0" anchor="ctr"/>
+          <a:lstStyle/>
+          <a:p>
+            <a:pPr indent="0" marL="0">
+              <a:buNone/>
+            </a:pPr>
+            <a:r>
+              <a:rPr lang="en-US" sz="1150" dirty="0">
+                <a:solidFill>
+                  <a:srgbClr val="8A8177"/>
+                </a:solidFill>
+                <a:latin typeface="Yu Gothic" pitchFamily="34" charset="0"/>
+                <a:ea typeface="Yu Gothic" pitchFamily="34" charset="-122"/>
+                <a:cs typeface="Yu Gothic" pitchFamily="34" charset="-120"/>
+              </a:rPr>
+              <a:t>配布した用語辞典にも同じものが載っています。覚える必要はありません。</a:t>
+            </a:r>
+            <a:endParaRPr lang="en-US" sz="1150" dirty="0"/>
           </a:p>
         </p:txBody>
       </p:sp>
@@ -2730,7 +2997,7 @@
                 <a:ea typeface="Yu Gothic" pitchFamily="34" charset="-122"/>
                 <a:cs typeface="Yu Gothic" pitchFamily="34" charset="-120"/>
               </a:rPr>
-              <a:t>組み込み</a:t>
+              <a:t>用語</a:t>
             </a:r>
             <a:endParaRPr lang="en-US" sz="900" dirty="0"/>
           </a:p>
@@ -2795,13 +3062,13 @@
             <a:r>
               <a:rPr lang="en-US" sz="1100" b="1" spc="250" kern="0" dirty="0">
                 <a:solidFill>
-                  <a:srgbClr val="B04A2F"/>
-                </a:solidFill>
-                <a:latin typeface="Yu Gothic" pitchFamily="34" charset="0"/>
-                <a:ea typeface="Yu Gothic" pitchFamily="34" charset="-122"/>
-                <a:cs typeface="Yu Gothic" pitchFamily="34" charset="-120"/>
-              </a:rPr>
-              <a:t>ここだけは</a:t>
+                  <a:srgbClr val="2F4F6B"/>
+                </a:solidFill>
+                <a:latin typeface="Yu Gothic" pitchFamily="34" charset="0"/>
+                <a:ea typeface="Yu Gothic" pitchFamily="34" charset="-122"/>
+                <a:cs typeface="Yu Gothic" pitchFamily="34" charset="-120"/>
+              </a:rPr>
+              <a:t>演習</a:t>
             </a:r>
             <a:endParaRPr lang="en-US" sz="1100" dirty="0"/>
           </a:p>
@@ -2815,7 +3082,7 @@
         </p:nvSpPr>
         <p:spPr>
           <a:xfrm>
-            <a:off x="777240" y="1097280"/>
+            <a:off x="777240" y="896112"/>
             <a:ext cx="10607040" cy="640080"/>
           </a:xfrm>
           <a:prstGeom prst="rect">
@@ -2840,7 +3107,7 @@
                 <a:ea typeface="Yu Gothic" pitchFamily="34" charset="-122"/>
                 <a:cs typeface="Yu Gothic" pitchFamily="34" charset="-120"/>
               </a:rPr>
-              <a:t>今日は、成果より「手応え」を持ち帰る回です</a:t>
+              <a:t>今日、一緒にやること</a:t>
             </a:r>
             <a:endParaRPr lang="en-US" sz="2600" dirty="0"/>
           </a:p>
@@ -2848,20 +3115,84 @@
       </p:sp>
       <p:sp>
         <p:nvSpPr>
-          <p:cNvPr id="4" name="Shape 2"/>
+          <p:cNvPr id="4" name="Text 2"/>
+          <p:cNvSpPr txBox="1"/>
+          <p:nvPr/>
+        </p:nvSpPr>
+        <p:spPr>
+          <a:xfrm>
+            <a:off x="777240" y="1572768"/>
+            <a:ext cx="10607040" cy="320040"/>
+          </a:xfrm>
+          <a:prstGeom prst="rect">
+            <a:avLst/>
+          </a:prstGeom>
+          <a:noFill/>
+          <a:ln/>
+        </p:spPr>
+        <p:txBody>
+          <a:bodyPr wrap="square" lIns="0" tIns="0" rIns="0" bIns="0" rtlCol="0" anchor="ctr"/>
+          <a:lstStyle/>
+          <a:p>
+            <a:pPr indent="0" marL="0">
+              <a:buNone/>
+            </a:pPr>
+            <a:r>
+              <a:rPr lang="en-US" sz="1250" b="1" dirty="0">
+                <a:solidFill>
+                  <a:srgbClr val="2F4F6B"/>
+                </a:solidFill>
+                <a:latin typeface="Yu Gothic" pitchFamily="34" charset="0"/>
+                <a:ea typeface="Yu Gothic" pitchFamily="34" charset="-122"/>
+                <a:cs typeface="Yu Gothic" pitchFamily="34" charset="-120"/>
+              </a:rPr>
+              <a:t>55分。操作するのはご自身です。</a:t>
+            </a:r>
+            <a:endParaRPr lang="en-US" sz="1250" dirty="0"/>
+          </a:p>
+        </p:txBody>
+      </p:sp>
+      <p:sp>
+        <p:nvSpPr>
+          <p:cNvPr id="5" name="Shape 3"/>
           <p:cNvSpPr/>
           <p:nvPr/>
         </p:nvSpPr>
         <p:spPr>
           <a:xfrm>
             <a:off x="777240" y="2148840"/>
-            <a:ext cx="64008" cy="2194560"/>
+            <a:ext cx="3383280" cy="2880360"/>
           </a:xfrm>
           <a:prstGeom prst="rect">
             <a:avLst/>
           </a:prstGeom>
           <a:solidFill>
-            <a:srgbClr val="B04A2F"/>
+            <a:srgbClr val="FFFFFF"/>
+          </a:solidFill>
+          <a:ln w="12700">
+            <a:solidFill>
+              <a:srgbClr val="EDE7DB"/>
+            </a:solidFill>
+            <a:prstDash val="solid"/>
+          </a:ln>
+        </p:spPr>
+      </p:sp>
+      <p:sp>
+        <p:nvSpPr>
+          <p:cNvPr id="6" name="Shape 4"/>
+          <p:cNvSpPr/>
+          <p:nvPr/>
+        </p:nvSpPr>
+        <p:spPr>
+          <a:xfrm>
+            <a:off x="1051560" y="2395728"/>
+            <a:ext cx="438912" cy="438912"/>
+          </a:xfrm>
+          <a:prstGeom prst="ellipse">
+            <a:avLst/>
+          </a:prstGeom>
+          <a:solidFill>
+            <a:srgbClr val="2F4F6B"/>
           </a:solidFill>
           <a:ln w="12700">
             <a:solidFill>
@@ -2873,14 +3204,53 @@
       </p:sp>
       <p:sp>
         <p:nvSpPr>
-          <p:cNvPr id="5" name="Text 3"/>
-          <p:cNvSpPr txBox="1"/>
-          <p:nvPr/>
-        </p:nvSpPr>
-        <p:spPr>
-          <a:xfrm>
-            <a:off x="1188720" y="2148840"/>
-            <a:ext cx="9966960" cy="2194560"/>
+          <p:cNvPr id="7" name="Text 5"/>
+          <p:cNvSpPr txBox="1"/>
+          <p:nvPr/>
+        </p:nvSpPr>
+        <p:spPr>
+          <a:xfrm>
+            <a:off x="1051560" y="2395728"/>
+            <a:ext cx="438912" cy="438912"/>
+          </a:xfrm>
+          <a:prstGeom prst="rect">
+            <a:avLst/>
+          </a:prstGeom>
+          <a:noFill/>
+          <a:ln/>
+        </p:spPr>
+        <p:txBody>
+          <a:bodyPr wrap="square" lIns="0" tIns="0" rIns="0" bIns="0" rtlCol="0" anchor="ctr"/>
+          <a:lstStyle/>
+          <a:p>
+            <a:pPr algn="ctr" indent="0" marL="0">
+              <a:buNone/>
+            </a:pPr>
+            <a:r>
+              <a:rPr lang="en-US" sz="1300" b="1" dirty="0">
+                <a:solidFill>
+                  <a:srgbClr val="FFFFFF"/>
+                </a:solidFill>
+                <a:latin typeface="Yu Gothic" pitchFamily="34" charset="0"/>
+                <a:ea typeface="Yu Gothic" pitchFamily="34" charset="-122"/>
+                <a:cs typeface="Yu Gothic" pitchFamily="34" charset="-120"/>
+              </a:rPr>
+              <a:t>1</a:t>
+            </a:r>
+            <a:endParaRPr lang="en-US" sz="1300" dirty="0"/>
+          </a:p>
+        </p:txBody>
+      </p:sp>
+      <p:sp>
+        <p:nvSpPr>
+          <p:cNvPr id="8" name="Text 6"/>
+          <p:cNvSpPr txBox="1"/>
+          <p:nvPr/>
+        </p:nvSpPr>
+        <p:spPr>
+          <a:xfrm>
+            <a:off x="1051560" y="2944368"/>
+            <a:ext cx="2834640" cy="731520"/>
           </a:xfrm>
           <a:prstGeom prst="rect">
             <a:avLst/>
@@ -2894,41 +3264,108 @@
           <a:p>
             <a:pPr indent="0" marL="0">
               <a:lnSpc>
-                <a:spcPct val="160000"/>
+                <a:spcPct val="125000"/>
               </a:lnSpc>
               <a:buNone/>
             </a:pPr>
             <a:r>
-              <a:rPr lang="en-US" sz="1650" dirty="0">
-                <a:solidFill>
-                  <a:srgbClr val="3F3933"/>
-                </a:solidFill>
-                <a:latin typeface="Yu Gothic" pitchFamily="34" charset="0"/>
-                <a:ea typeface="Yu Gothic" pitchFamily="34" charset="-122"/>
-                <a:cs typeface="Yu Gothic" pitchFamily="34" charset="-120"/>
-              </a:rPr>
-              <a:t>診断して終わった初回は、2回目の欠席理由をつくります。だから必ず、その日のうちに1つ動くものを持ち帰っていただきます。小さくて構いません。明日の朝に一度使えるものであることのほうが大事です。</a:t>
-            </a:r>
-            <a:endParaRPr lang="en-US" sz="1650" dirty="0"/>
-          </a:p>
-        </p:txBody>
-      </p:sp>
-      <p:sp>
-        <p:nvSpPr>
-          <p:cNvPr id="6" name="Shape 4"/>
+              <a:rPr lang="en-US" sz="1450" b="1" dirty="0">
+                <a:solidFill>
+                  <a:srgbClr val="23201D"/>
+                </a:solidFill>
+                <a:latin typeface="Yu Gothic" pitchFamily="34" charset="0"/>
+                <a:ea typeface="Yu Gothic" pitchFamily="34" charset="-122"/>
+                <a:cs typeface="Yu Gothic" pitchFamily="34" charset="-120"/>
+              </a:rPr>
+              <a:t>いまの使い方を拝見する</a:t>
+            </a:r>
+            <a:endParaRPr lang="en-US" sz="1450" dirty="0"/>
+          </a:p>
+        </p:txBody>
+      </p:sp>
+      <p:sp>
+        <p:nvSpPr>
+          <p:cNvPr id="9" name="Text 7"/>
+          <p:cNvSpPr txBox="1"/>
+          <p:nvPr/>
+        </p:nvSpPr>
+        <p:spPr>
+          <a:xfrm>
+            <a:off x="1051560" y="3703320"/>
+            <a:ext cx="2834640" cy="1188720"/>
+          </a:xfrm>
+          <a:prstGeom prst="rect">
+            <a:avLst/>
+          </a:prstGeom>
+          <a:noFill/>
+          <a:ln/>
+        </p:spPr>
+        <p:txBody>
+          <a:bodyPr wrap="square" lIns="0" tIns="0" rIns="0" bIns="0" rtlCol="0" anchor="ctr"/>
+          <a:lstStyle/>
+          <a:p>
+            <a:pPr indent="0" marL="0">
+              <a:lnSpc>
+                <a:spcPct val="130000"/>
+              </a:lnSpc>
+              <a:buNone/>
+            </a:pPr>
+            <a:r>
+              <a:rPr lang="en-US" sz="1150" dirty="0">
+                <a:solidFill>
+                  <a:srgbClr val="5A534A"/>
+                </a:solidFill>
+                <a:latin typeface="Yu Gothic" pitchFamily="34" charset="0"/>
+                <a:ea typeface="Yu Gothic" pitchFamily="34" charset="-122"/>
+                <a:cs typeface="Yu Gothic" pitchFamily="34" charset="-120"/>
+              </a:rPr>
+              <a:t>20分。普段どおりに操作していただきます。うまくやろうとしなくて大丈夫です</a:t>
+            </a:r>
+            <a:endParaRPr lang="en-US" sz="1150" dirty="0"/>
+          </a:p>
+        </p:txBody>
+      </p:sp>
+      <p:sp>
+        <p:nvSpPr>
+          <p:cNvPr id="10" name="Shape 8"/>
           <p:cNvSpPr/>
           <p:nvPr/>
         </p:nvSpPr>
         <p:spPr>
           <a:xfrm>
-            <a:off x="777240" y="4709160"/>
-            <a:ext cx="10607040" cy="960120"/>
+            <a:off x="4389120" y="2148840"/>
+            <a:ext cx="3383280" cy="2880360"/>
           </a:xfrm>
           <a:prstGeom prst="rect">
             <a:avLst/>
           </a:prstGeom>
           <a:solidFill>
-            <a:srgbClr val="EDE7DB"/>
+            <a:srgbClr val="FFFFFF"/>
+          </a:solidFill>
+          <a:ln w="12700">
+            <a:solidFill>
+              <a:srgbClr val="EDE7DB"/>
+            </a:solidFill>
+            <a:prstDash val="solid"/>
+          </a:ln>
+        </p:spPr>
+      </p:sp>
+      <p:sp>
+        <p:nvSpPr>
+          <p:cNvPr id="11" name="Shape 9"/>
+          <p:cNvSpPr/>
+          <p:nvPr/>
+        </p:nvSpPr>
+        <p:spPr>
+          <a:xfrm>
+            <a:off x="4663440" y="2395728"/>
+            <a:ext cx="438912" cy="438912"/>
+          </a:xfrm>
+          <a:prstGeom prst="ellipse">
+            <a:avLst/>
+          </a:prstGeom>
+          <a:solidFill>
+            <a:srgbClr val="2F4F6B"/>
           </a:solidFill>
           <a:ln w="12700">
             <a:solidFill>
@@ -2940,53 +3377,95 @@
       </p:sp>
       <p:sp>
         <p:nvSpPr>
-          <p:cNvPr id="7" name="Text 5"/>
-          <p:cNvSpPr txBox="1"/>
-          <p:nvPr/>
-        </p:nvSpPr>
-        <p:spPr>
-          <a:xfrm>
-            <a:off x="1051560" y="4800600"/>
-            <a:ext cx="1463040" cy="256032"/>
-          </a:xfrm>
-          <a:prstGeom prst="rect">
-            <a:avLst/>
-          </a:prstGeom>
-          <a:noFill/>
-          <a:ln/>
-        </p:spPr>
-        <p:txBody>
-          <a:bodyPr wrap="square" lIns="0" tIns="0" rIns="0" bIns="0" rtlCol="0" anchor="ctr"/>
-          <a:lstStyle/>
-          <a:p>
-            <a:pPr indent="0" marL="0">
-              <a:buNone/>
-            </a:pPr>
-            <a:r>
-              <a:rPr lang="en-US" sz="900" b="1" spc="150" kern="0" dirty="0">
-                <a:solidFill>
-                  <a:srgbClr val="B04A2F"/>
-                </a:solidFill>
-                <a:latin typeface="Yu Gothic" pitchFamily="34" charset="0"/>
-                <a:ea typeface="Yu Gothic" pitchFamily="34" charset="-122"/>
-                <a:cs typeface="Yu Gothic" pitchFamily="34" charset="-120"/>
-              </a:rPr>
-              <a:t>他社では</a:t>
-            </a:r>
-            <a:endParaRPr lang="en-US" sz="900" dirty="0"/>
-          </a:p>
-        </p:txBody>
-      </p:sp>
-      <p:sp>
-        <p:nvSpPr>
-          <p:cNvPr id="8" name="Text 6"/>
-          <p:cNvSpPr txBox="1"/>
-          <p:nvPr/>
-        </p:nvSpPr>
-        <p:spPr>
-          <a:xfrm>
-            <a:off x="1051560" y="5029200"/>
-            <a:ext cx="10058400" cy="566928"/>
+          <p:cNvPr id="12" name="Text 10"/>
+          <p:cNvSpPr txBox="1"/>
+          <p:nvPr/>
+        </p:nvSpPr>
+        <p:spPr>
+          <a:xfrm>
+            <a:off x="4663440" y="2395728"/>
+            <a:ext cx="438912" cy="438912"/>
+          </a:xfrm>
+          <a:prstGeom prst="rect">
+            <a:avLst/>
+          </a:prstGeom>
+          <a:noFill/>
+          <a:ln/>
+        </p:spPr>
+        <p:txBody>
+          <a:bodyPr wrap="square" lIns="0" tIns="0" rIns="0" bIns="0" rtlCol="0" anchor="ctr"/>
+          <a:lstStyle/>
+          <a:p>
+            <a:pPr algn="ctr" indent="0" marL="0">
+              <a:buNone/>
+            </a:pPr>
+            <a:r>
+              <a:rPr lang="en-US" sz="1300" b="1" dirty="0">
+                <a:solidFill>
+                  <a:srgbClr val="FFFFFF"/>
+                </a:solidFill>
+                <a:latin typeface="Yu Gothic" pitchFamily="34" charset="0"/>
+                <a:ea typeface="Yu Gothic" pitchFamily="34" charset="-122"/>
+                <a:cs typeface="Yu Gothic" pitchFamily="34" charset="-120"/>
+              </a:rPr>
+              <a:t>2</a:t>
+            </a:r>
+            <a:endParaRPr lang="en-US" sz="1300" dirty="0"/>
+          </a:p>
+        </p:txBody>
+      </p:sp>
+      <p:sp>
+        <p:nvSpPr>
+          <p:cNvPr id="13" name="Text 11"/>
+          <p:cNvSpPr txBox="1"/>
+          <p:nvPr/>
+        </p:nvSpPr>
+        <p:spPr>
+          <a:xfrm>
+            <a:off x="4663440" y="2944368"/>
+            <a:ext cx="2834640" cy="731520"/>
+          </a:xfrm>
+          <a:prstGeom prst="rect">
+            <a:avLst/>
+          </a:prstGeom>
+          <a:noFill/>
+          <a:ln/>
+        </p:spPr>
+        <p:txBody>
+          <a:bodyPr wrap="square" lIns="0" tIns="0" rIns="0" bIns="0" rtlCol="0" anchor="ctr"/>
+          <a:lstStyle/>
+          <a:p>
+            <a:pPr indent="0" marL="0">
+              <a:lnSpc>
+                <a:spcPct val="125000"/>
+              </a:lnSpc>
+              <a:buNone/>
+            </a:pPr>
+            <a:r>
+              <a:rPr lang="en-US" sz="1450" b="1" dirty="0">
+                <a:solidFill>
+                  <a:srgbClr val="23201D"/>
+                </a:solidFill>
+                <a:latin typeface="Yu Gothic" pitchFamily="34" charset="0"/>
+                <a:ea typeface="Yu Gothic" pitchFamily="34" charset="-122"/>
+                <a:cs typeface="Yu Gothic" pitchFamily="34" charset="-120"/>
+              </a:rPr>
+              <a:t>業務を棚卸しする</a:t>
+            </a:r>
+            <a:endParaRPr lang="en-US" sz="1450" dirty="0"/>
+          </a:p>
+        </p:txBody>
+      </p:sp>
+      <p:sp>
+        <p:nvSpPr>
+          <p:cNvPr id="14" name="Text 12"/>
+          <p:cNvSpPr txBox="1"/>
+          <p:nvPr/>
+        </p:nvSpPr>
+        <p:spPr>
+          <a:xfrm>
+            <a:off x="4663440" y="3703320"/>
+            <a:ext cx="2834640" cy="1188720"/>
           </a:xfrm>
           <a:prstGeom prst="rect">
             <a:avLst/>
@@ -3005,23 +3484,196 @@
               <a:buNone/>
             </a:pPr>
             <a:r>
-              <a:rPr lang="en-US" sz="1250" dirty="0">
-                <a:solidFill>
-                  <a:srgbClr val="3F3933"/>
-                </a:solidFill>
-                <a:latin typeface="Yu Gothic" pitchFamily="34" charset="0"/>
-                <a:ea typeface="Yu Gothic" pitchFamily="34" charset="-122"/>
-                <a:cs typeface="Yu Gothic" pitchFamily="34" charset="-120"/>
-              </a:rPr>
-              <a:t>ある会社では、初回に作ったのは「お断りメールの下書き」1本だけでした。ただ、それを翌朝に使ったことで、2回目以降の宿題が一度も止まりませんでした。</a:t>
-            </a:r>
-            <a:endParaRPr lang="en-US" sz="1250" dirty="0"/>
-          </a:p>
-        </p:txBody>
-      </p:sp>
-      <p:sp>
-        <p:nvSpPr>
-          <p:cNvPr id="9" name="Text 7"/>
+              <a:rPr lang="en-US" sz="1150" dirty="0">
+                <a:solidFill>
+                  <a:srgbClr val="5A534A"/>
+                </a:solidFill>
+                <a:latin typeface="Yu Gothic" pitchFamily="34" charset="0"/>
+                <a:ea typeface="Yu Gothic" pitchFamily="34" charset="-122"/>
+                <a:cs typeface="Yu Gothic" pitchFamily="34" charset="-120"/>
+              </a:rPr>
+              <a:t>実際の一週間を聞きながら、6列の表をその場で埋めます</a:t>
+            </a:r>
+            <a:endParaRPr lang="en-US" sz="1150" dirty="0"/>
+          </a:p>
+        </p:txBody>
+      </p:sp>
+      <p:sp>
+        <p:nvSpPr>
+          <p:cNvPr id="15" name="Shape 13"/>
+          <p:cNvSpPr/>
+          <p:nvPr/>
+        </p:nvSpPr>
+        <p:spPr>
+          <a:xfrm>
+            <a:off x="8001000" y="2148840"/>
+            <a:ext cx="3383280" cy="2880360"/>
+          </a:xfrm>
+          <a:prstGeom prst="rect">
+            <a:avLst/>
+          </a:prstGeom>
+          <a:solidFill>
+            <a:srgbClr val="FFFFFF"/>
+          </a:solidFill>
+          <a:ln w="12700">
+            <a:solidFill>
+              <a:srgbClr val="EDE7DB"/>
+            </a:solidFill>
+            <a:prstDash val="solid"/>
+          </a:ln>
+        </p:spPr>
+      </p:sp>
+      <p:sp>
+        <p:nvSpPr>
+          <p:cNvPr id="16" name="Shape 14"/>
+          <p:cNvSpPr/>
+          <p:nvPr/>
+        </p:nvSpPr>
+        <p:spPr>
+          <a:xfrm>
+            <a:off x="8275320" y="2395728"/>
+            <a:ext cx="438912" cy="438912"/>
+          </a:xfrm>
+          <a:prstGeom prst="ellipse">
+            <a:avLst/>
+          </a:prstGeom>
+          <a:solidFill>
+            <a:srgbClr val="2F4F6B"/>
+          </a:solidFill>
+          <a:ln w="12700">
+            <a:solidFill>
+              <a:srgbClr val="333333"/>
+            </a:solidFill>
+            <a:prstDash val="solid"/>
+          </a:ln>
+        </p:spPr>
+      </p:sp>
+      <p:sp>
+        <p:nvSpPr>
+          <p:cNvPr id="17" name="Text 15"/>
+          <p:cNvSpPr txBox="1"/>
+          <p:nvPr/>
+        </p:nvSpPr>
+        <p:spPr>
+          <a:xfrm>
+            <a:off x="8275320" y="2395728"/>
+            <a:ext cx="438912" cy="438912"/>
+          </a:xfrm>
+          <a:prstGeom prst="rect">
+            <a:avLst/>
+          </a:prstGeom>
+          <a:noFill/>
+          <a:ln/>
+        </p:spPr>
+        <p:txBody>
+          <a:bodyPr wrap="square" lIns="0" tIns="0" rIns="0" bIns="0" rtlCol="0" anchor="ctr"/>
+          <a:lstStyle/>
+          <a:p>
+            <a:pPr algn="ctr" indent="0" marL="0">
+              <a:buNone/>
+            </a:pPr>
+            <a:r>
+              <a:rPr lang="en-US" sz="1300" b="1" dirty="0">
+                <a:solidFill>
+                  <a:srgbClr val="FFFFFF"/>
+                </a:solidFill>
+                <a:latin typeface="Yu Gothic" pitchFamily="34" charset="0"/>
+                <a:ea typeface="Yu Gothic" pitchFamily="34" charset="-122"/>
+                <a:cs typeface="Yu Gothic" pitchFamily="34" charset="-120"/>
+              </a:rPr>
+              <a:t>3</a:t>
+            </a:r>
+            <a:endParaRPr lang="en-US" sz="1300" dirty="0"/>
+          </a:p>
+        </p:txBody>
+      </p:sp>
+      <p:sp>
+        <p:nvSpPr>
+          <p:cNvPr id="18" name="Text 16"/>
+          <p:cNvSpPr txBox="1"/>
+          <p:nvPr/>
+        </p:nvSpPr>
+        <p:spPr>
+          <a:xfrm>
+            <a:off x="8275320" y="2944368"/>
+            <a:ext cx="2834640" cy="731520"/>
+          </a:xfrm>
+          <a:prstGeom prst="rect">
+            <a:avLst/>
+          </a:prstGeom>
+          <a:noFill/>
+          <a:ln/>
+        </p:spPr>
+        <p:txBody>
+          <a:bodyPr wrap="square" lIns="0" tIns="0" rIns="0" bIns="0" rtlCol="0" anchor="ctr"/>
+          <a:lstStyle/>
+          <a:p>
+            <a:pPr indent="0" marL="0">
+              <a:lnSpc>
+                <a:spcPct val="125000"/>
+              </a:lnSpc>
+              <a:buNone/>
+            </a:pPr>
+            <a:r>
+              <a:rPr lang="en-US" sz="1450" b="1" dirty="0">
+                <a:solidFill>
+                  <a:srgbClr val="23201D"/>
+                </a:solidFill>
+                <a:latin typeface="Yu Gothic" pitchFamily="34" charset="0"/>
+                <a:ea typeface="Yu Gothic" pitchFamily="34" charset="-122"/>
+                <a:cs typeface="Yu Gothic" pitchFamily="34" charset="-120"/>
+              </a:rPr>
+              <a:t>1つ、その場で解かせる</a:t>
+            </a:r>
+            <a:endParaRPr lang="en-US" sz="1450" dirty="0"/>
+          </a:p>
+        </p:txBody>
+      </p:sp>
+      <p:sp>
+        <p:nvSpPr>
+          <p:cNvPr id="19" name="Text 17"/>
+          <p:cNvSpPr txBox="1"/>
+          <p:nvPr/>
+        </p:nvSpPr>
+        <p:spPr>
+          <a:xfrm>
+            <a:off x="8275320" y="3703320"/>
+            <a:ext cx="2834640" cy="1188720"/>
+          </a:xfrm>
+          <a:prstGeom prst="rect">
+            <a:avLst/>
+          </a:prstGeom>
+          <a:noFill/>
+          <a:ln/>
+        </p:spPr>
+        <p:txBody>
+          <a:bodyPr wrap="square" lIns="0" tIns="0" rIns="0" bIns="0" rtlCol="0" anchor="ctr"/>
+          <a:lstStyle/>
+          <a:p>
+            <a:pPr indent="0" marL="0">
+              <a:lnSpc>
+                <a:spcPct val="130000"/>
+              </a:lnSpc>
+              <a:buNone/>
+            </a:pPr>
+            <a:r>
+              <a:rPr lang="en-US" sz="1150" dirty="0">
+                <a:solidFill>
+                  <a:srgbClr val="5A534A"/>
+                </a:solidFill>
+                <a:latin typeface="Yu Gothic" pitchFamily="34" charset="0"/>
+                <a:ea typeface="Yu Gothic" pitchFamily="34" charset="-122"/>
+                <a:cs typeface="Yu Gothic" pitchFamily="34" charset="-120"/>
+              </a:rPr>
+              <a:t>上位3つのうち1つを今日のうちに動かし、指示文を保存して持ち帰ります</a:t>
+            </a:r>
+            <a:endParaRPr lang="en-US" sz="1150" dirty="0"/>
+          </a:p>
+        </p:txBody>
+      </p:sp>
+      <p:sp>
+        <p:nvSpPr>
+          <p:cNvPr id="20" name="Text 18"/>
           <p:cNvSpPr txBox="1"/>
           <p:nvPr/>
         </p:nvSpPr>
@@ -3060,7 +3712,7 @@
       </p:sp>
       <p:sp>
         <p:nvSpPr>
-          <p:cNvPr id="10" name="Text 8"/>
+          <p:cNvPr id="21" name="Text 19"/>
           <p:cNvSpPr txBox="1"/>
           <p:nvPr/>
         </p:nvSpPr>
@@ -3091,7 +3743,7 @@
                 <a:ea typeface="Yu Gothic" pitchFamily="34" charset="-122"/>
                 <a:cs typeface="Yu Gothic" pitchFamily="34" charset="-120"/>
               </a:rPr>
-              <a:t>ここだけは</a:t>
+              <a:t>演習</a:t>
             </a:r>
             <a:endParaRPr lang="en-US" sz="900" dirty="0"/>
           </a:p>
@@ -3108,6 +3760,1532 @@
 <file path=ppt/slides/slide12.xml><?xml version="1.0" encoding="utf-8"?>
 <p:sld xmlns:a="http://schemas.openxmlformats.org/drawingml/2006/main" xmlns:r="http://schemas.openxmlformats.org/officeDocument/2006/relationships" xmlns:p="http://schemas.openxmlformats.org/presentationml/2006/main">
   <p:cSld name="Slide 12">
+    <p:bg>
+      <p:bgPr>
+        <a:solidFill>
+          <a:srgbClr val="F6F2EA"/>
+        </a:solidFill>
+      </p:bgPr>
+    </p:bg>
+    <p:spTree>
+      <p:nvGrpSpPr>
+        <p:cNvPr id="1" name=""/>
+        <p:cNvGrpSpPr/>
+        <p:nvPr/>
+      </p:nvGrpSpPr>
+      <p:grpSpPr>
+        <a:xfrm>
+          <a:off x="0" y="0"/>
+          <a:ext cx="0" cy="0"/>
+          <a:chOff x="0" y="0"/>
+          <a:chExt cx="0" cy="0"/>
+        </a:xfrm>
+      </p:grpSpPr>
+      <p:sp>
+        <p:nvSpPr>
+          <p:cNvPr id="2" name="Text 0"/>
+          <p:cNvSpPr txBox="1"/>
+          <p:nvPr/>
+        </p:nvSpPr>
+        <p:spPr>
+          <a:xfrm>
+            <a:off x="777240" y="566928"/>
+            <a:ext cx="10607040" cy="274320"/>
+          </a:xfrm>
+          <a:prstGeom prst="rect">
+            <a:avLst/>
+          </a:prstGeom>
+          <a:noFill/>
+          <a:ln/>
+        </p:spPr>
+        <p:txBody>
+          <a:bodyPr wrap="square" lIns="0" tIns="0" rIns="0" bIns="0" rtlCol="0" anchor="ctr"/>
+          <a:lstStyle/>
+          <a:p>
+            <a:pPr indent="0" marL="0">
+              <a:buNone/>
+            </a:pPr>
+            <a:r>
+              <a:rPr lang="en-US" sz="1100" b="1" spc="250" kern="0" dirty="0">
+                <a:solidFill>
+                  <a:srgbClr val="3B6B4A"/>
+                </a:solidFill>
+                <a:latin typeface="Yu Gothic" pitchFamily="34" charset="0"/>
+                <a:ea typeface="Yu Gothic" pitchFamily="34" charset="-122"/>
+                <a:cs typeface="Yu Gothic" pitchFamily="34" charset="-120"/>
+              </a:rPr>
+              <a:t>業務への組み込み</a:t>
+            </a:r>
+            <a:endParaRPr lang="en-US" sz="1100" dirty="0"/>
+          </a:p>
+        </p:txBody>
+      </p:sp>
+      <p:sp>
+        <p:nvSpPr>
+          <p:cNvPr id="3" name="Text 1"/>
+          <p:cNvSpPr txBox="1"/>
+          <p:nvPr/>
+        </p:nvSpPr>
+        <p:spPr>
+          <a:xfrm>
+            <a:off x="777240" y="896112"/>
+            <a:ext cx="10607040" cy="640080"/>
+          </a:xfrm>
+          <a:prstGeom prst="rect">
+            <a:avLst/>
+          </a:prstGeom>
+          <a:noFill/>
+          <a:ln/>
+        </p:spPr>
+        <p:txBody>
+          <a:bodyPr wrap="square" lIns="0" tIns="0" rIns="0" bIns="0" rtlCol="0" anchor="ctr"/>
+          <a:lstStyle/>
+          <a:p>
+            <a:pPr indent="0" marL="0">
+              <a:buNone/>
+            </a:pPr>
+            <a:r>
+              <a:rPr lang="en-US" sz="2600" b="1" dirty="0">
+                <a:solidFill>
+                  <a:srgbClr val="23201D"/>
+                </a:solidFill>
+                <a:latin typeface="Yu Gothic" pitchFamily="34" charset="0"/>
+                <a:ea typeface="Yu Gothic" pitchFamily="34" charset="-122"/>
+                <a:cs typeface="Yu Gothic" pitchFamily="34" charset="-120"/>
+              </a:rPr>
+              <a:t>帰る前に決めること</a:t>
+            </a:r>
+            <a:endParaRPr lang="en-US" sz="2600" dirty="0"/>
+          </a:p>
+        </p:txBody>
+      </p:sp>
+      <p:sp>
+        <p:nvSpPr>
+          <p:cNvPr id="4" name="Text 2"/>
+          <p:cNvSpPr txBox="1"/>
+          <p:nvPr/>
+        </p:nvSpPr>
+        <p:spPr>
+          <a:xfrm>
+            <a:off x="777240" y="1572768"/>
+            <a:ext cx="10607040" cy="320040"/>
+          </a:xfrm>
+          <a:prstGeom prst="rect">
+            <a:avLst/>
+          </a:prstGeom>
+          <a:noFill/>
+          <a:ln/>
+        </p:spPr>
+        <p:txBody>
+          <a:bodyPr wrap="square" lIns="0" tIns="0" rIns="0" bIns="0" rtlCol="0" anchor="ctr"/>
+          <a:lstStyle/>
+          <a:p>
+            <a:pPr indent="0" marL="0">
+              <a:buNone/>
+            </a:pPr>
+            <a:r>
+              <a:rPr lang="en-US" sz="1250" b="1" dirty="0">
+                <a:solidFill>
+                  <a:srgbClr val="3B6B4A"/>
+                </a:solidFill>
+                <a:latin typeface="Yu Gothic" pitchFamily="34" charset="0"/>
+                <a:ea typeface="Yu Gothic" pitchFamily="34" charset="-122"/>
+                <a:cs typeface="Yu Gothic" pitchFamily="34" charset="-120"/>
+              </a:rPr>
+              <a:t>ここを決めないと、持ち帰っても使われません。紙に書きます。</a:t>
+            </a:r>
+            <a:endParaRPr lang="en-US" sz="1250" dirty="0"/>
+          </a:p>
+        </p:txBody>
+      </p:sp>
+      <p:sp>
+        <p:nvSpPr>
+          <p:cNvPr id="5" name="Shape 3"/>
+          <p:cNvSpPr/>
+          <p:nvPr/>
+        </p:nvSpPr>
+        <p:spPr>
+          <a:xfrm>
+            <a:off x="777240" y="2103120"/>
+            <a:ext cx="10607040" cy="914400"/>
+          </a:xfrm>
+          <a:prstGeom prst="rect">
+            <a:avLst/>
+          </a:prstGeom>
+          <a:solidFill>
+            <a:srgbClr val="FFFFFF"/>
+          </a:solidFill>
+          <a:ln w="12700">
+            <a:solidFill>
+              <a:srgbClr val="EDE7DB"/>
+            </a:solidFill>
+            <a:prstDash val="solid"/>
+          </a:ln>
+        </p:spPr>
+      </p:sp>
+      <p:sp>
+        <p:nvSpPr>
+          <p:cNvPr id="6" name="Shape 4"/>
+          <p:cNvSpPr/>
+          <p:nvPr/>
+        </p:nvSpPr>
+        <p:spPr>
+          <a:xfrm>
+            <a:off x="777240" y="2103120"/>
+            <a:ext cx="54864" cy="914400"/>
+          </a:xfrm>
+          <a:prstGeom prst="rect">
+            <a:avLst/>
+          </a:prstGeom>
+          <a:solidFill>
+            <a:srgbClr val="3B6B4A"/>
+          </a:solidFill>
+          <a:ln w="12700">
+            <a:solidFill>
+              <a:srgbClr val="333333"/>
+            </a:solidFill>
+            <a:prstDash val="solid"/>
+          </a:ln>
+        </p:spPr>
+      </p:sp>
+      <p:sp>
+        <p:nvSpPr>
+          <p:cNvPr id="7" name="Text 5"/>
+          <p:cNvSpPr txBox="1"/>
+          <p:nvPr/>
+        </p:nvSpPr>
+        <p:spPr>
+          <a:xfrm>
+            <a:off x="1143000" y="2176272"/>
+            <a:ext cx="2757830" cy="768096"/>
+          </a:xfrm>
+          <a:prstGeom prst="rect">
+            <a:avLst/>
+          </a:prstGeom>
+          <a:noFill/>
+          <a:ln/>
+        </p:spPr>
+        <p:txBody>
+          <a:bodyPr wrap="square" lIns="0" tIns="0" rIns="0" bIns="0" rtlCol="0" anchor="ctr"/>
+          <a:lstStyle/>
+          <a:p>
+            <a:pPr indent="0" marL="0">
+              <a:buNone/>
+            </a:pPr>
+            <a:r>
+              <a:rPr lang="en-US" sz="1400" b="1" dirty="0">
+                <a:solidFill>
+                  <a:srgbClr val="3B6B4A"/>
+                </a:solidFill>
+                <a:latin typeface="Yu Gothic" pitchFamily="34" charset="0"/>
+                <a:ea typeface="Yu Gothic" pitchFamily="34" charset="-122"/>
+                <a:cs typeface="Yu Gothic" pitchFamily="34" charset="-120"/>
+              </a:rPr>
+              <a:t>いつ使うか</a:t>
+            </a:r>
+            <a:endParaRPr lang="en-US" sz="1400" dirty="0"/>
+          </a:p>
+        </p:txBody>
+      </p:sp>
+      <p:sp>
+        <p:nvSpPr>
+          <p:cNvPr id="8" name="Text 6"/>
+          <p:cNvSpPr txBox="1"/>
+          <p:nvPr/>
+        </p:nvSpPr>
+        <p:spPr>
+          <a:xfrm>
+            <a:off x="4006901" y="2176272"/>
+            <a:ext cx="7011619" cy="768096"/>
+          </a:xfrm>
+          <a:prstGeom prst="rect">
+            <a:avLst/>
+          </a:prstGeom>
+          <a:noFill/>
+          <a:ln/>
+        </p:spPr>
+        <p:txBody>
+          <a:bodyPr wrap="square" lIns="0" tIns="0" rIns="0" bIns="0" rtlCol="0" anchor="ctr"/>
+          <a:lstStyle/>
+          <a:p>
+            <a:pPr indent="0" marL="0">
+              <a:lnSpc>
+                <a:spcPct val="130000"/>
+              </a:lnSpc>
+              <a:buNone/>
+            </a:pPr>
+            <a:r>
+              <a:rPr lang="en-US" sz="1250" dirty="0">
+                <a:solidFill>
+                  <a:srgbClr val="3F3933"/>
+                </a:solidFill>
+                <a:latin typeface="Yu Gothic" pitchFamily="34" charset="0"/>
+                <a:ea typeface="Yu Gothic" pitchFamily="34" charset="-122"/>
+                <a:cs typeface="Yu Gothic" pitchFamily="34" charset="-120"/>
+              </a:rPr>
+              <a:t>「明日の朝いち、見積を書く前に」まで具体的に決めます</a:t>
+            </a:r>
+            <a:endParaRPr lang="en-US" sz="1250" dirty="0"/>
+          </a:p>
+        </p:txBody>
+      </p:sp>
+      <p:sp>
+        <p:nvSpPr>
+          <p:cNvPr id="9" name="Shape 7"/>
+          <p:cNvSpPr/>
+          <p:nvPr/>
+        </p:nvSpPr>
+        <p:spPr>
+          <a:xfrm>
+            <a:off x="777240" y="3154680"/>
+            <a:ext cx="10607040" cy="914400"/>
+          </a:xfrm>
+          <a:prstGeom prst="rect">
+            <a:avLst/>
+          </a:prstGeom>
+          <a:solidFill>
+            <a:srgbClr val="FFFFFF"/>
+          </a:solidFill>
+          <a:ln w="12700">
+            <a:solidFill>
+              <a:srgbClr val="EDE7DB"/>
+            </a:solidFill>
+            <a:prstDash val="solid"/>
+          </a:ln>
+        </p:spPr>
+      </p:sp>
+      <p:sp>
+        <p:nvSpPr>
+          <p:cNvPr id="10" name="Shape 8"/>
+          <p:cNvSpPr/>
+          <p:nvPr/>
+        </p:nvSpPr>
+        <p:spPr>
+          <a:xfrm>
+            <a:off x="777240" y="3154680"/>
+            <a:ext cx="54864" cy="914400"/>
+          </a:xfrm>
+          <a:prstGeom prst="rect">
+            <a:avLst/>
+          </a:prstGeom>
+          <a:solidFill>
+            <a:srgbClr val="3B6B4A"/>
+          </a:solidFill>
+          <a:ln w="12700">
+            <a:solidFill>
+              <a:srgbClr val="333333"/>
+            </a:solidFill>
+            <a:prstDash val="solid"/>
+          </a:ln>
+        </p:spPr>
+      </p:sp>
+      <p:sp>
+        <p:nvSpPr>
+          <p:cNvPr id="11" name="Text 9"/>
+          <p:cNvSpPr txBox="1"/>
+          <p:nvPr/>
+        </p:nvSpPr>
+        <p:spPr>
+          <a:xfrm>
+            <a:off x="1143000" y="3227832"/>
+            <a:ext cx="2757830" cy="768096"/>
+          </a:xfrm>
+          <a:prstGeom prst="rect">
+            <a:avLst/>
+          </a:prstGeom>
+          <a:noFill/>
+          <a:ln/>
+        </p:spPr>
+        <p:txBody>
+          <a:bodyPr wrap="square" lIns="0" tIns="0" rIns="0" bIns="0" rtlCol="0" anchor="ctr"/>
+          <a:lstStyle/>
+          <a:p>
+            <a:pPr indent="0" marL="0">
+              <a:buNone/>
+            </a:pPr>
+            <a:r>
+              <a:rPr lang="en-US" sz="1400" b="1" dirty="0">
+                <a:solidFill>
+                  <a:srgbClr val="3B6B4A"/>
+                </a:solidFill>
+                <a:latin typeface="Yu Gothic" pitchFamily="34" charset="0"/>
+                <a:ea typeface="Yu Gothic" pitchFamily="34" charset="-122"/>
+                <a:cs typeface="Yu Gothic" pitchFamily="34" charset="-120"/>
+              </a:rPr>
+              <a:t>誰が使うか</a:t>
+            </a:r>
+            <a:endParaRPr lang="en-US" sz="1400" dirty="0"/>
+          </a:p>
+        </p:txBody>
+      </p:sp>
+      <p:sp>
+        <p:nvSpPr>
+          <p:cNvPr id="12" name="Text 10"/>
+          <p:cNvSpPr txBox="1"/>
+          <p:nvPr/>
+        </p:nvSpPr>
+        <p:spPr>
+          <a:xfrm>
+            <a:off x="4006901" y="3227832"/>
+            <a:ext cx="7011619" cy="768096"/>
+          </a:xfrm>
+          <a:prstGeom prst="rect">
+            <a:avLst/>
+          </a:prstGeom>
+          <a:noFill/>
+          <a:ln/>
+        </p:spPr>
+        <p:txBody>
+          <a:bodyPr wrap="square" lIns="0" tIns="0" rIns="0" bIns="0" rtlCol="0" anchor="ctr"/>
+          <a:lstStyle/>
+          <a:p>
+            <a:pPr indent="0" marL="0">
+              <a:lnSpc>
+                <a:spcPct val="130000"/>
+              </a:lnSpc>
+              <a:buNone/>
+            </a:pPr>
+            <a:r>
+              <a:rPr lang="en-US" sz="1250" dirty="0">
+                <a:solidFill>
+                  <a:srgbClr val="3F3933"/>
+                </a:solidFill>
+                <a:latin typeface="Yu Gothic" pitchFamily="34" charset="0"/>
+                <a:ea typeface="Yu Gothic" pitchFamily="34" charset="-122"/>
+                <a:cs typeface="Yu Gothic" pitchFamily="34" charset="-120"/>
+              </a:rPr>
+              <a:t>当面は社長ご自身です。社員に渡すのは第3回から</a:t>
+            </a:r>
+            <a:endParaRPr lang="en-US" sz="1250" dirty="0"/>
+          </a:p>
+        </p:txBody>
+      </p:sp>
+      <p:sp>
+        <p:nvSpPr>
+          <p:cNvPr id="13" name="Shape 11"/>
+          <p:cNvSpPr/>
+          <p:nvPr/>
+        </p:nvSpPr>
+        <p:spPr>
+          <a:xfrm>
+            <a:off x="777240" y="4206240"/>
+            <a:ext cx="10607040" cy="914400"/>
+          </a:xfrm>
+          <a:prstGeom prst="rect">
+            <a:avLst/>
+          </a:prstGeom>
+          <a:solidFill>
+            <a:srgbClr val="FFFFFF"/>
+          </a:solidFill>
+          <a:ln w="12700">
+            <a:solidFill>
+              <a:srgbClr val="EDE7DB"/>
+            </a:solidFill>
+            <a:prstDash val="solid"/>
+          </a:ln>
+        </p:spPr>
+      </p:sp>
+      <p:sp>
+        <p:nvSpPr>
+          <p:cNvPr id="14" name="Shape 12"/>
+          <p:cNvSpPr/>
+          <p:nvPr/>
+        </p:nvSpPr>
+        <p:spPr>
+          <a:xfrm>
+            <a:off x="777240" y="4206240"/>
+            <a:ext cx="54864" cy="914400"/>
+          </a:xfrm>
+          <a:prstGeom prst="rect">
+            <a:avLst/>
+          </a:prstGeom>
+          <a:solidFill>
+            <a:srgbClr val="3B6B4A"/>
+          </a:solidFill>
+          <a:ln w="12700">
+            <a:solidFill>
+              <a:srgbClr val="333333"/>
+            </a:solidFill>
+            <a:prstDash val="solid"/>
+          </a:ln>
+        </p:spPr>
+      </p:sp>
+      <p:sp>
+        <p:nvSpPr>
+          <p:cNvPr id="15" name="Text 13"/>
+          <p:cNvSpPr txBox="1"/>
+          <p:nvPr/>
+        </p:nvSpPr>
+        <p:spPr>
+          <a:xfrm>
+            <a:off x="1143000" y="4279392"/>
+            <a:ext cx="2757830" cy="768096"/>
+          </a:xfrm>
+          <a:prstGeom prst="rect">
+            <a:avLst/>
+          </a:prstGeom>
+          <a:noFill/>
+          <a:ln/>
+        </p:spPr>
+        <p:txBody>
+          <a:bodyPr wrap="square" lIns="0" tIns="0" rIns="0" bIns="0" rtlCol="0" anchor="ctr"/>
+          <a:lstStyle/>
+          <a:p>
+            <a:pPr indent="0" marL="0">
+              <a:buNone/>
+            </a:pPr>
+            <a:r>
+              <a:rPr lang="en-US" sz="1400" b="1" dirty="0">
+                <a:solidFill>
+                  <a:srgbClr val="3B6B4A"/>
+                </a:solidFill>
+                <a:latin typeface="Yu Gothic" pitchFamily="34" charset="0"/>
+                <a:ea typeface="Yu Gothic" pitchFamily="34" charset="-122"/>
+                <a:cs typeface="Yu Gothic" pitchFamily="34" charset="-120"/>
+              </a:rPr>
+              <a:t>何を確認するか</a:t>
+            </a:r>
+            <a:endParaRPr lang="en-US" sz="1400" dirty="0"/>
+          </a:p>
+        </p:txBody>
+      </p:sp>
+      <p:sp>
+        <p:nvSpPr>
+          <p:cNvPr id="16" name="Text 14"/>
+          <p:cNvSpPr txBox="1"/>
+          <p:nvPr/>
+        </p:nvSpPr>
+        <p:spPr>
+          <a:xfrm>
+            <a:off x="4006901" y="4279392"/>
+            <a:ext cx="7011619" cy="768096"/>
+          </a:xfrm>
+          <a:prstGeom prst="rect">
+            <a:avLst/>
+          </a:prstGeom>
+          <a:noFill/>
+          <a:ln/>
+        </p:spPr>
+        <p:txBody>
+          <a:bodyPr wrap="square" lIns="0" tIns="0" rIns="0" bIns="0" rtlCol="0" anchor="ctr"/>
+          <a:lstStyle/>
+          <a:p>
+            <a:pPr indent="0" marL="0">
+              <a:lnSpc>
+                <a:spcPct val="130000"/>
+              </a:lnSpc>
+              <a:buNone/>
+            </a:pPr>
+            <a:r>
+              <a:rPr lang="en-US" sz="1250" dirty="0">
+                <a:solidFill>
+                  <a:srgbClr val="3F3933"/>
+                </a:solidFill>
+                <a:latin typeface="Yu Gothic" pitchFamily="34" charset="0"/>
+                <a:ea typeface="Yu Gothic" pitchFamily="34" charset="-122"/>
+                <a:cs typeface="Yu Gothic" pitchFamily="34" charset="-120"/>
+              </a:rPr>
+              <a:t>出てきた金額と数字は、提出前に必ず目視で確認します</a:t>
+            </a:r>
+            <a:endParaRPr lang="en-US" sz="1250" dirty="0"/>
+          </a:p>
+        </p:txBody>
+      </p:sp>
+      <p:sp>
+        <p:nvSpPr>
+          <p:cNvPr id="17" name="Text 15"/>
+          <p:cNvSpPr txBox="1"/>
+          <p:nvPr/>
+        </p:nvSpPr>
+        <p:spPr>
+          <a:xfrm>
+            <a:off x="777240" y="6382512"/>
+            <a:ext cx="7424928" cy="256032"/>
+          </a:xfrm>
+          <a:prstGeom prst="rect">
+            <a:avLst/>
+          </a:prstGeom>
+          <a:noFill/>
+          <a:ln/>
+        </p:spPr>
+        <p:txBody>
+          <a:bodyPr wrap="square" lIns="0" tIns="0" rIns="0" bIns="0" rtlCol="0" anchor="ctr"/>
+          <a:lstStyle/>
+          <a:p>
+            <a:pPr indent="0" marL="0">
+              <a:buNone/>
+            </a:pPr>
+            <a:r>
+              <a:rPr lang="en-US" sz="900" dirty="0">
+                <a:solidFill>
+                  <a:srgbClr val="8A8177"/>
+                </a:solidFill>
+                <a:latin typeface="Yu Gothic" pitchFamily="34" charset="0"/>
+                <a:ea typeface="Yu Gothic" pitchFamily="34" charset="-122"/>
+                <a:cs typeface="Yu Gothic" pitchFamily="34" charset="-120"/>
+              </a:rPr>
+              <a:t>第1回　現状把握と地図づくり</a:t>
+            </a:r>
+            <a:endParaRPr lang="en-US" sz="900" dirty="0"/>
+          </a:p>
+        </p:txBody>
+      </p:sp>
+      <p:sp>
+        <p:nvSpPr>
+          <p:cNvPr id="18" name="Text 16"/>
+          <p:cNvSpPr txBox="1"/>
+          <p:nvPr/>
+        </p:nvSpPr>
+        <p:spPr>
+          <a:xfrm>
+            <a:off x="8202168" y="6382512"/>
+            <a:ext cx="3182112" cy="256032"/>
+          </a:xfrm>
+          <a:prstGeom prst="rect">
+            <a:avLst/>
+          </a:prstGeom>
+          <a:noFill/>
+          <a:ln/>
+        </p:spPr>
+        <p:txBody>
+          <a:bodyPr wrap="square" lIns="0" tIns="0" rIns="0" bIns="0" rtlCol="0" anchor="ctr"/>
+          <a:lstStyle/>
+          <a:p>
+            <a:pPr algn="r" indent="0" marL="0">
+              <a:buNone/>
+            </a:pPr>
+            <a:r>
+              <a:rPr lang="en-US" sz="900" dirty="0">
+                <a:solidFill>
+                  <a:srgbClr val="8A8177"/>
+                </a:solidFill>
+                <a:latin typeface="Yu Gothic" pitchFamily="34" charset="0"/>
+                <a:ea typeface="Yu Gothic" pitchFamily="34" charset="-122"/>
+                <a:cs typeface="Yu Gothic" pitchFamily="34" charset="-120"/>
+              </a:rPr>
+              <a:t>組み込み</a:t>
+            </a:r>
+            <a:endParaRPr lang="en-US" sz="900" dirty="0"/>
+          </a:p>
+        </p:txBody>
+      </p:sp>
+    </p:spTree>
+  </p:cSld>
+  <p:clrMapOvr>
+    <a:masterClrMapping/>
+  </p:clrMapOvr>
+</p:sld>
+</file>
+
+<file path=ppt/slides/slide13.xml><?xml version="1.0" encoding="utf-8"?>
+<p:sld xmlns:a="http://schemas.openxmlformats.org/drawingml/2006/main" xmlns:r="http://schemas.openxmlformats.org/officeDocument/2006/relationships" xmlns:p="http://schemas.openxmlformats.org/presentationml/2006/main">
+  <p:cSld name="Slide 13">
+    <p:bg>
+      <p:bgPr>
+        <a:solidFill>
+          <a:srgbClr val="F6F2EA"/>
+        </a:solidFill>
+      </p:bgPr>
+    </p:bg>
+    <p:spTree>
+      <p:nvGrpSpPr>
+        <p:cNvPr id="1" name=""/>
+        <p:cNvGrpSpPr/>
+        <p:nvPr/>
+      </p:nvGrpSpPr>
+      <p:grpSpPr>
+        <a:xfrm>
+          <a:off x="0" y="0"/>
+          <a:ext cx="0" cy="0"/>
+          <a:chOff x="0" y="0"/>
+          <a:chExt cx="0" cy="0"/>
+        </a:xfrm>
+      </p:grpSpPr>
+      <p:sp>
+        <p:nvSpPr>
+          <p:cNvPr id="2" name="Text 0"/>
+          <p:cNvSpPr txBox="1"/>
+          <p:nvPr/>
+        </p:nvSpPr>
+        <p:spPr>
+          <a:xfrm>
+            <a:off x="777240" y="566928"/>
+            <a:ext cx="10607040" cy="274320"/>
+          </a:xfrm>
+          <a:prstGeom prst="rect">
+            <a:avLst/>
+          </a:prstGeom>
+          <a:noFill/>
+          <a:ln/>
+        </p:spPr>
+        <p:txBody>
+          <a:bodyPr wrap="square" lIns="0" tIns="0" rIns="0" bIns="0" rtlCol="0" anchor="ctr"/>
+          <a:lstStyle/>
+          <a:p>
+            <a:pPr indent="0" marL="0">
+              <a:buNone/>
+            </a:pPr>
+            <a:r>
+              <a:rPr lang="en-US" sz="1100" b="1" spc="250" kern="0" dirty="0">
+                <a:solidFill>
+                  <a:srgbClr val="B04A2F"/>
+                </a:solidFill>
+                <a:latin typeface="Yu Gothic" pitchFamily="34" charset="0"/>
+                <a:ea typeface="Yu Gothic" pitchFamily="34" charset="-122"/>
+                <a:cs typeface="Yu Gothic" pitchFamily="34" charset="-120"/>
+              </a:rPr>
+              <a:t>ここだけは</a:t>
+            </a:r>
+            <a:endParaRPr lang="en-US" sz="1100" dirty="0"/>
+          </a:p>
+        </p:txBody>
+      </p:sp>
+      <p:sp>
+        <p:nvSpPr>
+          <p:cNvPr id="3" name="Text 1"/>
+          <p:cNvSpPr txBox="1"/>
+          <p:nvPr/>
+        </p:nvSpPr>
+        <p:spPr>
+          <a:xfrm>
+            <a:off x="777240" y="1097280"/>
+            <a:ext cx="10607040" cy="640080"/>
+          </a:xfrm>
+          <a:prstGeom prst="rect">
+            <a:avLst/>
+          </a:prstGeom>
+          <a:noFill/>
+          <a:ln/>
+        </p:spPr>
+        <p:txBody>
+          <a:bodyPr wrap="square" lIns="0" tIns="0" rIns="0" bIns="0" rtlCol="0" anchor="ctr"/>
+          <a:lstStyle/>
+          <a:p>
+            <a:pPr indent="0" marL="0">
+              <a:buNone/>
+            </a:pPr>
+            <a:r>
+              <a:rPr lang="en-US" sz="2600" b="1" dirty="0">
+                <a:solidFill>
+                  <a:srgbClr val="23201D"/>
+                </a:solidFill>
+                <a:latin typeface="Yu Gothic" pitchFamily="34" charset="0"/>
+                <a:ea typeface="Yu Gothic" pitchFamily="34" charset="-122"/>
+                <a:cs typeface="Yu Gothic" pitchFamily="34" charset="-120"/>
+              </a:rPr>
+              <a:t>今日は、成果より「手応え」を持ち帰る回です</a:t>
+            </a:r>
+            <a:endParaRPr lang="en-US" sz="2600" dirty="0"/>
+          </a:p>
+        </p:txBody>
+      </p:sp>
+      <p:sp>
+        <p:nvSpPr>
+          <p:cNvPr id="4" name="Shape 2"/>
+          <p:cNvSpPr/>
+          <p:nvPr/>
+        </p:nvSpPr>
+        <p:spPr>
+          <a:xfrm>
+            <a:off x="777240" y="2148840"/>
+            <a:ext cx="64008" cy="2194560"/>
+          </a:xfrm>
+          <a:prstGeom prst="rect">
+            <a:avLst/>
+          </a:prstGeom>
+          <a:solidFill>
+            <a:srgbClr val="B04A2F"/>
+          </a:solidFill>
+          <a:ln w="12700">
+            <a:solidFill>
+              <a:srgbClr val="333333"/>
+            </a:solidFill>
+            <a:prstDash val="solid"/>
+          </a:ln>
+        </p:spPr>
+      </p:sp>
+      <p:sp>
+        <p:nvSpPr>
+          <p:cNvPr id="5" name="Text 3"/>
+          <p:cNvSpPr txBox="1"/>
+          <p:nvPr/>
+        </p:nvSpPr>
+        <p:spPr>
+          <a:xfrm>
+            <a:off x="1188720" y="2148840"/>
+            <a:ext cx="9966960" cy="2194560"/>
+          </a:xfrm>
+          <a:prstGeom prst="rect">
+            <a:avLst/>
+          </a:prstGeom>
+          <a:noFill/>
+          <a:ln/>
+        </p:spPr>
+        <p:txBody>
+          <a:bodyPr wrap="square" lIns="0" tIns="0" rIns="0" bIns="0" rtlCol="0" anchor="ctr"/>
+          <a:lstStyle/>
+          <a:p>
+            <a:pPr indent="0" marL="0">
+              <a:lnSpc>
+                <a:spcPct val="160000"/>
+              </a:lnSpc>
+              <a:buNone/>
+            </a:pPr>
+            <a:r>
+              <a:rPr lang="en-US" sz="1650" dirty="0">
+                <a:solidFill>
+                  <a:srgbClr val="3F3933"/>
+                </a:solidFill>
+                <a:latin typeface="Yu Gothic" pitchFamily="34" charset="0"/>
+                <a:ea typeface="Yu Gothic" pitchFamily="34" charset="-122"/>
+                <a:cs typeface="Yu Gothic" pitchFamily="34" charset="-120"/>
+              </a:rPr>
+              <a:t>診断して終わった初回は、2回目の欠席理由をつくります。だから必ず、その日のうちに1つ動くものを持ち帰っていただきます。小さくて構いません。明日の朝に一度使えるものであることのほうが大事です。</a:t>
+            </a:r>
+            <a:endParaRPr lang="en-US" sz="1650" dirty="0"/>
+          </a:p>
+        </p:txBody>
+      </p:sp>
+      <p:sp>
+        <p:nvSpPr>
+          <p:cNvPr id="6" name="Shape 4"/>
+          <p:cNvSpPr/>
+          <p:nvPr/>
+        </p:nvSpPr>
+        <p:spPr>
+          <a:xfrm>
+            <a:off x="777240" y="4709160"/>
+            <a:ext cx="10607040" cy="960120"/>
+          </a:xfrm>
+          <a:prstGeom prst="rect">
+            <a:avLst/>
+          </a:prstGeom>
+          <a:solidFill>
+            <a:srgbClr val="EDE7DB"/>
+          </a:solidFill>
+          <a:ln w="12700">
+            <a:solidFill>
+              <a:srgbClr val="333333"/>
+            </a:solidFill>
+            <a:prstDash val="solid"/>
+          </a:ln>
+        </p:spPr>
+      </p:sp>
+      <p:sp>
+        <p:nvSpPr>
+          <p:cNvPr id="7" name="Text 5"/>
+          <p:cNvSpPr txBox="1"/>
+          <p:nvPr/>
+        </p:nvSpPr>
+        <p:spPr>
+          <a:xfrm>
+            <a:off x="1051560" y="4800600"/>
+            <a:ext cx="1463040" cy="256032"/>
+          </a:xfrm>
+          <a:prstGeom prst="rect">
+            <a:avLst/>
+          </a:prstGeom>
+          <a:noFill/>
+          <a:ln/>
+        </p:spPr>
+        <p:txBody>
+          <a:bodyPr wrap="square" lIns="0" tIns="0" rIns="0" bIns="0" rtlCol="0" anchor="ctr"/>
+          <a:lstStyle/>
+          <a:p>
+            <a:pPr indent="0" marL="0">
+              <a:buNone/>
+            </a:pPr>
+            <a:r>
+              <a:rPr lang="en-US" sz="900" b="1" spc="150" kern="0" dirty="0">
+                <a:solidFill>
+                  <a:srgbClr val="B04A2F"/>
+                </a:solidFill>
+                <a:latin typeface="Yu Gothic" pitchFamily="34" charset="0"/>
+                <a:ea typeface="Yu Gothic" pitchFamily="34" charset="-122"/>
+                <a:cs typeface="Yu Gothic" pitchFamily="34" charset="-120"/>
+              </a:rPr>
+              <a:t>他社では</a:t>
+            </a:r>
+            <a:endParaRPr lang="en-US" sz="900" dirty="0"/>
+          </a:p>
+        </p:txBody>
+      </p:sp>
+      <p:sp>
+        <p:nvSpPr>
+          <p:cNvPr id="8" name="Text 6"/>
+          <p:cNvSpPr txBox="1"/>
+          <p:nvPr/>
+        </p:nvSpPr>
+        <p:spPr>
+          <a:xfrm>
+            <a:off x="1051560" y="5029200"/>
+            <a:ext cx="10058400" cy="566928"/>
+          </a:xfrm>
+          <a:prstGeom prst="rect">
+            <a:avLst/>
+          </a:prstGeom>
+          <a:noFill/>
+          <a:ln/>
+        </p:spPr>
+        <p:txBody>
+          <a:bodyPr wrap="square" lIns="0" tIns="0" rIns="0" bIns="0" rtlCol="0" anchor="ctr"/>
+          <a:lstStyle/>
+          <a:p>
+            <a:pPr indent="0" marL="0">
+              <a:lnSpc>
+                <a:spcPct val="130000"/>
+              </a:lnSpc>
+              <a:buNone/>
+            </a:pPr>
+            <a:r>
+              <a:rPr lang="en-US" sz="1250" dirty="0">
+                <a:solidFill>
+                  <a:srgbClr val="3F3933"/>
+                </a:solidFill>
+                <a:latin typeface="Yu Gothic" pitchFamily="34" charset="0"/>
+                <a:ea typeface="Yu Gothic" pitchFamily="34" charset="-122"/>
+                <a:cs typeface="Yu Gothic" pitchFamily="34" charset="-120"/>
+              </a:rPr>
+              <a:t>ある会社では、初回に作ったのは「お断りメールの下書き」1本だけでした。ただ、それを翌朝に使ったことで、2回目以降の宿題が一度も止まりませんでした。</a:t>
+            </a:r>
+            <a:endParaRPr lang="en-US" sz="1250" dirty="0"/>
+          </a:p>
+        </p:txBody>
+      </p:sp>
+      <p:sp>
+        <p:nvSpPr>
+          <p:cNvPr id="9" name="Text 7"/>
+          <p:cNvSpPr txBox="1"/>
+          <p:nvPr/>
+        </p:nvSpPr>
+        <p:spPr>
+          <a:xfrm>
+            <a:off x="777240" y="6382512"/>
+            <a:ext cx="7424928" cy="256032"/>
+          </a:xfrm>
+          <a:prstGeom prst="rect">
+            <a:avLst/>
+          </a:prstGeom>
+          <a:noFill/>
+          <a:ln/>
+        </p:spPr>
+        <p:txBody>
+          <a:bodyPr wrap="square" lIns="0" tIns="0" rIns="0" bIns="0" rtlCol="0" anchor="ctr"/>
+          <a:lstStyle/>
+          <a:p>
+            <a:pPr indent="0" marL="0">
+              <a:buNone/>
+            </a:pPr>
+            <a:r>
+              <a:rPr lang="en-US" sz="900" dirty="0">
+                <a:solidFill>
+                  <a:srgbClr val="8A8177"/>
+                </a:solidFill>
+                <a:latin typeface="Yu Gothic" pitchFamily="34" charset="0"/>
+                <a:ea typeface="Yu Gothic" pitchFamily="34" charset="-122"/>
+                <a:cs typeface="Yu Gothic" pitchFamily="34" charset="-120"/>
+              </a:rPr>
+              <a:t>第1回　現状把握と地図づくり</a:t>
+            </a:r>
+            <a:endParaRPr lang="en-US" sz="900" dirty="0"/>
+          </a:p>
+        </p:txBody>
+      </p:sp>
+      <p:sp>
+        <p:nvSpPr>
+          <p:cNvPr id="10" name="Text 8"/>
+          <p:cNvSpPr txBox="1"/>
+          <p:nvPr/>
+        </p:nvSpPr>
+        <p:spPr>
+          <a:xfrm>
+            <a:off x="8202168" y="6382512"/>
+            <a:ext cx="3182112" cy="256032"/>
+          </a:xfrm>
+          <a:prstGeom prst="rect">
+            <a:avLst/>
+          </a:prstGeom>
+          <a:noFill/>
+          <a:ln/>
+        </p:spPr>
+        <p:txBody>
+          <a:bodyPr wrap="square" lIns="0" tIns="0" rIns="0" bIns="0" rtlCol="0" anchor="ctr"/>
+          <a:lstStyle/>
+          <a:p>
+            <a:pPr algn="r" indent="0" marL="0">
+              <a:buNone/>
+            </a:pPr>
+            <a:r>
+              <a:rPr lang="en-US" sz="900" dirty="0">
+                <a:solidFill>
+                  <a:srgbClr val="8A8177"/>
+                </a:solidFill>
+                <a:latin typeface="Yu Gothic" pitchFamily="34" charset="0"/>
+                <a:ea typeface="Yu Gothic" pitchFamily="34" charset="-122"/>
+                <a:cs typeface="Yu Gothic" pitchFamily="34" charset="-120"/>
+              </a:rPr>
+              <a:t>ここだけは</a:t>
+            </a:r>
+            <a:endParaRPr lang="en-US" sz="900" dirty="0"/>
+          </a:p>
+        </p:txBody>
+      </p:sp>
+    </p:spTree>
+  </p:cSld>
+  <p:clrMapOvr>
+    <a:masterClrMapping/>
+  </p:clrMapOvr>
+</p:sld>
+</file>
+
+<file path=ppt/slides/slide14.xml><?xml version="1.0" encoding="utf-8"?>
+<p:sld xmlns:a="http://schemas.openxmlformats.org/drawingml/2006/main" xmlns:r="http://schemas.openxmlformats.org/officeDocument/2006/relationships" xmlns:p="http://schemas.openxmlformats.org/presentationml/2006/main">
+  <p:cSld name="Slide 14">
+    <p:bg>
+      <p:bgPr>
+        <a:solidFill>
+          <a:srgbClr val="F6F2EA"/>
+        </a:solidFill>
+      </p:bgPr>
+    </p:bg>
+    <p:spTree>
+      <p:nvGrpSpPr>
+        <p:cNvPr id="1" name=""/>
+        <p:cNvGrpSpPr/>
+        <p:nvPr/>
+      </p:nvGrpSpPr>
+      <p:grpSpPr>
+        <a:xfrm>
+          <a:off x="0" y="0"/>
+          <a:ext cx="0" cy="0"/>
+          <a:chOff x="0" y="0"/>
+          <a:chExt cx="0" cy="0"/>
+        </a:xfrm>
+      </p:grpSpPr>
+      <p:sp>
+        <p:nvSpPr>
+          <p:cNvPr id="2" name="Text 0"/>
+          <p:cNvSpPr txBox="1"/>
+          <p:nvPr/>
+        </p:nvSpPr>
+        <p:spPr>
+          <a:xfrm>
+            <a:off x="777240" y="566928"/>
+            <a:ext cx="10607040" cy="274320"/>
+          </a:xfrm>
+          <a:prstGeom prst="rect">
+            <a:avLst/>
+          </a:prstGeom>
+          <a:noFill/>
+          <a:ln/>
+        </p:spPr>
+        <p:txBody>
+          <a:bodyPr wrap="square" lIns="0" tIns="0" rIns="0" bIns="0" rtlCol="0" anchor="ctr"/>
+          <a:lstStyle/>
+          <a:p>
+            <a:pPr indent="0" marL="0">
+              <a:buNone/>
+            </a:pPr>
+            <a:r>
+              <a:rPr lang="en-US" sz="1100" b="1" spc="250" kern="0" dirty="0">
+                <a:solidFill>
+                  <a:srgbClr val="3B6B4A"/>
+                </a:solidFill>
+                <a:latin typeface="Yu Gothic" pitchFamily="34" charset="0"/>
+                <a:ea typeface="Yu Gothic" pitchFamily="34" charset="-122"/>
+                <a:cs typeface="Yu Gothic" pitchFamily="34" charset="-120"/>
+              </a:rPr>
+              <a:t>次回まで</a:t>
+            </a:r>
+            <a:endParaRPr lang="en-US" sz="1100" dirty="0"/>
+          </a:p>
+        </p:txBody>
+      </p:sp>
+      <p:sp>
+        <p:nvSpPr>
+          <p:cNvPr id="3" name="Text 1"/>
+          <p:cNvSpPr txBox="1"/>
+          <p:nvPr/>
+        </p:nvSpPr>
+        <p:spPr>
+          <a:xfrm>
+            <a:off x="777240" y="896112"/>
+            <a:ext cx="10607040" cy="640080"/>
+          </a:xfrm>
+          <a:prstGeom prst="rect">
+            <a:avLst/>
+          </a:prstGeom>
+          <a:noFill/>
+          <a:ln/>
+        </p:spPr>
+        <p:txBody>
+          <a:bodyPr wrap="square" lIns="0" tIns="0" rIns="0" bIns="0" rtlCol="0" anchor="ctr"/>
+          <a:lstStyle/>
+          <a:p>
+            <a:pPr indent="0" marL="0">
+              <a:buNone/>
+            </a:pPr>
+            <a:r>
+              <a:rPr lang="en-US" sz="2600" b="1" dirty="0">
+                <a:solidFill>
+                  <a:srgbClr val="23201D"/>
+                </a:solidFill>
+                <a:latin typeface="Yu Gothic" pitchFamily="34" charset="0"/>
+                <a:ea typeface="Yu Gothic" pitchFamily="34" charset="-122"/>
+                <a:cs typeface="Yu Gothic" pitchFamily="34" charset="-120"/>
+              </a:rPr>
+              <a:t>次回は「今のChatGPTの使い方を作り直す」</a:t>
+            </a:r>
+            <a:endParaRPr lang="en-US" sz="2600" dirty="0"/>
+          </a:p>
+        </p:txBody>
+      </p:sp>
+      <p:sp>
+        <p:nvSpPr>
+          <p:cNvPr id="4" name="Text 2"/>
+          <p:cNvSpPr txBox="1"/>
+          <p:nvPr/>
+        </p:nvSpPr>
+        <p:spPr>
+          <a:xfrm>
+            <a:off x="777240" y="1572768"/>
+            <a:ext cx="9546336" cy="457200"/>
+          </a:xfrm>
+          <a:prstGeom prst="rect">
+            <a:avLst/>
+          </a:prstGeom>
+          <a:noFill/>
+          <a:ln/>
+        </p:spPr>
+        <p:txBody>
+          <a:bodyPr wrap="square" lIns="0" tIns="0" rIns="0" bIns="0" rtlCol="0" anchor="ctr"/>
+          <a:lstStyle/>
+          <a:p>
+            <a:pPr indent="0" marL="0">
+              <a:buNone/>
+            </a:pPr>
+            <a:r>
+              <a:rPr lang="en-US" sz="1400" b="1" dirty="0">
+                <a:solidFill>
+                  <a:srgbClr val="3B6B4A"/>
+                </a:solidFill>
+                <a:latin typeface="Yu Gothic" pitchFamily="34" charset="0"/>
+                <a:ea typeface="Yu Gothic" pitchFamily="34" charset="-122"/>
+                <a:cs typeface="Yu Gothic" pitchFamily="34" charset="-120"/>
+              </a:rPr>
+              <a:t>次回は、毎回ゼロから打つのをやめます。たまっていく形に組み替えます。</a:t>
+            </a:r>
+            <a:endParaRPr lang="en-US" sz="1400" dirty="0"/>
+          </a:p>
+        </p:txBody>
+      </p:sp>
+      <p:sp>
+        <p:nvSpPr>
+          <p:cNvPr id="5" name="Shape 3"/>
+          <p:cNvSpPr/>
+          <p:nvPr/>
+        </p:nvSpPr>
+        <p:spPr>
+          <a:xfrm>
+            <a:off x="777240" y="2240280"/>
+            <a:ext cx="4985309" cy="2286000"/>
+          </a:xfrm>
+          <a:prstGeom prst="rect">
+            <a:avLst/>
+          </a:prstGeom>
+          <a:solidFill>
+            <a:srgbClr val="FFFFFF"/>
+          </a:solidFill>
+          <a:ln w="12700">
+            <a:solidFill>
+              <a:srgbClr val="EDE7DB"/>
+            </a:solidFill>
+            <a:prstDash val="solid"/>
+          </a:ln>
+        </p:spPr>
+      </p:sp>
+      <p:sp>
+        <p:nvSpPr>
+          <p:cNvPr id="6" name="Text 4"/>
+          <p:cNvSpPr txBox="1"/>
+          <p:nvPr/>
+        </p:nvSpPr>
+        <p:spPr>
+          <a:xfrm>
+            <a:off x="1051560" y="2377440"/>
+            <a:ext cx="4242816" cy="274320"/>
+          </a:xfrm>
+          <a:prstGeom prst="rect">
+            <a:avLst/>
+          </a:prstGeom>
+          <a:noFill/>
+          <a:ln/>
+        </p:spPr>
+        <p:txBody>
+          <a:bodyPr wrap="square" lIns="0" tIns="0" rIns="0" bIns="0" rtlCol="0" anchor="ctr"/>
+          <a:lstStyle/>
+          <a:p>
+            <a:pPr indent="0" marL="0">
+              <a:buNone/>
+            </a:pPr>
+            <a:r>
+              <a:rPr lang="en-US" sz="1000" b="1" spc="150" kern="0" dirty="0">
+                <a:solidFill>
+                  <a:srgbClr val="B04A2F"/>
+                </a:solidFill>
+                <a:latin typeface="Yu Gothic" pitchFamily="34" charset="0"/>
+                <a:ea typeface="Yu Gothic" pitchFamily="34" charset="-122"/>
+                <a:cs typeface="Yu Gothic" pitchFamily="34" charset="-120"/>
+              </a:rPr>
+              <a:t>次回までにやること</a:t>
+            </a:r>
+            <a:endParaRPr lang="en-US" sz="1000" dirty="0"/>
+          </a:p>
+        </p:txBody>
+      </p:sp>
+      <p:sp>
+        <p:nvSpPr>
+          <p:cNvPr id="7" name="Text 5"/>
+          <p:cNvSpPr txBox="1"/>
+          <p:nvPr/>
+        </p:nvSpPr>
+        <p:spPr>
+          <a:xfrm>
+            <a:off x="1051560" y="2743200"/>
+            <a:ext cx="4436669" cy="1554480"/>
+          </a:xfrm>
+          <a:prstGeom prst="rect">
+            <a:avLst/>
+          </a:prstGeom>
+          <a:noFill/>
+          <a:ln/>
+        </p:spPr>
+        <p:txBody>
+          <a:bodyPr wrap="square" lIns="0" tIns="0" rIns="0" bIns="0" rtlCol="0" anchor="ctr"/>
+          <a:lstStyle/>
+          <a:p>
+            <a:pPr indent="0" marL="0">
+              <a:lnSpc>
+                <a:spcPct val="140000"/>
+              </a:lnSpc>
+              <a:buNone/>
+            </a:pPr>
+            <a:r>
+              <a:rPr lang="en-US" sz="1400" dirty="0">
+                <a:solidFill>
+                  <a:srgbClr val="23201D"/>
+                </a:solidFill>
+                <a:latin typeface="Yu Gothic" pitchFamily="34" charset="0"/>
+                <a:ea typeface="Yu Gothic" pitchFamily="34" charset="-122"/>
+                <a:cs typeface="Yu Gothic" pitchFamily="34" charset="-120"/>
+              </a:rPr>
+              <a:t>明日の朝いちで、今日つくった指示をもう一度使う</a:t>
+            </a:r>
+            <a:endParaRPr lang="en-US" sz="1400" dirty="0"/>
+          </a:p>
+        </p:txBody>
+      </p:sp>
+      <p:sp>
+        <p:nvSpPr>
+          <p:cNvPr id="8" name="Shape 6"/>
+          <p:cNvSpPr/>
+          <p:nvPr/>
+        </p:nvSpPr>
+        <p:spPr>
+          <a:xfrm>
+            <a:off x="6398971" y="2240280"/>
+            <a:ext cx="4985309" cy="2286000"/>
+          </a:xfrm>
+          <a:prstGeom prst="rect">
+            <a:avLst/>
+          </a:prstGeom>
+          <a:solidFill>
+            <a:srgbClr val="FFFFFF"/>
+          </a:solidFill>
+          <a:ln w="12700">
+            <a:solidFill>
+              <a:srgbClr val="EDE7DB"/>
+            </a:solidFill>
+            <a:prstDash val="solid"/>
+          </a:ln>
+        </p:spPr>
+      </p:sp>
+      <p:sp>
+        <p:nvSpPr>
+          <p:cNvPr id="9" name="Text 7"/>
+          <p:cNvSpPr txBox="1"/>
+          <p:nvPr/>
+        </p:nvSpPr>
+        <p:spPr>
+          <a:xfrm>
+            <a:off x="6673291" y="2377440"/>
+            <a:ext cx="4242816" cy="274320"/>
+          </a:xfrm>
+          <a:prstGeom prst="rect">
+            <a:avLst/>
+          </a:prstGeom>
+          <a:noFill/>
+          <a:ln/>
+        </p:spPr>
+        <p:txBody>
+          <a:bodyPr wrap="square" lIns="0" tIns="0" rIns="0" bIns="0" rtlCol="0" anchor="ctr"/>
+          <a:lstStyle/>
+          <a:p>
+            <a:pPr indent="0" marL="0">
+              <a:buNone/>
+            </a:pPr>
+            <a:r>
+              <a:rPr lang="en-US" sz="1000" b="1" spc="150" kern="0" dirty="0">
+                <a:solidFill>
+                  <a:srgbClr val="3B6B4A"/>
+                </a:solidFill>
+                <a:latin typeface="Yu Gothic" pitchFamily="34" charset="0"/>
+                <a:ea typeface="Yu Gothic" pitchFamily="34" charset="-122"/>
+                <a:cs typeface="Yu Gothic" pitchFamily="34" charset="-120"/>
+              </a:rPr>
+              <a:t>次回の持ち物</a:t>
+            </a:r>
+            <a:endParaRPr lang="en-US" sz="1000" dirty="0"/>
+          </a:p>
+        </p:txBody>
+      </p:sp>
+      <p:sp>
+        <p:nvSpPr>
+          <p:cNvPr id="10" name="Text 8"/>
+          <p:cNvSpPr txBox="1"/>
+          <p:nvPr/>
+        </p:nvSpPr>
+        <p:spPr>
+          <a:xfrm>
+            <a:off x="6673291" y="2743200"/>
+            <a:ext cx="4436669" cy="694944"/>
+          </a:xfrm>
+          <a:prstGeom prst="rect">
+            <a:avLst/>
+          </a:prstGeom>
+          <a:noFill/>
+          <a:ln/>
+        </p:spPr>
+        <p:txBody>
+          <a:bodyPr wrap="square" lIns="0" tIns="0" rIns="0" bIns="0" rtlCol="0" anchor="ctr"/>
+          <a:lstStyle/>
+          <a:p>
+            <a:pPr indent="0" marL="0">
+              <a:lnSpc>
+                <a:spcPct val="130000"/>
+              </a:lnSpc>
+              <a:buNone/>
+            </a:pPr>
+            <a:r>
+              <a:rPr lang="en-US" sz="1250" dirty="0">
+                <a:solidFill>
+                  <a:srgbClr val="23201D"/>
+                </a:solidFill>
+                <a:latin typeface="Yu Gothic" pitchFamily="34" charset="0"/>
+                <a:ea typeface="Yu Gothic" pitchFamily="34" charset="-122"/>
+                <a:cs typeface="Yu Gothic" pitchFamily="34" charset="-120"/>
+              </a:rPr>
+              <a:t>・週に3回以上やっている文書業務を1つ決めてくる</a:t>
+            </a:r>
+            <a:endParaRPr lang="en-US" sz="1250" dirty="0"/>
+          </a:p>
+        </p:txBody>
+      </p:sp>
+      <p:sp>
+        <p:nvSpPr>
+          <p:cNvPr id="11" name="Text 9"/>
+          <p:cNvSpPr txBox="1"/>
+          <p:nvPr/>
+        </p:nvSpPr>
+        <p:spPr>
+          <a:xfrm>
+            <a:off x="6673291" y="3474720"/>
+            <a:ext cx="4436669" cy="694944"/>
+          </a:xfrm>
+          <a:prstGeom prst="rect">
+            <a:avLst/>
+          </a:prstGeom>
+          <a:noFill/>
+          <a:ln/>
+        </p:spPr>
+        <p:txBody>
+          <a:bodyPr wrap="square" lIns="0" tIns="0" rIns="0" bIns="0" rtlCol="0" anchor="ctr"/>
+          <a:lstStyle/>
+          <a:p>
+            <a:pPr indent="0" marL="0">
+              <a:lnSpc>
+                <a:spcPct val="130000"/>
+              </a:lnSpc>
+              <a:buNone/>
+            </a:pPr>
+            <a:r>
+              <a:rPr lang="en-US" sz="1250" dirty="0">
+                <a:solidFill>
+                  <a:srgbClr val="23201D"/>
+                </a:solidFill>
+                <a:latin typeface="Yu Gothic" pitchFamily="34" charset="0"/>
+                <a:ea typeface="Yu Gothic" pitchFamily="34" charset="-122"/>
+                <a:cs typeface="Yu Gothic" pitchFamily="34" charset="-120"/>
+              </a:rPr>
+              <a:t>・会社概要の文章（Webサイトのコピーで構いません）</a:t>
+            </a:r>
+            <a:endParaRPr lang="en-US" sz="1250" dirty="0"/>
+          </a:p>
+        </p:txBody>
+      </p:sp>
+      <p:sp>
+        <p:nvSpPr>
+          <p:cNvPr id="12" name="Shape 10"/>
+          <p:cNvSpPr/>
+          <p:nvPr/>
+        </p:nvSpPr>
+        <p:spPr>
+          <a:xfrm>
+            <a:off x="777240" y="4800600"/>
+            <a:ext cx="10607040" cy="777240"/>
+          </a:xfrm>
+          <a:prstGeom prst="rect">
+            <a:avLst/>
+          </a:prstGeom>
+          <a:solidFill>
+            <a:srgbClr val="EDE7DB"/>
+          </a:solidFill>
+          <a:ln w="12700">
+            <a:solidFill>
+              <a:srgbClr val="333333"/>
+            </a:solidFill>
+            <a:prstDash val="solid"/>
+          </a:ln>
+        </p:spPr>
+      </p:sp>
+      <p:sp>
+        <p:nvSpPr>
+          <p:cNvPr id="13" name="Text 11"/>
+          <p:cNvSpPr txBox="1"/>
+          <p:nvPr/>
+        </p:nvSpPr>
+        <p:spPr>
+          <a:xfrm>
+            <a:off x="1097280" y="4800600"/>
+            <a:ext cx="9966960" cy="777240"/>
+          </a:xfrm>
+          <a:prstGeom prst="rect">
+            <a:avLst/>
+          </a:prstGeom>
+          <a:noFill/>
+          <a:ln/>
+        </p:spPr>
+        <p:txBody>
+          <a:bodyPr wrap="square" lIns="0" tIns="0" rIns="0" bIns="0" rtlCol="0" anchor="ctr"/>
+          <a:lstStyle/>
+          <a:p>
+            <a:pPr indent="0" marL="0">
+              <a:buNone/>
+            </a:pPr>
+            <a:r>
+              <a:rPr lang="en-US" sz="1250" dirty="0">
+                <a:solidFill>
+                  <a:srgbClr val="5A534A"/>
+                </a:solidFill>
+                <a:latin typeface="Yu Gothic" pitchFamily="34" charset="0"/>
+                <a:ea typeface="Yu Gothic" pitchFamily="34" charset="-122"/>
+                <a:cs typeface="Yu Gothic" pitchFamily="34" charset="-120"/>
+              </a:rPr>
+              <a:t>この内容は、次回の3日前にあらためてお送りします。</a:t>
+            </a:r>
+            <a:endParaRPr lang="en-US" sz="1250" dirty="0"/>
+          </a:p>
+        </p:txBody>
+      </p:sp>
+      <p:sp>
+        <p:nvSpPr>
+          <p:cNvPr id="14" name="Text 12"/>
+          <p:cNvSpPr txBox="1"/>
+          <p:nvPr/>
+        </p:nvSpPr>
+        <p:spPr>
+          <a:xfrm>
+            <a:off x="777240" y="6382512"/>
+            <a:ext cx="7424928" cy="256032"/>
+          </a:xfrm>
+          <a:prstGeom prst="rect">
+            <a:avLst/>
+          </a:prstGeom>
+          <a:noFill/>
+          <a:ln/>
+        </p:spPr>
+        <p:txBody>
+          <a:bodyPr wrap="square" lIns="0" tIns="0" rIns="0" bIns="0" rtlCol="0" anchor="ctr"/>
+          <a:lstStyle/>
+          <a:p>
+            <a:pPr indent="0" marL="0">
+              <a:buNone/>
+            </a:pPr>
+            <a:r>
+              <a:rPr lang="en-US" sz="900" dirty="0">
+                <a:solidFill>
+                  <a:srgbClr val="8A8177"/>
+                </a:solidFill>
+                <a:latin typeface="Yu Gothic" pitchFamily="34" charset="0"/>
+                <a:ea typeface="Yu Gothic" pitchFamily="34" charset="-122"/>
+                <a:cs typeface="Yu Gothic" pitchFamily="34" charset="-120"/>
+              </a:rPr>
+              <a:t>第1回　現状把握と地図づくり</a:t>
+            </a:r>
+            <a:endParaRPr lang="en-US" sz="900" dirty="0"/>
+          </a:p>
+        </p:txBody>
+      </p:sp>
+      <p:sp>
+        <p:nvSpPr>
+          <p:cNvPr id="15" name="Text 13"/>
+          <p:cNvSpPr txBox="1"/>
+          <p:nvPr/>
+        </p:nvSpPr>
+        <p:spPr>
+          <a:xfrm>
+            <a:off x="8202168" y="6382512"/>
+            <a:ext cx="3182112" cy="256032"/>
+          </a:xfrm>
+          <a:prstGeom prst="rect">
+            <a:avLst/>
+          </a:prstGeom>
+          <a:noFill/>
+          <a:ln/>
+        </p:spPr>
+        <p:txBody>
+          <a:bodyPr wrap="square" lIns="0" tIns="0" rIns="0" bIns="0" rtlCol="0" anchor="ctr"/>
+          <a:lstStyle/>
+          <a:p>
+            <a:pPr algn="r" indent="0" marL="0">
+              <a:buNone/>
+            </a:pPr>
+            <a:r>
+              <a:rPr lang="en-US" sz="900" dirty="0">
+                <a:solidFill>
+                  <a:srgbClr val="8A8177"/>
+                </a:solidFill>
+                <a:latin typeface="Yu Gothic" pitchFamily="34" charset="0"/>
+                <a:ea typeface="Yu Gothic" pitchFamily="34" charset="-122"/>
+                <a:cs typeface="Yu Gothic" pitchFamily="34" charset="-120"/>
+              </a:rPr>
+              <a:t>次回まで</a:t>
+            </a:r>
+            <a:endParaRPr lang="en-US" sz="900" dirty="0"/>
+          </a:p>
+        </p:txBody>
+      </p:sp>
+    </p:spTree>
+  </p:cSld>
+  <p:clrMapOvr>
+    <a:masterClrMapping/>
+  </p:clrMapOvr>
+</p:sld>
+</file>
+
+<file path=ppt/slides/slide15.xml><?xml version="1.0" encoding="utf-8"?>
+<p:sld xmlns:a="http://schemas.openxmlformats.org/drawingml/2006/main" xmlns:r="http://schemas.openxmlformats.org/officeDocument/2006/relationships" xmlns:p="http://schemas.openxmlformats.org/presentationml/2006/main">
+  <p:cSld name="Slide 15">
     <p:bg>
       <p:bgPr>
         <a:solidFill>
@@ -8388,13 +10566,13 @@
             <a:r>
               <a:rPr lang="en-US" sz="1100" b="1" spc="250" kern="0" dirty="0">
                 <a:solidFill>
-                  <a:srgbClr val="2F4F6B"/>
-                </a:solidFill>
-                <a:latin typeface="Yu Gothic" pitchFamily="34" charset="0"/>
-                <a:ea typeface="Yu Gothic" pitchFamily="34" charset="-122"/>
-                <a:cs typeface="Yu Gothic" pitchFamily="34" charset="-120"/>
-              </a:rPr>
-              <a:t>演習</a:t>
+                  <a:srgbClr val="B04A2F"/>
+                </a:solidFill>
+                <a:latin typeface="Yu Gothic" pitchFamily="34" charset="0"/>
+                <a:ea typeface="Yu Gothic" pitchFamily="34" charset="-122"/>
+                <a:cs typeface="Yu Gothic" pitchFamily="34" charset="-120"/>
+              </a:rPr>
+              <a:t>想定問答</a:t>
             </a:r>
             <a:endParaRPr lang="en-US" sz="1100" dirty="0"/>
           </a:p>
@@ -8433,7 +10611,7 @@
                 <a:ea typeface="Yu Gothic" pitchFamily="34" charset="-122"/>
                 <a:cs typeface="Yu Gothic" pitchFamily="34" charset="-120"/>
               </a:rPr>
-              <a:t>今日、一緒にやること</a:t>
+              <a:t>この回で、よく聞かれること</a:t>
             </a:r>
             <a:endParaRPr lang="en-US" sz="2600" dirty="0"/>
           </a:p>
@@ -8441,53 +10619,14 @@
       </p:sp>
       <p:sp>
         <p:nvSpPr>
-          <p:cNvPr id="4" name="Text 2"/>
-          <p:cNvSpPr txBox="1"/>
-          <p:nvPr/>
-        </p:nvSpPr>
-        <p:spPr>
-          <a:xfrm>
-            <a:off x="777240" y="1572768"/>
-            <a:ext cx="10607040" cy="320040"/>
-          </a:xfrm>
-          <a:prstGeom prst="rect">
-            <a:avLst/>
-          </a:prstGeom>
-          <a:noFill/>
-          <a:ln/>
-        </p:spPr>
-        <p:txBody>
-          <a:bodyPr wrap="square" lIns="0" tIns="0" rIns="0" bIns="0" rtlCol="0" anchor="ctr"/>
-          <a:lstStyle/>
-          <a:p>
-            <a:pPr indent="0" marL="0">
-              <a:buNone/>
-            </a:pPr>
-            <a:r>
-              <a:rPr lang="en-US" sz="1250" b="1" dirty="0">
-                <a:solidFill>
-                  <a:srgbClr val="2F4F6B"/>
-                </a:solidFill>
-                <a:latin typeface="Yu Gothic" pitchFamily="34" charset="0"/>
-                <a:ea typeface="Yu Gothic" pitchFamily="34" charset="-122"/>
-                <a:cs typeface="Yu Gothic" pitchFamily="34" charset="-120"/>
-              </a:rPr>
-              <a:t>55分。操作するのはご自身です。</a:t>
-            </a:r>
-            <a:endParaRPr lang="en-US" sz="1250" dirty="0"/>
-          </a:p>
-        </p:txBody>
-      </p:sp>
-      <p:sp>
-        <p:nvSpPr>
-          <p:cNvPr id="5" name="Shape 3"/>
+          <p:cNvPr id="4" name="Shape 2"/>
           <p:cNvSpPr/>
           <p:nvPr/>
         </p:nvSpPr>
         <p:spPr>
           <a:xfrm>
-            <a:off x="777240" y="2148840"/>
-            <a:ext cx="3383280" cy="2880360"/>
+            <a:off x="777240" y="1737360"/>
+            <a:ext cx="10607040" cy="1170432"/>
           </a:xfrm>
           <a:prstGeom prst="rect">
             <a:avLst/>
@@ -8505,16 +10644,16 @@
       </p:sp>
       <p:sp>
         <p:nvSpPr>
-          <p:cNvPr id="6" name="Shape 4"/>
+          <p:cNvPr id="5" name="Shape 3"/>
           <p:cNvSpPr/>
           <p:nvPr/>
         </p:nvSpPr>
         <p:spPr>
           <a:xfrm>
-            <a:off x="1051560" y="2395728"/>
-            <a:ext cx="438912" cy="438912"/>
-          </a:xfrm>
-          <a:prstGeom prst="ellipse">
+            <a:off x="777240" y="1737360"/>
+            <a:ext cx="54864" cy="1170432"/>
+          </a:xfrm>
+          <a:prstGeom prst="rect">
             <a:avLst/>
           </a:prstGeom>
           <a:solidFill>
@@ -8530,95 +10669,53 @@
       </p:sp>
       <p:sp>
         <p:nvSpPr>
+          <p:cNvPr id="6" name="Text 4"/>
+          <p:cNvSpPr txBox="1"/>
+          <p:nvPr/>
+        </p:nvSpPr>
+        <p:spPr>
+          <a:xfrm>
+            <a:off x="1097280" y="1828800"/>
+            <a:ext cx="9966960" cy="384048"/>
+          </a:xfrm>
+          <a:prstGeom prst="rect">
+            <a:avLst/>
+          </a:prstGeom>
+          <a:noFill/>
+          <a:ln/>
+        </p:spPr>
+        <p:txBody>
+          <a:bodyPr wrap="square" lIns="0" tIns="0" rIns="0" bIns="0" rtlCol="0" anchor="ctr"/>
+          <a:lstStyle/>
+          <a:p>
+            <a:pPr indent="0" marL="0">
+              <a:buNone/>
+            </a:pPr>
+            <a:r>
+              <a:rPr lang="en-US" sz="1400" b="1" dirty="0">
+                <a:solidFill>
+                  <a:srgbClr val="2F4F6B"/>
+                </a:solidFill>
+                <a:latin typeface="Yu Gothic" pitchFamily="34" charset="0"/>
+                <a:ea typeface="Yu Gothic" pitchFamily="34" charset="-122"/>
+                <a:cs typeface="Yu Gothic" pitchFamily="34" charset="-120"/>
+              </a:rPr>
+              <a:t>「うちの業界は特殊なので、使えないのでは」</a:t>
+            </a:r>
+            <a:endParaRPr lang="en-US" sz="1400" dirty="0"/>
+          </a:p>
+        </p:txBody>
+      </p:sp>
+      <p:sp>
+        <p:nvSpPr>
           <p:cNvPr id="7" name="Text 5"/>
           <p:cNvSpPr txBox="1"/>
           <p:nvPr/>
         </p:nvSpPr>
         <p:spPr>
           <a:xfrm>
-            <a:off x="1051560" y="2395728"/>
-            <a:ext cx="438912" cy="438912"/>
-          </a:xfrm>
-          <a:prstGeom prst="rect">
-            <a:avLst/>
-          </a:prstGeom>
-          <a:noFill/>
-          <a:ln/>
-        </p:spPr>
-        <p:txBody>
-          <a:bodyPr wrap="square" lIns="0" tIns="0" rIns="0" bIns="0" rtlCol="0" anchor="ctr"/>
-          <a:lstStyle/>
-          <a:p>
-            <a:pPr algn="ctr" indent="0" marL="0">
-              <a:buNone/>
-            </a:pPr>
-            <a:r>
-              <a:rPr lang="en-US" sz="1300" b="1" dirty="0">
-                <a:solidFill>
-                  <a:srgbClr val="FFFFFF"/>
-                </a:solidFill>
-                <a:latin typeface="Yu Gothic" pitchFamily="34" charset="0"/>
-                <a:ea typeface="Yu Gothic" pitchFamily="34" charset="-122"/>
-                <a:cs typeface="Yu Gothic" pitchFamily="34" charset="-120"/>
-              </a:rPr>
-              <a:t>1</a:t>
-            </a:r>
-            <a:endParaRPr lang="en-US" sz="1300" dirty="0"/>
-          </a:p>
-        </p:txBody>
-      </p:sp>
-      <p:sp>
-        <p:nvSpPr>
-          <p:cNvPr id="8" name="Text 6"/>
-          <p:cNvSpPr txBox="1"/>
-          <p:nvPr/>
-        </p:nvSpPr>
-        <p:spPr>
-          <a:xfrm>
-            <a:off x="1051560" y="2944368"/>
-            <a:ext cx="2834640" cy="731520"/>
-          </a:xfrm>
-          <a:prstGeom prst="rect">
-            <a:avLst/>
-          </a:prstGeom>
-          <a:noFill/>
-          <a:ln/>
-        </p:spPr>
-        <p:txBody>
-          <a:bodyPr wrap="square" lIns="0" tIns="0" rIns="0" bIns="0" rtlCol="0" anchor="ctr"/>
-          <a:lstStyle/>
-          <a:p>
-            <a:pPr indent="0" marL="0">
-              <a:lnSpc>
-                <a:spcPct val="125000"/>
-              </a:lnSpc>
-              <a:buNone/>
-            </a:pPr>
-            <a:r>
-              <a:rPr lang="en-US" sz="1450" b="1" dirty="0">
-                <a:solidFill>
-                  <a:srgbClr val="23201D"/>
-                </a:solidFill>
-                <a:latin typeface="Yu Gothic" pitchFamily="34" charset="0"/>
-                <a:ea typeface="Yu Gothic" pitchFamily="34" charset="-122"/>
-                <a:cs typeface="Yu Gothic" pitchFamily="34" charset="-120"/>
-              </a:rPr>
-              <a:t>いまの使い方を拝見する</a:t>
-            </a:r>
-            <a:endParaRPr lang="en-US" sz="1450" dirty="0"/>
-          </a:p>
-        </p:txBody>
-      </p:sp>
-      <p:sp>
-        <p:nvSpPr>
-          <p:cNvPr id="9" name="Text 7"/>
-          <p:cNvSpPr txBox="1"/>
-          <p:nvPr/>
-        </p:nvSpPr>
-        <p:spPr>
-          <a:xfrm>
-            <a:off x="1051560" y="3703320"/>
-            <a:ext cx="2834640" cy="1188720"/>
+            <a:off x="1097280" y="2231136"/>
+            <a:ext cx="9966960" cy="603504"/>
           </a:xfrm>
           <a:prstGeom prst="rect">
             <a:avLst/>
@@ -8637,30 +10734,30 @@
               <a:buNone/>
             </a:pPr>
             <a:r>
-              <a:rPr lang="en-US" sz="1150" dirty="0">
-                <a:solidFill>
-                  <a:srgbClr val="5A534A"/>
-                </a:solidFill>
-                <a:latin typeface="Yu Gothic" pitchFamily="34" charset="0"/>
-                <a:ea typeface="Yu Gothic" pitchFamily="34" charset="-122"/>
-                <a:cs typeface="Yu Gothic" pitchFamily="34" charset="-120"/>
-              </a:rPr>
-              <a:t>20分。普段どおりに操作していただきます。うまくやろうとしなくて大丈夫です</a:t>
-            </a:r>
-            <a:endParaRPr lang="en-US" sz="1150" dirty="0"/>
-          </a:p>
-        </p:txBody>
-      </p:sp>
-      <p:sp>
-        <p:nvSpPr>
-          <p:cNvPr id="10" name="Shape 8"/>
+              <a:rPr lang="en-US" sz="1250" dirty="0">
+                <a:solidFill>
+                  <a:srgbClr val="3F3933"/>
+                </a:solidFill>
+                <a:latin typeface="Yu Gothic" pitchFamily="34" charset="0"/>
+                <a:ea typeface="Yu Gothic" pitchFamily="34" charset="-122"/>
+                <a:cs typeface="Yu Gothic" pitchFamily="34" charset="-120"/>
+              </a:rPr>
+              <a:t>特殊なのは判断の部分で、その周りの定型業務はどの業界も驚くほど似ています。棚卸し表で、どこが特殊でどこが共通かを分けて見せます。</a:t>
+            </a:r>
+            <a:endParaRPr lang="en-US" sz="1250" dirty="0"/>
+          </a:p>
+        </p:txBody>
+      </p:sp>
+      <p:sp>
+        <p:nvSpPr>
+          <p:cNvPr id="8" name="Shape 6"/>
           <p:cNvSpPr/>
           <p:nvPr/>
         </p:nvSpPr>
         <p:spPr>
           <a:xfrm>
-            <a:off x="4389120" y="2148840"/>
-            <a:ext cx="3383280" cy="2880360"/>
+            <a:off x="777240" y="3035808"/>
+            <a:ext cx="10607040" cy="1170432"/>
           </a:xfrm>
           <a:prstGeom prst="rect">
             <a:avLst/>
@@ -8678,16 +10775,16 @@
       </p:sp>
       <p:sp>
         <p:nvSpPr>
-          <p:cNvPr id="11" name="Shape 9"/>
+          <p:cNvPr id="9" name="Shape 7"/>
           <p:cNvSpPr/>
           <p:nvPr/>
         </p:nvSpPr>
         <p:spPr>
           <a:xfrm>
-            <a:off x="4663440" y="2395728"/>
-            <a:ext cx="438912" cy="438912"/>
-          </a:xfrm>
-          <a:prstGeom prst="ellipse">
+            <a:off x="777240" y="3035808"/>
+            <a:ext cx="54864" cy="1170432"/>
+          </a:xfrm>
+          <a:prstGeom prst="rect">
             <a:avLst/>
           </a:prstGeom>
           <a:solidFill>
@@ -8703,95 +10800,53 @@
       </p:sp>
       <p:sp>
         <p:nvSpPr>
-          <p:cNvPr id="12" name="Text 10"/>
-          <p:cNvSpPr txBox="1"/>
-          <p:nvPr/>
-        </p:nvSpPr>
-        <p:spPr>
-          <a:xfrm>
-            <a:off x="4663440" y="2395728"/>
-            <a:ext cx="438912" cy="438912"/>
-          </a:xfrm>
-          <a:prstGeom prst="rect">
-            <a:avLst/>
-          </a:prstGeom>
-          <a:noFill/>
-          <a:ln/>
-        </p:spPr>
-        <p:txBody>
-          <a:bodyPr wrap="square" lIns="0" tIns="0" rIns="0" bIns="0" rtlCol="0" anchor="ctr"/>
-          <a:lstStyle/>
-          <a:p>
-            <a:pPr algn="ctr" indent="0" marL="0">
-              <a:buNone/>
-            </a:pPr>
-            <a:r>
-              <a:rPr lang="en-US" sz="1300" b="1" dirty="0">
-                <a:solidFill>
-                  <a:srgbClr val="FFFFFF"/>
-                </a:solidFill>
-                <a:latin typeface="Yu Gothic" pitchFamily="34" charset="0"/>
-                <a:ea typeface="Yu Gothic" pitchFamily="34" charset="-122"/>
-                <a:cs typeface="Yu Gothic" pitchFamily="34" charset="-120"/>
-              </a:rPr>
-              <a:t>2</a:t>
-            </a:r>
-            <a:endParaRPr lang="en-US" sz="1300" dirty="0"/>
-          </a:p>
-        </p:txBody>
-      </p:sp>
-      <p:sp>
-        <p:nvSpPr>
-          <p:cNvPr id="13" name="Text 11"/>
-          <p:cNvSpPr txBox="1"/>
-          <p:nvPr/>
-        </p:nvSpPr>
-        <p:spPr>
-          <a:xfrm>
-            <a:off x="4663440" y="2944368"/>
-            <a:ext cx="2834640" cy="731520"/>
-          </a:xfrm>
-          <a:prstGeom prst="rect">
-            <a:avLst/>
-          </a:prstGeom>
-          <a:noFill/>
-          <a:ln/>
-        </p:spPr>
-        <p:txBody>
-          <a:bodyPr wrap="square" lIns="0" tIns="0" rIns="0" bIns="0" rtlCol="0" anchor="ctr"/>
-          <a:lstStyle/>
-          <a:p>
-            <a:pPr indent="0" marL="0">
-              <a:lnSpc>
-                <a:spcPct val="125000"/>
-              </a:lnSpc>
-              <a:buNone/>
-            </a:pPr>
-            <a:r>
-              <a:rPr lang="en-US" sz="1450" b="1" dirty="0">
-                <a:solidFill>
-                  <a:srgbClr val="23201D"/>
-                </a:solidFill>
-                <a:latin typeface="Yu Gothic" pitchFamily="34" charset="0"/>
-                <a:ea typeface="Yu Gothic" pitchFamily="34" charset="-122"/>
-                <a:cs typeface="Yu Gothic" pitchFamily="34" charset="-120"/>
-              </a:rPr>
-              <a:t>業務を棚卸しする</a:t>
-            </a:r>
-            <a:endParaRPr lang="en-US" sz="1450" dirty="0"/>
-          </a:p>
-        </p:txBody>
-      </p:sp>
-      <p:sp>
-        <p:nvSpPr>
-          <p:cNvPr id="14" name="Text 12"/>
-          <p:cNvSpPr txBox="1"/>
-          <p:nvPr/>
-        </p:nvSpPr>
-        <p:spPr>
-          <a:xfrm>
-            <a:off x="4663440" y="3703320"/>
-            <a:ext cx="2834640" cy="1188720"/>
+          <p:cNvPr id="10" name="Text 8"/>
+          <p:cNvSpPr txBox="1"/>
+          <p:nvPr/>
+        </p:nvSpPr>
+        <p:spPr>
+          <a:xfrm>
+            <a:off x="1097280" y="3127248"/>
+            <a:ext cx="9966960" cy="384048"/>
+          </a:xfrm>
+          <a:prstGeom prst="rect">
+            <a:avLst/>
+          </a:prstGeom>
+          <a:noFill/>
+          <a:ln/>
+        </p:spPr>
+        <p:txBody>
+          <a:bodyPr wrap="square" lIns="0" tIns="0" rIns="0" bIns="0" rtlCol="0" anchor="ctr"/>
+          <a:lstStyle/>
+          <a:p>
+            <a:pPr indent="0" marL="0">
+              <a:buNone/>
+            </a:pPr>
+            <a:r>
+              <a:rPr lang="en-US" sz="1400" b="1" dirty="0">
+                <a:solidFill>
+                  <a:srgbClr val="2F4F6B"/>
+                </a:solidFill>
+                <a:latin typeface="Yu Gothic" pitchFamily="34" charset="0"/>
+                <a:ea typeface="Yu Gothic" pitchFamily="34" charset="-122"/>
+                <a:cs typeface="Yu Gothic" pitchFamily="34" charset="-120"/>
+              </a:rPr>
+              <a:t>「社員にやらせたほうが早いのでは」</a:t>
+            </a:r>
+            <a:endParaRPr lang="en-US" sz="1400" dirty="0"/>
+          </a:p>
+        </p:txBody>
+      </p:sp>
+      <p:sp>
+        <p:nvSpPr>
+          <p:cNvPr id="11" name="Text 9"/>
+          <p:cNvSpPr txBox="1"/>
+          <p:nvPr/>
+        </p:nvSpPr>
+        <p:spPr>
+          <a:xfrm>
+            <a:off x="1097280" y="3529584"/>
+            <a:ext cx="9966960" cy="603504"/>
           </a:xfrm>
           <a:prstGeom prst="rect">
             <a:avLst/>
@@ -8810,30 +10865,30 @@
               <a:buNone/>
             </a:pPr>
             <a:r>
-              <a:rPr lang="en-US" sz="1150" dirty="0">
-                <a:solidFill>
-                  <a:srgbClr val="5A534A"/>
-                </a:solidFill>
-                <a:latin typeface="Yu Gothic" pitchFamily="34" charset="0"/>
-                <a:ea typeface="Yu Gothic" pitchFamily="34" charset="-122"/>
-                <a:cs typeface="Yu Gothic" pitchFamily="34" charset="-120"/>
-              </a:rPr>
-              <a:t>実際の一週間を聞きながら、6列の表をその場で埋めます</a:t>
-            </a:r>
-            <a:endParaRPr lang="en-US" sz="1150" dirty="0"/>
-          </a:p>
-        </p:txBody>
-      </p:sp>
-      <p:sp>
-        <p:nvSpPr>
-          <p:cNvPr id="15" name="Shape 13"/>
+              <a:rPr lang="en-US" sz="1250" dirty="0">
+                <a:solidFill>
+                  <a:srgbClr val="3F3933"/>
+                </a:solidFill>
+                <a:latin typeface="Yu Gothic" pitchFamily="34" charset="0"/>
+                <a:ea typeface="Yu Gothic" pitchFamily="34" charset="-122"/>
+                <a:cs typeface="Yu Gothic" pitchFamily="34" charset="-120"/>
+              </a:rPr>
+              <a:t>第5回までは社長ご自身に使っていただきます。判断の勘所は、使った人にしか分かりません。社員に渡すのは第3回から、1名ずつです。</a:t>
+            </a:r>
+            <a:endParaRPr lang="en-US" sz="1250" dirty="0"/>
+          </a:p>
+        </p:txBody>
+      </p:sp>
+      <p:sp>
+        <p:nvSpPr>
+          <p:cNvPr id="12" name="Shape 10"/>
           <p:cNvSpPr/>
           <p:nvPr/>
         </p:nvSpPr>
         <p:spPr>
           <a:xfrm>
-            <a:off x="8001000" y="2148840"/>
-            <a:ext cx="3383280" cy="2880360"/>
+            <a:off x="777240" y="4334256"/>
+            <a:ext cx="10607040" cy="1170432"/>
           </a:xfrm>
           <a:prstGeom prst="rect">
             <a:avLst/>
@@ -8851,16 +10906,16 @@
       </p:sp>
       <p:sp>
         <p:nvSpPr>
-          <p:cNvPr id="16" name="Shape 14"/>
+          <p:cNvPr id="13" name="Shape 11"/>
           <p:cNvSpPr/>
           <p:nvPr/>
         </p:nvSpPr>
         <p:spPr>
           <a:xfrm>
-            <a:off x="8275320" y="2395728"/>
-            <a:ext cx="438912" cy="438912"/>
-          </a:xfrm>
-          <a:prstGeom prst="ellipse">
+            <a:off x="777240" y="4334256"/>
+            <a:ext cx="54864" cy="1170432"/>
+          </a:xfrm>
+          <a:prstGeom prst="rect">
             <a:avLst/>
           </a:prstGeom>
           <a:solidFill>
@@ -8876,95 +10931,53 @@
       </p:sp>
       <p:sp>
         <p:nvSpPr>
-          <p:cNvPr id="17" name="Text 15"/>
-          <p:cNvSpPr txBox="1"/>
-          <p:nvPr/>
-        </p:nvSpPr>
-        <p:spPr>
-          <a:xfrm>
-            <a:off x="8275320" y="2395728"/>
-            <a:ext cx="438912" cy="438912"/>
-          </a:xfrm>
-          <a:prstGeom prst="rect">
-            <a:avLst/>
-          </a:prstGeom>
-          <a:noFill/>
-          <a:ln/>
-        </p:spPr>
-        <p:txBody>
-          <a:bodyPr wrap="square" lIns="0" tIns="0" rIns="0" bIns="0" rtlCol="0" anchor="ctr"/>
-          <a:lstStyle/>
-          <a:p>
-            <a:pPr algn="ctr" indent="0" marL="0">
-              <a:buNone/>
-            </a:pPr>
-            <a:r>
-              <a:rPr lang="en-US" sz="1300" b="1" dirty="0">
-                <a:solidFill>
-                  <a:srgbClr val="FFFFFF"/>
-                </a:solidFill>
-                <a:latin typeface="Yu Gothic" pitchFamily="34" charset="0"/>
-                <a:ea typeface="Yu Gothic" pitchFamily="34" charset="-122"/>
-                <a:cs typeface="Yu Gothic" pitchFamily="34" charset="-120"/>
-              </a:rPr>
-              <a:t>3</a:t>
-            </a:r>
-            <a:endParaRPr lang="en-US" sz="1300" dirty="0"/>
-          </a:p>
-        </p:txBody>
-      </p:sp>
-      <p:sp>
-        <p:nvSpPr>
-          <p:cNvPr id="18" name="Text 16"/>
-          <p:cNvSpPr txBox="1"/>
-          <p:nvPr/>
-        </p:nvSpPr>
-        <p:spPr>
-          <a:xfrm>
-            <a:off x="8275320" y="2944368"/>
-            <a:ext cx="2834640" cy="731520"/>
-          </a:xfrm>
-          <a:prstGeom prst="rect">
-            <a:avLst/>
-          </a:prstGeom>
-          <a:noFill/>
-          <a:ln/>
-        </p:spPr>
-        <p:txBody>
-          <a:bodyPr wrap="square" lIns="0" tIns="0" rIns="0" bIns="0" rtlCol="0" anchor="ctr"/>
-          <a:lstStyle/>
-          <a:p>
-            <a:pPr indent="0" marL="0">
-              <a:lnSpc>
-                <a:spcPct val="125000"/>
-              </a:lnSpc>
-              <a:buNone/>
-            </a:pPr>
-            <a:r>
-              <a:rPr lang="en-US" sz="1450" b="1" dirty="0">
-                <a:solidFill>
-                  <a:srgbClr val="23201D"/>
-                </a:solidFill>
-                <a:latin typeface="Yu Gothic" pitchFamily="34" charset="0"/>
-                <a:ea typeface="Yu Gothic" pitchFamily="34" charset="-122"/>
-                <a:cs typeface="Yu Gothic" pitchFamily="34" charset="-120"/>
-              </a:rPr>
-              <a:t>1つ、その場で解かせる</a:t>
-            </a:r>
-            <a:endParaRPr lang="en-US" sz="1450" dirty="0"/>
-          </a:p>
-        </p:txBody>
-      </p:sp>
-      <p:sp>
-        <p:nvSpPr>
-          <p:cNvPr id="19" name="Text 17"/>
-          <p:cNvSpPr txBox="1"/>
-          <p:nvPr/>
-        </p:nvSpPr>
-        <p:spPr>
-          <a:xfrm>
-            <a:off x="8275320" y="3703320"/>
-            <a:ext cx="2834640" cy="1188720"/>
+          <p:cNvPr id="14" name="Text 12"/>
+          <p:cNvSpPr txBox="1"/>
+          <p:nvPr/>
+        </p:nvSpPr>
+        <p:spPr>
+          <a:xfrm>
+            <a:off x="1097280" y="4425696"/>
+            <a:ext cx="9966960" cy="384048"/>
+          </a:xfrm>
+          <a:prstGeom prst="rect">
+            <a:avLst/>
+          </a:prstGeom>
+          <a:noFill/>
+          <a:ln/>
+        </p:spPr>
+        <p:txBody>
+          <a:bodyPr wrap="square" lIns="0" tIns="0" rIns="0" bIns="0" rtlCol="0" anchor="ctr"/>
+          <a:lstStyle/>
+          <a:p>
+            <a:pPr indent="0" marL="0">
+              <a:buNone/>
+            </a:pPr>
+            <a:r>
+              <a:rPr lang="en-US" sz="1400" b="1" dirty="0">
+                <a:solidFill>
+                  <a:srgbClr val="2F4F6B"/>
+                </a:solidFill>
+                <a:latin typeface="Yu Gothic" pitchFamily="34" charset="0"/>
+                <a:ea typeface="Yu Gothic" pitchFamily="34" charset="-122"/>
+                <a:cs typeface="Yu Gothic" pitchFamily="34" charset="-120"/>
+              </a:rPr>
+              <a:t>「無料のままで足りますか」</a:t>
+            </a:r>
+            <a:endParaRPr lang="en-US" sz="1400" dirty="0"/>
+          </a:p>
+        </p:txBody>
+      </p:sp>
+      <p:sp>
+        <p:nvSpPr>
+          <p:cNvPr id="15" name="Text 13"/>
+          <p:cNvSpPr txBox="1"/>
+          <p:nvPr/>
+        </p:nvSpPr>
+        <p:spPr>
+          <a:xfrm>
+            <a:off x="1097280" y="4828032"/>
+            <a:ext cx="9966960" cy="603504"/>
           </a:xfrm>
           <a:prstGeom prst="rect">
             <a:avLst/>
@@ -8983,23 +10996,23 @@
               <a:buNone/>
             </a:pPr>
             <a:r>
-              <a:rPr lang="en-US" sz="1150" dirty="0">
-                <a:solidFill>
-                  <a:srgbClr val="5A534A"/>
-                </a:solidFill>
-                <a:latin typeface="Yu Gothic" pitchFamily="34" charset="0"/>
-                <a:ea typeface="Yu Gothic" pitchFamily="34" charset="-122"/>
-                <a:cs typeface="Yu Gothic" pitchFamily="34" charset="-120"/>
-              </a:rPr>
-              <a:t>上位3つのうち1つを今日のうちに動かし、指示文を保存して持ち帰ります</a:t>
-            </a:r>
-            <a:endParaRPr lang="en-US" sz="1150" dirty="0"/>
-          </a:p>
-        </p:txBody>
-      </p:sp>
-      <p:sp>
-        <p:nvSpPr>
-          <p:cNvPr id="20" name="Text 18"/>
+              <a:rPr lang="en-US" sz="1250" dirty="0">
+                <a:solidFill>
+                  <a:srgbClr val="3F3933"/>
+                </a:solidFill>
+                <a:latin typeface="Yu Gothic" pitchFamily="34" charset="0"/>
+                <a:ea typeface="Yu Gothic" pitchFamily="34" charset="-122"/>
+                <a:cs typeface="Yu Gothic" pitchFamily="34" charset="-120"/>
+              </a:rPr>
+              <a:t>第4回まではほぼ足ります。第5回以降の演習で機能差が出ますが、そのときに必要な機能と金額をお示しします。契約はご判断にお任せします。</a:t>
+            </a:r>
+            <a:endParaRPr lang="en-US" sz="1250" dirty="0"/>
+          </a:p>
+        </p:txBody>
+      </p:sp>
+      <p:sp>
+        <p:nvSpPr>
+          <p:cNvPr id="16" name="Text 14"/>
           <p:cNvSpPr txBox="1"/>
           <p:nvPr/>
         </p:nvSpPr>
@@ -9038,7 +11051,7 @@
       </p:sp>
       <p:sp>
         <p:nvSpPr>
-          <p:cNvPr id="21" name="Text 19"/>
+          <p:cNvPr id="17" name="Text 15"/>
           <p:cNvSpPr txBox="1"/>
           <p:nvPr/>
         </p:nvSpPr>
@@ -9069,7 +11082,7 @@
                 <a:ea typeface="Yu Gothic" pitchFamily="34" charset="-122"/>
                 <a:cs typeface="Yu Gothic" pitchFamily="34" charset="-120"/>
               </a:rPr>
-              <a:t>演習</a:t>
+              <a:t>想定問答</a:t>
             </a:r>
             <a:endParaRPr lang="en-US" sz="900" dirty="0"/>
           </a:p>

--- a/slides/pptx/第01回_現状把握と地図づくり.pptx
+++ b/slides/pptx/第01回_現状把握と地図づくり.pptx
@@ -4604,7 +4604,7 @@
                 <a:ea typeface="Yu Gothic" pitchFamily="34" charset="-122"/>
                 <a:cs typeface="Yu Gothic" pitchFamily="34" charset="-120"/>
               </a:rPr>
-              <a:t>他社では</a:t>
+              <a:t>よくある型</a:t>
             </a:r>
             <a:endParaRPr lang="en-US" sz="900" dirty="0"/>
           </a:p>
@@ -4646,7 +4646,7 @@
                 <a:ea typeface="Yu Gothic" pitchFamily="34" charset="-122"/>
                 <a:cs typeface="Yu Gothic" pitchFamily="34" charset="-120"/>
               </a:rPr>
-              <a:t>ある会社では、初回に作ったのは「お断りメールの下書き」1本だけでした。ただ、それを翌朝に使ったことで、2回目以降の宿題が一度も止まりませんでした。</a:t>
+              <a:t>初回に作るものは1本でよい。小さくても、翌朝に一度使うと、そのあとの宿題が止まりにくくなる。逆に大きいものを持ち帰ると、使わないまま2回目を迎える。</a:t>
             </a:r>
             <a:endParaRPr lang="en-US" sz="1250" dirty="0"/>
           </a:p>

--- a/slides/pptx/第01回_現状把握と地図づくり.pptx
+++ b/slides/pptx/第01回_現状把握と地図づくり.pptx
@@ -3146,7 +3146,7 @@
                 <a:ea typeface="Yu Gothic" pitchFamily="34" charset="-122"/>
                 <a:cs typeface="Yu Gothic" pitchFamily="34" charset="-120"/>
               </a:rPr>
-              <a:t>55分。操作するのはご自身です。</a:t>
+              <a:t>70分。操作するのはご自身です。</a:t>
             </a:r>
             <a:endParaRPr lang="en-US" sz="1250" dirty="0"/>
           </a:p>
@@ -6350,7 +6350,7 @@
         <p:spPr>
           <a:xfrm>
             <a:off x="960120" y="4873752"/>
-            <a:ext cx="1956816" cy="237744"/>
+            <a:ext cx="1371600" cy="237744"/>
           </a:xfrm>
           <a:prstGeom prst="rect">
             <a:avLst/>
@@ -6374,7 +6374,7 @@
                 <a:ea typeface="Yu Gothic" pitchFamily="34" charset="-122"/>
                 <a:cs typeface="Yu Gothic" pitchFamily="34" charset="-120"/>
               </a:rPr>
-              <a:t>0-15分</a:t>
+              <a:t>0-10分</a:t>
             </a:r>
             <a:endParaRPr lang="en-US" sz="900" dirty="0"/>
           </a:p>
@@ -6389,7 +6389,7 @@
         <p:spPr>
           <a:xfrm>
             <a:off x="960120" y="5111496"/>
-            <a:ext cx="1956816" cy="384048"/>
+            <a:ext cx="1371600" cy="384048"/>
           </a:xfrm>
           <a:prstGeom prst="rect">
             <a:avLst/>
@@ -6413,7 +6413,7 @@
                 <a:ea typeface="Yu Gothic" pitchFamily="34" charset="-122"/>
                 <a:cs typeface="Yu Gothic" pitchFamily="34" charset="-120"/>
               </a:rPr>
-              <a:t>前回の宿題を実物で</a:t>
+              <a:t>開始・枠組みの共有</a:t>
             </a:r>
             <a:endParaRPr lang="en-US" sz="1100" dirty="0"/>
           </a:p>
@@ -6427,8 +6427,8 @@
         </p:nvSpPr>
         <p:spPr>
           <a:xfrm>
-            <a:off x="3008376" y="4873752"/>
-            <a:ext cx="1956816" cy="237744"/>
+            <a:off x="2423160" y="4873752"/>
+            <a:ext cx="1371600" cy="237744"/>
           </a:xfrm>
           <a:prstGeom prst="rect">
             <a:avLst/>
@@ -6452,7 +6452,7 @@
                 <a:ea typeface="Yu Gothic" pitchFamily="34" charset="-122"/>
                 <a:cs typeface="Yu Gothic" pitchFamily="34" charset="-120"/>
               </a:rPr>
-              <a:t>15-35分</a:t>
+              <a:t>10-30分</a:t>
             </a:r>
             <a:endParaRPr lang="en-US" sz="900" dirty="0"/>
           </a:p>
@@ -6466,8 +6466,8 @@
         </p:nvSpPr>
         <p:spPr>
           <a:xfrm>
-            <a:off x="3008376" y="5111496"/>
-            <a:ext cx="1956816" cy="384048"/>
+            <a:off x="2423160" y="5111496"/>
+            <a:ext cx="1371600" cy="384048"/>
           </a:xfrm>
           <a:prstGeom prst="rect">
             <a:avLst/>
@@ -6491,7 +6491,7 @@
                 <a:ea typeface="Yu Gothic" pitchFamily="34" charset="-122"/>
                 <a:cs typeface="Yu Gothic" pitchFamily="34" charset="-120"/>
               </a:rPr>
-              <a:t>テーマとデモ</a:t>
+              <a:t>いまの使い方を拝見</a:t>
             </a:r>
             <a:endParaRPr lang="en-US" sz="1100" dirty="0"/>
           </a:p>
@@ -6505,8 +6505,8 @@
         </p:nvSpPr>
         <p:spPr>
           <a:xfrm>
-            <a:off x="5056632" y="4873752"/>
-            <a:ext cx="1956816" cy="237744"/>
+            <a:off x="3886200" y="4873752"/>
+            <a:ext cx="1371600" cy="237744"/>
           </a:xfrm>
           <a:prstGeom prst="rect">
             <a:avLst/>
@@ -6530,7 +6530,7 @@
                 <a:ea typeface="Yu Gothic" pitchFamily="34" charset="-122"/>
                 <a:cs typeface="Yu Gothic" pitchFamily="34" charset="-120"/>
               </a:rPr>
-              <a:t>35-90分</a:t>
+              <a:t>30-45分</a:t>
             </a:r>
             <a:endParaRPr lang="en-US" sz="900" dirty="0"/>
           </a:p>
@@ -6544,8 +6544,8 @@
         </p:nvSpPr>
         <p:spPr>
           <a:xfrm>
-            <a:off x="5056632" y="5111496"/>
-            <a:ext cx="1956816" cy="384048"/>
+            <a:off x="3886200" y="5111496"/>
+            <a:ext cx="1371600" cy="384048"/>
           </a:xfrm>
           <a:prstGeom prst="rect">
             <a:avLst/>
@@ -6569,7 +6569,7 @@
                 <a:ea typeface="Yu Gothic" pitchFamily="34" charset="-122"/>
                 <a:cs typeface="Yu Gothic" pitchFamily="34" charset="-120"/>
               </a:rPr>
-              <a:t>一緒に手を動かす</a:t>
+              <a:t>環境と体制の聞き取り</a:t>
             </a:r>
             <a:endParaRPr lang="en-US" sz="1100" dirty="0"/>
           </a:p>
@@ -6583,8 +6583,8 @@
         </p:nvSpPr>
         <p:spPr>
           <a:xfrm>
-            <a:off x="7104888" y="4873752"/>
-            <a:ext cx="1956816" cy="237744"/>
+            <a:off x="5349240" y="4873752"/>
+            <a:ext cx="1371600" cy="237744"/>
           </a:xfrm>
           <a:prstGeom prst="rect">
             <a:avLst/>
@@ -6608,7 +6608,7 @@
                 <a:ea typeface="Yu Gothic" pitchFamily="34" charset="-122"/>
                 <a:cs typeface="Yu Gothic" pitchFamily="34" charset="-120"/>
               </a:rPr>
-              <a:t>90-105分</a:t>
+              <a:t>45-75分</a:t>
             </a:r>
             <a:endParaRPr lang="en-US" sz="900" dirty="0"/>
           </a:p>
@@ -6622,8 +6622,8 @@
         </p:nvSpPr>
         <p:spPr>
           <a:xfrm>
-            <a:off x="7104888" y="5111496"/>
-            <a:ext cx="1956816" cy="384048"/>
+            <a:off x="5349240" y="5111496"/>
+            <a:ext cx="1371600" cy="384048"/>
           </a:xfrm>
           <a:prstGeom prst="rect">
             <a:avLst/>
@@ -6647,7 +6647,7 @@
                 <a:ea typeface="Yu Gothic" pitchFamily="34" charset="-122"/>
                 <a:cs typeface="Yu Gothic" pitchFamily="34" charset="-120"/>
               </a:rPr>
-              <a:t>業務への組み込み</a:t>
+              <a:t>業務の棚卸し</a:t>
             </a:r>
             <a:endParaRPr lang="en-US" sz="1100" dirty="0"/>
           </a:p>
@@ -6661,8 +6661,8 @@
         </p:nvSpPr>
         <p:spPr>
           <a:xfrm>
-            <a:off x="9153144" y="4873752"/>
-            <a:ext cx="1956816" cy="237744"/>
+            <a:off x="6812280" y="4873752"/>
+            <a:ext cx="1371600" cy="237744"/>
           </a:xfrm>
           <a:prstGeom prst="rect">
             <a:avLst/>
@@ -6686,7 +6686,7 @@
                 <a:ea typeface="Yu Gothic" pitchFamily="34" charset="-122"/>
                 <a:cs typeface="Yu Gothic" pitchFamily="34" charset="-120"/>
               </a:rPr>
-              <a:t>105-120分</a:t>
+              <a:t>75-95分</a:t>
             </a:r>
             <a:endParaRPr lang="en-US" sz="900" dirty="0"/>
           </a:p>
@@ -6700,8 +6700,8 @@
         </p:nvSpPr>
         <p:spPr>
           <a:xfrm>
-            <a:off x="9153144" y="5111496"/>
-            <a:ext cx="1956816" cy="384048"/>
+            <a:off x="6812280" y="5111496"/>
+            <a:ext cx="1371600" cy="384048"/>
           </a:xfrm>
           <a:prstGeom prst="rect">
             <a:avLst/>
@@ -6725,7 +6725,7 @@
                 <a:ea typeface="Yu Gothic" pitchFamily="34" charset="-122"/>
                 <a:cs typeface="Yu Gothic" pitchFamily="34" charset="-120"/>
               </a:rPr>
-              <a:t>宿題・記録</a:t>
+              <a:t>手応えを1つ渡す</a:t>
             </a:r>
             <a:endParaRPr lang="en-US" sz="1100" dirty="0"/>
           </a:p>
@@ -6734,6 +6734,162 @@
       <p:sp>
         <p:nvSpPr>
           <p:cNvPr id="17" name="Text 15"/>
+          <p:cNvSpPr txBox="1"/>
+          <p:nvPr/>
+        </p:nvSpPr>
+        <p:spPr>
+          <a:xfrm>
+            <a:off x="8275320" y="4873752"/>
+            <a:ext cx="1371600" cy="237744"/>
+          </a:xfrm>
+          <a:prstGeom prst="rect">
+            <a:avLst/>
+          </a:prstGeom>
+          <a:noFill/>
+          <a:ln/>
+        </p:spPr>
+        <p:txBody>
+          <a:bodyPr wrap="square" lIns="0" tIns="0" rIns="0" bIns="0" rtlCol="0" anchor="ctr"/>
+          <a:lstStyle/>
+          <a:p>
+            <a:pPr indent="0" marL="0">
+              <a:buNone/>
+            </a:pPr>
+            <a:r>
+              <a:rPr lang="en-US" sz="900" b="1" dirty="0">
+                <a:solidFill>
+                  <a:srgbClr val="B04A2F"/>
+                </a:solidFill>
+                <a:latin typeface="Yu Gothic" pitchFamily="34" charset="0"/>
+                <a:ea typeface="Yu Gothic" pitchFamily="34" charset="-122"/>
+                <a:cs typeface="Yu Gothic" pitchFamily="34" charset="-120"/>
+              </a:rPr>
+              <a:t>95-110分</a:t>
+            </a:r>
+            <a:endParaRPr lang="en-US" sz="900" dirty="0"/>
+          </a:p>
+        </p:txBody>
+      </p:sp>
+      <p:sp>
+        <p:nvSpPr>
+          <p:cNvPr id="18" name="Text 16"/>
+          <p:cNvSpPr txBox="1"/>
+          <p:nvPr/>
+        </p:nvSpPr>
+        <p:spPr>
+          <a:xfrm>
+            <a:off x="8275320" y="5111496"/>
+            <a:ext cx="1371600" cy="384048"/>
+          </a:xfrm>
+          <a:prstGeom prst="rect">
+            <a:avLst/>
+          </a:prstGeom>
+          <a:noFill/>
+          <a:ln/>
+        </p:spPr>
+        <p:txBody>
+          <a:bodyPr wrap="square" lIns="0" tIns="0" rIns="0" bIns="0" rtlCol="0" anchor="ctr"/>
+          <a:lstStyle/>
+          <a:p>
+            <a:pPr indent="0" marL="0">
+              <a:buNone/>
+            </a:pPr>
+            <a:r>
+              <a:rPr lang="en-US" sz="1100" dirty="0">
+                <a:solidFill>
+                  <a:srgbClr val="23201D"/>
+                </a:solidFill>
+                <a:latin typeface="Yu Gothic" pitchFamily="34" charset="0"/>
+                <a:ea typeface="Yu Gothic" pitchFamily="34" charset="-122"/>
+                <a:cs typeface="Yu Gothic" pitchFamily="34" charset="-120"/>
+              </a:rPr>
+              <a:t>12回の設計合意</a:t>
+            </a:r>
+            <a:endParaRPr lang="en-US" sz="1100" dirty="0"/>
+          </a:p>
+        </p:txBody>
+      </p:sp>
+      <p:sp>
+        <p:nvSpPr>
+          <p:cNvPr id="19" name="Text 17"/>
+          <p:cNvSpPr txBox="1"/>
+          <p:nvPr/>
+        </p:nvSpPr>
+        <p:spPr>
+          <a:xfrm>
+            <a:off x="9738360" y="4873752"/>
+            <a:ext cx="1371600" cy="237744"/>
+          </a:xfrm>
+          <a:prstGeom prst="rect">
+            <a:avLst/>
+          </a:prstGeom>
+          <a:noFill/>
+          <a:ln/>
+        </p:spPr>
+        <p:txBody>
+          <a:bodyPr wrap="square" lIns="0" tIns="0" rIns="0" bIns="0" rtlCol="0" anchor="ctr"/>
+          <a:lstStyle/>
+          <a:p>
+            <a:pPr indent="0" marL="0">
+              <a:buNone/>
+            </a:pPr>
+            <a:r>
+              <a:rPr lang="en-US" sz="900" b="1" dirty="0">
+                <a:solidFill>
+                  <a:srgbClr val="B04A2F"/>
+                </a:solidFill>
+                <a:latin typeface="Yu Gothic" pitchFamily="34" charset="0"/>
+                <a:ea typeface="Yu Gothic" pitchFamily="34" charset="-122"/>
+                <a:cs typeface="Yu Gothic" pitchFamily="34" charset="-120"/>
+              </a:rPr>
+              <a:t>110-120分</a:t>
+            </a:r>
+            <a:endParaRPr lang="en-US" sz="900" dirty="0"/>
+          </a:p>
+        </p:txBody>
+      </p:sp>
+      <p:sp>
+        <p:nvSpPr>
+          <p:cNvPr id="20" name="Text 18"/>
+          <p:cNvSpPr txBox="1"/>
+          <p:nvPr/>
+        </p:nvSpPr>
+        <p:spPr>
+          <a:xfrm>
+            <a:off x="9738360" y="5111496"/>
+            <a:ext cx="1371600" cy="384048"/>
+          </a:xfrm>
+          <a:prstGeom prst="rect">
+            <a:avLst/>
+          </a:prstGeom>
+          <a:noFill/>
+          <a:ln/>
+        </p:spPr>
+        <p:txBody>
+          <a:bodyPr wrap="square" lIns="0" tIns="0" rIns="0" bIns="0" rtlCol="0" anchor="ctr"/>
+          <a:lstStyle/>
+          <a:p>
+            <a:pPr indent="0" marL="0">
+              <a:buNone/>
+            </a:pPr>
+            <a:r>
+              <a:rPr lang="en-US" sz="1100" dirty="0">
+                <a:solidFill>
+                  <a:srgbClr val="23201D"/>
+                </a:solidFill>
+                <a:latin typeface="Yu Gothic" pitchFamily="34" charset="0"/>
+                <a:ea typeface="Yu Gothic" pitchFamily="34" charset="-122"/>
+                <a:cs typeface="Yu Gothic" pitchFamily="34" charset="-120"/>
+              </a:rPr>
+              <a:t>宿題・締め</a:t>
+            </a:r>
+            <a:endParaRPr lang="en-US" sz="1100" dirty="0"/>
+          </a:p>
+        </p:txBody>
+      </p:sp>
+      <p:sp>
+        <p:nvSpPr>
+          <p:cNvPr id="21" name="Text 19"/>
           <p:cNvSpPr txBox="1"/>
           <p:nvPr/>
         </p:nvSpPr>
@@ -6772,7 +6928,7 @@
       </p:sp>
       <p:sp>
         <p:nvSpPr>
-          <p:cNvPr id="18" name="Text 16"/>
+          <p:cNvPr id="22" name="Text 20"/>
           <p:cNvSpPr txBox="1"/>
           <p:nvPr/>
         </p:nvSpPr>

--- a/slides/pptx/第01回_現状把握と地図づくり.pptx
+++ b/slides/pptx/第01回_現状把握と地図づくり.pptx
@@ -2304,6 +2304,10 @@
             <a:prstDash val="solid"/>
           </a:ln>
         </p:spPr>
+        <p:txBody>
+          <a:bodyPr/>
+          <a:p/>
+        </p:txBody>
       </p:sp>
       <p:sp>
         <p:nvSpPr>
@@ -2517,6 +2521,10 @@
             <a:prstDash val="solid"/>
           </a:ln>
         </p:spPr>
+        <p:txBody>
+          <a:bodyPr/>
+          <a:p/>
+        </p:txBody>
       </p:sp>
       <p:sp>
         <p:nvSpPr>
@@ -2581,6 +2589,10 @@
             <a:prstDash val="solid"/>
           </a:ln>
         </p:spPr>
+        <p:txBody>
+          <a:bodyPr/>
+          <a:p/>
+        </p:txBody>
       </p:sp>
       <p:sp>
         <p:nvSpPr>
@@ -2648,6 +2660,10 @@
             <a:prstDash val="solid"/>
           </a:ln>
         </p:spPr>
+        <p:txBody>
+          <a:bodyPr/>
+          <a:p/>
+        </p:txBody>
       </p:sp>
       <p:sp>
         <p:nvSpPr>
@@ -2712,6 +2728,10 @@
             <a:prstDash val="solid"/>
           </a:ln>
         </p:spPr>
+        <p:txBody>
+          <a:bodyPr/>
+          <a:p/>
+        </p:txBody>
       </p:sp>
       <p:sp>
         <p:nvSpPr>
@@ -2779,6 +2799,10 @@
             <a:prstDash val="solid"/>
           </a:ln>
         </p:spPr>
+        <p:txBody>
+          <a:bodyPr/>
+          <a:p/>
+        </p:txBody>
       </p:sp>
       <p:sp>
         <p:nvSpPr>
@@ -2843,6 +2867,10 @@
             <a:prstDash val="solid"/>
           </a:ln>
         </p:spPr>
+        <p:txBody>
+          <a:bodyPr/>
+          <a:p/>
+        </p:txBody>
       </p:sp>
       <p:sp>
         <p:nvSpPr>
@@ -3068,7 +3096,7 @@
                 <a:ea typeface="Yu Gothic" pitchFamily="34" charset="-122"/>
                 <a:cs typeface="Yu Gothic" pitchFamily="34" charset="-120"/>
               </a:rPr>
-              <a:t>演習</a:t>
+              <a:t>実演</a:t>
             </a:r>
             <a:endParaRPr lang="en-US" sz="1100" dirty="0"/>
           </a:p>
@@ -3107,7 +3135,7 @@
                 <a:ea typeface="Yu Gothic" pitchFamily="34" charset="-122"/>
                 <a:cs typeface="Yu Gothic" pitchFamily="34" charset="-120"/>
               </a:rPr>
-              <a:t>今日、一緒にやること</a:t>
+              <a:t>今日、画面でお見せすること</a:t>
             </a:r>
             <a:endParaRPr lang="en-US" sz="2600" dirty="0"/>
           </a:p>
@@ -3146,7 +3174,7 @@
                 <a:ea typeface="Yu Gothic" pitchFamily="34" charset="-122"/>
                 <a:cs typeface="Yu Gothic" pitchFamily="34" charset="-120"/>
               </a:rPr>
-              <a:t>70分。操作するのはご自身です。</a:t>
+              <a:t>70分。講師の画面でお見せします。</a:t>
             </a:r>
             <a:endParaRPr lang="en-US" sz="1250" dirty="0"/>
           </a:p>
@@ -3176,6 +3204,10 @@
             <a:prstDash val="solid"/>
           </a:ln>
         </p:spPr>
+        <p:txBody>
+          <a:bodyPr/>
+          <a:p/>
+        </p:txBody>
       </p:sp>
       <p:sp>
         <p:nvSpPr>
@@ -3201,6 +3233,10 @@
             <a:prstDash val="solid"/>
           </a:ln>
         </p:spPr>
+        <p:txBody>
+          <a:bodyPr/>
+          <a:p/>
+        </p:txBody>
       </p:sp>
       <p:sp>
         <p:nvSpPr>
@@ -3349,6 +3385,10 @@
             <a:prstDash val="solid"/>
           </a:ln>
         </p:spPr>
+        <p:txBody>
+          <a:bodyPr/>
+          <a:p/>
+        </p:txBody>
       </p:sp>
       <p:sp>
         <p:nvSpPr>
@@ -3374,6 +3414,10 @@
             <a:prstDash val="solid"/>
           </a:ln>
         </p:spPr>
+        <p:txBody>
+          <a:bodyPr/>
+          <a:p/>
+        </p:txBody>
       </p:sp>
       <p:sp>
         <p:nvSpPr>
@@ -3522,6 +3566,10 @@
             <a:prstDash val="solid"/>
           </a:ln>
         </p:spPr>
+        <p:txBody>
+          <a:bodyPr/>
+          <a:p/>
+        </p:txBody>
       </p:sp>
       <p:sp>
         <p:nvSpPr>
@@ -3547,6 +3595,10 @@
             <a:prstDash val="solid"/>
           </a:ln>
         </p:spPr>
+        <p:txBody>
+          <a:bodyPr/>
+          <a:p/>
+        </p:txBody>
       </p:sp>
       <p:sp>
         <p:nvSpPr>
@@ -3743,7 +3795,7 @@
                 <a:ea typeface="Yu Gothic" pitchFamily="34" charset="-122"/>
                 <a:cs typeface="Yu Gothic" pitchFamily="34" charset="-120"/>
               </a:rPr>
-              <a:t>演習</a:t>
+              <a:t>実演</a:t>
             </a:r>
             <a:endParaRPr lang="en-US" sz="900" dirty="0"/>
           </a:p>
@@ -3922,6 +3974,10 @@
             <a:prstDash val="solid"/>
           </a:ln>
         </p:spPr>
+        <p:txBody>
+          <a:bodyPr/>
+          <a:p/>
+        </p:txBody>
       </p:sp>
       <p:sp>
         <p:nvSpPr>
@@ -3947,6 +4003,10 @@
             <a:prstDash val="solid"/>
           </a:ln>
         </p:spPr>
+        <p:txBody>
+          <a:bodyPr/>
+          <a:p/>
+        </p:txBody>
       </p:sp>
       <p:sp>
         <p:nvSpPr>
@@ -4053,6 +4113,10 @@
             <a:prstDash val="solid"/>
           </a:ln>
         </p:spPr>
+        <p:txBody>
+          <a:bodyPr/>
+          <a:p/>
+        </p:txBody>
       </p:sp>
       <p:sp>
         <p:nvSpPr>
@@ -4078,6 +4142,10 @@
             <a:prstDash val="solid"/>
           </a:ln>
         </p:spPr>
+        <p:txBody>
+          <a:bodyPr/>
+          <a:p/>
+        </p:txBody>
       </p:sp>
       <p:sp>
         <p:nvSpPr>
@@ -4184,6 +4252,10 @@
             <a:prstDash val="solid"/>
           </a:ln>
         </p:spPr>
+        <p:txBody>
+          <a:bodyPr/>
+          <a:p/>
+        </p:txBody>
       </p:sp>
       <p:sp>
         <p:nvSpPr>
@@ -4209,6 +4281,10 @@
             <a:prstDash val="solid"/>
           </a:ln>
         </p:spPr>
+        <p:txBody>
+          <a:bodyPr/>
+          <a:p/>
+        </p:txBody>
       </p:sp>
       <p:sp>
         <p:nvSpPr>
@@ -4503,6 +4579,10 @@
             <a:prstDash val="solid"/>
           </a:ln>
         </p:spPr>
+        <p:txBody>
+          <a:bodyPr/>
+          <a:p/>
+        </p:txBody>
       </p:sp>
       <p:sp>
         <p:nvSpPr>
@@ -4570,6 +4650,10 @@
             <a:prstDash val="solid"/>
           </a:ln>
         </p:spPr>
+        <p:txBody>
+          <a:bodyPr/>
+          <a:p/>
+        </p:txBody>
       </p:sp>
       <p:sp>
         <p:nvSpPr>
@@ -4903,6 +4987,10 @@
             <a:prstDash val="solid"/>
           </a:ln>
         </p:spPr>
+        <p:txBody>
+          <a:bodyPr/>
+          <a:p/>
+        </p:txBody>
       </p:sp>
       <p:sp>
         <p:nvSpPr>
@@ -5009,6 +5097,10 @@
             <a:prstDash val="solid"/>
           </a:ln>
         </p:spPr>
+        <p:txBody>
+          <a:bodyPr/>
+          <a:p/>
+        </p:txBody>
       </p:sp>
       <p:sp>
         <p:nvSpPr>
@@ -5157,6 +5249,10 @@
             <a:prstDash val="solid"/>
           </a:ln>
         </p:spPr>
+        <p:txBody>
+          <a:bodyPr/>
+          <a:p/>
+        </p:txBody>
       </p:sp>
       <p:sp>
         <p:nvSpPr>
@@ -5409,6 +5505,10 @@
             <a:prstDash val="solid"/>
           </a:ln>
         </p:spPr>
+        <p:txBody>
+          <a:bodyPr/>
+          <a:p/>
+        </p:txBody>
       </p:sp>
       <p:sp>
         <p:nvSpPr>
@@ -5706,6 +5806,10 @@
             <a:prstDash val="solid"/>
           </a:ln>
         </p:spPr>
+        <p:txBody>
+          <a:bodyPr/>
+          <a:p/>
+        </p:txBody>
       </p:sp>
       <p:sp>
         <p:nvSpPr>
@@ -5809,6 +5913,10 @@
             <a:prstDash val="solid"/>
           </a:ln>
         </p:spPr>
+        <p:txBody>
+          <a:bodyPr/>
+          <a:p/>
+        </p:txBody>
       </p:sp>
       <p:sp>
         <p:nvSpPr>
@@ -5912,6 +6020,10 @@
             <a:prstDash val="solid"/>
           </a:ln>
         </p:spPr>
+        <p:txBody>
+          <a:bodyPr/>
+          <a:p/>
+        </p:txBody>
       </p:sp>
       <p:sp>
         <p:nvSpPr>
@@ -6015,6 +6127,10 @@
             <a:prstDash val="solid"/>
           </a:ln>
         </p:spPr>
+        <p:txBody>
+          <a:bodyPr/>
+          <a:p/>
+        </p:txBody>
       </p:sp>
       <p:sp>
         <p:nvSpPr>
@@ -6273,6 +6389,10 @@
             <a:prstDash val="solid"/>
           </a:ln>
         </p:spPr>
+        <p:txBody>
+          <a:bodyPr/>
+          <a:p/>
+        </p:txBody>
       </p:sp>
       <p:sp>
         <p:nvSpPr>
@@ -6340,6 +6460,10 @@
             <a:prstDash val="solid"/>
           </a:ln>
         </p:spPr>
+        <p:txBody>
+          <a:bodyPr/>
+          <a:p/>
+        </p:txBody>
       </p:sp>
       <p:sp>
         <p:nvSpPr>
@@ -7099,6 +7223,10 @@
             <a:prstDash val="solid"/>
           </a:ln>
         </p:spPr>
+        <p:txBody>
+          <a:bodyPr/>
+          <a:p/>
+        </p:txBody>
       </p:sp>
       <p:sp>
         <p:nvSpPr>
@@ -7124,6 +7252,10 @@
             <a:prstDash val="solid"/>
           </a:ln>
         </p:spPr>
+        <p:txBody>
+          <a:bodyPr/>
+          <a:p/>
+        </p:txBody>
       </p:sp>
       <p:sp>
         <p:nvSpPr>
@@ -7269,6 +7401,10 @@
             <a:prstDash val="solid"/>
           </a:ln>
         </p:spPr>
+        <p:txBody>
+          <a:bodyPr/>
+          <a:p/>
+        </p:txBody>
       </p:sp>
       <p:sp>
         <p:nvSpPr>
@@ -7294,6 +7430,10 @@
             <a:prstDash val="solid"/>
           </a:ln>
         </p:spPr>
+        <p:txBody>
+          <a:bodyPr/>
+          <a:p/>
+        </p:txBody>
       </p:sp>
       <p:sp>
         <p:nvSpPr>
@@ -7439,6 +7579,10 @@
             <a:prstDash val="solid"/>
           </a:ln>
         </p:spPr>
+        <p:txBody>
+          <a:bodyPr/>
+          <a:p/>
+        </p:txBody>
       </p:sp>
       <p:sp>
         <p:nvSpPr>
@@ -7464,6 +7608,10 @@
             <a:prstDash val="solid"/>
           </a:ln>
         </p:spPr>
+        <p:txBody>
+          <a:bodyPr/>
+          <a:p/>
+        </p:txBody>
       </p:sp>
       <p:sp>
         <p:nvSpPr>
@@ -7836,6 +7984,10 @@
             <a:prstDash val="solid"/>
           </a:ln>
         </p:spPr>
+        <p:txBody>
+          <a:bodyPr/>
+          <a:p/>
+        </p:txBody>
       </p:sp>
       <p:sp>
         <p:nvSpPr>
@@ -7861,6 +8013,10 @@
             <a:prstDash val="solid"/>
           </a:ln>
         </p:spPr>
+        <p:txBody>
+          <a:bodyPr/>
+          <a:p/>
+        </p:txBody>
       </p:sp>
       <p:sp>
         <p:nvSpPr>
@@ -8659,6 +8815,10 @@
             <a:prstDash val="solid"/>
           </a:ln>
         </p:spPr>
+        <p:txBody>
+          <a:bodyPr/>
+          <a:p/>
+        </p:txBody>
       </p:sp>
       <p:sp>
         <p:nvSpPr>
@@ -8765,6 +8925,10 @@
             <a:prstDash val="solid"/>
           </a:ln>
         </p:spPr>
+        <p:txBody>
+          <a:bodyPr/>
+          <a:p/>
+        </p:txBody>
       </p:sp>
       <p:sp>
         <p:nvSpPr>
@@ -8997,6 +9161,10 @@
             <a:prstDash val="solid"/>
           </a:ln>
         </p:spPr>
+        <p:txBody>
+          <a:bodyPr/>
+          <a:p/>
+        </p:txBody>
       </p:sp>
       <p:sp>
         <p:nvSpPr>
@@ -9064,6 +9232,10 @@
             <a:prstDash val="solid"/>
           </a:ln>
         </p:spPr>
+        <p:txBody>
+          <a:bodyPr/>
+          <a:p/>
+        </p:txBody>
       </p:sp>
       <p:sp>
         <p:nvSpPr>
@@ -9316,6 +9488,10 @@
             <a:prstDash val="solid"/>
           </a:ln>
         </p:spPr>
+        <p:txBody>
+          <a:bodyPr/>
+          <a:p/>
+        </p:txBody>
       </p:sp>
       <p:sp>
         <p:nvSpPr>
@@ -9422,6 +9598,10 @@
             <a:prstDash val="solid"/>
           </a:ln>
         </p:spPr>
+        <p:txBody>
+          <a:bodyPr/>
+          <a:p/>
+        </p:txBody>
       </p:sp>
       <p:sp>
         <p:nvSpPr>
@@ -9654,6 +9834,10 @@
             <a:prstDash val="solid"/>
           </a:ln>
         </p:spPr>
+        <p:txBody>
+          <a:bodyPr/>
+          <a:p/>
+        </p:txBody>
       </p:sp>
       <p:sp>
         <p:nvSpPr>
@@ -9721,6 +9905,10 @@
             <a:prstDash val="solid"/>
           </a:ln>
         </p:spPr>
+        <p:txBody>
+          <a:bodyPr/>
+          <a:p/>
+        </p:txBody>
       </p:sp>
       <p:sp>
         <p:nvSpPr>
@@ -9973,6 +10161,10 @@
             <a:prstDash val="solid"/>
           </a:ln>
         </p:spPr>
+        <p:txBody>
+          <a:bodyPr/>
+          <a:p/>
+        </p:txBody>
       </p:sp>
       <p:sp>
         <p:nvSpPr>
@@ -10079,6 +10271,10 @@
             <a:prstDash val="solid"/>
           </a:ln>
         </p:spPr>
+        <p:txBody>
+          <a:bodyPr/>
+          <a:p/>
+        </p:txBody>
       </p:sp>
       <p:sp>
         <p:nvSpPr>
@@ -10185,6 +10381,10 @@
             <a:prstDash val="solid"/>
           </a:ln>
         </p:spPr>
+        <p:txBody>
+          <a:bodyPr/>
+          <a:p/>
+        </p:txBody>
       </p:sp>
       <p:sp>
         <p:nvSpPr>
@@ -10291,6 +10491,10 @@
             <a:prstDash val="solid"/>
           </a:ln>
         </p:spPr>
+        <p:txBody>
+          <a:bodyPr/>
+          <a:p/>
+        </p:txBody>
       </p:sp>
       <p:sp>
         <p:nvSpPr>
@@ -10397,6 +10601,10 @@
             <a:prstDash val="solid"/>
           </a:ln>
         </p:spPr>
+        <p:txBody>
+          <a:bodyPr/>
+          <a:p/>
+        </p:txBody>
       </p:sp>
       <p:sp>
         <p:nvSpPr>
@@ -10503,6 +10711,10 @@
             <a:prstDash val="solid"/>
           </a:ln>
         </p:spPr>
+        <p:txBody>
+          <a:bodyPr/>
+          <a:p/>
+        </p:txBody>
       </p:sp>
       <p:sp>
         <p:nvSpPr>
@@ -10797,6 +11009,10 @@
             <a:prstDash val="solid"/>
           </a:ln>
         </p:spPr>
+        <p:txBody>
+          <a:bodyPr/>
+          <a:p/>
+        </p:txBody>
       </p:sp>
       <p:sp>
         <p:nvSpPr>
@@ -10822,6 +11038,10 @@
             <a:prstDash val="solid"/>
           </a:ln>
         </p:spPr>
+        <p:txBody>
+          <a:bodyPr/>
+          <a:p/>
+        </p:txBody>
       </p:sp>
       <p:sp>
         <p:nvSpPr>
@@ -10928,6 +11148,10 @@
             <a:prstDash val="solid"/>
           </a:ln>
         </p:spPr>
+        <p:txBody>
+          <a:bodyPr/>
+          <a:p/>
+        </p:txBody>
       </p:sp>
       <p:sp>
         <p:nvSpPr>
@@ -10953,6 +11177,10 @@
             <a:prstDash val="solid"/>
           </a:ln>
         </p:spPr>
+        <p:txBody>
+          <a:bodyPr/>
+          <a:p/>
+        </p:txBody>
       </p:sp>
       <p:sp>
         <p:nvSpPr>
@@ -11059,6 +11287,10 @@
             <a:prstDash val="solid"/>
           </a:ln>
         </p:spPr>
+        <p:txBody>
+          <a:bodyPr/>
+          <a:p/>
+        </p:txBody>
       </p:sp>
       <p:sp>
         <p:nvSpPr>
@@ -11084,6 +11316,10 @@
             <a:prstDash val="solid"/>
           </a:ln>
         </p:spPr>
+        <p:txBody>
+          <a:bodyPr/>
+          <a:p/>
+        </p:txBody>
       </p:sp>
       <p:sp>
         <p:nvSpPr>
